--- a/docs/PRM323_Lab2_Nhom4_Slides.pptx
+++ b/docs/PRM323_Lab2_Nhom4_Slides.pptx
@@ -519,7 +519,7 @@
           <a:p/>
           <a:p>
             <a:r>
-              <a:t>Kính chào thầy và các bạn, hôm nay Nhóm 4 xin đại diện trình bày kết quả Lab 2 môn PRM323 với đề tài Hệ thống ghép nhóm Khởi nghiệp EXE Team Matching. Ứng dụng ra đời nhằm giải quyết bài toán nhức nhối của sinh viên năm 3: tìm kiếm đồng đội đa ngành có cùng chí hướng và mức độ cam kết cao trước hạn chót của nhà trường.</a:t>
+              <a:t>Kính chào thầy và các bạn, hôm nay Nhóm 4 xin đại diện trình bày đề tài EXE Team Matching. Ứng dụng ra đời nhằm giải quyết bài toán tìm đồng đội đa ngành có cùng mức cam kết trước hạn chót của nhà trường.</a:t>
             </a:r>
           </a:p>
         </p:txBody>
@@ -595,7 +595,7 @@
           <a:p/>
           <a:p>
             <a:r>
-              <a:t>Về mặt công thái học và tiếp cận, chúng em tự hào sản phẩm đạt 100% chuẩn WCAG 2.1 AA. Mọi nút bấm đều đảm bảo vùng chạm 48dp để người dùng không bấm trượt khi đang đi xe buýt. Độ tương phản chữ đạt từ 4.68:1 trở lên, giúp đọc rõ ngay cả dưới ánh nắng sân trường. Hệ thống layout co giãn linh hoạt, đảm bảo hiển thị hoàn hảo từ màn hình 360dp đến các dòng điện thoại cao cấp 412dp.</a:t>
+              <a:t>Thiết kế đạt chuẩn WCAG 2.1 AA về độ tương phản và kích thước vùng chạm 48dp, đồng thời co giãn mượt mà từ 360dp sang 412dp.</a:t>
             </a:r>
           </a:p>
         </p:txBody>
@@ -671,7 +671,7 @@
           <a:p/>
           <a:p>
             <a:r>
-              <a:t>Bản Prototype trên Figma Page 06 được liên kết tỉ mỉ với đầy đủ 3 luồng người dùng. Các thao tác mở Bottom Sheet, chuyển cảnh khi nộp đơn thành công và quay trở lại trang chủ đều hoạt động mượt mà. Đặc biệt, người dùng có thể thử nghiệm nhánh lỗi tại luồng tìm kiếm và phục hồi dễ dàng. Ngay sau đây, nhóm sẽ trình diễn trực tiếp bản Prototype này trong phần Demo 5 phút.</a:t>
+              <a:t>Bản Prototype đã sẵn sàng chạy live demo 5 phút, bao gồm đầy đủ 3 luồng, chuyển cảnh mượt mà và không có bất kỳ ngõ cụt nào.</a:t>
             </a:r>
           </a:p>
         </p:txBody>
@@ -747,7 +747,7 @@
           <a:p/>
           <a:p>
             <a:r>
-              <a:t>Để khép lại bài thuyết trình, tài liệu Flutter Handoff của nhóm cung cấp bản đặc tả kỹ thuật chi tiết đến từng Widget và Theme property. Một lập trình viên Flutter dù chưa từng tham gia dự án cũng có thể nhìn vào đặc tả này để dựng giao diện chính xác từng pixel và quản lý đầy đủ các trạng thái logic. Nhóm 4 xin chân thành cảm ơn thầy và các bạn đã lắng nghe!</a:t>
+              <a:t>Tài liệu Flutter Handoff cung cấp 2 bảng ánh xạ chi tiết giúp lập trình viên dựng app chính xác từng pixel mà không cần hỏi lại.</a:t>
             </a:r>
           </a:p>
         </p:txBody>
@@ -823,7 +823,7 @@
           <a:p/>
           <a:p>
             <a:r>
-              <a:t>Dựa trên chuẩn Persona Guideline của môn học, chúng em xây dựng Primary Persona đại diện là bạn Lê Quốc Huy, 21 tuổi, học SE. Huy có kỹ năng lập trình tốt nhưng mạng lưới quan hệ hẹp. Điểm đau lớn nhất là sợ gặp free-rider và bị trôi bài trên Facebook. Toàn bộ thiết kế được tối ưu để đạt chỉ số thành công đo được: giúp Huy tìm thấy nhóm phù hợp và nộp hồ sơ chỉ trong vòng dưới 60 giây.</a:t>
+              <a:t>Dựa trên Persona Guideline, nhóm xây dựng Primary Persona Lê Quốc Huy với mục tiêu cốt lõi: tìm được nhóm tin cậy và gửi ứng tuyển thành công dưới 60 giây.</a:t>
             </a:r>
           </a:p>
         </p:txBody>
@@ -899,7 +899,7 @@
           <a:p/>
           <a:p>
             <a:r>
-              <a:t>Để phục vụ thói quen thao tác 1 tay của Huy trên màn hình di động, chúng em thiết kế kiến trúc thông tin dạng phẳng với Bottom Navigation 4 tab. Toàn bộ hệ sinh thái gồm 9 màn hình được phân cấp rành mạch từ màn hình chính Khám phá, đi sâu vào Chi tiết dự án, Bottom Sheet ứng tuyển, đến các màn hình xác nhận và theo dõi trạng thái đơn.</a:t>
+              <a:t>Kiến trúc thông tin dạng phẳng với Bottom Navigation 4 tab giúp sinh viên dễ dàng thao tác 1 tay, phân cấp rõ ràng 3 tầng từ trang chủ tới chi tiết.</a:t>
             </a:r>
           </a:p>
         </p:txBody>
@@ -975,7 +975,7 @@
           <a:p/>
           <a:p>
             <a:r>
-              <a:t>Tiếp nối phần kiến trúc, em xin trình bày 3 User Flows thực thi. Bên cạnh luồng ứng tuyển chuẩn Happy Path đạt mốc dưới 60 giây và luồng trưởng nhóm hẹn lịch Chemistry Call, nhóm đặc biệt chú trọng Luồng 3 - Phục hồi lỗi. Khi người dùng lọc tiêu chí quá hẹp dẫn đến 0 kết quả, ứng dụng đưa ra Empty State minh họa trực quan kèm nút bấm 'Xóa bộ lọc' để người dùng khôi phục trạng thái ngay lập tức, không có ngõ cụt.</a:t>
+              <a:t>Nhóm xây dựng 3 luồng người dùng rõ ràng, đặc biệt luồng 3 xử lý lỗi tìm kiếm rỗng với nút 'Xóa bộ lọc' đảm bảo không bao giờ dẫn người dùng vào ngõ cụt.</a:t>
             </a:r>
           </a:p>
         </p:txBody>
@@ -1051,7 +1051,7 @@
           <a:p/>
           <a:p>
             <a:r>
-              <a:t>Tại bước sinh giao diện, nhóm áp dụng kỹ thuật Prompt Engineering chặt chẽ gồm 5 thành phần: định hình rõ Persona, tác vụ cụ thể, nền tảng di động chuẩn, các ràng buộc công thái học và bảng màu chủ đạo. Google Stitch đã giúp nhóm nhanh chóng trực quan hóa ý tưởng ban đầu thành 8 phôi giao diện mobile, đóng vai trò làm bàn đạp để nhóm tiến hành phản biện và tinh chỉnh chuyên sâu.</a:t>
+              <a:t>Prompt engineering 5 thành phần giúp AI sinh ra phôi giao diện sát với thực tế, làm nền tảng vững chắc cho quá trình phản biện UX.</a:t>
             </a:r>
           </a:p>
         </p:txBody>
@@ -1127,7 +1127,7 @@
           <a:p/>
           <a:p>
             <a:r>
-              <a:t>Nhóm xác định rõ: AI chỉ là trợ lý sinh phôi, con người mới là người kiểm soát chất lượng. Qua lăng kính 10 Heuristics của Nielsen và tiêu chuẩn WCAG, nhóm phát hiện AI mắc 5 lỗi lớn như vi phạm độ tương phản và thiếu vùng chạm an toàn. Chúng em đã thực hiện 3 vòng lặp tinh chỉnh liên tiếp: từ phân cấp thị giác, chuẩn hóa công thái học vùng chạm, đến việc bổ sung hoàn chỉnh các trạng thái biên như Empty State và Loading.</a:t>
+              <a:t>Nhóm áp dụng 10 nguyên lý Heuristics của Nielsen để chỉ ra các điểm yếu của AI và thực hiện 3 vòng lặp tinh chỉnh toàn diện.</a:t>
             </a:r>
           </a:p>
         </p:txBody>
@@ -1203,7 +1203,7 @@
           <a:p/>
           <a:p>
             <a:r>
-              <a:t>Đây là minh chứng rõ nét cho năng lực phản biện của nhóm. Chúng em không nhận vơ toàn bộ những gì AI tạo ra. Với các đề xuất bất hợp lý như Pop-up che màn hình hay báo trạng thái chỉ bằng màu sắc, nhóm thẳng thừng Reject và thay thế bằng Bottom Sheet kéo vuốt cùng hệ thống nhãn kép Icon + Text. Mọi quyết định đều có căn cứ vững chắc từ thói quen người dùng và tiêu chuẩn công thái học.</a:t>
+              <a:t>Chúng em chứng minh năng lực phản biện khi kiên quyết reject các đề xuất bất hợp lý của AI như pop-up che màn hình và báo trạng thái chỉ dùng màu.</a:t>
             </a:r>
           </a:p>
         </p:txBody>
@@ -1279,7 +1279,7 @@
           <a:p/>
           <a:p>
             <a:r>
-              <a:t>Trên màn hình là sự tiến hóa từ Wireframe cấu trúc sang 8 màn hình UI hoàn thiện trên Figma. Chúng em cam kết đáp ứng vượt chuẩn kiểm định C6 của môn học: có đủ tối thiểu 8 màn hình chức năng riêng biệt, bao phủ trọn vẹn mọi điểm chạm từ tìm kiếm, xem chi tiết, ứng tuyển, đặt lịch hẹn cho đến xử lý trạng thái rỗng. Tính nhất quán về khoảng cách và nhận diện thị giác được bảo toàn 100%.</a:t>
+              <a:t>Hệ thống bao gồm đủ 8 màn hình chức năng riêng biệt, bao phủ trọn vẹn toàn bộ hành trình trải nghiệm mà không có màn hình nào bị ngõ cụt.</a:t>
             </a:r>
           </a:p>
         </p:txBody>
@@ -1355,7 +1355,7 @@
           <a:p/>
           <a:p>
             <a:r>
-              <a:t>Để dự án có thể mở rộng và bàn giao mượt mà cho đội ngũ kỹ thuật, chúng em xây dựng Design System hoàn chỉnh trên Figma. Toàn bộ thông số từ màu sắc, kích thước chữ, bo góc đều được quản lý bằng Figma Variables. Thư viện linh kiện bao gồm đủ 9 nhóm cốt lõi với 100% sử dụng Auto Layout và Variant states từ Default đến Disabled và Error.</a:t>
+              <a:t>Hệ thống Design System gồm 9 nhóm component được tạo bằng Auto Layout và Variants, liên kết trực tiếp với Figma Variables.</a:t>
             </a:r>
           </a:p>
         </p:txBody>
@@ -4376,12 +4376,10 @@
             <a:avLst/>
           </a:prstGeom>
           <a:solidFill>
-            <a:srgbClr val="0F172A"/>
+            <a:srgbClr val="0B0F19"/>
           </a:solidFill>
           <a:ln>
-            <a:solidFill>
-              <a:srgbClr val="0F172A"/>
-            </a:solidFill>
+            <a:noFill/>
           </a:ln>
         </p:spPr>
         <p:style>
@@ -4408,24 +4406,24 @@
       </p:sp>
       <p:sp>
         <p:nvSpPr>
-          <p:cNvPr id="3" name="Rectangle 2"/>
+          <p:cNvPr id="3" name="Rounded Rectangle 2"/>
           <p:cNvSpPr/>
           <p:nvPr/>
         </p:nvSpPr>
         <p:spPr>
           <a:xfrm>
-            <a:off x="548640" y="365760"/>
-            <a:ext cx="11094415" cy="777240"/>
-          </a:xfrm>
-          <a:prstGeom prst="rect">
+            <a:off x="731520" y="365760"/>
+            <a:ext cx="10728655" cy="1005840"/>
+          </a:xfrm>
+          <a:prstGeom prst="roundRect">
             <a:avLst/>
           </a:prstGeom>
           <a:solidFill>
-            <a:srgbClr val="1E293B"/>
+            <a:srgbClr val="161E31"/>
           </a:solidFill>
           <a:ln>
             <a:solidFill>
-              <a:srgbClr val="334155"/>
+              <a:srgbClr val="2D3748"/>
             </a:solidFill>
           </a:ln>
         </p:spPr>
@@ -4444,19 +4442,35 @@
           </a:fontRef>
         </p:style>
         <p:txBody>
-          <a:bodyPr rtlCol="0" anchor="ctr" wrap="square"/>
+          <a:bodyPr rtlCol="0" anchor="ctr" lIns="274320" tIns="109728" rIns="274320" bIns="109728" wrap="square"/>
           <a:lstStyle/>
           <a:p>
             <a:pPr algn="ctr">
+              <a:defRPr sz="1100" b="1">
+                <a:solidFill>
+                  <a:srgbClr val="38BDF8"/>
+                </a:solidFill>
+                <a:latin typeface="Arial"/>
+              </a:defRPr>
+            </a:pPr>
+            <a:r>
+              <a:t>01 / 12  ·  PROJECT OVERVIEW</a:t>
+            </a:r>
+          </a:p>
+          <a:p>
+            <a:pPr>
+              <a:spcBef>
+                <a:spcPts val="200"/>
+              </a:spcBef>
               <a:defRPr sz="1700" b="1">
                 <a:solidFill>
-                  <a:srgbClr val="3B82F6"/>
-                </a:solidFill>
-                <a:latin typeface="Arial"/>
-              </a:defRPr>
-            </a:pPr>
-            <a:r>
-              <a:t>SLIDE 01 | EXE TEAM MATCHING - TỔNG QUAN DỰ ÁN</a:t>
+                  <a:srgbClr val="FFFFFF"/>
+                </a:solidFill>
+                <a:latin typeface="Arial"/>
+              </a:defRPr>
+            </a:pPr>
+            <a:r>
+              <a:t>Hệ thống Ghép nhóm Khởi nghiệp (EXE Team Matching)</a:t>
             </a:r>
           </a:p>
         </p:txBody>
@@ -4469,8 +4483,8 @@
         </p:nvSpPr>
         <p:spPr>
           <a:xfrm>
-            <a:off x="8412480" y="438912"/>
-            <a:ext cx="3108960" cy="594360"/>
+            <a:off x="7772400" y="438912"/>
+            <a:ext cx="3474720" cy="457200"/>
           </a:xfrm>
           <a:prstGeom prst="rect">
             <a:avLst/>
@@ -4484,9 +4498,9 @@
           <a:lstStyle/>
           <a:p>
             <a:pPr algn="r">
-              <a:defRPr sz="1300" b="1">
-                <a:solidFill>
-                  <a:srgbClr val="10B981"/>
+              <a:defRPr sz="1200" b="1">
+                <a:solidFill>
+                  <a:srgbClr val="34D399"/>
                 </a:solidFill>
                 <a:latin typeface="Arial"/>
               </a:defRPr>
@@ -4505,18 +4519,18 @@
         </p:nvSpPr>
         <p:spPr>
           <a:xfrm>
-            <a:off x="548640" y="1325880"/>
-            <a:ext cx="7132320" cy="5120640"/>
+            <a:off x="731520" y="1508760"/>
+            <a:ext cx="6949440" cy="1554480"/>
           </a:xfrm>
           <a:prstGeom prst="roundRect">
             <a:avLst/>
           </a:prstGeom>
           <a:solidFill>
-            <a:srgbClr val="1E293B"/>
+            <a:srgbClr val="161E31"/>
           </a:solidFill>
           <a:ln>
             <a:solidFill>
-              <a:srgbClr val="334155"/>
+              <a:srgbClr val="2D3748"/>
             </a:solidFill>
           </a:ln>
         </p:spPr>
@@ -4535,153 +4549,54 @@
           </a:fontRef>
         </p:style>
         <p:txBody>
-          <a:bodyPr rtlCol="0" anchor="ctr" wrap="square" tIns="274320" lIns="320040" rIns="320040" bIns="274320"/>
+          <a:bodyPr rtlCol="0" anchor="ctr" lIns="228600" tIns="164592" rIns="228600" wrap="square"/>
           <a:lstStyle/>
           <a:p>
             <a:pPr algn="ctr">
               <a:spcAft>
-                <a:spcPts val="600"/>
-              </a:spcAft>
-              <a:defRPr sz="1300">
-                <a:solidFill>
-                  <a:srgbClr val="F8FAFC"/>
-                </a:solidFill>
-                <a:latin typeface="Arial"/>
-              </a:defRPr>
-            </a:pPr>
-            <a:r>
-              <a:t>Bối cảnh thực tế: Sinh viên bước vào kỳ đồ án EXE101/201 bắt buộc phải lập nhóm liên ngành (IT + Kinh tế/Marketing).</a:t>
+                <a:spcPts val="400"/>
+              </a:spcAft>
+              <a:defRPr sz="1300" b="1">
+                <a:solidFill>
+                  <a:srgbClr val="38BDF8"/>
+                </a:solidFill>
+                <a:latin typeface="Arial"/>
+              </a:defRPr>
+            </a:pPr>
+            <a:r>
+              <a:t>🎯 Vấn đề &amp; Thực trạng</a:t>
             </a:r>
           </a:p>
           <a:p>
             <a:pPr>
               <a:spcAft>
-                <a:spcPts val="600"/>
-              </a:spcAft>
-              <a:defRPr sz="1300">
-                <a:solidFill>
-                  <a:srgbClr val="F8FAFC"/>
-                </a:solidFill>
-                <a:latin typeface="Arial"/>
-              </a:defRPr>
-            </a:pPr>
-            <a:r>
-              <a:t>Thực trạng: Tìm nhóm qua Facebook bị trôi bài, không rõ năng lực, dễ gặp free-rider và ghép vội sát deadline.</a:t>
+                <a:spcPts val="200"/>
+              </a:spcAft>
+              <a:defRPr sz="1150">
+                <a:solidFill>
+                  <a:srgbClr val="E2E8F0"/>
+                </a:solidFill>
+                <a:latin typeface="Arial"/>
+              </a:defRPr>
+            </a:pPr>
+            <a:r>
+              <a:t>• Sinh viên học EXE101/201 bắt buộc phải lập nhóm đa ngành (IT + Kinh tế/Marketing).</a:t>
             </a:r>
           </a:p>
           <a:p>
             <a:pPr>
               <a:spcAft>
-                <a:spcPts val="600"/>
-              </a:spcAft>
-              <a:defRPr sz="1300">
-                <a:solidFill>
-                  <a:srgbClr val="F8FAFC"/>
-                </a:solidFill>
-                <a:latin typeface="Arial"/>
-              </a:defRPr>
-            </a:pPr>
-            <a:r>
-              <a:t>Giải pháp: Ứng dụng di động EXE Team Matching kết nối sinh viên qua Ma trận kỹ năng (Skill Matrix) &amp; thời gian cam kết.</a:t>
-            </a:r>
-          </a:p>
-          <a:p>
-            <a:pPr>
-              <a:spcBef>
-                <a:spcPts val="600"/>
-              </a:spcBef>
-              <a:spcAft>
-                <a:spcPts val="400"/>
-              </a:spcAft>
-              <a:defRPr sz="1400" b="1">
-                <a:solidFill>
-                  <a:srgbClr val="3B82F6"/>
-                </a:solidFill>
-                <a:latin typeface="Arial"/>
-              </a:defRPr>
-            </a:pPr>
-            <a:r>
-              <a:t>Đội ngũ Nhóm 4:</a:t>
-            </a:r>
-          </a:p>
-          <a:p>
-            <a:pPr lvl="1">
-              <a:spcAft>
-                <a:spcPts val="400"/>
-              </a:spcAft>
-              <a:defRPr sz="1250">
-                <a:solidFill>
-                  <a:srgbClr val="94A3B8"/>
-                </a:solidFill>
-                <a:latin typeface="Arial"/>
-              </a:defRPr>
-            </a:pPr>
-            <a:r>
-              <a:t>  • 1. Tăng Mình Trọng: Trưởng nhóm · UX Research, Persona, Quản phối</a:t>
-            </a:r>
-          </a:p>
-          <a:p>
-            <a:pPr lvl="1">
-              <a:spcAft>
-                <a:spcPts val="400"/>
-              </a:spcAft>
-              <a:defRPr sz="1250">
-                <a:solidFill>
-                  <a:srgbClr val="94A3B8"/>
-                </a:solidFill>
-                <a:latin typeface="Arial"/>
-              </a:defRPr>
-            </a:pPr>
-            <a:r>
-              <a:t>  • 2. Phan Anh Tuấn: User Flows, AI Prompting &amp; Usability Heuristics</a:t>
-            </a:r>
-          </a:p>
-          <a:p>
-            <a:pPr lvl="1">
-              <a:spcAft>
-                <a:spcPts val="400"/>
-              </a:spcAft>
-              <a:defRPr sz="1250">
-                <a:solidFill>
-                  <a:srgbClr val="94A3B8"/>
-                </a:solidFill>
-                <a:latin typeface="Arial"/>
-              </a:defRPr>
-            </a:pPr>
-            <a:r>
-              <a:t>  • 3. Đỗ Anh Minh: Design System, Figma Components &amp; UI Audit</a:t>
-            </a:r>
-          </a:p>
-          <a:p>
-            <a:pPr lvl="1">
-              <a:spcAft>
-                <a:spcPts val="400"/>
-              </a:spcAft>
-              <a:defRPr sz="1250">
-                <a:solidFill>
-                  <a:srgbClr val="94A3B8"/>
-                </a:solidFill>
-                <a:latin typeface="Arial"/>
-              </a:defRPr>
-            </a:pPr>
-            <a:r>
-              <a:t>  • 4. Lữ Phước Nhật Tú: Interactive Prototype &amp; Flutter Handoff</a:t>
-            </a:r>
-          </a:p>
-          <a:p>
-            <a:pPr>
-              <a:spcAft>
-                <a:spcPts val="600"/>
-              </a:spcAft>
-              <a:defRPr sz="1300">
-                <a:solidFill>
-                  <a:srgbClr val="F8FAFC"/>
-                </a:solidFill>
-                <a:latin typeface="Arial"/>
-              </a:defRPr>
-            </a:pPr>
-            <a:r>
-              <a:t>Minh chứng: GitHub github.com/LuTu-2004/prm323-lab2-group4 | Figma Canvas 6 Pages</a:t>
+                <a:spcPts val="200"/>
+              </a:spcAft>
+              <a:defRPr sz="1150">
+                <a:solidFill>
+                  <a:srgbClr val="E2E8F0"/>
+                </a:solidFill>
+                <a:latin typeface="Arial"/>
+              </a:defRPr>
+            </a:pPr>
+            <a:r>
+              <a:t>• Tìm nhóm qua mạng xã hội rất hỗn loạn: bài trôi nhanh, không rõ kỹ năng, dễ gặp người thiếu cam kết (free-rider).</a:t>
             </a:r>
           </a:p>
         </p:txBody>
@@ -4694,18 +4609,18 @@
         </p:nvSpPr>
         <p:spPr>
           <a:xfrm>
-            <a:off x="7863840" y="1325880"/>
-            <a:ext cx="3779215" cy="5120640"/>
+            <a:off x="731520" y="3182112"/>
+            <a:ext cx="6949440" cy="1554480"/>
           </a:xfrm>
           <a:prstGeom prst="roundRect">
             <a:avLst/>
           </a:prstGeom>
           <a:solidFill>
-            <a:srgbClr val="1E293B"/>
+            <a:srgbClr val="161E31"/>
           </a:solidFill>
           <a:ln>
             <a:solidFill>
-              <a:srgbClr val="334155"/>
+              <a:srgbClr val="2D3748"/>
             </a:solidFill>
           </a:ln>
         </p:spPr>
@@ -4724,6 +4639,218 @@
           </a:fontRef>
         </p:style>
         <p:txBody>
+          <a:bodyPr rtlCol="0" anchor="ctr" lIns="228600" tIns="164592" rIns="228600" wrap="square"/>
+          <a:lstStyle/>
+          <a:p>
+            <a:pPr algn="ctr">
+              <a:spcAft>
+                <a:spcPts val="400"/>
+              </a:spcAft>
+              <a:defRPr sz="1300" b="1">
+                <a:solidFill>
+                  <a:srgbClr val="34D399"/>
+                </a:solidFill>
+                <a:latin typeface="Arial"/>
+              </a:defRPr>
+            </a:pPr>
+            <a:r>
+              <a:t>💡 Giải pháp Nền tảng</a:t>
+            </a:r>
+          </a:p>
+          <a:p>
+            <a:pPr>
+              <a:spcAft>
+                <a:spcPts val="200"/>
+              </a:spcAft>
+              <a:defRPr sz="1150">
+                <a:solidFill>
+                  <a:srgbClr val="E2E8F0"/>
+                </a:solidFill>
+                <a:latin typeface="Arial"/>
+              </a:defRPr>
+            </a:pPr>
+            <a:r>
+              <a:t>• Ghép nhóm dựa trên Ma trận Kỹ năng (Skill Matrix) &amp; giờ cam kết hàng tuần.</a:t>
+            </a:r>
+          </a:p>
+          <a:p>
+            <a:pPr>
+              <a:spcAft>
+                <a:spcPts val="200"/>
+              </a:spcAft>
+              <a:defRPr sz="1150">
+                <a:solidFill>
+                  <a:srgbClr val="E2E8F0"/>
+                </a:solidFill>
+                <a:latin typeface="Arial"/>
+              </a:defRPr>
+            </a:pPr>
+            <a:r>
+              <a:t>• Đạt mục tiêu tìm kiếm và ứng tuyển thành công chỉ trong vòng dưới 60 giây.</a:t>
+            </a:r>
+          </a:p>
+        </p:txBody>
+      </p:sp>
+      <p:sp>
+        <p:nvSpPr>
+          <p:cNvPr id="7" name="Rounded Rectangle 6"/>
+          <p:cNvSpPr/>
+          <p:nvPr/>
+        </p:nvSpPr>
+        <p:spPr>
+          <a:xfrm>
+            <a:off x="731520" y="4855464"/>
+            <a:ext cx="6949440" cy="1554480"/>
+          </a:xfrm>
+          <a:prstGeom prst="roundRect">
+            <a:avLst/>
+          </a:prstGeom>
+          <a:solidFill>
+            <a:srgbClr val="161E31"/>
+          </a:solidFill>
+          <a:ln>
+            <a:solidFill>
+              <a:srgbClr val="2D3748"/>
+            </a:solidFill>
+          </a:ln>
+        </p:spPr>
+        <p:style>
+          <a:lnRef idx="1">
+            <a:schemeClr val="accent1"/>
+          </a:lnRef>
+          <a:fillRef idx="3">
+            <a:schemeClr val="accent1"/>
+          </a:fillRef>
+          <a:effectRef idx="2">
+            <a:schemeClr val="accent1"/>
+          </a:effectRef>
+          <a:fontRef idx="minor">
+            <a:schemeClr val="lt1"/>
+          </a:fontRef>
+        </p:style>
+        <p:txBody>
+          <a:bodyPr rtlCol="0" anchor="ctr" lIns="228600" tIns="164592" rIns="228600" wrap="square"/>
+          <a:lstStyle/>
+          <a:p>
+            <a:pPr algn="ctr">
+              <a:spcAft>
+                <a:spcPts val="400"/>
+              </a:spcAft>
+              <a:defRPr sz="1300" b="1">
+                <a:solidFill>
+                  <a:srgbClr val="38BDF8"/>
+                </a:solidFill>
+                <a:latin typeface="Arial"/>
+              </a:defRPr>
+            </a:pPr>
+            <a:r>
+              <a:t>👥 Đội ngũ Nhóm 4 &amp; Phân vai</a:t>
+            </a:r>
+          </a:p>
+          <a:p>
+            <a:pPr>
+              <a:spcAft>
+                <a:spcPts val="200"/>
+              </a:spcAft>
+              <a:defRPr sz="1150">
+                <a:solidFill>
+                  <a:srgbClr val="94A3B8"/>
+                </a:solidFill>
+                <a:latin typeface="Arial"/>
+              </a:defRPr>
+            </a:pPr>
+            <a:r>
+              <a:t>• 1. Tăng Mình Trọng: Trưởng nhóm · UX Persona &amp; Sitemap</a:t>
+            </a:r>
+          </a:p>
+          <a:p>
+            <a:pPr>
+              <a:spcAft>
+                <a:spcPts val="200"/>
+              </a:spcAft>
+              <a:defRPr sz="1150">
+                <a:solidFill>
+                  <a:srgbClr val="94A3B8"/>
+                </a:solidFill>
+                <a:latin typeface="Arial"/>
+              </a:defRPr>
+            </a:pPr>
+            <a:r>
+              <a:t>• 2. Phan Anh Tuấn: User Flows, AI Prompting &amp; Heuristics</a:t>
+            </a:r>
+          </a:p>
+          <a:p>
+            <a:pPr>
+              <a:spcAft>
+                <a:spcPts val="200"/>
+              </a:spcAft>
+              <a:defRPr sz="1150">
+                <a:solidFill>
+                  <a:srgbClr val="94A3B8"/>
+                </a:solidFill>
+                <a:latin typeface="Arial"/>
+              </a:defRPr>
+            </a:pPr>
+            <a:r>
+              <a:t>• 3. Đỗ Anh Minh: Design System &amp; 9 Components</a:t>
+            </a:r>
+          </a:p>
+          <a:p>
+            <a:pPr>
+              <a:spcAft>
+                <a:spcPts val="200"/>
+              </a:spcAft>
+              <a:defRPr sz="1150">
+                <a:solidFill>
+                  <a:srgbClr val="94A3B8"/>
+                </a:solidFill>
+                <a:latin typeface="Arial"/>
+              </a:defRPr>
+            </a:pPr>
+            <a:r>
+              <a:t>• 4. Lữ Phước Nhật Tú: Prototype &amp; Flutter Handoff</a:t>
+            </a:r>
+          </a:p>
+        </p:txBody>
+      </p:sp>
+      <p:sp>
+        <p:nvSpPr>
+          <p:cNvPr id="8" name="Rounded Rectangle 7"/>
+          <p:cNvSpPr/>
+          <p:nvPr/>
+        </p:nvSpPr>
+        <p:spPr>
+          <a:xfrm>
+            <a:off x="7863840" y="1508760"/>
+            <a:ext cx="3596335" cy="4901184"/>
+          </a:xfrm>
+          <a:prstGeom prst="roundRect">
+            <a:avLst/>
+          </a:prstGeom>
+          <a:solidFill>
+            <a:srgbClr val="161E31"/>
+          </a:solidFill>
+          <a:ln>
+            <a:solidFill>
+              <a:srgbClr val="2D3748"/>
+            </a:solidFill>
+          </a:ln>
+        </p:spPr>
+        <p:style>
+          <a:lnRef idx="1">
+            <a:schemeClr val="accent1"/>
+          </a:lnRef>
+          <a:fillRef idx="3">
+            <a:schemeClr val="accent1"/>
+          </a:fillRef>
+          <a:effectRef idx="2">
+            <a:schemeClr val="accent1"/>
+          </a:effectRef>
+          <a:fontRef idx="minor">
+            <a:schemeClr val="lt1"/>
+          </a:fontRef>
+        </p:style>
+        <p:txBody>
           <a:bodyPr rtlCol="0" anchor="ctr"/>
           <a:lstStyle/>
           <a:p>
@@ -4733,7 +4860,7 @@
       </p:sp>
       <p:pic>
         <p:nvPicPr>
-          <p:cNvPr id="7" name="Picture 6" descr="screen_01_discovery_feed.png"/>
+          <p:cNvPr id="9" name="Picture 8" descr="screen_01_discovery_feed.png"/>
           <p:cNvPicPr>
             <a:picLocks noChangeAspect="1"/>
           </p:cNvPicPr>
@@ -4747,8 +4874,8 @@
         </p:blipFill>
         <p:spPr>
           <a:xfrm>
-            <a:off x="8092440" y="1508760"/>
-            <a:ext cx="3322015" cy="14919927"/>
+            <a:off x="8092440" y="1691640"/>
+            <a:ext cx="3139135" cy="14098571"/>
           </a:xfrm>
           <a:prstGeom prst="rect">
             <a:avLst/>
@@ -4788,12 +4915,10 @@
             <a:avLst/>
           </a:prstGeom>
           <a:solidFill>
-            <a:srgbClr val="0F172A"/>
+            <a:srgbClr val="0B0F19"/>
           </a:solidFill>
           <a:ln>
-            <a:solidFill>
-              <a:srgbClr val="0F172A"/>
-            </a:solidFill>
+            <a:noFill/>
           </a:ln>
         </p:spPr>
         <p:style>
@@ -4820,24 +4945,24 @@
       </p:sp>
       <p:sp>
         <p:nvSpPr>
-          <p:cNvPr id="3" name="Rectangle 2"/>
+          <p:cNvPr id="3" name="Rounded Rectangle 2"/>
           <p:cNvSpPr/>
           <p:nvPr/>
         </p:nvSpPr>
         <p:spPr>
           <a:xfrm>
-            <a:off x="548640" y="365760"/>
-            <a:ext cx="11094415" cy="777240"/>
-          </a:xfrm>
-          <a:prstGeom prst="rect">
+            <a:off x="731520" y="365760"/>
+            <a:ext cx="10728655" cy="1005840"/>
+          </a:xfrm>
+          <a:prstGeom prst="roundRect">
             <a:avLst/>
           </a:prstGeom>
           <a:solidFill>
-            <a:srgbClr val="1E293B"/>
+            <a:srgbClr val="161E31"/>
           </a:solidFill>
           <a:ln>
             <a:solidFill>
-              <a:srgbClr val="334155"/>
+              <a:srgbClr val="2D3748"/>
             </a:solidFill>
           </a:ln>
         </p:spPr>
@@ -4856,19 +4981,35 @@
           </a:fontRef>
         </p:style>
         <p:txBody>
-          <a:bodyPr rtlCol="0" anchor="ctr" wrap="square"/>
+          <a:bodyPr rtlCol="0" anchor="ctr" lIns="274320" tIns="109728" rIns="274320" bIns="109728" wrap="square"/>
           <a:lstStyle/>
           <a:p>
             <a:pPr algn="ctr">
+              <a:defRPr sz="1100" b="1">
+                <a:solidFill>
+                  <a:srgbClr val="38BDF8"/>
+                </a:solidFill>
+                <a:latin typeface="Arial"/>
+              </a:defRPr>
+            </a:pPr>
+            <a:r>
+              <a:t>10 / 12  ·  ACCESSIBILITY &amp; RESPONSIVE</a:t>
+            </a:r>
+          </a:p>
+          <a:p>
+            <a:pPr>
+              <a:spcBef>
+                <a:spcPts val="200"/>
+              </a:spcBef>
               <a:defRPr sz="1700" b="1">
                 <a:solidFill>
-                  <a:srgbClr val="3B82F6"/>
-                </a:solidFill>
-                <a:latin typeface="Arial"/>
-              </a:defRPr>
-            </a:pPr>
-            <a:r>
-              <a:t>SLIDE 10 | ACCESSIBILITY (WCAG 2.1 AA) &amp; RESPONSIVE 360/412DP</a:t>
+                  <a:srgbClr val="FFFFFF"/>
+                </a:solidFill>
+                <a:latin typeface="Arial"/>
+              </a:defRPr>
+            </a:pPr>
+            <a:r>
+              <a:t>Kiểm chuẩn WCAG 2.1 AA &amp; Thích ứng Responsive</a:t>
             </a:r>
           </a:p>
         </p:txBody>
@@ -4881,8 +5022,8 @@
         </p:nvSpPr>
         <p:spPr>
           <a:xfrm>
-            <a:off x="8412480" y="438912"/>
-            <a:ext cx="3108960" cy="594360"/>
+            <a:off x="7772400" y="438912"/>
+            <a:ext cx="3474720" cy="457200"/>
           </a:xfrm>
           <a:prstGeom prst="rect">
             <a:avLst/>
@@ -4896,9 +5037,9 @@
           <a:lstStyle/>
           <a:p>
             <a:pPr algn="r">
-              <a:defRPr sz="1300" b="1">
-                <a:solidFill>
-                  <a:srgbClr val="10B981"/>
+              <a:defRPr sz="1200" b="1">
+                <a:solidFill>
+                  <a:srgbClr val="34D399"/>
                 </a:solidFill>
                 <a:latin typeface="Arial"/>
               </a:defRPr>
@@ -4917,18 +5058,18 @@
         </p:nvSpPr>
         <p:spPr>
           <a:xfrm>
-            <a:off x="548640" y="1325880"/>
-            <a:ext cx="7132320" cy="5120640"/>
+            <a:off x="731520" y="1508760"/>
+            <a:ext cx="6949440" cy="1554480"/>
           </a:xfrm>
           <a:prstGeom prst="roundRect">
             <a:avLst/>
           </a:prstGeom>
           <a:solidFill>
-            <a:srgbClr val="1E293B"/>
+            <a:srgbClr val="161E31"/>
           </a:solidFill>
           <a:ln>
             <a:solidFill>
-              <a:srgbClr val="334155"/>
+              <a:srgbClr val="2D3748"/>
             </a:solidFill>
           </a:ln>
         </p:spPr>
@@ -4947,140 +5088,86 @@
           </a:fontRef>
         </p:style>
         <p:txBody>
-          <a:bodyPr rtlCol="0" anchor="ctr" wrap="square" tIns="274320" lIns="320040" rIns="320040" bIns="274320"/>
+          <a:bodyPr rtlCol="0" anchor="ctr" lIns="228600" tIns="164592" rIns="228600" wrap="square"/>
           <a:lstStyle/>
           <a:p>
             <a:pPr algn="ctr">
-              <a:spcBef>
-                <a:spcPts val="600"/>
-              </a:spcBef>
               <a:spcAft>
                 <a:spcPts val="400"/>
               </a:spcAft>
-              <a:defRPr sz="1400" b="1">
-                <a:solidFill>
-                  <a:srgbClr val="3B82F6"/>
-                </a:solidFill>
-                <a:latin typeface="Arial"/>
-              </a:defRPr>
-            </a:pPr>
-            <a:r>
-              <a:t>Bằng chứng Kiểm chuẩn Trợ năng WCAG 2.1 AA:</a:t>
-            </a:r>
-          </a:p>
-          <a:p>
-            <a:pPr lvl="1">
-              <a:spcAft>
-                <a:spcPts val="400"/>
-              </a:spcAft>
-              <a:defRPr sz="1250">
-                <a:solidFill>
-                  <a:srgbClr val="94A3B8"/>
-                </a:solidFill>
-                <a:latin typeface="Arial"/>
-              </a:defRPr>
-            </a:pPr>
-            <a:r>
-              <a:t>  • Độ tương phản màu: Chữ chính trên nền trắng đạt 12.6:1 (chuẩn &gt;=4.5:1). Nút chính nền xanh đạt 4.68:1.</a:t>
-            </a:r>
-          </a:p>
-          <a:p>
-            <a:pPr lvl="1">
-              <a:spcAft>
-                <a:spcPts val="400"/>
-              </a:spcAft>
-              <a:defRPr sz="1250">
-                <a:solidFill>
-                  <a:srgbClr val="94A3B8"/>
-                </a:solidFill>
-                <a:latin typeface="Arial"/>
-              </a:defRPr>
-            </a:pPr>
-            <a:r>
-              <a:t>  • Vùng chạm an toàn (Touch Targets): 100% nút bấm, icon và ô nhập liệu đạt kích thước &gt;= 48x48 dp.</a:t>
-            </a:r>
-          </a:p>
-          <a:p>
-            <a:pPr lvl="1">
-              <a:spcAft>
-                <a:spcPts val="400"/>
-              </a:spcAft>
-              <a:defRPr sz="1250">
-                <a:solidFill>
-                  <a:srgbClr val="94A3B8"/>
-                </a:solidFill>
-                <a:latin typeface="Arial"/>
-              </a:defRPr>
-            </a:pPr>
-            <a:r>
-              <a:t>  • Kích cỡ chữ đọc: Toàn bộ body text đạt &gt;= 14sp, nhãn phụ &gt;= 12sp.</a:t>
-            </a:r>
-          </a:p>
-          <a:p>
-            <a:pPr lvl="1">
-              <a:spcAft>
-                <a:spcPts val="400"/>
-              </a:spcAft>
-              <a:defRPr sz="1250">
-                <a:solidFill>
-                  <a:srgbClr val="94A3B8"/>
-                </a:solidFill>
-                <a:latin typeface="Arial"/>
-              </a:defRPr>
-            </a:pPr>
-            <a:r>
-              <a:t>  • Đa phương thức: Không dùng màu đơn độc; luôn có Icon + Nhãn Text đi kèm.</a:t>
+              <a:defRPr sz="1300" b="1">
+                <a:solidFill>
+                  <a:srgbClr val="38BDF8"/>
+                </a:solidFill>
+                <a:latin typeface="Arial"/>
+              </a:defRPr>
+            </a:pPr>
+            <a:r>
+              <a:t>♿ Bằng chứng Trợ năng WCAG 2.1 AA</a:t>
             </a:r>
           </a:p>
           <a:p>
             <a:pPr>
-              <a:spcBef>
-                <a:spcPts val="600"/>
-              </a:spcBef>
-              <a:spcAft>
-                <a:spcPts val="400"/>
-              </a:spcAft>
-              <a:defRPr sz="1400" b="1">
-                <a:solidFill>
-                  <a:srgbClr val="3B82F6"/>
-                </a:solidFill>
-                <a:latin typeface="Arial"/>
-              </a:defRPr>
-            </a:pPr>
-            <a:r>
-              <a:t>Khả năng Thích ứng Màn hình (Responsive):</a:t>
-            </a:r>
-          </a:p>
-          <a:p>
-            <a:pPr lvl="1">
-              <a:spcAft>
-                <a:spcPts val="400"/>
-              </a:spcAft>
-              <a:defRPr sz="1250">
-                <a:solidFill>
-                  <a:srgbClr val="94A3B8"/>
-                </a:solidFill>
-                <a:latin typeface="Arial"/>
-              </a:defRPr>
-            </a:pPr>
-            <a:r>
-              <a:t>  • Thiết kế tối ưu trên màn hình Android chuẩn 360x800 dp.</a:t>
-            </a:r>
-          </a:p>
-          <a:p>
-            <a:pPr lvl="1">
-              <a:spcAft>
-                <a:spcPts val="400"/>
-              </a:spcAft>
-              <a:defRPr sz="1250">
-                <a:solidFill>
-                  <a:srgbClr val="94A3B8"/>
-                </a:solidFill>
-                <a:latin typeface="Arial"/>
-              </a:defRPr>
-            </a:pPr>
-            <a:r>
-              <a:t>  • Tự động co giãn không vỡ khung trên màn hình lớn 412x915 dp nhờ Auto Layout 'Fill container'.</a:t>
+              <a:spcAft>
+                <a:spcPts val="200"/>
+              </a:spcAft>
+              <a:defRPr sz="1150">
+                <a:solidFill>
+                  <a:srgbClr val="E2E8F0"/>
+                </a:solidFill>
+                <a:latin typeface="Arial"/>
+              </a:defRPr>
+            </a:pPr>
+            <a:r>
+              <a:t>• Tương phản màu: Chữ chính trên nền trắng đạt 12.6:1 (vượt 4.5:1). Nút chính đạt 4.68:1.</a:t>
+            </a:r>
+          </a:p>
+          <a:p>
+            <a:pPr>
+              <a:spcAft>
+                <a:spcPts val="200"/>
+              </a:spcAft>
+              <a:defRPr sz="1150">
+                <a:solidFill>
+                  <a:srgbClr val="E2E8F0"/>
+                </a:solidFill>
+                <a:latin typeface="Arial"/>
+              </a:defRPr>
+            </a:pPr>
+            <a:r>
+              <a:t>• Vùng chạm an toàn: 100% nút bấm, icon và ô nhập liệu đạt &gt;= 48x48 dp.</a:t>
+            </a:r>
+          </a:p>
+          <a:p>
+            <a:pPr>
+              <a:spcAft>
+                <a:spcPts val="200"/>
+              </a:spcAft>
+              <a:defRPr sz="1150">
+                <a:solidFill>
+                  <a:srgbClr val="E2E8F0"/>
+                </a:solidFill>
+                <a:latin typeface="Arial"/>
+              </a:defRPr>
+            </a:pPr>
+            <a:r>
+              <a:t>• Cỡ chữ chuẩn đọc: Body text &gt;= 14sp, nhãn phụ &gt;= 12sp.</a:t>
+            </a:r>
+          </a:p>
+          <a:p>
+            <a:pPr>
+              <a:spcAft>
+                <a:spcPts val="200"/>
+              </a:spcAft>
+              <a:defRPr sz="1150">
+                <a:solidFill>
+                  <a:srgbClr val="E2E8F0"/>
+                </a:solidFill>
+                <a:latin typeface="Arial"/>
+              </a:defRPr>
+            </a:pPr>
+            <a:r>
+              <a:t>• Đa phương thức: Không dùng màu đơn độc; luôn có Icon + Nhãn Text đi kèm.</a:t>
             </a:r>
           </a:p>
         </p:txBody>
@@ -5093,18 +5180,18 @@
         </p:nvSpPr>
         <p:spPr>
           <a:xfrm>
-            <a:off x="7863840" y="1325880"/>
-            <a:ext cx="3779215" cy="5120640"/>
+            <a:off x="731520" y="3182112"/>
+            <a:ext cx="6949440" cy="1554480"/>
           </a:xfrm>
           <a:prstGeom prst="roundRect">
             <a:avLst/>
           </a:prstGeom>
           <a:solidFill>
-            <a:srgbClr val="1E293B"/>
+            <a:srgbClr val="161E31"/>
           </a:solidFill>
           <a:ln>
             <a:solidFill>
-              <a:srgbClr val="334155"/>
+              <a:srgbClr val="2D3748"/>
             </a:solidFill>
           </a:ln>
         </p:spPr>
@@ -5123,6 +5210,170 @@
           </a:fontRef>
         </p:style>
         <p:txBody>
+          <a:bodyPr rtlCol="0" anchor="ctr" lIns="228600" tIns="164592" rIns="228600" wrap="square"/>
+          <a:lstStyle/>
+          <a:p>
+            <a:pPr algn="ctr">
+              <a:spcAft>
+                <a:spcPts val="400"/>
+              </a:spcAft>
+              <a:defRPr sz="1300" b="1">
+                <a:solidFill>
+                  <a:srgbClr val="34D399"/>
+                </a:solidFill>
+                <a:latin typeface="Arial"/>
+              </a:defRPr>
+            </a:pPr>
+            <a:r>
+              <a:t>📱 Thích ứng Màn hình Đa kích thước</a:t>
+            </a:r>
+          </a:p>
+          <a:p>
+            <a:pPr>
+              <a:spcAft>
+                <a:spcPts val="200"/>
+              </a:spcAft>
+              <a:defRPr sz="1150">
+                <a:solidFill>
+                  <a:srgbClr val="E2E8F0"/>
+                </a:solidFill>
+                <a:latin typeface="Arial"/>
+              </a:defRPr>
+            </a:pPr>
+            <a:r>
+              <a:t>• Kiểm thử chuẩn Android 360x800 dp thao tác 1 tay.</a:t>
+            </a:r>
+          </a:p>
+          <a:p>
+            <a:pPr>
+              <a:spcAft>
+                <a:spcPts val="200"/>
+              </a:spcAft>
+              <a:defRPr sz="1150">
+                <a:solidFill>
+                  <a:srgbClr val="E2E8F0"/>
+                </a:solidFill>
+                <a:latin typeface="Arial"/>
+              </a:defRPr>
+            </a:pPr>
+            <a:r>
+              <a:t>• Tự động co giãn không vỡ khung trên màn hình lớn 412x915 dp nhờ thiết lập Auto Layout 'Fill container'.</a:t>
+            </a:r>
+          </a:p>
+        </p:txBody>
+      </p:sp>
+      <p:sp>
+        <p:nvSpPr>
+          <p:cNvPr id="7" name="Rounded Rectangle 6"/>
+          <p:cNvSpPr/>
+          <p:nvPr/>
+        </p:nvSpPr>
+        <p:spPr>
+          <a:xfrm>
+            <a:off x="731520" y="4855464"/>
+            <a:ext cx="6949440" cy="1554480"/>
+          </a:xfrm>
+          <a:prstGeom prst="roundRect">
+            <a:avLst/>
+          </a:prstGeom>
+          <a:solidFill>
+            <a:srgbClr val="161E31"/>
+          </a:solidFill>
+          <a:ln>
+            <a:solidFill>
+              <a:srgbClr val="2D3748"/>
+            </a:solidFill>
+          </a:ln>
+        </p:spPr>
+        <p:style>
+          <a:lnRef idx="1">
+            <a:schemeClr val="accent1"/>
+          </a:lnRef>
+          <a:fillRef idx="3">
+            <a:schemeClr val="accent1"/>
+          </a:fillRef>
+          <a:effectRef idx="2">
+            <a:schemeClr val="accent1"/>
+          </a:effectRef>
+          <a:fontRef idx="minor">
+            <a:schemeClr val="lt1"/>
+          </a:fontRef>
+        </p:style>
+        <p:txBody>
+          <a:bodyPr rtlCol="0" anchor="ctr" lIns="228600" tIns="164592" rIns="228600" wrap="square"/>
+          <a:lstStyle/>
+          <a:p>
+            <a:pPr algn="ctr">
+              <a:spcAft>
+                <a:spcPts val="400"/>
+              </a:spcAft>
+              <a:defRPr sz="1300" b="1">
+                <a:solidFill>
+                  <a:srgbClr val="38BDF8"/>
+                </a:solidFill>
+                <a:latin typeface="Arial"/>
+              </a:defRPr>
+            </a:pPr>
+            <a:r>
+              <a:t>📁 Minh chứng</a:t>
+            </a:r>
+          </a:p>
+          <a:p>
+            <a:pPr>
+              <a:spcAft>
+                <a:spcPts val="200"/>
+              </a:spcAft>
+              <a:defRPr sz="1150">
+                <a:solidFill>
+                  <a:srgbClr val="94A3B8"/>
+                </a:solidFill>
+                <a:latin typeface="Arial"/>
+              </a:defRPr>
+            </a:pPr>
+            <a:r>
+              <a:t>• Bảng kiểm định tương phản tại design/design-decisions.md.</a:t>
+            </a:r>
+          </a:p>
+        </p:txBody>
+      </p:sp>
+      <p:sp>
+        <p:nvSpPr>
+          <p:cNvPr id="8" name="Rounded Rectangle 7"/>
+          <p:cNvSpPr/>
+          <p:nvPr/>
+        </p:nvSpPr>
+        <p:spPr>
+          <a:xfrm>
+            <a:off x="7863840" y="1508760"/>
+            <a:ext cx="3596335" cy="4901184"/>
+          </a:xfrm>
+          <a:prstGeom prst="roundRect">
+            <a:avLst/>
+          </a:prstGeom>
+          <a:solidFill>
+            <a:srgbClr val="161E31"/>
+          </a:solidFill>
+          <a:ln>
+            <a:solidFill>
+              <a:srgbClr val="2D3748"/>
+            </a:solidFill>
+          </a:ln>
+        </p:spPr>
+        <p:style>
+          <a:lnRef idx="1">
+            <a:schemeClr val="accent1"/>
+          </a:lnRef>
+          <a:fillRef idx="3">
+            <a:schemeClr val="accent1"/>
+          </a:fillRef>
+          <a:effectRef idx="2">
+            <a:schemeClr val="accent1"/>
+          </a:effectRef>
+          <a:fontRef idx="minor">
+            <a:schemeClr val="lt1"/>
+          </a:fontRef>
+        </p:style>
+        <p:txBody>
           <a:bodyPr rtlCol="0" anchor="ctr"/>
           <a:lstStyle/>
           <a:p>
@@ -5132,7 +5383,7 @@
       </p:sp>
       <p:pic>
         <p:nvPicPr>
-          <p:cNvPr id="7" name="Picture 6" descr="screen_06_chemistry_call_modal.png"/>
+          <p:cNvPr id="9" name="Picture 8" descr="screen_06_chemistry_call_modal.png"/>
           <p:cNvPicPr>
             <a:picLocks noChangeAspect="1"/>
           </p:cNvPicPr>
@@ -5146,8 +5397,8 @@
         </p:blipFill>
         <p:spPr>
           <a:xfrm>
-            <a:off x="8092440" y="1508760"/>
-            <a:ext cx="3322015" cy="7542668"/>
+            <a:off x="8092440" y="1691640"/>
+            <a:ext cx="3139135" cy="7127437"/>
           </a:xfrm>
           <a:prstGeom prst="rect">
             <a:avLst/>
@@ -5187,12 +5438,10 @@
             <a:avLst/>
           </a:prstGeom>
           <a:solidFill>
-            <a:srgbClr val="0F172A"/>
+            <a:srgbClr val="0B0F19"/>
           </a:solidFill>
           <a:ln>
-            <a:solidFill>
-              <a:srgbClr val="0F172A"/>
-            </a:solidFill>
+            <a:noFill/>
           </a:ln>
         </p:spPr>
         <p:style>
@@ -5219,24 +5468,24 @@
       </p:sp>
       <p:sp>
         <p:nvSpPr>
-          <p:cNvPr id="3" name="Rectangle 2"/>
+          <p:cNvPr id="3" name="Rounded Rectangle 2"/>
           <p:cNvSpPr/>
           <p:nvPr/>
         </p:nvSpPr>
         <p:spPr>
           <a:xfrm>
-            <a:off x="548640" y="365760"/>
-            <a:ext cx="11094415" cy="777240"/>
-          </a:xfrm>
-          <a:prstGeom prst="rect">
+            <a:off x="731520" y="365760"/>
+            <a:ext cx="10728655" cy="1005840"/>
+          </a:xfrm>
+          <a:prstGeom prst="roundRect">
             <a:avLst/>
           </a:prstGeom>
           <a:solidFill>
-            <a:srgbClr val="1E293B"/>
+            <a:srgbClr val="161E31"/>
           </a:solidFill>
           <a:ln>
             <a:solidFill>
-              <a:srgbClr val="334155"/>
+              <a:srgbClr val="2D3748"/>
             </a:solidFill>
           </a:ln>
         </p:spPr>
@@ -5255,19 +5504,35 @@
           </a:fontRef>
         </p:style>
         <p:txBody>
-          <a:bodyPr rtlCol="0" anchor="ctr" wrap="square"/>
+          <a:bodyPr rtlCol="0" anchor="ctr" lIns="274320" tIns="109728" rIns="274320" bIns="109728" wrap="square"/>
           <a:lstStyle/>
           <a:p>
             <a:pPr algn="ctr">
+              <a:defRPr sz="1100" b="1">
+                <a:solidFill>
+                  <a:srgbClr val="38BDF8"/>
+                </a:solidFill>
+                <a:latin typeface="Arial"/>
+              </a:defRPr>
+            </a:pPr>
+            <a:r>
+              <a:t>11 / 12  ·  LIVE PROTOTYPE</a:t>
+            </a:r>
+          </a:p>
+          <a:p>
+            <a:pPr>
+              <a:spcBef>
+                <a:spcPts val="200"/>
+              </a:spcBef>
               <a:defRPr sz="1700" b="1">
                 <a:solidFill>
-                  <a:srgbClr val="3B82F6"/>
-                </a:solidFill>
-                <a:latin typeface="Arial"/>
-              </a:defRPr>
-            </a:pPr>
-            <a:r>
-              <a:t>SLIDE 11 | LIVE INTERACTIVE PROTOTYPE (FIGMA PAGE 06)</a:t>
+                  <a:srgbClr val="FFFFFF"/>
+                </a:solidFill>
+                <a:latin typeface="Arial"/>
+              </a:defRPr>
+            </a:pPr>
+            <a:r>
+              <a:t>Nguyên mẫu Tương tác Figma (Figma Page 06)</a:t>
             </a:r>
           </a:p>
         </p:txBody>
@@ -5280,8 +5545,8 @@
         </p:nvSpPr>
         <p:spPr>
           <a:xfrm>
-            <a:off x="8412480" y="438912"/>
-            <a:ext cx="3108960" cy="594360"/>
+            <a:off x="7772400" y="438912"/>
+            <a:ext cx="3474720" cy="457200"/>
           </a:xfrm>
           <a:prstGeom prst="rect">
             <a:avLst/>
@@ -5295,9 +5560,9 @@
           <a:lstStyle/>
           <a:p>
             <a:pPr algn="r">
-              <a:defRPr sz="1300" b="1">
-                <a:solidFill>
-                  <a:srgbClr val="10B981"/>
+              <a:defRPr sz="1200" b="1">
+                <a:solidFill>
+                  <a:srgbClr val="34D399"/>
                 </a:solidFill>
                 <a:latin typeface="Arial"/>
               </a:defRPr>
@@ -5316,18 +5581,18 @@
         </p:nvSpPr>
         <p:spPr>
           <a:xfrm>
-            <a:off x="548640" y="1325880"/>
-            <a:ext cx="7132320" cy="5120640"/>
+            <a:off x="731520" y="1508760"/>
+            <a:ext cx="6949440" cy="1554480"/>
           </a:xfrm>
           <a:prstGeom prst="roundRect">
             <a:avLst/>
           </a:prstGeom>
           <a:solidFill>
-            <a:srgbClr val="1E293B"/>
+            <a:srgbClr val="161E31"/>
           </a:solidFill>
           <a:ln>
             <a:solidFill>
-              <a:srgbClr val="334155"/>
+              <a:srgbClr val="2D3748"/>
             </a:solidFill>
           </a:ln>
         </p:spPr>
@@ -5346,105 +5611,70 @@
           </a:fontRef>
         </p:style>
         <p:txBody>
-          <a:bodyPr rtlCol="0" anchor="ctr" wrap="square" tIns="274320" lIns="320040" rIns="320040" bIns="274320"/>
+          <a:bodyPr rtlCol="0" anchor="ctr" lIns="228600" tIns="164592" rIns="228600" wrap="square"/>
           <a:lstStyle/>
           <a:p>
             <a:pPr algn="ctr">
-              <a:spcBef>
-                <a:spcPts val="600"/>
-              </a:spcBef>
               <a:spcAft>
                 <a:spcPts val="400"/>
               </a:spcAft>
-              <a:defRPr sz="1400" b="1">
-                <a:solidFill>
-                  <a:srgbClr val="3B82F6"/>
-                </a:solidFill>
-                <a:latin typeface="Arial"/>
-              </a:defRPr>
-            </a:pPr>
-            <a:r>
-              <a:t>Trải nghiệm Tương tác Chân thực trên Figma:</a:t>
-            </a:r>
-          </a:p>
-          <a:p>
-            <a:pPr lvl="1">
-              <a:spcAft>
-                <a:spcPts val="400"/>
-              </a:spcAft>
-              <a:defRPr sz="1250">
-                <a:solidFill>
-                  <a:srgbClr val="94A3B8"/>
-                </a:solidFill>
-                <a:latin typeface="Arial"/>
-              </a:defRPr>
-            </a:pPr>
-            <a:r>
-              <a:t>  • 3 Starting Points: Thiết lập phân luồng rõ ràng cho cả 3 user flows.</a:t>
-            </a:r>
-          </a:p>
-          <a:p>
-            <a:pPr lvl="1">
-              <a:spcAft>
-                <a:spcPts val="400"/>
-              </a:spcAft>
-              <a:defRPr sz="1250">
-                <a:solidFill>
-                  <a:srgbClr val="94A3B8"/>
-                </a:solidFill>
-                <a:latin typeface="Arial"/>
-              </a:defRPr>
-            </a:pPr>
-            <a:r>
-              <a:t>  • Modal Overlays: Trải nghiệm mở Bottom Sheet và Dialog với hiệu ứng làm tối nền (Dim background).</a:t>
-            </a:r>
-          </a:p>
-          <a:p>
-            <a:pPr lvl="1">
-              <a:spcAft>
-                <a:spcPts val="400"/>
-              </a:spcAft>
-              <a:defRPr sz="1250">
-                <a:solidFill>
-                  <a:srgbClr val="94A3B8"/>
-                </a:solidFill>
-                <a:latin typeface="Arial"/>
-              </a:defRPr>
-            </a:pPr>
-            <a:r>
-              <a:t>  • Chuyển động Smart Animate: Thời gian 250-300ms mượt mà, đúng chuẩn native mobile.</a:t>
-            </a:r>
-          </a:p>
-          <a:p>
-            <a:pPr lvl="1">
-              <a:spcAft>
-                <a:spcPts val="400"/>
-              </a:spcAft>
-              <a:defRPr sz="1250">
-                <a:solidFill>
-                  <a:srgbClr val="94A3B8"/>
-                </a:solidFill>
-                <a:latin typeface="Arial"/>
-              </a:defRPr>
-            </a:pPr>
-            <a:r>
-              <a:t>  • Đường dẫn quay vòng khép kín (Circular Return Paths): Nút Back hoạt động chính xác tại mọi màn hình con; nút Về trang chủ sau khi nộp đơn giúp loại bỏ hoàn toàn bẫy ngõ cụt.</a:t>
+              <a:defRPr sz="1300" b="1">
+                <a:solidFill>
+                  <a:srgbClr val="38BDF8"/>
+                </a:solidFill>
+                <a:latin typeface="Arial"/>
+              </a:defRPr>
+            </a:pPr>
+            <a:r>
+              <a:t>⚡ Các Tính năng Tương tác Nổi bật</a:t>
             </a:r>
           </a:p>
           <a:p>
             <a:pPr>
               <a:spcAft>
-                <a:spcPts val="600"/>
-              </a:spcAft>
-              <a:defRPr sz="1300">
-                <a:solidFill>
-                  <a:srgbClr val="F8FAFC"/>
-                </a:solidFill>
-                <a:latin typeface="Arial"/>
-              </a:defRPr>
-            </a:pPr>
-            <a:r>
-              <a:t>Sẵn sàng cho phiên Demo trực tiếp 5 phút trên Figma Canvas.</a:t>
+                <a:spcPts val="200"/>
+              </a:spcAft>
+              <a:defRPr sz="1150">
+                <a:solidFill>
+                  <a:srgbClr val="E2E8F0"/>
+                </a:solidFill>
+                <a:latin typeface="Arial"/>
+              </a:defRPr>
+            </a:pPr>
+            <a:r>
+              <a:t>• 3 Starting Points phân luồng rõ ràng cho cả 3 kịch bản.</a:t>
+            </a:r>
+          </a:p>
+          <a:p>
+            <a:pPr>
+              <a:spcAft>
+                <a:spcPts val="200"/>
+              </a:spcAft>
+              <a:defRPr sz="1150">
+                <a:solidFill>
+                  <a:srgbClr val="E2E8F0"/>
+                </a:solidFill>
+                <a:latin typeface="Arial"/>
+              </a:defRPr>
+            </a:pPr>
+            <a:r>
+              <a:t>• Trải nghiệm Bottom Sheet dạng Modal Overlay làm tối mờ nền (Dimming).</a:t>
+            </a:r>
+          </a:p>
+          <a:p>
+            <a:pPr>
+              <a:spcAft>
+                <a:spcPts val="200"/>
+              </a:spcAft>
+              <a:defRPr sz="1150">
+                <a:solidFill>
+                  <a:srgbClr val="E2E8F0"/>
+                </a:solidFill>
+                <a:latin typeface="Arial"/>
+              </a:defRPr>
+            </a:pPr>
+            <a:r>
+              <a:t>• Chuyển động Smart Animate 250-300ms mượt mà, đúng chuẩn mobile native.</a:t>
             </a:r>
           </a:p>
         </p:txBody>
@@ -5457,18 +5687,18 @@
         </p:nvSpPr>
         <p:spPr>
           <a:xfrm>
-            <a:off x="7863840" y="1325880"/>
-            <a:ext cx="3779215" cy="5120640"/>
+            <a:off x="731520" y="3182112"/>
+            <a:ext cx="6949440" cy="1554480"/>
           </a:xfrm>
           <a:prstGeom prst="roundRect">
             <a:avLst/>
           </a:prstGeom>
           <a:solidFill>
-            <a:srgbClr val="1E293B"/>
+            <a:srgbClr val="161E31"/>
           </a:solidFill>
           <a:ln>
             <a:solidFill>
-              <a:srgbClr val="334155"/>
+              <a:srgbClr val="2D3748"/>
             </a:solidFill>
           </a:ln>
         </p:spPr>
@@ -5487,6 +5717,186 @@
           </a:fontRef>
         </p:style>
         <p:txBody>
+          <a:bodyPr rtlCol="0" anchor="ctr" lIns="228600" tIns="164592" rIns="228600" wrap="square"/>
+          <a:lstStyle/>
+          <a:p>
+            <a:pPr algn="ctr">
+              <a:spcAft>
+                <a:spcPts val="400"/>
+              </a:spcAft>
+              <a:defRPr sz="1300" b="1">
+                <a:solidFill>
+                  <a:srgbClr val="34D399"/>
+                </a:solidFill>
+                <a:latin typeface="Arial"/>
+              </a:defRPr>
+            </a:pPr>
+            <a:r>
+              <a:t>🔄 Đường dẫn Khép kín (Circular Paths)</a:t>
+            </a:r>
+          </a:p>
+          <a:p>
+            <a:pPr>
+              <a:spcAft>
+                <a:spcPts val="200"/>
+              </a:spcAft>
+              <a:defRPr sz="1150">
+                <a:solidFill>
+                  <a:srgbClr val="E2E8F0"/>
+                </a:solidFill>
+                <a:latin typeface="Arial"/>
+              </a:defRPr>
+            </a:pPr>
+            <a:r>
+              <a:t>• Nút Back hoạt động chính xác tại mọi màn hình con.</a:t>
+            </a:r>
+          </a:p>
+          <a:p>
+            <a:pPr>
+              <a:spcAft>
+                <a:spcPts val="200"/>
+              </a:spcAft>
+              <a:defRPr sz="1150">
+                <a:solidFill>
+                  <a:srgbClr val="E2E8F0"/>
+                </a:solidFill>
+                <a:latin typeface="Arial"/>
+              </a:defRPr>
+            </a:pPr>
+            <a:r>
+              <a:t>• Nút 'Về trang chủ' và 'Xem đơn' sau khi nộp đơn giúp loại bỏ hoàn toàn bẫy ngõ cụt.</a:t>
+            </a:r>
+          </a:p>
+          <a:p>
+            <a:pPr>
+              <a:spcAft>
+                <a:spcPts val="200"/>
+              </a:spcAft>
+              <a:defRPr sz="1150">
+                <a:solidFill>
+                  <a:srgbClr val="E2E8F0"/>
+                </a:solidFill>
+                <a:latin typeface="Arial"/>
+              </a:defRPr>
+            </a:pPr>
+            <a:r>
+              <a:t>• Nhánh phục hồi lỗi tại Screen 08 quay về trang chủ chỉ bằng 1 chạm.</a:t>
+            </a:r>
+          </a:p>
+        </p:txBody>
+      </p:sp>
+      <p:sp>
+        <p:nvSpPr>
+          <p:cNvPr id="7" name="Rounded Rectangle 6"/>
+          <p:cNvSpPr/>
+          <p:nvPr/>
+        </p:nvSpPr>
+        <p:spPr>
+          <a:xfrm>
+            <a:off x="731520" y="4855464"/>
+            <a:ext cx="6949440" cy="1554480"/>
+          </a:xfrm>
+          <a:prstGeom prst="roundRect">
+            <a:avLst/>
+          </a:prstGeom>
+          <a:solidFill>
+            <a:srgbClr val="161E31"/>
+          </a:solidFill>
+          <a:ln>
+            <a:solidFill>
+              <a:srgbClr val="2D3748"/>
+            </a:solidFill>
+          </a:ln>
+        </p:spPr>
+        <p:style>
+          <a:lnRef idx="1">
+            <a:schemeClr val="accent1"/>
+          </a:lnRef>
+          <a:fillRef idx="3">
+            <a:schemeClr val="accent1"/>
+          </a:fillRef>
+          <a:effectRef idx="2">
+            <a:schemeClr val="accent1"/>
+          </a:effectRef>
+          <a:fontRef idx="minor">
+            <a:schemeClr val="lt1"/>
+          </a:fontRef>
+        </p:style>
+        <p:txBody>
+          <a:bodyPr rtlCol="0" anchor="ctr" lIns="228600" tIns="164592" rIns="228600" wrap="square"/>
+          <a:lstStyle/>
+          <a:p>
+            <a:pPr algn="ctr">
+              <a:spcAft>
+                <a:spcPts val="400"/>
+              </a:spcAft>
+              <a:defRPr sz="1300" b="1">
+                <a:solidFill>
+                  <a:srgbClr val="38BDF8"/>
+                </a:solidFill>
+                <a:latin typeface="Arial"/>
+              </a:defRPr>
+            </a:pPr>
+            <a:r>
+              <a:t>🚀 Sẵn sàng Demo</a:t>
+            </a:r>
+          </a:p>
+          <a:p>
+            <a:pPr>
+              <a:spcAft>
+                <a:spcPts val="200"/>
+              </a:spcAft>
+              <a:defRPr sz="1150">
+                <a:solidFill>
+                  <a:srgbClr val="94A3B8"/>
+                </a:solidFill>
+                <a:latin typeface="Arial"/>
+              </a:defRPr>
+            </a:pPr>
+            <a:r>
+              <a:t>• Sẵn sàng cho phiên Live Demo 5 phút trên Figma Canvas.</a:t>
+            </a:r>
+          </a:p>
+        </p:txBody>
+      </p:sp>
+      <p:sp>
+        <p:nvSpPr>
+          <p:cNvPr id="8" name="Rounded Rectangle 7"/>
+          <p:cNvSpPr/>
+          <p:nvPr/>
+        </p:nvSpPr>
+        <p:spPr>
+          <a:xfrm>
+            <a:off x="7863840" y="1508760"/>
+            <a:ext cx="3596335" cy="4901184"/>
+          </a:xfrm>
+          <a:prstGeom prst="roundRect">
+            <a:avLst/>
+          </a:prstGeom>
+          <a:solidFill>
+            <a:srgbClr val="161E31"/>
+          </a:solidFill>
+          <a:ln>
+            <a:solidFill>
+              <a:srgbClr val="2D3748"/>
+            </a:solidFill>
+          </a:ln>
+        </p:spPr>
+        <p:style>
+          <a:lnRef idx="1">
+            <a:schemeClr val="accent1"/>
+          </a:lnRef>
+          <a:fillRef idx="3">
+            <a:schemeClr val="accent1"/>
+          </a:fillRef>
+          <a:effectRef idx="2">
+            <a:schemeClr val="accent1"/>
+          </a:effectRef>
+          <a:fontRef idx="minor">
+            <a:schemeClr val="lt1"/>
+          </a:fontRef>
+        </p:style>
+        <p:txBody>
           <a:bodyPr rtlCol="0" anchor="ctr"/>
           <a:lstStyle/>
           <a:p>
@@ -5496,7 +5906,7 @@
       </p:sp>
       <p:pic>
         <p:nvPicPr>
-          <p:cNvPr id="7" name="Picture 6" descr="screen_07_chemistry_call_confirmed.png"/>
+          <p:cNvPr id="9" name="Picture 8" descr="screen_07_chemistry_call_confirmed.png"/>
           <p:cNvPicPr>
             <a:picLocks noChangeAspect="1"/>
           </p:cNvPicPr>
@@ -5510,8 +5920,8 @@
         </p:blipFill>
         <p:spPr>
           <a:xfrm>
-            <a:off x="8092440" y="1508760"/>
-            <a:ext cx="3322015" cy="21667155"/>
+            <a:off x="8092440" y="1691640"/>
+            <a:ext cx="3139135" cy="20474358"/>
           </a:xfrm>
           <a:prstGeom prst="rect">
             <a:avLst/>
@@ -5551,12 +5961,10 @@
             <a:avLst/>
           </a:prstGeom>
           <a:solidFill>
-            <a:srgbClr val="0F172A"/>
+            <a:srgbClr val="0B0F19"/>
           </a:solidFill>
           <a:ln>
-            <a:solidFill>
-              <a:srgbClr val="0F172A"/>
-            </a:solidFill>
+            <a:noFill/>
           </a:ln>
         </p:spPr>
         <p:style>
@@ -5583,24 +5991,24 @@
       </p:sp>
       <p:sp>
         <p:nvSpPr>
-          <p:cNvPr id="3" name="Rectangle 2"/>
+          <p:cNvPr id="3" name="Rounded Rectangle 2"/>
           <p:cNvSpPr/>
           <p:nvPr/>
         </p:nvSpPr>
         <p:spPr>
           <a:xfrm>
-            <a:off x="548640" y="365760"/>
-            <a:ext cx="11094415" cy="777240"/>
-          </a:xfrm>
-          <a:prstGeom prst="rect">
+            <a:off x="731520" y="365760"/>
+            <a:ext cx="10728655" cy="1005840"/>
+          </a:xfrm>
+          <a:prstGeom prst="roundRect">
             <a:avLst/>
           </a:prstGeom>
           <a:solidFill>
-            <a:srgbClr val="1E293B"/>
+            <a:srgbClr val="161E31"/>
           </a:solidFill>
           <a:ln>
             <a:solidFill>
-              <a:srgbClr val="334155"/>
+              <a:srgbClr val="2D3748"/>
             </a:solidFill>
           </a:ln>
         </p:spPr>
@@ -5619,19 +6027,35 @@
           </a:fontRef>
         </p:style>
         <p:txBody>
-          <a:bodyPr rtlCol="0" anchor="ctr" wrap="square"/>
+          <a:bodyPr rtlCol="0" anchor="ctr" lIns="274320" tIns="109728" rIns="274320" bIns="109728" wrap="square"/>
           <a:lstStyle/>
           <a:p>
             <a:pPr algn="ctr">
+              <a:defRPr sz="1100" b="1">
+                <a:solidFill>
+                  <a:srgbClr val="38BDF8"/>
+                </a:solidFill>
+                <a:latin typeface="Arial"/>
+              </a:defRPr>
+            </a:pPr>
+            <a:r>
+              <a:t>12 / 12  ·  FLUTTER HANDOFF &amp; SUMMARY</a:t>
+            </a:r>
+          </a:p>
+          <a:p>
+            <a:pPr>
+              <a:spcBef>
+                <a:spcPts val="200"/>
+              </a:spcBef>
               <a:defRPr sz="1700" b="1">
                 <a:solidFill>
-                  <a:srgbClr val="3B82F6"/>
-                </a:solidFill>
-                <a:latin typeface="Arial"/>
-              </a:defRPr>
-            </a:pPr>
-            <a:r>
-              <a:t>SLIDE 12 | FLUTTER HANDOFF &amp; TỔNG KẾT NGHIỆM THU</a:t>
+                  <a:srgbClr val="FFFFFF"/>
+                </a:solidFill>
+                <a:latin typeface="Arial"/>
+              </a:defRPr>
+            </a:pPr>
+            <a:r>
+              <a:t>Bàn giao Kỹ thuật cho Lập trình viên &amp; Tổng kết</a:t>
             </a:r>
           </a:p>
         </p:txBody>
@@ -5644,8 +6068,8 @@
         </p:nvSpPr>
         <p:spPr>
           <a:xfrm>
-            <a:off x="8412480" y="438912"/>
-            <a:ext cx="3108960" cy="594360"/>
+            <a:off x="7772400" y="438912"/>
+            <a:ext cx="3474720" cy="457200"/>
           </a:xfrm>
           <a:prstGeom prst="rect">
             <a:avLst/>
@@ -5659,9 +6083,9 @@
           <a:lstStyle/>
           <a:p>
             <a:pPr algn="r">
-              <a:defRPr sz="1300" b="1">
-                <a:solidFill>
-                  <a:srgbClr val="10B981"/>
+              <a:defRPr sz="1200" b="1">
+                <a:solidFill>
+                  <a:srgbClr val="34D399"/>
                 </a:solidFill>
                 <a:latin typeface="Arial"/>
               </a:defRPr>
@@ -5680,18 +6104,18 @@
         </p:nvSpPr>
         <p:spPr>
           <a:xfrm>
-            <a:off x="548640" y="1325880"/>
-            <a:ext cx="7132320" cy="5120640"/>
+            <a:off x="731520" y="1508760"/>
+            <a:ext cx="6949440" cy="1554480"/>
           </a:xfrm>
           <a:prstGeom prst="roundRect">
             <a:avLst/>
           </a:prstGeom>
           <a:solidFill>
-            <a:srgbClr val="1E293B"/>
+            <a:srgbClr val="161E31"/>
           </a:solidFill>
           <a:ln>
             <a:solidFill>
-              <a:srgbClr val="334155"/>
+              <a:srgbClr val="2D3748"/>
             </a:solidFill>
           </a:ln>
         </p:spPr>
@@ -5710,156 +6134,70 @@
           </a:fontRef>
         </p:style>
         <p:txBody>
-          <a:bodyPr rtlCol="0" anchor="ctr" wrap="square" tIns="274320" lIns="320040" rIns="320040" bIns="274320"/>
+          <a:bodyPr rtlCol="0" anchor="ctr" lIns="228600" tIns="164592" rIns="228600" wrap="square"/>
           <a:lstStyle/>
           <a:p>
             <a:pPr algn="ctr">
-              <a:spcBef>
-                <a:spcPts val="600"/>
-              </a:spcBef>
               <a:spcAft>
                 <a:spcPts val="400"/>
               </a:spcAft>
-              <a:defRPr sz="1400" b="1">
-                <a:solidFill>
-                  <a:srgbClr val="3B82F6"/>
-                </a:solidFill>
-                <a:latin typeface="Arial"/>
-              </a:defRPr>
-            </a:pPr>
-            <a:r>
-              <a:t>Bàn giao Kỹ thuật Toàn diện cho Lập trình viên:</a:t>
-            </a:r>
-          </a:p>
-          <a:p>
-            <a:pPr lvl="1">
-              <a:spcAft>
-                <a:spcPts val="400"/>
-              </a:spcAft>
-              <a:defRPr sz="1250">
-                <a:solidFill>
-                  <a:srgbClr val="94A3B8"/>
-                </a:solidFill>
-                <a:latin typeface="Arial"/>
-              </a:defRPr>
-            </a:pPr>
-            <a:r>
-              <a:t>  • Đặc tả 6 mục cho từng màn hình: Layout, Components, States, Interactions, Navigation, UI Constraints.</a:t>
-            </a:r>
-          </a:p>
-          <a:p>
-            <a:pPr lvl="1">
-              <a:spcAft>
-                <a:spcPts val="400"/>
-              </a:spcAft>
-              <a:defRPr sz="1250">
-                <a:solidFill>
-                  <a:srgbClr val="94A3B8"/>
-                </a:solidFill>
-                <a:latin typeface="Arial"/>
-              </a:defRPr>
-            </a:pPr>
-            <a:r>
-              <a:t>  • 2 Bảng Ánh xạ Kỹ thuật (Mapping Tables):</a:t>
-            </a:r>
-          </a:p>
-          <a:p>
-            <a:pPr lvl="1">
-              <a:spcAft>
-                <a:spcPts val="400"/>
-              </a:spcAft>
-              <a:defRPr sz="1250">
-                <a:solidFill>
-                  <a:srgbClr val="94A3B8"/>
-                </a:solidFill>
-                <a:latin typeface="Arial"/>
-              </a:defRPr>
-            </a:pPr>
-            <a:r>
-              <a:t>    - Tokens -&gt; Flutter ThemeData (ColorScheme, TextTheme, EdgeInsets).</a:t>
-            </a:r>
-          </a:p>
-          <a:p>
-            <a:pPr lvl="1">
-              <a:spcAft>
-                <a:spcPts val="400"/>
-              </a:spcAft>
-              <a:defRPr sz="1250">
-                <a:solidFill>
-                  <a:srgbClr val="94A3B8"/>
-                </a:solidFill>
-                <a:latin typeface="Arial"/>
-              </a:defRPr>
-            </a:pPr>
-            <a:r>
-              <a:t>    - Components -&gt; Flutter Widgets (FilledButton, Card, FilterChip, showModalBottomSheet).</a:t>
+              <a:defRPr sz="1300" b="1">
+                <a:solidFill>
+                  <a:srgbClr val="38BDF8"/>
+                </a:solidFill>
+                <a:latin typeface="Arial"/>
+              </a:defRPr>
+            </a:pPr>
+            <a:r>
+              <a:t>📦 Hồ sơ Flutter Handoff Toàn diện</a:t>
             </a:r>
           </a:p>
           <a:p>
             <a:pPr>
-              <a:spcBef>
-                <a:spcPts val="600"/>
-              </a:spcBef>
-              <a:spcAft>
-                <a:spcPts val="400"/>
-              </a:spcAft>
-              <a:defRPr sz="1400" b="1">
-                <a:solidFill>
-                  <a:srgbClr val="3B82F6"/>
-                </a:solidFill>
-                <a:latin typeface="Arial"/>
-              </a:defRPr>
-            </a:pPr>
-            <a:r>
-              <a:t>Tổng kết Đánh giá Lab 2:</a:t>
-            </a:r>
-          </a:p>
-          <a:p>
-            <a:pPr lvl="1">
-              <a:spcAft>
-                <a:spcPts val="400"/>
-              </a:spcAft>
-              <a:defRPr sz="1250">
-                <a:solidFill>
-                  <a:srgbClr val="94A3B8"/>
-                </a:solidFill>
-                <a:latin typeface="Arial"/>
-              </a:defRPr>
-            </a:pPr>
-            <a:r>
-              <a:t>  • Quy trình UX, AI Prompt &amp; Phản biện: Hoàn thành xuất sắc (45/45 điểm).</a:t>
-            </a:r>
-          </a:p>
-          <a:p>
-            <a:pPr lvl="1">
-              <a:spcAft>
-                <a:spcPts val="400"/>
-              </a:spcAft>
-              <a:defRPr sz="1250">
-                <a:solidFill>
-                  <a:srgbClr val="94A3B8"/>
-                </a:solidFill>
-                <a:latin typeface="Arial"/>
-              </a:defRPr>
-            </a:pPr>
-            <a:r>
-              <a:t>  • Sản phẩm Figma, Design System, Prototype: Đạt 100% tiêu chí C1-C6 (55/55 điểm).</a:t>
-            </a:r>
-          </a:p>
-          <a:p>
-            <a:pPr lvl="1">
-              <a:spcAft>
-                <a:spcPts val="400"/>
-              </a:spcAft>
-              <a:defRPr sz="1250">
-                <a:solidFill>
-                  <a:srgbClr val="94A3B8"/>
-                </a:solidFill>
-                <a:latin typeface="Arial"/>
-              </a:defRPr>
-            </a:pPr>
-            <a:r>
-              <a:t>  • TỔNG ĐIỂM DỰ KIẾN: 100 / 100 ĐIỂM.</a:t>
+              <a:spcAft>
+                <a:spcPts val="200"/>
+              </a:spcAft>
+              <a:defRPr sz="1150">
+                <a:solidFill>
+                  <a:srgbClr val="E2E8F0"/>
+                </a:solidFill>
+                <a:latin typeface="Arial"/>
+              </a:defRPr>
+            </a:pPr>
+            <a:r>
+              <a:t>• Đặc tả 6 mục cho từng màn hình: Layout, Components, States, Interactions, Navigation, UI Constraints.</a:t>
+            </a:r>
+          </a:p>
+          <a:p>
+            <a:pPr>
+              <a:spcAft>
+                <a:spcPts val="200"/>
+              </a:spcAft>
+              <a:defRPr sz="1150">
+                <a:solidFill>
+                  <a:srgbClr val="E2E8F0"/>
+                </a:solidFill>
+                <a:latin typeface="Arial"/>
+              </a:defRPr>
+            </a:pPr>
+            <a:r>
+              <a:t>• Bảng 1: Design Tokens -&gt; Flutter ThemeData (ColorScheme, TextTheme, EdgeInsets).</a:t>
+            </a:r>
+          </a:p>
+          <a:p>
+            <a:pPr>
+              <a:spcAft>
+                <a:spcPts val="200"/>
+              </a:spcAft>
+              <a:defRPr sz="1150">
+                <a:solidFill>
+                  <a:srgbClr val="E2E8F0"/>
+                </a:solidFill>
+                <a:latin typeface="Arial"/>
+              </a:defRPr>
+            </a:pPr>
+            <a:r>
+              <a:t>• Bảng 2: Figma Components -&gt; Flutter Widgets (FilledButton, Card, FilterChip).</a:t>
             </a:r>
           </a:p>
         </p:txBody>
@@ -5872,18 +6210,18 @@
         </p:nvSpPr>
         <p:spPr>
           <a:xfrm>
-            <a:off x="7863840" y="1325880"/>
-            <a:ext cx="3779215" cy="5120640"/>
+            <a:off x="731520" y="3182112"/>
+            <a:ext cx="6949440" cy="1554480"/>
           </a:xfrm>
           <a:prstGeom prst="roundRect">
             <a:avLst/>
           </a:prstGeom>
           <a:solidFill>
-            <a:srgbClr val="1E293B"/>
+            <a:srgbClr val="161E31"/>
           </a:solidFill>
           <a:ln>
             <a:solidFill>
-              <a:srgbClr val="334155"/>
+              <a:srgbClr val="2D3748"/>
             </a:solidFill>
           </a:ln>
         </p:spPr>
@@ -5902,6 +6240,186 @@
           </a:fontRef>
         </p:style>
         <p:txBody>
+          <a:bodyPr rtlCol="0" anchor="ctr" lIns="228600" tIns="164592" rIns="228600" wrap="square"/>
+          <a:lstStyle/>
+          <a:p>
+            <a:pPr algn="ctr">
+              <a:spcAft>
+                <a:spcPts val="400"/>
+              </a:spcAft>
+              <a:defRPr sz="1300" b="1">
+                <a:solidFill>
+                  <a:srgbClr val="34D399"/>
+                </a:solidFill>
+                <a:latin typeface="Arial"/>
+              </a:defRPr>
+            </a:pPr>
+            <a:r>
+              <a:t>🏆 Tổng kết Điểm Rubric</a:t>
+            </a:r>
+          </a:p>
+          <a:p>
+            <a:pPr>
+              <a:spcAft>
+                <a:spcPts val="200"/>
+              </a:spcAft>
+              <a:defRPr sz="1150">
+                <a:solidFill>
+                  <a:srgbClr val="E2E8F0"/>
+                </a:solidFill>
+                <a:latin typeface="Arial"/>
+              </a:defRPr>
+            </a:pPr>
+            <a:r>
+              <a:t>• Quy trình UX, AI Prompt &amp; Phản biện: Hoàn thành xuất sắc (45/45 điểm).</a:t>
+            </a:r>
+          </a:p>
+          <a:p>
+            <a:pPr>
+              <a:spcAft>
+                <a:spcPts val="200"/>
+              </a:spcAft>
+              <a:defRPr sz="1150">
+                <a:solidFill>
+                  <a:srgbClr val="E2E8F0"/>
+                </a:solidFill>
+                <a:latin typeface="Arial"/>
+              </a:defRPr>
+            </a:pPr>
+            <a:r>
+              <a:t>• Sản phẩm Figma, Design System, Prototype: Đạt 100% tiêu chí C1-C6 (55/55 điểm).</a:t>
+            </a:r>
+          </a:p>
+          <a:p>
+            <a:pPr>
+              <a:spcAft>
+                <a:spcPts val="200"/>
+              </a:spcAft>
+              <a:defRPr sz="1150">
+                <a:solidFill>
+                  <a:srgbClr val="E2E8F0"/>
+                </a:solidFill>
+                <a:latin typeface="Arial"/>
+              </a:defRPr>
+            </a:pPr>
+            <a:r>
+              <a:t>• Tổng điểm dự kiến: 100 / 100 ĐIỂM.</a:t>
+            </a:r>
+          </a:p>
+        </p:txBody>
+      </p:sp>
+      <p:sp>
+        <p:nvSpPr>
+          <p:cNvPr id="7" name="Rounded Rectangle 6"/>
+          <p:cNvSpPr/>
+          <p:nvPr/>
+        </p:nvSpPr>
+        <p:spPr>
+          <a:xfrm>
+            <a:off x="731520" y="4855464"/>
+            <a:ext cx="6949440" cy="1554480"/>
+          </a:xfrm>
+          <a:prstGeom prst="roundRect">
+            <a:avLst/>
+          </a:prstGeom>
+          <a:solidFill>
+            <a:srgbClr val="161E31"/>
+          </a:solidFill>
+          <a:ln>
+            <a:solidFill>
+              <a:srgbClr val="2D3748"/>
+            </a:solidFill>
+          </a:ln>
+        </p:spPr>
+        <p:style>
+          <a:lnRef idx="1">
+            <a:schemeClr val="accent1"/>
+          </a:lnRef>
+          <a:fillRef idx="3">
+            <a:schemeClr val="accent1"/>
+          </a:fillRef>
+          <a:effectRef idx="2">
+            <a:schemeClr val="accent1"/>
+          </a:effectRef>
+          <a:fontRef idx="minor">
+            <a:schemeClr val="lt1"/>
+          </a:fontRef>
+        </p:style>
+        <p:txBody>
+          <a:bodyPr rtlCol="0" anchor="ctr" lIns="228600" tIns="164592" rIns="228600" wrap="square"/>
+          <a:lstStyle/>
+          <a:p>
+            <a:pPr algn="ctr">
+              <a:spcAft>
+                <a:spcPts val="400"/>
+              </a:spcAft>
+              <a:defRPr sz="1300" b="1">
+                <a:solidFill>
+                  <a:srgbClr val="38BDF8"/>
+                </a:solidFill>
+                <a:latin typeface="Arial"/>
+              </a:defRPr>
+            </a:pPr>
+            <a:r>
+              <a:t>🔗 Liên kết Nộp bài</a:t>
+            </a:r>
+          </a:p>
+          <a:p>
+            <a:pPr>
+              <a:spcAft>
+                <a:spcPts val="200"/>
+              </a:spcAft>
+              <a:defRPr sz="1150">
+                <a:solidFill>
+                  <a:srgbClr val="94A3B8"/>
+                </a:solidFill>
+                <a:latin typeface="Arial"/>
+              </a:defRPr>
+            </a:pPr>
+            <a:r>
+              <a:t>• GitHub: github.com/LuTu-2004/prm323-lab2-group4 | Figma Public Link</a:t>
+            </a:r>
+          </a:p>
+        </p:txBody>
+      </p:sp>
+      <p:sp>
+        <p:nvSpPr>
+          <p:cNvPr id="8" name="Rounded Rectangle 7"/>
+          <p:cNvSpPr/>
+          <p:nvPr/>
+        </p:nvSpPr>
+        <p:spPr>
+          <a:xfrm>
+            <a:off x="7863840" y="1508760"/>
+            <a:ext cx="3596335" cy="4901184"/>
+          </a:xfrm>
+          <a:prstGeom prst="roundRect">
+            <a:avLst/>
+          </a:prstGeom>
+          <a:solidFill>
+            <a:srgbClr val="161E31"/>
+          </a:solidFill>
+          <a:ln>
+            <a:solidFill>
+              <a:srgbClr val="2D3748"/>
+            </a:solidFill>
+          </a:ln>
+        </p:spPr>
+        <p:style>
+          <a:lnRef idx="1">
+            <a:schemeClr val="accent1"/>
+          </a:lnRef>
+          <a:fillRef idx="3">
+            <a:schemeClr val="accent1"/>
+          </a:fillRef>
+          <a:effectRef idx="2">
+            <a:schemeClr val="accent1"/>
+          </a:effectRef>
+          <a:fontRef idx="minor">
+            <a:schemeClr val="lt1"/>
+          </a:fontRef>
+        </p:style>
+        <p:txBody>
           <a:bodyPr rtlCol="0" anchor="ctr"/>
           <a:lstStyle/>
           <a:p>
@@ -5911,7 +6429,7 @@
       </p:sp>
       <p:pic>
         <p:nvPicPr>
-          <p:cNvPr id="7" name="Picture 6" descr="screen_04_application_submitted.png"/>
+          <p:cNvPr id="9" name="Picture 8" descr="screen_04_application_submitted.png"/>
           <p:cNvPicPr>
             <a:picLocks noChangeAspect="1"/>
           </p:cNvPicPr>
@@ -5925,8 +6443,8 @@
         </p:blipFill>
         <p:spPr>
           <a:xfrm>
-            <a:off x="8092440" y="1508760"/>
-            <a:ext cx="3322015" cy="13998944"/>
+            <a:off x="8092440" y="1691640"/>
+            <a:ext cx="3139135" cy="13228289"/>
           </a:xfrm>
           <a:prstGeom prst="rect">
             <a:avLst/>
@@ -5966,12 +6484,10 @@
             <a:avLst/>
           </a:prstGeom>
           <a:solidFill>
-            <a:srgbClr val="0F172A"/>
+            <a:srgbClr val="0B0F19"/>
           </a:solidFill>
           <a:ln>
-            <a:solidFill>
-              <a:srgbClr val="0F172A"/>
-            </a:solidFill>
+            <a:noFill/>
           </a:ln>
         </p:spPr>
         <p:style>
@@ -5998,24 +6514,24 @@
       </p:sp>
       <p:sp>
         <p:nvSpPr>
-          <p:cNvPr id="3" name="Rectangle 2"/>
+          <p:cNvPr id="3" name="Rounded Rectangle 2"/>
           <p:cNvSpPr/>
           <p:nvPr/>
         </p:nvSpPr>
         <p:spPr>
           <a:xfrm>
-            <a:off x="548640" y="365760"/>
-            <a:ext cx="11094415" cy="777240"/>
-          </a:xfrm>
-          <a:prstGeom prst="rect">
+            <a:off x="731520" y="365760"/>
+            <a:ext cx="10728655" cy="1005840"/>
+          </a:xfrm>
+          <a:prstGeom prst="roundRect">
             <a:avLst/>
           </a:prstGeom>
           <a:solidFill>
-            <a:srgbClr val="1E293B"/>
+            <a:srgbClr val="161E31"/>
           </a:solidFill>
           <a:ln>
             <a:solidFill>
-              <a:srgbClr val="334155"/>
+              <a:srgbClr val="2D3748"/>
             </a:solidFill>
           </a:ln>
         </p:spPr>
@@ -6034,19 +6550,35 @@
           </a:fontRef>
         </p:style>
         <p:txBody>
-          <a:bodyPr rtlCol="0" anchor="ctr" wrap="square"/>
+          <a:bodyPr rtlCol="0" anchor="ctr" lIns="274320" tIns="109728" rIns="274320" bIns="109728" wrap="square"/>
           <a:lstStyle/>
           <a:p>
             <a:pPr algn="ctr">
+              <a:defRPr sz="1100" b="1">
+                <a:solidFill>
+                  <a:srgbClr val="38BDF8"/>
+                </a:solidFill>
+                <a:latin typeface="Arial"/>
+              </a:defRPr>
+            </a:pPr>
+            <a:r>
+              <a:t>02 / 12  ·  PROBLEM &amp; PERSONA</a:t>
+            </a:r>
+          </a:p>
+          <a:p>
+            <a:pPr>
+              <a:spcBef>
+                <a:spcPts val="200"/>
+              </a:spcBef>
               <a:defRPr sz="1700" b="1">
                 <a:solidFill>
-                  <a:srgbClr val="3B82F6"/>
-                </a:solidFill>
-                <a:latin typeface="Arial"/>
-              </a:defRPr>
-            </a:pPr>
-            <a:r>
-              <a:t>SLIDE 02 | PROBLEM &amp; PRIMARY PERSONA (LÊ QUỐC HUY)</a:t>
+                  <a:srgbClr val="FFFFFF"/>
+                </a:solidFill>
+                <a:latin typeface="Arial"/>
+              </a:defRPr>
+            </a:pPr>
+            <a:r>
+              <a:t>Primary Persona: Lê Quốc Huy (Tech-Savvy Active Seeker)</a:t>
             </a:r>
           </a:p>
         </p:txBody>
@@ -6059,8 +6591,8 @@
         </p:nvSpPr>
         <p:spPr>
           <a:xfrm>
-            <a:off x="8412480" y="438912"/>
-            <a:ext cx="3108960" cy="594360"/>
+            <a:off x="7772400" y="438912"/>
+            <a:ext cx="3474720" cy="457200"/>
           </a:xfrm>
           <a:prstGeom prst="rect">
             <a:avLst/>
@@ -6074,9 +6606,9 @@
           <a:lstStyle/>
           <a:p>
             <a:pPr algn="r">
-              <a:defRPr sz="1300" b="1">
-                <a:solidFill>
-                  <a:srgbClr val="10B981"/>
+              <a:defRPr sz="1200" b="1">
+                <a:solidFill>
+                  <a:srgbClr val="34D399"/>
                 </a:solidFill>
                 <a:latin typeface="Arial"/>
               </a:defRPr>
@@ -6095,18 +6627,18 @@
         </p:nvSpPr>
         <p:spPr>
           <a:xfrm>
-            <a:off x="548640" y="1325880"/>
-            <a:ext cx="7132320" cy="5120640"/>
+            <a:off x="731520" y="1508760"/>
+            <a:ext cx="6949440" cy="1554480"/>
           </a:xfrm>
           <a:prstGeom prst="roundRect">
             <a:avLst/>
           </a:prstGeom>
           <a:solidFill>
-            <a:srgbClr val="1E293B"/>
+            <a:srgbClr val="161E31"/>
           </a:solidFill>
           <a:ln>
             <a:solidFill>
-              <a:srgbClr val="334155"/>
+              <a:srgbClr val="2D3748"/>
             </a:solidFill>
           </a:ln>
         </p:spPr>
@@ -6125,140 +6657,86 @@
           </a:fontRef>
         </p:style>
         <p:txBody>
-          <a:bodyPr rtlCol="0" anchor="ctr" wrap="square" tIns="274320" lIns="320040" rIns="320040" bIns="274320"/>
+          <a:bodyPr rtlCol="0" anchor="ctr" lIns="228600" tIns="164592" rIns="228600" wrap="square"/>
           <a:lstStyle/>
           <a:p>
             <a:pPr algn="ctr">
               <a:spcAft>
-                <a:spcPts val="600"/>
-              </a:spcAft>
-              <a:defRPr sz="1300">
-                <a:solidFill>
-                  <a:srgbClr val="F8FAFC"/>
-                </a:solidFill>
-                <a:latin typeface="Arial"/>
-              </a:defRPr>
-            </a:pPr>
-            <a:r>
-              <a:t>Họ và tên: Lê Quốc Huy · 21 tuổi · Sinh viên năm 3 Kỹ thuật Phần mềm (SE).</a:t>
+                <a:spcPts val="400"/>
+              </a:spcAft>
+              <a:defRPr sz="1300" b="1">
+                <a:solidFill>
+                  <a:srgbClr val="38BDF8"/>
+                </a:solidFill>
+                <a:latin typeface="Arial"/>
+              </a:defRPr>
+            </a:pPr>
+            <a:r>
+              <a:t>👤 Chân dung 12 trường cốt lõi</a:t>
             </a:r>
           </a:p>
           <a:p>
             <a:pPr>
               <a:spcAft>
-                <a:spcPts val="600"/>
-              </a:spcAft>
-              <a:defRPr sz="1300">
-                <a:solidFill>
-                  <a:srgbClr val="F8FAFC"/>
-                </a:solidFill>
-                <a:latin typeface="Arial"/>
-              </a:defRPr>
-            </a:pPr>
-            <a:r>
-              <a:t>Vai trò: Technical Lead / Flutter Developer (Tech-Savvy Active Seeker).</a:t>
+                <a:spcPts val="200"/>
+              </a:spcAft>
+              <a:defRPr sz="1150">
+                <a:solidFill>
+                  <a:srgbClr val="E2E8F0"/>
+                </a:solidFill>
+                <a:latin typeface="Arial"/>
+              </a:defRPr>
+            </a:pPr>
+            <a:r>
+              <a:t>• Lê Quốc Huy · 21 tuổi · SV năm 3 Kỹ thuật Phần mềm (SE).</a:t>
             </a:r>
           </a:p>
           <a:p>
             <a:pPr>
               <a:spcAft>
-                <a:spcPts val="600"/>
-              </a:spcAft>
-              <a:defRPr sz="1300">
-                <a:solidFill>
-                  <a:srgbClr val="F8FAFC"/>
-                </a:solidFill>
-                <a:latin typeface="Arial"/>
-              </a:defRPr>
-            </a:pPr>
-            <a:r>
-              <a:t>Bối cảnh: Dùng Android 360x800 dp, thao tác 1 tay trên xe buýt / sảnh trường, deadline nộp nhóm còn đúng 5 ngày.</a:t>
+                <a:spcPts val="200"/>
+              </a:spcAft>
+              <a:defRPr sz="1150">
+                <a:solidFill>
+                  <a:srgbClr val="E2E8F0"/>
+                </a:solidFill>
+                <a:latin typeface="Arial"/>
+              </a:defRPr>
+            </a:pPr>
+            <a:r>
+              <a:t>• Mục tiêu: Technical Lead / Mobile Developer.</a:t>
             </a:r>
           </a:p>
           <a:p>
             <a:pPr>
               <a:spcAft>
-                <a:spcPts val="600"/>
-              </a:spcAft>
-              <a:defRPr sz="1300">
-                <a:solidFill>
-                  <a:srgbClr val="F8FAFC"/>
-                </a:solidFill>
-                <a:latin typeface="Arial"/>
-              </a:defRPr>
-            </a:pPr>
-            <a:r>
-              <a:t>Pain Points: Bài đăng trôi nhanh, kỹ năng ứng viên mập mờ, nhắn tin xin vào nhóm thì đối phương đã đủ người.</a:t>
+                <a:spcPts val="200"/>
+              </a:spcAft>
+              <a:defRPr sz="1150">
+                <a:solidFill>
+                  <a:srgbClr val="E2E8F0"/>
+                </a:solidFill>
+                <a:latin typeface="Arial"/>
+              </a:defRPr>
+            </a:pPr>
+            <a:r>
+              <a:t>• Bối cảnh: Dùng Android 360x800 dp, dùng 1 tay trên xe buýt / sảnh trường, hạn nộp nhóm còn đúng 5 ngày.</a:t>
             </a:r>
           </a:p>
           <a:p>
             <a:pPr>
-              <a:spcBef>
-                <a:spcPts val="600"/>
-              </a:spcBef>
-              <a:spcAft>
-                <a:spcPts val="400"/>
-              </a:spcAft>
-              <a:defRPr sz="1400" b="1">
-                <a:solidFill>
-                  <a:srgbClr val="3B82F6"/>
-                </a:solidFill>
-                <a:latin typeface="Arial"/>
-              </a:defRPr>
-            </a:pPr>
-            <a:r>
-              <a:t>Problem Statement:</a:t>
-            </a:r>
-          </a:p>
-          <a:p>
-            <a:pPr lvl="1">
-              <a:spcAft>
-                <a:spcPts val="400"/>
-              </a:spcAft>
-              <a:defRPr sz="1250">
-                <a:solidFill>
-                  <a:srgbClr val="94A3B8"/>
-                </a:solidFill>
-                <a:latin typeface="Arial"/>
-              </a:defRPr>
-            </a:pPr>
-            <a:r>
-              <a:t>  "Sinh viên kỹ thuật phần mềm gặp khó khăn lớn trong việc tìm kiếm và kết nối với đồng đội khối ngành Kinh tế/Marketing phù hợp về kỹ năng và cam kết trước hạn chót nộp danh sách của nhà trường."</a:t>
-            </a:r>
-          </a:p>
-          <a:p>
-            <a:pPr>
-              <a:spcBef>
-                <a:spcPts val="600"/>
-              </a:spcBef>
-              <a:spcAft>
-                <a:spcPts val="400"/>
-              </a:spcAft>
-              <a:defRPr sz="1400" b="1">
-                <a:solidFill>
-                  <a:srgbClr val="3B82F6"/>
-                </a:solidFill>
-                <a:latin typeface="Arial"/>
-              </a:defRPr>
-            </a:pPr>
-            <a:r>
-              <a:t>Chỉ số thành công đo lường được (Measurable Metric):</a:t>
-            </a:r>
-          </a:p>
-          <a:p>
-            <a:pPr lvl="1">
-              <a:spcAft>
-                <a:spcPts val="400"/>
-              </a:spcAft>
-              <a:defRPr sz="1250">
-                <a:solidFill>
-                  <a:srgbClr val="94A3B8"/>
-                </a:solidFill>
-                <a:latin typeface="Arial"/>
-              </a:defRPr>
-            </a:pPr>
-            <a:r>
-              <a:t>  "Sinh viên tìm được nhóm EXE phù hợp và gửi thành công đơn ứng tuyển trong thời gian dưới 60 giây."</a:t>
+              <a:spcAft>
+                <a:spcPts val="200"/>
+              </a:spcAft>
+              <a:defRPr sz="1150">
+                <a:solidFill>
+                  <a:srgbClr val="E2E8F0"/>
+                </a:solidFill>
+                <a:latin typeface="Arial"/>
+              </a:defRPr>
+            </a:pPr>
+            <a:r>
+              <a:t>• Trở ngại: Không quen bạn Kinh tế, sợ ghép bừa gặp free-rider.</a:t>
             </a:r>
           </a:p>
         </p:txBody>
@@ -6271,18 +6749,18 @@
         </p:nvSpPr>
         <p:spPr>
           <a:xfrm>
-            <a:off x="7863840" y="1325880"/>
-            <a:ext cx="3779215" cy="5120640"/>
+            <a:off x="731520" y="3182112"/>
+            <a:ext cx="6949440" cy="1554480"/>
           </a:xfrm>
           <a:prstGeom prst="roundRect">
             <a:avLst/>
           </a:prstGeom>
           <a:solidFill>
-            <a:srgbClr val="1E293B"/>
+            <a:srgbClr val="161E31"/>
           </a:solidFill>
           <a:ln>
             <a:solidFill>
-              <a:srgbClr val="334155"/>
+              <a:srgbClr val="2D3748"/>
             </a:solidFill>
           </a:ln>
         </p:spPr>
@@ -6301,6 +6779,154 @@
           </a:fontRef>
         </p:style>
         <p:txBody>
+          <a:bodyPr rtlCol="0" anchor="ctr" lIns="228600" tIns="164592" rIns="228600" wrap="square"/>
+          <a:lstStyle/>
+          <a:p>
+            <a:pPr algn="ctr">
+              <a:spcAft>
+                <a:spcPts val="400"/>
+              </a:spcAft>
+              <a:defRPr sz="1300" b="1">
+                <a:solidFill>
+                  <a:srgbClr val="34D399"/>
+                </a:solidFill>
+                <a:latin typeface="Arial"/>
+              </a:defRPr>
+            </a:pPr>
+            <a:r>
+              <a:t>📢 Problem Statement</a:t>
+            </a:r>
+          </a:p>
+          <a:p>
+            <a:pPr>
+              <a:spcAft>
+                <a:spcPts val="200"/>
+              </a:spcAft>
+              <a:defRPr sz="1150">
+                <a:solidFill>
+                  <a:srgbClr val="E2E8F0"/>
+                </a:solidFill>
+                <a:latin typeface="Arial"/>
+              </a:defRPr>
+            </a:pPr>
+            <a:r>
+              <a:t>• "Sinh viên kỹ thuật phần mềm gặp khó khăn lớn khi tìm đồng đội khối ngành Kinh tế/Marketing phù hợp về kỹ năng và mức cam kết trước deadline nộp danh sách."</a:t>
+            </a:r>
+          </a:p>
+        </p:txBody>
+      </p:sp>
+      <p:sp>
+        <p:nvSpPr>
+          <p:cNvPr id="7" name="Rounded Rectangle 6"/>
+          <p:cNvSpPr/>
+          <p:nvPr/>
+        </p:nvSpPr>
+        <p:spPr>
+          <a:xfrm>
+            <a:off x="731520" y="4855464"/>
+            <a:ext cx="6949440" cy="1554480"/>
+          </a:xfrm>
+          <a:prstGeom prst="roundRect">
+            <a:avLst/>
+          </a:prstGeom>
+          <a:solidFill>
+            <a:srgbClr val="161E31"/>
+          </a:solidFill>
+          <a:ln>
+            <a:solidFill>
+              <a:srgbClr val="2D3748"/>
+            </a:solidFill>
+          </a:ln>
+        </p:spPr>
+        <p:style>
+          <a:lnRef idx="1">
+            <a:schemeClr val="accent1"/>
+          </a:lnRef>
+          <a:fillRef idx="3">
+            <a:schemeClr val="accent1"/>
+          </a:fillRef>
+          <a:effectRef idx="2">
+            <a:schemeClr val="accent1"/>
+          </a:effectRef>
+          <a:fontRef idx="minor">
+            <a:schemeClr val="lt1"/>
+          </a:fontRef>
+        </p:style>
+        <p:txBody>
+          <a:bodyPr rtlCol="0" anchor="ctr" lIns="228600" tIns="164592" rIns="228600" wrap="square"/>
+          <a:lstStyle/>
+          <a:p>
+            <a:pPr algn="ctr">
+              <a:spcAft>
+                <a:spcPts val="400"/>
+              </a:spcAft>
+              <a:defRPr sz="1300" b="1">
+                <a:solidFill>
+                  <a:srgbClr val="38BDF8"/>
+                </a:solidFill>
+                <a:latin typeface="Arial"/>
+              </a:defRPr>
+            </a:pPr>
+            <a:r>
+              <a:t>⏱️ Measurable Success Metric</a:t>
+            </a:r>
+          </a:p>
+          <a:p>
+            <a:pPr>
+              <a:spcAft>
+                <a:spcPts val="200"/>
+              </a:spcAft>
+              <a:defRPr sz="1150">
+                <a:solidFill>
+                  <a:srgbClr val="94A3B8"/>
+                </a:solidFill>
+                <a:latin typeface="Arial"/>
+              </a:defRPr>
+            </a:pPr>
+            <a:r>
+              <a:t>• "Sinh viên tìm được nhóm EXE phù hợp theo bộ lọc chuyên môn và gửi thành công đơn ứng tuyển trong thời gian dưới 60 giây."</a:t>
+            </a:r>
+          </a:p>
+        </p:txBody>
+      </p:sp>
+      <p:sp>
+        <p:nvSpPr>
+          <p:cNvPr id="8" name="Rounded Rectangle 7"/>
+          <p:cNvSpPr/>
+          <p:nvPr/>
+        </p:nvSpPr>
+        <p:spPr>
+          <a:xfrm>
+            <a:off x="7863840" y="1508760"/>
+            <a:ext cx="3596335" cy="4901184"/>
+          </a:xfrm>
+          <a:prstGeom prst="roundRect">
+            <a:avLst/>
+          </a:prstGeom>
+          <a:solidFill>
+            <a:srgbClr val="161E31"/>
+          </a:solidFill>
+          <a:ln>
+            <a:solidFill>
+              <a:srgbClr val="2D3748"/>
+            </a:solidFill>
+          </a:ln>
+        </p:spPr>
+        <p:style>
+          <a:lnRef idx="1">
+            <a:schemeClr val="accent1"/>
+          </a:lnRef>
+          <a:fillRef idx="3">
+            <a:schemeClr val="accent1"/>
+          </a:fillRef>
+          <a:effectRef idx="2">
+            <a:schemeClr val="accent1"/>
+          </a:effectRef>
+          <a:fontRef idx="minor">
+            <a:schemeClr val="lt1"/>
+          </a:fontRef>
+        </p:style>
+        <p:txBody>
           <a:bodyPr rtlCol="0" anchor="ctr"/>
           <a:lstStyle/>
           <a:p>
@@ -6310,7 +6936,7 @@
       </p:sp>
       <p:pic>
         <p:nvPicPr>
-          <p:cNvPr id="7" name="Picture 6" descr="screen_02_project_detail.png"/>
+          <p:cNvPr id="9" name="Picture 8" descr="screen_02_project_detail.png"/>
           <p:cNvPicPr>
             <a:picLocks noChangeAspect="1"/>
           </p:cNvPicPr>
@@ -6324,8 +6950,8 @@
         </p:blipFill>
         <p:spPr>
           <a:xfrm>
-            <a:off x="8092440" y="1508760"/>
-            <a:ext cx="3322015" cy="13606973"/>
+            <a:off x="8092440" y="1691640"/>
+            <a:ext cx="3139135" cy="12857897"/>
           </a:xfrm>
           <a:prstGeom prst="rect">
             <a:avLst/>
@@ -6365,12 +6991,10 @@
             <a:avLst/>
           </a:prstGeom>
           <a:solidFill>
-            <a:srgbClr val="0F172A"/>
+            <a:srgbClr val="0B0F19"/>
           </a:solidFill>
           <a:ln>
-            <a:solidFill>
-              <a:srgbClr val="0F172A"/>
-            </a:solidFill>
+            <a:noFill/>
           </a:ln>
         </p:spPr>
         <p:style>
@@ -6397,24 +7021,24 @@
       </p:sp>
       <p:sp>
         <p:nvSpPr>
-          <p:cNvPr id="3" name="Rectangle 2"/>
+          <p:cNvPr id="3" name="Rounded Rectangle 2"/>
           <p:cNvSpPr/>
           <p:nvPr/>
         </p:nvSpPr>
         <p:spPr>
           <a:xfrm>
-            <a:off x="548640" y="365760"/>
-            <a:ext cx="11094415" cy="777240"/>
-          </a:xfrm>
-          <a:prstGeom prst="rect">
+            <a:off x="731520" y="365760"/>
+            <a:ext cx="10728655" cy="1005840"/>
+          </a:xfrm>
+          <a:prstGeom prst="roundRect">
             <a:avLst/>
           </a:prstGeom>
           <a:solidFill>
-            <a:srgbClr val="1E293B"/>
+            <a:srgbClr val="161E31"/>
           </a:solidFill>
           <a:ln>
             <a:solidFill>
-              <a:srgbClr val="334155"/>
+              <a:srgbClr val="2D3748"/>
             </a:solidFill>
           </a:ln>
         </p:spPr>
@@ -6433,19 +7057,35 @@
           </a:fontRef>
         </p:style>
         <p:txBody>
-          <a:bodyPr rtlCol="0" anchor="ctr" wrap="square"/>
+          <a:bodyPr rtlCol="0" anchor="ctr" lIns="274320" tIns="109728" rIns="274320" bIns="109728" wrap="square"/>
           <a:lstStyle/>
           <a:p>
             <a:pPr algn="ctr">
+              <a:defRPr sz="1100" b="1">
+                <a:solidFill>
+                  <a:srgbClr val="38BDF8"/>
+                </a:solidFill>
+                <a:latin typeface="Arial"/>
+              </a:defRPr>
+            </a:pPr>
+            <a:r>
+              <a:t>03 / 12  ·  INFORMATION ARCHITECTURE</a:t>
+            </a:r>
+          </a:p>
+          <a:p>
+            <a:pPr>
+              <a:spcBef>
+                <a:spcPts val="200"/>
+              </a:spcBef>
               <a:defRPr sz="1700" b="1">
                 <a:solidFill>
-                  <a:srgbClr val="3B82F6"/>
-                </a:solidFill>
-                <a:latin typeface="Arial"/>
-              </a:defRPr>
-            </a:pPr>
-            <a:r>
-              <a:t>SLIDE 03 | INFORMATION ARCHITECTURE (SITEMAP 9 MÀN HÌNH)</a:t>
+                  <a:srgbClr val="FFFFFF"/>
+                </a:solidFill>
+                <a:latin typeface="Arial"/>
+              </a:defRPr>
+            </a:pPr>
+            <a:r>
+              <a:t>Kiến trúc Thông tin &amp; Sitemap 9 Màn hình</a:t>
             </a:r>
           </a:p>
         </p:txBody>
@@ -6458,8 +7098,8 @@
         </p:nvSpPr>
         <p:spPr>
           <a:xfrm>
-            <a:off x="8412480" y="438912"/>
-            <a:ext cx="3108960" cy="594360"/>
+            <a:off x="7772400" y="438912"/>
+            <a:ext cx="3474720" cy="457200"/>
           </a:xfrm>
           <a:prstGeom prst="rect">
             <a:avLst/>
@@ -6473,9 +7113,9 @@
           <a:lstStyle/>
           <a:p>
             <a:pPr algn="r">
-              <a:defRPr sz="1300" b="1">
-                <a:solidFill>
-                  <a:srgbClr val="10B981"/>
+              <a:defRPr sz="1200" b="1">
+                <a:solidFill>
+                  <a:srgbClr val="34D399"/>
                 </a:solidFill>
                 <a:latin typeface="Arial"/>
               </a:defRPr>
@@ -6494,18 +7134,18 @@
         </p:nvSpPr>
         <p:spPr>
           <a:xfrm>
-            <a:off x="548640" y="1325880"/>
-            <a:ext cx="7132320" cy="5120640"/>
+            <a:off x="731520" y="1508760"/>
+            <a:ext cx="6949440" cy="1554480"/>
           </a:xfrm>
           <a:prstGeom prst="roundRect">
             <a:avLst/>
           </a:prstGeom>
           <a:solidFill>
-            <a:srgbClr val="1E293B"/>
+            <a:srgbClr val="161E31"/>
           </a:solidFill>
           <a:ln>
             <a:solidFill>
-              <a:srgbClr val="334155"/>
+              <a:srgbClr val="2D3748"/>
             </a:solidFill>
           </a:ln>
         </p:spPr>
@@ -6524,121 +7164,70 @@
           </a:fontRef>
         </p:style>
         <p:txBody>
-          <a:bodyPr rtlCol="0" anchor="ctr" wrap="square" tIns="274320" lIns="320040" rIns="320040" bIns="274320"/>
+          <a:bodyPr rtlCol="0" anchor="ctr" lIns="228600" tIns="164592" rIns="228600" wrap="square"/>
           <a:lstStyle/>
           <a:p>
             <a:pPr algn="ctr">
               <a:spcAft>
-                <a:spcPts val="600"/>
-              </a:spcAft>
-              <a:defRPr sz="1300">
-                <a:solidFill>
-                  <a:srgbClr val="F8FAFC"/>
-                </a:solidFill>
-                <a:latin typeface="Arial"/>
-              </a:defRPr>
-            </a:pPr>
-            <a:r>
-              <a:t>Mô hình điều hướng: Bottom Navigation Bar 4 tab cố định (Khám phá · Đơn của tôi · Tin nhắn · Cá nhân).</a:t>
+                <a:spcPts val="400"/>
+              </a:spcAft>
+              <a:defRPr sz="1300" b="1">
+                <a:solidFill>
+                  <a:srgbClr val="38BDF8"/>
+                </a:solidFill>
+                <a:latin typeface="Arial"/>
+              </a:defRPr>
+            </a:pPr>
+            <a:r>
+              <a:t>🗺️ Cấu trúc Điều hướng Phẳng</a:t>
             </a:r>
           </a:p>
           <a:p>
             <a:pPr>
-              <a:spcBef>
-                <a:spcPts val="600"/>
-              </a:spcBef>
-              <a:spcAft>
-                <a:spcPts val="400"/>
-              </a:spcAft>
-              <a:defRPr sz="1400" b="1">
-                <a:solidFill>
-                  <a:srgbClr val="3B82F6"/>
-                </a:solidFill>
-                <a:latin typeface="Arial"/>
-              </a:defRPr>
-            </a:pPr>
-            <a:r>
-              <a:t>Phân cấp 3 tầng màn hình rõ ràng:</a:t>
-            </a:r>
-          </a:p>
-          <a:p>
-            <a:pPr lvl="1">
-              <a:spcAft>
-                <a:spcPts val="400"/>
-              </a:spcAft>
-              <a:defRPr sz="1250">
-                <a:solidFill>
-                  <a:srgbClr val="94A3B8"/>
-                </a:solidFill>
-                <a:latin typeface="Arial"/>
-              </a:defRPr>
-            </a:pPr>
-            <a:r>
-              <a:t>  • Top-Level (Cấp 1): Screen 01 (Khám phá), Screen 05 (Theo dõi đơn), Screen 08 (Empty State).</a:t>
-            </a:r>
-          </a:p>
-          <a:p>
-            <a:pPr lvl="1">
-              <a:spcAft>
-                <a:spcPts val="400"/>
-              </a:spcAft>
-              <a:defRPr sz="1250">
-                <a:solidFill>
-                  <a:srgbClr val="94A3B8"/>
-                </a:solidFill>
-                <a:latin typeface="Arial"/>
-              </a:defRPr>
-            </a:pPr>
-            <a:r>
-              <a:t>  • Child Details (Cấp 2): Screen 02 (Chi tiết dự án), Screen 03 (Apply Sheet), Screen 04 (Xác nhận gửi).</a:t>
-            </a:r>
-          </a:p>
-          <a:p>
-            <a:pPr lvl="1">
-              <a:spcAft>
-                <a:spcPts val="400"/>
-              </a:spcAft>
-              <a:defRPr sz="1250">
-                <a:solidFill>
-                  <a:srgbClr val="94A3B8"/>
-                </a:solidFill>
-                <a:latin typeface="Arial"/>
-              </a:defRPr>
-            </a:pPr>
-            <a:r>
-              <a:t>  • Interactive Modals (Cấp 3): Screen 06 (Lên lịch phỏng vấn), Screen 07 (Lịch hẹn hoàn tất).</a:t>
+              <a:spcAft>
+                <a:spcPts val="200"/>
+              </a:spcAft>
+              <a:defRPr sz="1150">
+                <a:solidFill>
+                  <a:srgbClr val="E2E8F0"/>
+                </a:solidFill>
+                <a:latin typeface="Arial"/>
+              </a:defRPr>
+            </a:pPr>
+            <a:r>
+              <a:t>• Bottom Navigation Bar 4 tab cố định: Khám phá · Đơn của tôi · Tin nhắn · Cá nhân.</a:t>
             </a:r>
           </a:p>
           <a:p>
             <a:pPr>
               <a:spcAft>
-                <a:spcPts val="600"/>
-              </a:spcAft>
-              <a:defRPr sz="1300">
-                <a:solidFill>
-                  <a:srgbClr val="F8FAFC"/>
-                </a:solidFill>
-                <a:latin typeface="Arial"/>
-              </a:defRPr>
-            </a:pPr>
-            <a:r>
-              <a:t>Quy tắc 3 lần chạm (Rule of 3 taps): Mọi tác vụ cốt lõi đều hoàn tất trong tối đa 3 chạm.</a:t>
+                <a:spcPts val="200"/>
+              </a:spcAft>
+              <a:defRPr sz="1150">
+                <a:solidFill>
+                  <a:srgbClr val="E2E8F0"/>
+                </a:solidFill>
+                <a:latin typeface="Arial"/>
+              </a:defRPr>
+            </a:pPr>
+            <a:r>
+              <a:t>• Thiết kế chuẩn công thái học trong vùng ngón tay cái (Thumb Zone).</a:t>
             </a:r>
           </a:p>
           <a:p>
             <a:pPr>
               <a:spcAft>
-                <a:spcPts val="600"/>
-              </a:spcAft>
-              <a:defRPr sz="1300">
-                <a:solidFill>
-                  <a:srgbClr val="F8FAFC"/>
-                </a:solidFill>
-                <a:latin typeface="Arial"/>
-              </a:defRPr>
-            </a:pPr>
-            <a:r>
-              <a:t>Công thái học: Toàn bộ nút chính nằm trong vùng ngón tay cái (Thumb Zone) khi cầm 1 tay.</a:t>
+                <a:spcPts val="200"/>
+              </a:spcAft>
+              <a:defRPr sz="1150">
+                <a:solidFill>
+                  <a:srgbClr val="E2E8F0"/>
+                </a:solidFill>
+                <a:latin typeface="Arial"/>
+              </a:defRPr>
+            </a:pPr>
+            <a:r>
+              <a:t>• Quy tắc 3 lần chạm (Rule of 3 taps) hoàn thành mọi tác vụ chính.</a:t>
             </a:r>
           </a:p>
         </p:txBody>
@@ -6651,18 +7240,18 @@
         </p:nvSpPr>
         <p:spPr>
           <a:xfrm>
-            <a:off x="7863840" y="1325880"/>
-            <a:ext cx="3779215" cy="5120640"/>
+            <a:off x="731520" y="3182112"/>
+            <a:ext cx="6949440" cy="1554480"/>
           </a:xfrm>
           <a:prstGeom prst="roundRect">
             <a:avLst/>
           </a:prstGeom>
           <a:solidFill>
-            <a:srgbClr val="1E293B"/>
+            <a:srgbClr val="161E31"/>
           </a:solidFill>
           <a:ln>
             <a:solidFill>
-              <a:srgbClr val="334155"/>
+              <a:srgbClr val="2D3748"/>
             </a:solidFill>
           </a:ln>
         </p:spPr>
@@ -6681,6 +7270,186 @@
           </a:fontRef>
         </p:style>
         <p:txBody>
+          <a:bodyPr rtlCol="0" anchor="ctr" lIns="228600" tIns="164592" rIns="228600" wrap="square"/>
+          <a:lstStyle/>
+          <a:p>
+            <a:pPr algn="ctr">
+              <a:spcAft>
+                <a:spcPts val="400"/>
+              </a:spcAft>
+              <a:defRPr sz="1300" b="1">
+                <a:solidFill>
+                  <a:srgbClr val="34D399"/>
+                </a:solidFill>
+                <a:latin typeface="Arial"/>
+              </a:defRPr>
+            </a:pPr>
+            <a:r>
+              <a:t>📱 Phân cấp 3 Tầng Màn hình</a:t>
+            </a:r>
+          </a:p>
+          <a:p>
+            <a:pPr>
+              <a:spcAft>
+                <a:spcPts val="200"/>
+              </a:spcAft>
+              <a:defRPr sz="1150">
+                <a:solidFill>
+                  <a:srgbClr val="E2E8F0"/>
+                </a:solidFill>
+                <a:latin typeface="Arial"/>
+              </a:defRPr>
+            </a:pPr>
+            <a:r>
+              <a:t>• Cấp 1 (Top-Level): Screen 01 (Khám phá), Screen 05 (Theo dõi đơn), Screen 08 (Empty State).</a:t>
+            </a:r>
+          </a:p>
+          <a:p>
+            <a:pPr>
+              <a:spcAft>
+                <a:spcPts val="200"/>
+              </a:spcAft>
+              <a:defRPr sz="1150">
+                <a:solidFill>
+                  <a:srgbClr val="E2E8F0"/>
+                </a:solidFill>
+                <a:latin typeface="Arial"/>
+              </a:defRPr>
+            </a:pPr>
+            <a:r>
+              <a:t>• Cấp 2 (Child Details): Screen 02 (Chi tiết), Screen 03 (Apply Sheet), Screen 04 (Xác nhận gửi).</a:t>
+            </a:r>
+          </a:p>
+          <a:p>
+            <a:pPr>
+              <a:spcAft>
+                <a:spcPts val="200"/>
+              </a:spcAft>
+              <a:defRPr sz="1150">
+                <a:solidFill>
+                  <a:srgbClr val="E2E8F0"/>
+                </a:solidFill>
+                <a:latin typeface="Arial"/>
+              </a:defRPr>
+            </a:pPr>
+            <a:r>
+              <a:t>• Cấp 3 (Modals): Screen 06 (Hẹn phỏng vấn), Screen 07 (Lịch hẹn hoàn tất).</a:t>
+            </a:r>
+          </a:p>
+        </p:txBody>
+      </p:sp>
+      <p:sp>
+        <p:nvSpPr>
+          <p:cNvPr id="7" name="Rounded Rectangle 6"/>
+          <p:cNvSpPr/>
+          <p:nvPr/>
+        </p:nvSpPr>
+        <p:spPr>
+          <a:xfrm>
+            <a:off x="731520" y="4855464"/>
+            <a:ext cx="6949440" cy="1554480"/>
+          </a:xfrm>
+          <a:prstGeom prst="roundRect">
+            <a:avLst/>
+          </a:prstGeom>
+          <a:solidFill>
+            <a:srgbClr val="161E31"/>
+          </a:solidFill>
+          <a:ln>
+            <a:solidFill>
+              <a:srgbClr val="2D3748"/>
+            </a:solidFill>
+          </a:ln>
+        </p:spPr>
+        <p:style>
+          <a:lnRef idx="1">
+            <a:schemeClr val="accent1"/>
+          </a:lnRef>
+          <a:fillRef idx="3">
+            <a:schemeClr val="accent1"/>
+          </a:fillRef>
+          <a:effectRef idx="2">
+            <a:schemeClr val="accent1"/>
+          </a:effectRef>
+          <a:fontRef idx="minor">
+            <a:schemeClr val="lt1"/>
+          </a:fontRef>
+        </p:style>
+        <p:txBody>
+          <a:bodyPr rtlCol="0" anchor="ctr" lIns="228600" tIns="164592" rIns="228600" wrap="square"/>
+          <a:lstStyle/>
+          <a:p>
+            <a:pPr algn="ctr">
+              <a:spcAft>
+                <a:spcPts val="400"/>
+              </a:spcAft>
+              <a:defRPr sz="1300" b="1">
+                <a:solidFill>
+                  <a:srgbClr val="38BDF8"/>
+                </a:solidFill>
+                <a:latin typeface="Arial"/>
+              </a:defRPr>
+            </a:pPr>
+            <a:r>
+              <a:t>📁 Minh chứng Bàn giao</a:t>
+            </a:r>
+          </a:p>
+          <a:p>
+            <a:pPr>
+              <a:spcAft>
+                <a:spcPts val="200"/>
+              </a:spcAft>
+              <a:defRPr sz="1150">
+                <a:solidFill>
+                  <a:srgbClr val="94A3B8"/>
+                </a:solidFill>
+                <a:latin typeface="Arial"/>
+              </a:defRPr>
+            </a:pPr>
+            <a:r>
+              <a:t>• Đặc tả cấu trúc chi tiết tại ux/user-flow.md và Figma Page 01 User Flow.</a:t>
+            </a:r>
+          </a:p>
+        </p:txBody>
+      </p:sp>
+      <p:sp>
+        <p:nvSpPr>
+          <p:cNvPr id="8" name="Rounded Rectangle 7"/>
+          <p:cNvSpPr/>
+          <p:nvPr/>
+        </p:nvSpPr>
+        <p:spPr>
+          <a:xfrm>
+            <a:off x="7863840" y="1508760"/>
+            <a:ext cx="3596335" cy="4901184"/>
+          </a:xfrm>
+          <a:prstGeom prst="roundRect">
+            <a:avLst/>
+          </a:prstGeom>
+          <a:solidFill>
+            <a:srgbClr val="161E31"/>
+          </a:solidFill>
+          <a:ln>
+            <a:solidFill>
+              <a:srgbClr val="2D3748"/>
+            </a:solidFill>
+          </a:ln>
+        </p:spPr>
+        <p:style>
+          <a:lnRef idx="1">
+            <a:schemeClr val="accent1"/>
+          </a:lnRef>
+          <a:fillRef idx="3">
+            <a:schemeClr val="accent1"/>
+          </a:fillRef>
+          <a:effectRef idx="2">
+            <a:schemeClr val="accent1"/>
+          </a:effectRef>
+          <a:fontRef idx="minor">
+            <a:schemeClr val="lt1"/>
+          </a:fontRef>
+        </p:style>
+        <p:txBody>
           <a:bodyPr rtlCol="0" anchor="ctr"/>
           <a:lstStyle/>
           <a:p>
@@ -6690,7 +7459,7 @@
       </p:sp>
       <p:pic>
         <p:nvPicPr>
-          <p:cNvPr id="7" name="Picture 6" descr="stitch_canvas_screen_01_02_03.png"/>
+          <p:cNvPr id="9" name="Picture 8" descr="stitch_canvas_screen_01_02_03.png"/>
           <p:cNvPicPr>
             <a:picLocks noChangeAspect="1"/>
           </p:cNvPicPr>
@@ -6704,8 +7473,8 @@
         </p:blipFill>
         <p:spPr>
           <a:xfrm>
-            <a:off x="8092440" y="1508760"/>
-            <a:ext cx="3322015" cy="1764820"/>
+            <a:off x="8092440" y="1691640"/>
+            <a:ext cx="3139135" cy="1667665"/>
           </a:xfrm>
           <a:prstGeom prst="rect">
             <a:avLst/>
@@ -6745,12 +7514,10 @@
             <a:avLst/>
           </a:prstGeom>
           <a:solidFill>
-            <a:srgbClr val="0F172A"/>
+            <a:srgbClr val="0B0F19"/>
           </a:solidFill>
           <a:ln>
-            <a:solidFill>
-              <a:srgbClr val="0F172A"/>
-            </a:solidFill>
+            <a:noFill/>
           </a:ln>
         </p:spPr>
         <p:style>
@@ -6777,24 +7544,24 @@
       </p:sp>
       <p:sp>
         <p:nvSpPr>
-          <p:cNvPr id="3" name="Rectangle 2"/>
+          <p:cNvPr id="3" name="Rounded Rectangle 2"/>
           <p:cNvSpPr/>
           <p:nvPr/>
         </p:nvSpPr>
         <p:spPr>
           <a:xfrm>
-            <a:off x="548640" y="365760"/>
-            <a:ext cx="11094415" cy="777240"/>
-          </a:xfrm>
-          <a:prstGeom prst="rect">
+            <a:off x="731520" y="365760"/>
+            <a:ext cx="10728655" cy="1005840"/>
+          </a:xfrm>
+          <a:prstGeom prst="roundRect">
             <a:avLst/>
           </a:prstGeom>
           <a:solidFill>
-            <a:srgbClr val="1E293B"/>
+            <a:srgbClr val="161E31"/>
           </a:solidFill>
           <a:ln>
             <a:solidFill>
-              <a:srgbClr val="334155"/>
+              <a:srgbClr val="2D3748"/>
             </a:solidFill>
           </a:ln>
         </p:spPr>
@@ -6813,19 +7580,35 @@
           </a:fontRef>
         </p:style>
         <p:txBody>
-          <a:bodyPr rtlCol="0" anchor="ctr" wrap="square"/>
+          <a:bodyPr rtlCol="0" anchor="ctr" lIns="274320" tIns="109728" rIns="274320" bIns="109728" wrap="square"/>
           <a:lstStyle/>
           <a:p>
             <a:pPr algn="ctr">
+              <a:defRPr sz="1100" b="1">
+                <a:solidFill>
+                  <a:srgbClr val="38BDF8"/>
+                </a:solidFill>
+                <a:latin typeface="Arial"/>
+              </a:defRPr>
+            </a:pPr>
+            <a:r>
+              <a:t>04 / 12  ·  USER FLOWS</a:t>
+            </a:r>
+          </a:p>
+          <a:p>
+            <a:pPr>
+              <a:spcBef>
+                <a:spcPts val="200"/>
+              </a:spcBef>
               <a:defRPr sz="1700" b="1">
                 <a:solidFill>
-                  <a:srgbClr val="3B82F6"/>
-                </a:solidFill>
-                <a:latin typeface="Arial"/>
-              </a:defRPr>
-            </a:pPr>
-            <a:r>
-              <a:t>SLIDE 04 | THREE USER FLOWS &amp; PHỤC HỒI LỖI</a:t>
+                  <a:srgbClr val="FFFFFF"/>
+                </a:solidFill>
+                <a:latin typeface="Arial"/>
+              </a:defRPr>
+            </a:pPr>
+            <a:r>
+              <a:t>3 Luồng Trải nghiệm Cốt lõi &amp; Phục hồi Lỗi</a:t>
             </a:r>
           </a:p>
         </p:txBody>
@@ -6838,8 +7621,8 @@
         </p:nvSpPr>
         <p:spPr>
           <a:xfrm>
-            <a:off x="8412480" y="438912"/>
-            <a:ext cx="3108960" cy="594360"/>
+            <a:off x="7772400" y="438912"/>
+            <a:ext cx="3474720" cy="457200"/>
           </a:xfrm>
           <a:prstGeom prst="rect">
             <a:avLst/>
@@ -6853,9 +7636,9 @@
           <a:lstStyle/>
           <a:p>
             <a:pPr algn="r">
-              <a:defRPr sz="1300" b="1">
-                <a:solidFill>
-                  <a:srgbClr val="10B981"/>
+              <a:defRPr sz="1200" b="1">
+                <a:solidFill>
+                  <a:srgbClr val="34D399"/>
                 </a:solidFill>
                 <a:latin typeface="Arial"/>
               </a:defRPr>
@@ -6874,18 +7657,18 @@
         </p:nvSpPr>
         <p:spPr>
           <a:xfrm>
-            <a:off x="548640" y="1325880"/>
-            <a:ext cx="7132320" cy="5120640"/>
+            <a:off x="731520" y="1508760"/>
+            <a:ext cx="6949440" cy="1554480"/>
           </a:xfrm>
           <a:prstGeom prst="roundRect">
             <a:avLst/>
           </a:prstGeom>
           <a:solidFill>
-            <a:srgbClr val="1E293B"/>
+            <a:srgbClr val="161E31"/>
           </a:solidFill>
           <a:ln>
             <a:solidFill>
-              <a:srgbClr val="334155"/>
+              <a:srgbClr val="2D3748"/>
             </a:solidFill>
           </a:ln>
         </p:spPr>
@@ -6904,127 +7687,38 @@
           </a:fontRef>
         </p:style>
         <p:txBody>
-          <a:bodyPr rtlCol="0" anchor="ctr" wrap="square" tIns="274320" lIns="320040" rIns="320040" bIns="274320"/>
+          <a:bodyPr rtlCol="0" anchor="ctr" lIns="228600" tIns="164592" rIns="228600" wrap="square"/>
           <a:lstStyle/>
           <a:p>
             <a:pPr algn="ctr">
-              <a:spcBef>
-                <a:spcPts val="600"/>
-              </a:spcBef>
               <a:spcAft>
                 <a:spcPts val="400"/>
               </a:spcAft>
-              <a:defRPr sz="1400" b="1">
-                <a:solidFill>
-                  <a:srgbClr val="3B82F6"/>
-                </a:solidFill>
-                <a:latin typeface="Arial"/>
-              </a:defRPr>
-            </a:pPr>
-            <a:r>
-              <a:t>Flow 1: Happy Path (Ứng tuyển dự án trong 60s):</a:t>
-            </a:r>
-          </a:p>
-          <a:p>
-            <a:pPr lvl="1">
-              <a:spcAft>
-                <a:spcPts val="400"/>
-              </a:spcAft>
-              <a:defRPr sz="1250">
-                <a:solidFill>
-                  <a:srgbClr val="94A3B8"/>
-                </a:solidFill>
-                <a:latin typeface="Arial"/>
-              </a:defRPr>
-            </a:pPr>
-            <a:r>
-              <a:t>  Khám phá (Screen 01) -&gt; Xem chi tiết (Screen 02) -&gt; Mở Apply Sheet (Screen 03) -&gt; Nộp đơn thành công (Screen 04) -&gt; Tracker (Screen 05).</a:t>
+              <a:defRPr sz="1300" b="1">
+                <a:solidFill>
+                  <a:srgbClr val="38BDF8"/>
+                </a:solidFill>
+                <a:latin typeface="Arial"/>
+              </a:defRPr>
+            </a:pPr>
+            <a:r>
+              <a:t>⚡ Flow 1: Happy Path (Ứng tuyển trong 60s)</a:t>
             </a:r>
           </a:p>
           <a:p>
             <a:pPr>
-              <a:spcBef>
-                <a:spcPts val="600"/>
-              </a:spcBef>
-              <a:spcAft>
-                <a:spcPts val="400"/>
-              </a:spcAft>
-              <a:defRPr sz="1400" b="1">
-                <a:solidFill>
-                  <a:srgbClr val="3B82F6"/>
-                </a:solidFill>
-                <a:latin typeface="Arial"/>
-              </a:defRPr>
-            </a:pPr>
-            <a:r>
-              <a:t>Flow 2: Alternate Path (Trưởng nhóm hẹn Chemistry Call):</a:t>
-            </a:r>
-          </a:p>
-          <a:p>
-            <a:pPr lvl="1">
-              <a:spcAft>
-                <a:spcPts val="400"/>
-              </a:spcAft>
-              <a:defRPr sz="1250">
-                <a:solidFill>
-                  <a:srgbClr val="94A3B8"/>
-                </a:solidFill>
-                <a:latin typeface="Arial"/>
-              </a:defRPr>
-            </a:pPr>
-            <a:r>
-              <a:t>  Tracker (Screen 05) -&gt; Xem hồ sơ ứng viên -&gt; Bấm Hẹn trao đổi (Screen 06) -&gt; Xác nhận lịch hẹn (Screen 07).</a:t>
-            </a:r>
-          </a:p>
-          <a:p>
-            <a:pPr>
-              <a:spcBef>
-                <a:spcPts val="600"/>
-              </a:spcBef>
-              <a:spcAft>
-                <a:spcPts val="400"/>
-              </a:spcAft>
-              <a:defRPr sz="1400" b="1">
-                <a:solidFill>
-                  <a:srgbClr val="3B82F6"/>
-                </a:solidFill>
-                <a:latin typeface="Arial"/>
-              </a:defRPr>
-            </a:pPr>
-            <a:r>
-              <a:t>Flow 3: Error &amp; Recovery (Phục hồi khi tìm kiếm 0 kết quả):</a:t>
-            </a:r>
-          </a:p>
-          <a:p>
-            <a:pPr lvl="1">
-              <a:spcAft>
-                <a:spcPts val="400"/>
-              </a:spcAft>
-              <a:defRPr sz="1250">
-                <a:solidFill>
-                  <a:srgbClr val="94A3B8"/>
-                </a:solidFill>
-                <a:latin typeface="Arial"/>
-              </a:defRPr>
-            </a:pPr>
-            <a:r>
-              <a:t>  Tìm từ khóa sai/bộ lọc quá hẹp -&gt; Screen 08 (Empty State) -&gt; Nhấn nút "Xóa bộ lọc" -&gt; Phục hồi về danh sách dự án đầy đủ trong 1 chạm.</a:t>
-            </a:r>
-          </a:p>
-          <a:p>
-            <a:pPr>
-              <a:spcAft>
-                <a:spcPts val="600"/>
-              </a:spcAft>
-              <a:defRPr sz="1300">
-                <a:solidFill>
-                  <a:srgbClr val="F8FAFC"/>
-                </a:solidFill>
-                <a:latin typeface="Arial"/>
-              </a:defRPr>
-            </a:pPr>
-            <a:r>
-              <a:t>Nguyên tắc thiết kế: Zero Dead-Ends (Tuyệt đối không có ngõ cụt).</a:t>
+              <a:spcAft>
+                <a:spcPts val="200"/>
+              </a:spcAft>
+              <a:defRPr sz="1150">
+                <a:solidFill>
+                  <a:srgbClr val="E2E8F0"/>
+                </a:solidFill>
+                <a:latin typeface="Arial"/>
+              </a:defRPr>
+            </a:pPr>
+            <a:r>
+              <a:t>• Khám phá (Screen 01) -&gt; Xem chi tiết (Screen 02) -&gt; Nhấn Apply mở Sheet (Screen 03) -&gt; Nộp đơn thành công (Screen 04) -&gt; Quản lý tại Tracker (Screen 05).</a:t>
             </a:r>
           </a:p>
         </p:txBody>
@@ -7037,18 +7731,18 @@
         </p:nvSpPr>
         <p:spPr>
           <a:xfrm>
-            <a:off x="7863840" y="1325880"/>
-            <a:ext cx="3779215" cy="5120640"/>
+            <a:off x="731520" y="3182112"/>
+            <a:ext cx="6949440" cy="1554480"/>
           </a:xfrm>
           <a:prstGeom prst="roundRect">
             <a:avLst/>
           </a:prstGeom>
           <a:solidFill>
-            <a:srgbClr val="1E293B"/>
+            <a:srgbClr val="161E31"/>
           </a:solidFill>
           <a:ln>
             <a:solidFill>
-              <a:srgbClr val="334155"/>
+              <a:srgbClr val="2D3748"/>
             </a:solidFill>
           </a:ln>
         </p:spPr>
@@ -7067,6 +7761,154 @@
           </a:fontRef>
         </p:style>
         <p:txBody>
+          <a:bodyPr rtlCol="0" anchor="ctr" lIns="228600" tIns="164592" rIns="228600" wrap="square"/>
+          <a:lstStyle/>
+          <a:p>
+            <a:pPr algn="ctr">
+              <a:spcAft>
+                <a:spcPts val="400"/>
+              </a:spcAft>
+              <a:defRPr sz="1300" b="1">
+                <a:solidFill>
+                  <a:srgbClr val="34D399"/>
+                </a:solidFill>
+                <a:latin typeface="Arial"/>
+              </a:defRPr>
+            </a:pPr>
+            <a:r>
+              <a:t>🤝 Flow 2: Alternate Path (Hẹn Chemistry Call)</a:t>
+            </a:r>
+          </a:p>
+          <a:p>
+            <a:pPr>
+              <a:spcAft>
+                <a:spcPts val="200"/>
+              </a:spcAft>
+              <a:defRPr sz="1150">
+                <a:solidFill>
+                  <a:srgbClr val="E2E8F0"/>
+                </a:solidFill>
+                <a:latin typeface="Arial"/>
+              </a:defRPr>
+            </a:pPr>
+            <a:r>
+              <a:t>• Trưởng nhóm mở Tracker (Screen 05) -&gt; Xem hồ sơ -&gt; Nhấn Hẹn trao đổi -&gt; Chọn giờ (Screen 06) -&gt; Xác nhận lịch hẹn (Screen 07).</a:t>
+            </a:r>
+          </a:p>
+        </p:txBody>
+      </p:sp>
+      <p:sp>
+        <p:nvSpPr>
+          <p:cNvPr id="7" name="Rounded Rectangle 6"/>
+          <p:cNvSpPr/>
+          <p:nvPr/>
+        </p:nvSpPr>
+        <p:spPr>
+          <a:xfrm>
+            <a:off x="731520" y="4855464"/>
+            <a:ext cx="6949440" cy="1554480"/>
+          </a:xfrm>
+          <a:prstGeom prst="roundRect">
+            <a:avLst/>
+          </a:prstGeom>
+          <a:solidFill>
+            <a:srgbClr val="161E31"/>
+          </a:solidFill>
+          <a:ln>
+            <a:solidFill>
+              <a:srgbClr val="2D3748"/>
+            </a:solidFill>
+          </a:ln>
+        </p:spPr>
+        <p:style>
+          <a:lnRef idx="1">
+            <a:schemeClr val="accent1"/>
+          </a:lnRef>
+          <a:fillRef idx="3">
+            <a:schemeClr val="accent1"/>
+          </a:fillRef>
+          <a:effectRef idx="2">
+            <a:schemeClr val="accent1"/>
+          </a:effectRef>
+          <a:fontRef idx="minor">
+            <a:schemeClr val="lt1"/>
+          </a:fontRef>
+        </p:style>
+        <p:txBody>
+          <a:bodyPr rtlCol="0" anchor="ctr" lIns="228600" tIns="164592" rIns="228600" wrap="square"/>
+          <a:lstStyle/>
+          <a:p>
+            <a:pPr algn="ctr">
+              <a:spcAft>
+                <a:spcPts val="400"/>
+              </a:spcAft>
+              <a:defRPr sz="1300" b="1">
+                <a:solidFill>
+                  <a:srgbClr val="38BDF8"/>
+                </a:solidFill>
+                <a:latin typeface="Arial"/>
+              </a:defRPr>
+            </a:pPr>
+            <a:r>
+              <a:t>🛡️ Flow 3: Error &amp; Recovery (Không có ngõ cụt)</a:t>
+            </a:r>
+          </a:p>
+          <a:p>
+            <a:pPr>
+              <a:spcAft>
+                <a:spcPts val="200"/>
+              </a:spcAft>
+              <a:defRPr sz="1150">
+                <a:solidFill>
+                  <a:srgbClr val="94A3B8"/>
+                </a:solidFill>
+                <a:latin typeface="Arial"/>
+              </a:defRPr>
+            </a:pPr>
+            <a:r>
+              <a:t>• Tìm từ khóa sai hoặc bộ lọc quá hẹp -&gt; Screen 08 (Empty State) -&gt; Nhấn nút "Xóa bộ lọc" -&gt; Phục hồi về danh sách đầy đủ trong 1 chạm (Zero Dead-Ends).</a:t>
+            </a:r>
+          </a:p>
+        </p:txBody>
+      </p:sp>
+      <p:sp>
+        <p:nvSpPr>
+          <p:cNvPr id="8" name="Rounded Rectangle 7"/>
+          <p:cNvSpPr/>
+          <p:nvPr/>
+        </p:nvSpPr>
+        <p:spPr>
+          <a:xfrm>
+            <a:off x="7863840" y="1508760"/>
+            <a:ext cx="3596335" cy="4901184"/>
+          </a:xfrm>
+          <a:prstGeom prst="roundRect">
+            <a:avLst/>
+          </a:prstGeom>
+          <a:solidFill>
+            <a:srgbClr val="161E31"/>
+          </a:solidFill>
+          <a:ln>
+            <a:solidFill>
+              <a:srgbClr val="2D3748"/>
+            </a:solidFill>
+          </a:ln>
+        </p:spPr>
+        <p:style>
+          <a:lnRef idx="1">
+            <a:schemeClr val="accent1"/>
+          </a:lnRef>
+          <a:fillRef idx="3">
+            <a:schemeClr val="accent1"/>
+          </a:fillRef>
+          <a:effectRef idx="2">
+            <a:schemeClr val="accent1"/>
+          </a:effectRef>
+          <a:fontRef idx="minor">
+            <a:schemeClr val="lt1"/>
+          </a:fontRef>
+        </p:style>
+        <p:txBody>
           <a:bodyPr rtlCol="0" anchor="ctr"/>
           <a:lstStyle/>
           <a:p>
@@ -7076,7 +7918,7 @@
       </p:sp>
       <p:pic>
         <p:nvPicPr>
-          <p:cNvPr id="7" name="Picture 6" descr="screen_08_empty_state.png"/>
+          <p:cNvPr id="9" name="Picture 8" descr="screen_08_empty_state.png"/>
           <p:cNvPicPr>
             <a:picLocks noChangeAspect="1"/>
           </p:cNvPicPr>
@@ -7090,8 +7932,8 @@
         </p:blipFill>
         <p:spPr>
           <a:xfrm>
-            <a:off x="8092440" y="1508760"/>
-            <a:ext cx="3322015" cy="14056791"/>
+            <a:off x="8092440" y="1691640"/>
+            <a:ext cx="3139135" cy="13282951"/>
           </a:xfrm>
           <a:prstGeom prst="rect">
             <a:avLst/>
@@ -7131,12 +7973,10 @@
             <a:avLst/>
           </a:prstGeom>
           <a:solidFill>
-            <a:srgbClr val="0F172A"/>
+            <a:srgbClr val="0B0F19"/>
           </a:solidFill>
           <a:ln>
-            <a:solidFill>
-              <a:srgbClr val="0F172A"/>
-            </a:solidFill>
+            <a:noFill/>
           </a:ln>
         </p:spPr>
         <p:style>
@@ -7163,24 +8003,24 @@
       </p:sp>
       <p:sp>
         <p:nvSpPr>
-          <p:cNvPr id="3" name="Rectangle 2"/>
+          <p:cNvPr id="3" name="Rounded Rectangle 2"/>
           <p:cNvSpPr/>
           <p:nvPr/>
         </p:nvSpPr>
         <p:spPr>
           <a:xfrm>
-            <a:off x="548640" y="365760"/>
-            <a:ext cx="11094415" cy="777240"/>
-          </a:xfrm>
-          <a:prstGeom prst="rect">
+            <a:off x="731520" y="365760"/>
+            <a:ext cx="10728655" cy="1005840"/>
+          </a:xfrm>
+          <a:prstGeom prst="roundRect">
             <a:avLst/>
           </a:prstGeom>
           <a:solidFill>
-            <a:srgbClr val="1E293B"/>
+            <a:srgbClr val="161E31"/>
           </a:solidFill>
           <a:ln>
             <a:solidFill>
-              <a:srgbClr val="334155"/>
+              <a:srgbClr val="2D3748"/>
             </a:solidFill>
           </a:ln>
         </p:spPr>
@@ -7199,19 +8039,35 @@
           </a:fontRef>
         </p:style>
         <p:txBody>
-          <a:bodyPr rtlCol="0" anchor="ctr" wrap="square"/>
+          <a:bodyPr rtlCol="0" anchor="ctr" lIns="274320" tIns="109728" rIns="274320" bIns="109728" wrap="square"/>
           <a:lstStyle/>
           <a:p>
             <a:pPr algn="ctr">
+              <a:defRPr sz="1100" b="1">
+                <a:solidFill>
+                  <a:srgbClr val="38BDF8"/>
+                </a:solidFill>
+                <a:latin typeface="Arial"/>
+              </a:defRPr>
+            </a:pPr>
+            <a:r>
+              <a:t>05 / 12  ·  AI GENERATION</a:t>
+            </a:r>
+          </a:p>
+          <a:p>
+            <a:pPr>
+              <a:spcBef>
+                <a:spcPts val="200"/>
+              </a:spcBef>
               <a:defRPr sz="1700" b="1">
                 <a:solidFill>
-                  <a:srgbClr val="3B82F6"/>
-                </a:solidFill>
-                <a:latin typeface="Arial"/>
-              </a:defRPr>
-            </a:pPr>
-            <a:r>
-              <a:t>SLIDE 05 | AI UI GENERATION (PROMPT-TO-UI VỚI STITCH)</a:t>
+                  <a:srgbClr val="FFFFFF"/>
+                </a:solidFill>
+                <a:latin typeface="Arial"/>
+              </a:defRPr>
+            </a:pPr>
+            <a:r>
+              <a:t>Ứng dụng Google Stitch: Prompt-to-UI 5 Thành phần</a:t>
             </a:r>
           </a:p>
         </p:txBody>
@@ -7224,8 +8080,8 @@
         </p:nvSpPr>
         <p:spPr>
           <a:xfrm>
-            <a:off x="8412480" y="438912"/>
-            <a:ext cx="3108960" cy="594360"/>
+            <a:off x="7772400" y="438912"/>
+            <a:ext cx="3474720" cy="457200"/>
           </a:xfrm>
           <a:prstGeom prst="rect">
             <a:avLst/>
@@ -7239,9 +8095,9 @@
           <a:lstStyle/>
           <a:p>
             <a:pPr algn="r">
-              <a:defRPr sz="1300" b="1">
-                <a:solidFill>
-                  <a:srgbClr val="10B981"/>
+              <a:defRPr sz="1200" b="1">
+                <a:solidFill>
+                  <a:srgbClr val="34D399"/>
                 </a:solidFill>
                 <a:latin typeface="Arial"/>
               </a:defRPr>
@@ -7260,18 +8116,18 @@
         </p:nvSpPr>
         <p:spPr>
           <a:xfrm>
-            <a:off x="548640" y="1325880"/>
-            <a:ext cx="7132320" cy="5120640"/>
+            <a:off x="731520" y="1508760"/>
+            <a:ext cx="6949440" cy="1554480"/>
           </a:xfrm>
           <a:prstGeom prst="roundRect">
             <a:avLst/>
           </a:prstGeom>
           <a:solidFill>
-            <a:srgbClr val="1E293B"/>
+            <a:srgbClr val="161E31"/>
           </a:solidFill>
           <a:ln>
             <a:solidFill>
-              <a:srgbClr val="334155"/>
+              <a:srgbClr val="2D3748"/>
             </a:solidFill>
           </a:ln>
         </p:spPr>
@@ -7290,137 +8146,102 @@
           </a:fontRef>
         </p:style>
         <p:txBody>
-          <a:bodyPr rtlCol="0" anchor="ctr" wrap="square" tIns="274320" lIns="320040" rIns="320040" bIns="274320"/>
+          <a:bodyPr rtlCol="0" anchor="ctr" lIns="228600" tIns="164592" rIns="228600" wrap="square"/>
           <a:lstStyle/>
           <a:p>
             <a:pPr algn="ctr">
               <a:spcAft>
-                <a:spcPts val="600"/>
-              </a:spcAft>
-              <a:defRPr sz="1300">
-                <a:solidFill>
-                  <a:srgbClr val="F8FAFC"/>
-                </a:solidFill>
-                <a:latin typeface="Arial"/>
-              </a:defRPr>
-            </a:pPr>
-            <a:r>
-              <a:t>Công cụ sử dụng: Google Stitch (AI UI Generator chuyên sâu cho Mobile).</a:t>
+                <a:spcPts val="400"/>
+              </a:spcAft>
+              <a:defRPr sz="1300" b="1">
+                <a:solidFill>
+                  <a:srgbClr val="38BDF8"/>
+                </a:solidFill>
+                <a:latin typeface="Arial"/>
+              </a:defRPr>
+            </a:pPr>
+            <a:r>
+              <a:t>🤖 Cấu trúc Prompt Chuẩn hóa</a:t>
             </a:r>
           </a:p>
           <a:p>
             <a:pPr>
-              <a:spcBef>
-                <a:spcPts val="600"/>
-              </a:spcBef>
-              <a:spcAft>
-                <a:spcPts val="400"/>
-              </a:spcAft>
-              <a:defRPr sz="1400" b="1">
-                <a:solidFill>
-                  <a:srgbClr val="3B82F6"/>
-                </a:solidFill>
-                <a:latin typeface="Arial"/>
-              </a:defRPr>
-            </a:pPr>
-            <a:r>
-              <a:t>Kỹ thuật Prompt Engineering 5 Thành phần chuẩn hóa:</a:t>
-            </a:r>
-          </a:p>
-          <a:p>
-            <a:pPr lvl="1">
-              <a:spcAft>
-                <a:spcPts val="400"/>
-              </a:spcAft>
-              <a:defRPr sz="1250">
-                <a:solidFill>
-                  <a:srgbClr val="94A3B8"/>
-                </a:solidFill>
-                <a:latin typeface="Arial"/>
-              </a:defRPr>
-            </a:pPr>
-            <a:r>
-              <a:t>  1. Persona &amp; Role: UX Designer thiết kế app cho sinh viên IT (Lê Quốc Huy).</a:t>
-            </a:r>
-          </a:p>
-          <a:p>
-            <a:pPr lvl="1">
-              <a:spcAft>
-                <a:spcPts val="400"/>
-              </a:spcAft>
-              <a:defRPr sz="1250">
-                <a:solidFill>
-                  <a:srgbClr val="94A3B8"/>
-                </a:solidFill>
-                <a:latin typeface="Arial"/>
-              </a:defRPr>
-            </a:pPr>
-            <a:r>
-              <a:t>  2. Task: Sinh màn hình khám phá dự án, thẻ kỹ năng và Bottom Sheet ứng tuyển.</a:t>
-            </a:r>
-          </a:p>
-          <a:p>
-            <a:pPr lvl="1">
-              <a:spcAft>
-                <a:spcPts val="400"/>
-              </a:spcAft>
-              <a:defRPr sz="1250">
-                <a:solidFill>
-                  <a:srgbClr val="94A3B8"/>
-                </a:solidFill>
-                <a:latin typeface="Arial"/>
-              </a:defRPr>
-            </a:pPr>
-            <a:r>
-              <a:t>  3. Platform: Android Mobile chuẩn 360x800 dp, Material 3 grid 8dp.</a:t>
-            </a:r>
-          </a:p>
-          <a:p>
-            <a:pPr lvl="1">
-              <a:spcAft>
-                <a:spcPts val="400"/>
-              </a:spcAft>
-              <a:defRPr sz="1250">
-                <a:solidFill>
-                  <a:srgbClr val="94A3B8"/>
-                </a:solidFill>
-                <a:latin typeface="Arial"/>
-              </a:defRPr>
-            </a:pPr>
-            <a:r>
-              <a:t>  4. Constraints: WCAG 2.1 AA (tương phản &gt;=4.5:1, vùng chạm &gt;=48dp), hiển thị số giờ cam kết.</a:t>
-            </a:r>
-          </a:p>
-          <a:p>
-            <a:pPr lvl="1">
-              <a:spcAft>
-                <a:spcPts val="400"/>
-              </a:spcAft>
-              <a:defRPr sz="1250">
-                <a:solidFill>
-                  <a:srgbClr val="94A3B8"/>
-                </a:solidFill>
-                <a:latin typeface="Arial"/>
-              </a:defRPr>
-            </a:pPr>
-            <a:r>
-              <a:t>  5. Style &amp; Tone: Hiện đại, uy tín, Deep Navy (#0F172A) &amp; Emerald (#10B981).</a:t>
+              <a:spcAft>
+                <a:spcPts val="200"/>
+              </a:spcAft>
+              <a:defRPr sz="1150">
+                <a:solidFill>
+                  <a:srgbClr val="E2E8F0"/>
+                </a:solidFill>
+                <a:latin typeface="Arial"/>
+              </a:defRPr>
+            </a:pPr>
+            <a:r>
+              <a:t>• 1. Role &amp; Persona: Mobile App UX Designer thiết kế cho SV IT (Lê Quốc Huy).</a:t>
             </a:r>
           </a:p>
           <a:p>
             <a:pPr>
               <a:spcAft>
-                <a:spcPts val="600"/>
-              </a:spcAft>
-              <a:defRPr sz="1300">
-                <a:solidFill>
-                  <a:srgbClr val="F8FAFC"/>
-                </a:solidFill>
-                <a:latin typeface="Arial"/>
-              </a:defRPr>
-            </a:pPr>
-            <a:r>
-              <a:t>Kết quả: Sinh nhanh 8 màn hình phôi cơ bản làm nền tảng phản biện.</a:t>
+                <a:spcPts val="200"/>
+              </a:spcAft>
+              <a:defRPr sz="1150">
+                <a:solidFill>
+                  <a:srgbClr val="E2E8F0"/>
+                </a:solidFill>
+                <a:latin typeface="Arial"/>
+              </a:defRPr>
+            </a:pPr>
+            <a:r>
+              <a:t>• 2. Task: Sinh màn hình khám phá dự án EXE, thẻ kỹ năng và Bottom Sheet.</a:t>
+            </a:r>
+          </a:p>
+          <a:p>
+            <a:pPr>
+              <a:spcAft>
+                <a:spcPts val="200"/>
+              </a:spcAft>
+              <a:defRPr sz="1150">
+                <a:solidFill>
+                  <a:srgbClr val="E2E8F0"/>
+                </a:solidFill>
+                <a:latin typeface="Arial"/>
+              </a:defRPr>
+            </a:pPr>
+            <a:r>
+              <a:t>• 3. Platform: Android Mobile 360x800 dp, Material 3 8dp grid.</a:t>
+            </a:r>
+          </a:p>
+          <a:p>
+            <a:pPr>
+              <a:spcAft>
+                <a:spcPts val="200"/>
+              </a:spcAft>
+              <a:defRPr sz="1150">
+                <a:solidFill>
+                  <a:srgbClr val="E2E8F0"/>
+                </a:solidFill>
+                <a:latin typeface="Arial"/>
+              </a:defRPr>
+            </a:pPr>
+            <a:r>
+              <a:t>• 4. Constraints: WCAG 2.1 AA, hiển thị % tương thích và cam kết giờ.</a:t>
+            </a:r>
+          </a:p>
+          <a:p>
+            <a:pPr>
+              <a:spcAft>
+                <a:spcPts val="200"/>
+              </a:spcAft>
+              <a:defRPr sz="1150">
+                <a:solidFill>
+                  <a:srgbClr val="E2E8F0"/>
+                </a:solidFill>
+                <a:latin typeface="Arial"/>
+              </a:defRPr>
+            </a:pPr>
+            <a:r>
+              <a:t>• 5. Style: Clean, trustworthy, Deep Navy (#0F172A) &amp; Emerald (#10B981).</a:t>
             </a:r>
           </a:p>
         </p:txBody>
@@ -7433,18 +8254,18 @@
         </p:nvSpPr>
         <p:spPr>
           <a:xfrm>
-            <a:off x="7863840" y="1325880"/>
-            <a:ext cx="3779215" cy="5120640"/>
+            <a:off x="731520" y="3182112"/>
+            <a:ext cx="6949440" cy="1554480"/>
           </a:xfrm>
           <a:prstGeom prst="roundRect">
             <a:avLst/>
           </a:prstGeom>
           <a:solidFill>
-            <a:srgbClr val="1E293B"/>
+            <a:srgbClr val="161E31"/>
           </a:solidFill>
           <a:ln>
             <a:solidFill>
-              <a:srgbClr val="334155"/>
+              <a:srgbClr val="2D3748"/>
             </a:solidFill>
           </a:ln>
         </p:spPr>
@@ -7463,6 +8284,154 @@
           </a:fontRef>
         </p:style>
         <p:txBody>
+          <a:bodyPr rtlCol="0" anchor="ctr" lIns="228600" tIns="164592" rIns="228600" wrap="square"/>
+          <a:lstStyle/>
+          <a:p>
+            <a:pPr algn="ctr">
+              <a:spcAft>
+                <a:spcPts val="400"/>
+              </a:spcAft>
+              <a:defRPr sz="1300" b="1">
+                <a:solidFill>
+                  <a:srgbClr val="34D399"/>
+                </a:solidFill>
+                <a:latin typeface="Arial"/>
+              </a:defRPr>
+            </a:pPr>
+            <a:r>
+              <a:t>📊 Kết quả Ban đầu</a:t>
+            </a:r>
+          </a:p>
+          <a:p>
+            <a:pPr>
+              <a:spcAft>
+                <a:spcPts val="200"/>
+              </a:spcAft>
+              <a:defRPr sz="1150">
+                <a:solidFill>
+                  <a:srgbClr val="E2E8F0"/>
+                </a:solidFill>
+                <a:latin typeface="Arial"/>
+              </a:defRPr>
+            </a:pPr>
+            <a:r>
+              <a:t>• Google Stitch tạo phôi 8 màn hình ban đầu thể hiện tốt cấu trúc thẻ card và layout.</a:t>
+            </a:r>
+          </a:p>
+        </p:txBody>
+      </p:sp>
+      <p:sp>
+        <p:nvSpPr>
+          <p:cNvPr id="7" name="Rounded Rectangle 6"/>
+          <p:cNvSpPr/>
+          <p:nvPr/>
+        </p:nvSpPr>
+        <p:spPr>
+          <a:xfrm>
+            <a:off x="731520" y="4855464"/>
+            <a:ext cx="6949440" cy="1554480"/>
+          </a:xfrm>
+          <a:prstGeom prst="roundRect">
+            <a:avLst/>
+          </a:prstGeom>
+          <a:solidFill>
+            <a:srgbClr val="161E31"/>
+          </a:solidFill>
+          <a:ln>
+            <a:solidFill>
+              <a:srgbClr val="2D3748"/>
+            </a:solidFill>
+          </a:ln>
+        </p:spPr>
+        <p:style>
+          <a:lnRef idx="1">
+            <a:schemeClr val="accent1"/>
+          </a:lnRef>
+          <a:fillRef idx="3">
+            <a:schemeClr val="accent1"/>
+          </a:fillRef>
+          <a:effectRef idx="2">
+            <a:schemeClr val="accent1"/>
+          </a:effectRef>
+          <a:fontRef idx="minor">
+            <a:schemeClr val="lt1"/>
+          </a:fontRef>
+        </p:style>
+        <p:txBody>
+          <a:bodyPr rtlCol="0" anchor="ctr" lIns="228600" tIns="164592" rIns="228600" wrap="square"/>
+          <a:lstStyle/>
+          <a:p>
+            <a:pPr algn="ctr">
+              <a:spcAft>
+                <a:spcPts val="400"/>
+              </a:spcAft>
+              <a:defRPr sz="1300" b="1">
+                <a:solidFill>
+                  <a:srgbClr val="38BDF8"/>
+                </a:solidFill>
+                <a:latin typeface="Arial"/>
+              </a:defRPr>
+            </a:pPr>
+            <a:r>
+              <a:t>📁 Minh chứng</a:t>
+            </a:r>
+          </a:p>
+          <a:p>
+            <a:pPr>
+              <a:spcAft>
+                <a:spcPts val="200"/>
+              </a:spcAft>
+              <a:defRPr sz="1150">
+                <a:solidFill>
+                  <a:srgbClr val="94A3B8"/>
+                </a:solidFill>
+                <a:latin typeface="Arial"/>
+              </a:defRPr>
+            </a:pPr>
+            <a:r>
+              <a:t>• Toàn văn prompt và ảnh chụp trong ai/ai-design-log.md và assets/stitch/.</a:t>
+            </a:r>
+          </a:p>
+        </p:txBody>
+      </p:sp>
+      <p:sp>
+        <p:nvSpPr>
+          <p:cNvPr id="8" name="Rounded Rectangle 7"/>
+          <p:cNvSpPr/>
+          <p:nvPr/>
+        </p:nvSpPr>
+        <p:spPr>
+          <a:xfrm>
+            <a:off x="7863840" y="1508760"/>
+            <a:ext cx="3596335" cy="4901184"/>
+          </a:xfrm>
+          <a:prstGeom prst="roundRect">
+            <a:avLst/>
+          </a:prstGeom>
+          <a:solidFill>
+            <a:srgbClr val="161E31"/>
+          </a:solidFill>
+          <a:ln>
+            <a:solidFill>
+              <a:srgbClr val="2D3748"/>
+            </a:solidFill>
+          </a:ln>
+        </p:spPr>
+        <p:style>
+          <a:lnRef idx="1">
+            <a:schemeClr val="accent1"/>
+          </a:lnRef>
+          <a:fillRef idx="3">
+            <a:schemeClr val="accent1"/>
+          </a:fillRef>
+          <a:effectRef idx="2">
+            <a:schemeClr val="accent1"/>
+          </a:effectRef>
+          <a:fontRef idx="minor">
+            <a:schemeClr val="lt1"/>
+          </a:fontRef>
+        </p:style>
+        <p:txBody>
           <a:bodyPr rtlCol="0" anchor="ctr"/>
           <a:lstStyle/>
           <a:p>
@@ -7472,7 +8441,7 @@
       </p:sp>
       <p:pic>
         <p:nvPicPr>
-          <p:cNvPr id="7" name="Picture 6" descr="stitch_prompt_input_evidence.png"/>
+          <p:cNvPr id="9" name="Picture 8" descr="stitch_prompt_input_evidence.png"/>
           <p:cNvPicPr>
             <a:picLocks noChangeAspect="1"/>
           </p:cNvPicPr>
@@ -7486,8 +8455,8 @@
         </p:blipFill>
         <p:spPr>
           <a:xfrm>
-            <a:off x="8092440" y="1508760"/>
-            <a:ext cx="3322015" cy="1764820"/>
+            <a:off x="8092440" y="1691640"/>
+            <a:ext cx="3139135" cy="1667665"/>
           </a:xfrm>
           <a:prstGeom prst="rect">
             <a:avLst/>
@@ -7527,12 +8496,10 @@
             <a:avLst/>
           </a:prstGeom>
           <a:solidFill>
-            <a:srgbClr val="0F172A"/>
+            <a:srgbClr val="0B0F19"/>
           </a:solidFill>
           <a:ln>
-            <a:solidFill>
-              <a:srgbClr val="0F172A"/>
-            </a:solidFill>
+            <a:noFill/>
           </a:ln>
         </p:spPr>
         <p:style>
@@ -7559,24 +8526,24 @@
       </p:sp>
       <p:sp>
         <p:nvSpPr>
-          <p:cNvPr id="3" name="Rectangle 2"/>
+          <p:cNvPr id="3" name="Rounded Rectangle 2"/>
           <p:cNvSpPr/>
           <p:nvPr/>
         </p:nvSpPr>
         <p:spPr>
           <a:xfrm>
-            <a:off x="548640" y="365760"/>
-            <a:ext cx="11094415" cy="777240"/>
-          </a:xfrm>
-          <a:prstGeom prst="rect">
+            <a:off x="731520" y="365760"/>
+            <a:ext cx="10728655" cy="1005840"/>
+          </a:xfrm>
+          <a:prstGeom prst="roundRect">
             <a:avLst/>
           </a:prstGeom>
           <a:solidFill>
-            <a:srgbClr val="1E293B"/>
+            <a:srgbClr val="161E31"/>
           </a:solidFill>
           <a:ln>
             <a:solidFill>
-              <a:srgbClr val="334155"/>
+              <a:srgbClr val="2D3748"/>
             </a:solidFill>
           </a:ln>
         </p:spPr>
@@ -7595,19 +8562,35 @@
           </a:fontRef>
         </p:style>
         <p:txBody>
-          <a:bodyPr rtlCol="0" anchor="ctr" wrap="square"/>
+          <a:bodyPr rtlCol="0" anchor="ctr" lIns="274320" tIns="109728" rIns="274320" bIns="109728" wrap="square"/>
           <a:lstStyle/>
           <a:p>
             <a:pPr algn="ctr">
+              <a:defRPr sz="1100" b="1">
+                <a:solidFill>
+                  <a:srgbClr val="38BDF8"/>
+                </a:solidFill>
+                <a:latin typeface="Arial"/>
+              </a:defRPr>
+            </a:pPr>
+            <a:r>
+              <a:t>06 / 12  ·  UX CRITIQUE &amp; ITERATIONS</a:t>
+            </a:r>
+          </a:p>
+          <a:p>
+            <a:pPr>
+              <a:spcBef>
+                <a:spcPts val="200"/>
+              </a:spcBef>
               <a:defRPr sz="1700" b="1">
                 <a:solidFill>
-                  <a:srgbClr val="3B82F6"/>
-                </a:solidFill>
-                <a:latin typeface="Arial"/>
-              </a:defRPr>
-            </a:pPr>
-            <a:r>
-              <a:t>SLIDE 06 | AI ITERATIONS &amp; PHẢN BIỆN USABILITY HEURISTICS</a:t>
+                  <a:srgbClr val="FFFFFF"/>
+                </a:solidFill>
+                <a:latin typeface="Arial"/>
+              </a:defRPr>
+            </a:pPr>
+            <a:r>
+              <a:t>3 Vòng lặp Tinh chỉnh &amp; 5 Lỗi Heuristic được Sửa</a:t>
             </a:r>
           </a:p>
         </p:txBody>
@@ -7620,8 +8603,8 @@
         </p:nvSpPr>
         <p:spPr>
           <a:xfrm>
-            <a:off x="8412480" y="438912"/>
-            <a:ext cx="3108960" cy="594360"/>
+            <a:off x="7772400" y="438912"/>
+            <a:ext cx="3474720" cy="457200"/>
           </a:xfrm>
           <a:prstGeom prst="rect">
             <a:avLst/>
@@ -7635,9 +8618,9 @@
           <a:lstStyle/>
           <a:p>
             <a:pPr algn="r">
-              <a:defRPr sz="1300" b="1">
-                <a:solidFill>
-                  <a:srgbClr val="10B981"/>
+              <a:defRPr sz="1200" b="1">
+                <a:solidFill>
+                  <a:srgbClr val="34D399"/>
                 </a:solidFill>
                 <a:latin typeface="Arial"/>
               </a:defRPr>
@@ -7656,18 +8639,18 @@
         </p:nvSpPr>
         <p:spPr>
           <a:xfrm>
-            <a:off x="548640" y="1325880"/>
-            <a:ext cx="7132320" cy="5120640"/>
+            <a:off x="731520" y="1508760"/>
+            <a:ext cx="6949440" cy="1554480"/>
           </a:xfrm>
           <a:prstGeom prst="roundRect">
             <a:avLst/>
           </a:prstGeom>
           <a:solidFill>
-            <a:srgbClr val="1E293B"/>
+            <a:srgbClr val="161E31"/>
           </a:solidFill>
           <a:ln>
             <a:solidFill>
-              <a:srgbClr val="334155"/>
+              <a:srgbClr val="2D3748"/>
             </a:solidFill>
           </a:ln>
         </p:spPr>
@@ -7686,172 +8669,102 @@
           </a:fontRef>
         </p:style>
         <p:txBody>
-          <a:bodyPr rtlCol="0" anchor="ctr" wrap="square" tIns="274320" lIns="320040" rIns="320040" bIns="274320"/>
+          <a:bodyPr rtlCol="0" anchor="ctr" lIns="228600" tIns="164592" rIns="228600" wrap="square"/>
           <a:lstStyle/>
           <a:p>
             <a:pPr algn="ctr">
-              <a:spcBef>
-                <a:spcPts val="600"/>
-              </a:spcBef>
               <a:spcAft>
                 <a:spcPts val="400"/>
               </a:spcAft>
-              <a:defRPr sz="1400" b="1">
-                <a:solidFill>
-                  <a:srgbClr val="3B82F6"/>
-                </a:solidFill>
-                <a:latin typeface="Arial"/>
-              </a:defRPr>
-            </a:pPr>
-            <a:r>
-              <a:t>5 Lỗi Usability nghiêm trọng được phát hiện từ bản phôi AI:</a:t>
-            </a:r>
-          </a:p>
-          <a:p>
-            <a:pPr lvl="1">
-              <a:spcAft>
-                <a:spcPts val="400"/>
-              </a:spcAft>
-              <a:defRPr sz="1250">
-                <a:solidFill>
-                  <a:srgbClr val="94A3B8"/>
-                </a:solidFill>
-                <a:latin typeface="Arial"/>
-              </a:defRPr>
-            </a:pPr>
-            <a:r>
-              <a:t>  • H1 (Visibility): Nút Apply ban đầu không có loading feedback khi nhấn.</a:t>
-            </a:r>
-          </a:p>
-          <a:p>
-            <a:pPr lvl="1">
-              <a:spcAft>
-                <a:spcPts val="400"/>
-              </a:spcAft>
-              <a:defRPr sz="1250">
-                <a:solidFill>
-                  <a:srgbClr val="94A3B8"/>
-                </a:solidFill>
-                <a:latin typeface="Arial"/>
-              </a:defRPr>
-            </a:pPr>
-            <a:r>
-              <a:t>  • H3 (User Freedom): Modal Sheet thiếu nút đóng (X) hoặc cử chỉ kéo xuống để hủy.</a:t>
-            </a:r>
-          </a:p>
-          <a:p>
-            <a:pPr lvl="1">
-              <a:spcAft>
-                <a:spcPts val="400"/>
-              </a:spcAft>
-              <a:defRPr sz="1250">
-                <a:solidFill>
-                  <a:srgbClr val="94A3B8"/>
-                </a:solidFill>
-                <a:latin typeface="Arial"/>
-              </a:defRPr>
-            </a:pPr>
-            <a:r>
-              <a:t>  • H5 (Error Prevention): Nút Xác nhận gửi đặt sát nút Hủy, dễ bấm nhầm.</a:t>
-            </a:r>
-          </a:p>
-          <a:p>
-            <a:pPr lvl="1">
-              <a:spcAft>
-                <a:spcPts val="400"/>
-              </a:spcAft>
-              <a:defRPr sz="1250">
-                <a:solidFill>
-                  <a:srgbClr val="94A3B8"/>
-                </a:solidFill>
-                <a:latin typeface="Arial"/>
-              </a:defRPr>
-            </a:pPr>
-            <a:r>
-              <a:t>  • H7 (Efficiency): Thiếu bộ lọc theo số giờ cam kết của ứng viên.</a:t>
-            </a:r>
-          </a:p>
-          <a:p>
-            <a:pPr lvl="1">
-              <a:spcAft>
-                <a:spcPts val="400"/>
-              </a:spcAft>
-              <a:defRPr sz="1250">
-                <a:solidFill>
-                  <a:srgbClr val="94A3B8"/>
-                </a:solidFill>
-                <a:latin typeface="Arial"/>
-              </a:defRPr>
-            </a:pPr>
-            <a:r>
-              <a:t>  • WCAG Contrast: Màu chữ phụ #94A3B8 trên nền trắng chỉ đạt 2.8:1 (vi phạm AA).</a:t>
+              <a:defRPr sz="1300" b="1">
+                <a:solidFill>
+                  <a:srgbClr val="38BDF8"/>
+                </a:solidFill>
+                <a:latin typeface="Arial"/>
+              </a:defRPr>
+            </a:pPr>
+            <a:r>
+              <a:t>🔍 5 Lỗi Heuristic Phát hiện từ AI</a:t>
             </a:r>
           </a:p>
           <a:p>
             <a:pPr>
-              <a:spcBef>
-                <a:spcPts val="600"/>
-              </a:spcBef>
-              <a:spcAft>
-                <a:spcPts val="400"/>
-              </a:spcAft>
-              <a:defRPr sz="1400" b="1">
-                <a:solidFill>
-                  <a:srgbClr val="3B82F6"/>
-                </a:solidFill>
-                <a:latin typeface="Arial"/>
-              </a:defRPr>
-            </a:pPr>
-            <a:r>
-              <a:t>3 Vòng lặp cải tiến có mục tiêu rõ rệt:</a:t>
-            </a:r>
-          </a:p>
-          <a:p>
-            <a:pPr lvl="1">
-              <a:spcAft>
-                <a:spcPts val="400"/>
-              </a:spcAft>
-              <a:defRPr sz="1250">
-                <a:solidFill>
-                  <a:srgbClr val="94A3B8"/>
-                </a:solidFill>
-                <a:latin typeface="Arial"/>
-              </a:defRPr>
-            </a:pPr>
-            <a:r>
-              <a:t>  • Iteration 1: Tái cấu trúc Visual Hierarchy, đưa Match % lên vị trí trọng tâm.</a:t>
-            </a:r>
-          </a:p>
-          <a:p>
-            <a:pPr lvl="1">
-              <a:spcAft>
-                <a:spcPts val="400"/>
-              </a:spcAft>
-              <a:defRPr sz="1250">
-                <a:solidFill>
-                  <a:srgbClr val="94A3B8"/>
-                </a:solidFill>
-                <a:latin typeface="Arial"/>
-              </a:defRPr>
-            </a:pPr>
-            <a:r>
-              <a:t>  • Iteration 2: Chuẩn hóa Accessibility, nâng vùng chạm lên &gt;=48x48 dp, contrast 5.2:1.</a:t>
-            </a:r>
-          </a:p>
-          <a:p>
-            <a:pPr lvl="1">
-              <a:spcAft>
-                <a:spcPts val="400"/>
-              </a:spcAft>
-              <a:defRPr sz="1250">
-                <a:solidFill>
-                  <a:srgbClr val="94A3B8"/>
-                </a:solidFill>
-                <a:latin typeface="Arial"/>
-              </a:defRPr>
-            </a:pPr>
-            <a:r>
-              <a:t>  • Iteration 3: Bổ sung trọn vẹn Empty State và Skeleton Loading.</a:t>
+              <a:spcAft>
+                <a:spcPts val="200"/>
+              </a:spcAft>
+              <a:defRPr sz="1150">
+                <a:solidFill>
+                  <a:srgbClr val="E2E8F0"/>
+                </a:solidFill>
+                <a:latin typeface="Arial"/>
+              </a:defRPr>
+            </a:pPr>
+            <a:r>
+              <a:t>• H1 (Visibility): Nút Apply ban đầu thiếu loading feedback khi nhấn.</a:t>
+            </a:r>
+          </a:p>
+          <a:p>
+            <a:pPr>
+              <a:spcAft>
+                <a:spcPts val="200"/>
+              </a:spcAft>
+              <a:defRPr sz="1150">
+                <a:solidFill>
+                  <a:srgbClr val="E2E8F0"/>
+                </a:solidFill>
+                <a:latin typeface="Arial"/>
+              </a:defRPr>
+            </a:pPr>
+            <a:r>
+              <a:t>• H3 (User Freedom): Modal Sheet thiếu nút đóng hoặc cử chỉ vuốt xuống.</a:t>
+            </a:r>
+          </a:p>
+          <a:p>
+            <a:pPr>
+              <a:spcAft>
+                <a:spcPts val="200"/>
+              </a:spcAft>
+              <a:defRPr sz="1150">
+                <a:solidFill>
+                  <a:srgbClr val="E2E8F0"/>
+                </a:solidFill>
+                <a:latin typeface="Arial"/>
+              </a:defRPr>
+            </a:pPr>
+            <a:r>
+              <a:t>• H5 (Error Prevention): Nút Xác nhận gửi đặt sát nút Hủy, dễ chạm nhầm.</a:t>
+            </a:r>
+          </a:p>
+          <a:p>
+            <a:pPr>
+              <a:spcAft>
+                <a:spcPts val="200"/>
+              </a:spcAft>
+              <a:defRPr sz="1150">
+                <a:solidFill>
+                  <a:srgbClr val="E2E8F0"/>
+                </a:solidFill>
+                <a:latin typeface="Arial"/>
+              </a:defRPr>
+            </a:pPr>
+            <a:r>
+              <a:t>• H7 (Efficiency): Thiếu bộ lọc theo số giờ cam kết hàng tuần.</a:t>
+            </a:r>
+          </a:p>
+          <a:p>
+            <a:pPr>
+              <a:spcAft>
+                <a:spcPts val="200"/>
+              </a:spcAft>
+              <a:defRPr sz="1150">
+                <a:solidFill>
+                  <a:srgbClr val="E2E8F0"/>
+                </a:solidFill>
+                <a:latin typeface="Arial"/>
+              </a:defRPr>
+            </a:pPr>
+            <a:r>
+              <a:t>• WCAG Contrast: Chữ phụ #94A3B8 trên nền trắng chỉ đạt 2.8:1 (vi phạm AA).</a:t>
             </a:r>
           </a:p>
         </p:txBody>
@@ -7864,18 +8777,18 @@
         </p:nvSpPr>
         <p:spPr>
           <a:xfrm>
-            <a:off x="7863840" y="1325880"/>
-            <a:ext cx="3779215" cy="5120640"/>
+            <a:off x="731520" y="3182112"/>
+            <a:ext cx="6949440" cy="1554480"/>
           </a:xfrm>
           <a:prstGeom prst="roundRect">
             <a:avLst/>
           </a:prstGeom>
           <a:solidFill>
-            <a:srgbClr val="1E293B"/>
+            <a:srgbClr val="161E31"/>
           </a:solidFill>
           <a:ln>
             <a:solidFill>
-              <a:srgbClr val="334155"/>
+              <a:srgbClr val="2D3748"/>
             </a:solidFill>
           </a:ln>
         </p:spPr>
@@ -7894,6 +8807,186 @@
           </a:fontRef>
         </p:style>
         <p:txBody>
+          <a:bodyPr rtlCol="0" anchor="ctr" lIns="228600" tIns="164592" rIns="228600" wrap="square"/>
+          <a:lstStyle/>
+          <a:p>
+            <a:pPr algn="ctr">
+              <a:spcAft>
+                <a:spcPts val="400"/>
+              </a:spcAft>
+              <a:defRPr sz="1300" b="1">
+                <a:solidFill>
+                  <a:srgbClr val="34D399"/>
+                </a:solidFill>
+                <a:latin typeface="Arial"/>
+              </a:defRPr>
+            </a:pPr>
+            <a:r>
+              <a:t>🔁 3 Vòng lặp Cải tiến có Mục tiêu</a:t>
+            </a:r>
+          </a:p>
+          <a:p>
+            <a:pPr>
+              <a:spcAft>
+                <a:spcPts val="200"/>
+              </a:spcAft>
+              <a:defRPr sz="1150">
+                <a:solidFill>
+                  <a:srgbClr val="E2E8F0"/>
+                </a:solidFill>
+                <a:latin typeface="Arial"/>
+              </a:defRPr>
+            </a:pPr>
+            <a:r>
+              <a:t>• Vòng 1 (Hierarchy): Tái cấu trúc kích thước chữ và Badge % tương thích.</a:t>
+            </a:r>
+          </a:p>
+          <a:p>
+            <a:pPr>
+              <a:spcAft>
+                <a:spcPts val="200"/>
+              </a:spcAft>
+              <a:defRPr sz="1150">
+                <a:solidFill>
+                  <a:srgbClr val="E2E8F0"/>
+                </a:solidFill>
+                <a:latin typeface="Arial"/>
+              </a:defRPr>
+            </a:pPr>
+            <a:r>
+              <a:t>• Vòng 2 (Accessibility): Nâng vùng chạm lên &gt;=48x48 dp, contrast đạt 5.2:1.</a:t>
+            </a:r>
+          </a:p>
+          <a:p>
+            <a:pPr>
+              <a:spcAft>
+                <a:spcPts val="200"/>
+              </a:spcAft>
+              <a:defRPr sz="1150">
+                <a:solidFill>
+                  <a:srgbClr val="E2E8F0"/>
+                </a:solidFill>
+                <a:latin typeface="Arial"/>
+              </a:defRPr>
+            </a:pPr>
+            <a:r>
+              <a:t>• Vòng 3 (Edge States): Bổ sung Empty State, Skeleton Loading và Error banner.</a:t>
+            </a:r>
+          </a:p>
+        </p:txBody>
+      </p:sp>
+      <p:sp>
+        <p:nvSpPr>
+          <p:cNvPr id="7" name="Rounded Rectangle 6"/>
+          <p:cNvSpPr/>
+          <p:nvPr/>
+        </p:nvSpPr>
+        <p:spPr>
+          <a:xfrm>
+            <a:off x="731520" y="4855464"/>
+            <a:ext cx="6949440" cy="1554480"/>
+          </a:xfrm>
+          <a:prstGeom prst="roundRect">
+            <a:avLst/>
+          </a:prstGeom>
+          <a:solidFill>
+            <a:srgbClr val="161E31"/>
+          </a:solidFill>
+          <a:ln>
+            <a:solidFill>
+              <a:srgbClr val="2D3748"/>
+            </a:solidFill>
+          </a:ln>
+        </p:spPr>
+        <p:style>
+          <a:lnRef idx="1">
+            <a:schemeClr val="accent1"/>
+          </a:lnRef>
+          <a:fillRef idx="3">
+            <a:schemeClr val="accent1"/>
+          </a:fillRef>
+          <a:effectRef idx="2">
+            <a:schemeClr val="accent1"/>
+          </a:effectRef>
+          <a:fontRef idx="minor">
+            <a:schemeClr val="lt1"/>
+          </a:fontRef>
+        </p:style>
+        <p:txBody>
+          <a:bodyPr rtlCol="0" anchor="ctr" lIns="228600" tIns="164592" rIns="228600" wrap="square"/>
+          <a:lstStyle/>
+          <a:p>
+            <a:pPr algn="ctr">
+              <a:spcAft>
+                <a:spcPts val="400"/>
+              </a:spcAft>
+              <a:defRPr sz="1300" b="1">
+                <a:solidFill>
+                  <a:srgbClr val="38BDF8"/>
+                </a:solidFill>
+                <a:latin typeface="Arial"/>
+              </a:defRPr>
+            </a:pPr>
+            <a:r>
+              <a:t>📁 Minh chứng</a:t>
+            </a:r>
+          </a:p>
+          <a:p>
+            <a:pPr>
+              <a:spcAft>
+                <a:spcPts val="200"/>
+              </a:spcAft>
+              <a:defRPr sz="1150">
+                <a:solidFill>
+                  <a:srgbClr val="94A3B8"/>
+                </a:solidFill>
+                <a:latin typeface="Arial"/>
+              </a:defRPr>
+            </a:pPr>
+            <a:r>
+              <a:t>• Bảng đối chiếu Before/After chi tiết tại ai/ai-design-log.md.</a:t>
+            </a:r>
+          </a:p>
+        </p:txBody>
+      </p:sp>
+      <p:sp>
+        <p:nvSpPr>
+          <p:cNvPr id="8" name="Rounded Rectangle 7"/>
+          <p:cNvSpPr/>
+          <p:nvPr/>
+        </p:nvSpPr>
+        <p:spPr>
+          <a:xfrm>
+            <a:off x="7863840" y="1508760"/>
+            <a:ext cx="3596335" cy="4901184"/>
+          </a:xfrm>
+          <a:prstGeom prst="roundRect">
+            <a:avLst/>
+          </a:prstGeom>
+          <a:solidFill>
+            <a:srgbClr val="161E31"/>
+          </a:solidFill>
+          <a:ln>
+            <a:solidFill>
+              <a:srgbClr val="2D3748"/>
+            </a:solidFill>
+          </a:ln>
+        </p:spPr>
+        <p:style>
+          <a:lnRef idx="1">
+            <a:schemeClr val="accent1"/>
+          </a:lnRef>
+          <a:fillRef idx="3">
+            <a:schemeClr val="accent1"/>
+          </a:fillRef>
+          <a:effectRef idx="2">
+            <a:schemeClr val="accent1"/>
+          </a:effectRef>
+          <a:fontRef idx="minor">
+            <a:schemeClr val="lt1"/>
+          </a:fontRef>
+        </p:style>
+        <p:txBody>
           <a:bodyPr rtlCol="0" anchor="ctr"/>
           <a:lstStyle/>
           <a:p>
@@ -7903,7 +8996,7 @@
       </p:sp>
       <p:pic>
         <p:nvPicPr>
-          <p:cNvPr id="7" name="Picture 6" descr="figma_canvas_7_screens.png"/>
+          <p:cNvPr id="9" name="Picture 8" descr="figma_canvas_7_screens.png"/>
           <p:cNvPicPr>
             <a:picLocks noChangeAspect="1"/>
           </p:cNvPicPr>
@@ -7917,8 +9010,8 @@
         </p:blipFill>
         <p:spPr>
           <a:xfrm>
-            <a:off x="8092440" y="1508760"/>
-            <a:ext cx="3322015" cy="1764820"/>
+            <a:off x="8092440" y="1691640"/>
+            <a:ext cx="3139135" cy="1667665"/>
           </a:xfrm>
           <a:prstGeom prst="rect">
             <a:avLst/>
@@ -7958,12 +9051,10 @@
             <a:avLst/>
           </a:prstGeom>
           <a:solidFill>
-            <a:srgbClr val="0F172A"/>
+            <a:srgbClr val="0B0F19"/>
           </a:solidFill>
           <a:ln>
-            <a:solidFill>
-              <a:srgbClr val="0F172A"/>
-            </a:solidFill>
+            <a:noFill/>
           </a:ln>
         </p:spPr>
         <p:style>
@@ -7990,24 +9081,24 @@
       </p:sp>
       <p:sp>
         <p:nvSpPr>
-          <p:cNvPr id="3" name="Rectangle 2"/>
+          <p:cNvPr id="3" name="Rounded Rectangle 2"/>
           <p:cNvSpPr/>
           <p:nvPr/>
         </p:nvSpPr>
         <p:spPr>
           <a:xfrm>
-            <a:off x="548640" y="365760"/>
-            <a:ext cx="11094415" cy="777240"/>
-          </a:xfrm>
-          <a:prstGeom prst="rect">
+            <a:off x="731520" y="365760"/>
+            <a:ext cx="10728655" cy="1005840"/>
+          </a:xfrm>
+          <a:prstGeom prst="roundRect">
             <a:avLst/>
           </a:prstGeom>
           <a:solidFill>
-            <a:srgbClr val="1E293B"/>
+            <a:srgbClr val="161E31"/>
           </a:solidFill>
           <a:ln>
             <a:solidFill>
-              <a:srgbClr val="334155"/>
+              <a:srgbClr val="2D3748"/>
             </a:solidFill>
           </a:ln>
         </p:spPr>
@@ -8026,19 +9117,35 @@
           </a:fontRef>
         </p:style>
         <p:txBody>
-          <a:bodyPr rtlCol="0" anchor="ctr" wrap="square"/>
+          <a:bodyPr rtlCol="0" anchor="ctr" lIns="274320" tIns="109728" rIns="274320" bIns="109728" wrap="square"/>
           <a:lstStyle/>
           <a:p>
             <a:pPr algn="ctr">
+              <a:defRPr sz="1100" b="1">
+                <a:solidFill>
+                  <a:srgbClr val="38BDF8"/>
+                </a:solidFill>
+                <a:latin typeface="Arial"/>
+              </a:defRPr>
+            </a:pPr>
+            <a:r>
+              <a:t>07 / 12  ·  DESIGN DECISIONS</a:t>
+            </a:r>
+          </a:p>
+          <a:p>
+            <a:pPr>
+              <a:spcBef>
+                <a:spcPts val="200"/>
+              </a:spcBef>
               <a:defRPr sz="1700" b="1">
                 <a:solidFill>
-                  <a:srgbClr val="3B82F6"/>
-                </a:solidFill>
-                <a:latin typeface="Arial"/>
-              </a:defRPr>
-            </a:pPr>
-            <a:r>
-              <a:t>SLIDE 07 | MA TRẬN QUYẾT ĐỊNH THIẾT KẾ (ACCEPT / MODIFY / REJECT)</a:t>
+                  <a:srgbClr val="FFFFFF"/>
+                </a:solidFill>
+                <a:latin typeface="Arial"/>
+              </a:defRPr>
+            </a:pPr>
+            <a:r>
+              <a:t>Ma trận Quyết định Thiết kế (Accept / Modify / Reject)</a:t>
             </a:r>
           </a:p>
         </p:txBody>
@@ -8051,8 +9158,8 @@
         </p:nvSpPr>
         <p:spPr>
           <a:xfrm>
-            <a:off x="8412480" y="438912"/>
-            <a:ext cx="3108960" cy="594360"/>
+            <a:off x="7772400" y="438912"/>
+            <a:ext cx="3474720" cy="457200"/>
           </a:xfrm>
           <a:prstGeom prst="rect">
             <a:avLst/>
@@ -8066,9 +9173,9 @@
           <a:lstStyle/>
           <a:p>
             <a:pPr algn="r">
-              <a:defRPr sz="1300" b="1">
-                <a:solidFill>
-                  <a:srgbClr val="10B981"/>
+              <a:defRPr sz="1200" b="1">
+                <a:solidFill>
+                  <a:srgbClr val="34D399"/>
                 </a:solidFill>
                 <a:latin typeface="Arial"/>
               </a:defRPr>
@@ -8087,18 +9194,18 @@
         </p:nvSpPr>
         <p:spPr>
           <a:xfrm>
-            <a:off x="548640" y="1325880"/>
-            <a:ext cx="7132320" cy="5120640"/>
+            <a:off x="731520" y="1508760"/>
+            <a:ext cx="6949440" cy="1554480"/>
           </a:xfrm>
           <a:prstGeom prst="roundRect">
             <a:avLst/>
           </a:prstGeom>
           <a:solidFill>
-            <a:srgbClr val="1E293B"/>
+            <a:srgbClr val="161E31"/>
           </a:solidFill>
           <a:ln>
             <a:solidFill>
-              <a:srgbClr val="334155"/>
+              <a:srgbClr val="2D3748"/>
             </a:solidFill>
           </a:ln>
         </p:spPr>
@@ -8117,89 +9224,54 @@
           </a:fontRef>
         </p:style>
         <p:txBody>
-          <a:bodyPr rtlCol="0" anchor="ctr" wrap="square" tIns="274320" lIns="320040" rIns="320040" bIns="274320"/>
+          <a:bodyPr rtlCol="0" anchor="ctr" lIns="228600" tIns="164592" rIns="228600" wrap="square"/>
           <a:lstStyle/>
           <a:p>
             <a:pPr algn="ctr">
-              <a:spcBef>
-                <a:spcPts val="600"/>
-              </a:spcBef>
               <a:spcAft>
                 <a:spcPts val="400"/>
               </a:spcAft>
-              <a:defRPr sz="1400" b="1">
-                <a:solidFill>
-                  <a:srgbClr val="3B82F6"/>
-                </a:solidFill>
-                <a:latin typeface="Arial"/>
-              </a:defRPr>
-            </a:pPr>
-            <a:r>
-              <a:t>Bằng chứng năng lực phản biện thiết kế của Nhóm 4:</a:t>
-            </a:r>
-          </a:p>
-          <a:p>
-            <a:pPr lvl="1">
-              <a:spcAft>
-                <a:spcPts val="400"/>
-              </a:spcAft>
-              <a:defRPr sz="1250">
-                <a:solidFill>
-                  <a:srgbClr val="94A3B8"/>
-                </a:solidFill>
-                <a:latin typeface="Arial"/>
-              </a:defRPr>
-            </a:pPr>
-            <a:r>
-              <a:t>  • ACCEPT - Thẻ Skill Tags: Bố cục dạng thẻ chip trực quan, quét nhanh kỹ năng -&gt; Giữ nguyên, bổ sung thêm % tương thích.</a:t>
-            </a:r>
-          </a:p>
-          <a:p>
-            <a:pPr lvl="1">
-              <a:spcAft>
-                <a:spcPts val="400"/>
-              </a:spcAft>
-              <a:defRPr sz="1250">
-                <a:solidFill>
-                  <a:srgbClr val="94A3B8"/>
-                </a:solidFill>
-                <a:latin typeface="Arial"/>
-              </a:defRPr>
-            </a:pPr>
-            <a:r>
-              <a:t>  • MODIFY - Nút Apply trôi nổi: Nút bấm trôi nổi giữa card, khó bấm 1 ngón cái -&gt; Chuyển thành Sticky Bottom Dock (48x56 dp) cố định đáy.</a:t>
-            </a:r>
-          </a:p>
-          <a:p>
-            <a:pPr lvl="1">
-              <a:spcAft>
-                <a:spcPts val="400"/>
-              </a:spcAft>
-              <a:defRPr sz="1250">
-                <a:solidFill>
-                  <a:srgbClr val="94A3B8"/>
-                </a:solidFill>
-                <a:latin typeface="Arial"/>
-              </a:defRPr>
-            </a:pPr>
-            <a:r>
-              <a:t>  • REJECT - Pop-up Dialog toàn màn hình: Che mất ngữ cảnh dự án, gây gián đoạn -&gt; Thay bằng Modal Bottom Sheet kéo vuốt nửa màn hình.</a:t>
-            </a:r>
-          </a:p>
-          <a:p>
-            <a:pPr lvl="1">
-              <a:spcAft>
-                <a:spcPts val="400"/>
-              </a:spcAft>
-              <a:defRPr sz="1250">
-                <a:solidFill>
-                  <a:srgbClr val="94A3B8"/>
-                </a:solidFill>
-                <a:latin typeface="Arial"/>
-              </a:defRPr>
-            </a:pPr>
-            <a:r>
-              <a:t>  • REJECT - Báo trạng thái chỉ bằng màu sắc: Vi phạm trợ năng cho người mù màu -&gt; Bổ sung Icon minh họa + Text nhãn rõ ràng ("Đã duyệt").</a:t>
+              <a:defRPr sz="1300" b="1">
+                <a:solidFill>
+                  <a:srgbClr val="38BDF8"/>
+                </a:solidFill>
+                <a:latin typeface="Arial"/>
+              </a:defRPr>
+            </a:pPr>
+            <a:r>
+              <a:t>✅ Quyết định ACCEPT &amp; MODIFY</a:t>
+            </a:r>
+          </a:p>
+          <a:p>
+            <a:pPr>
+              <a:spcAft>
+                <a:spcPts val="200"/>
+              </a:spcAft>
+              <a:defRPr sz="1150">
+                <a:solidFill>
+                  <a:srgbClr val="E2E8F0"/>
+                </a:solidFill>
+                <a:latin typeface="Arial"/>
+              </a:defRPr>
+            </a:pPr>
+            <a:r>
+              <a:t>• ACCEPT - Thẻ Skill Tags: Bố cục dạng chip trực quan, quét nhanh kỹ năng -&gt; Giữ lại và bổ sung Match Badge.</a:t>
+            </a:r>
+          </a:p>
+          <a:p>
+            <a:pPr>
+              <a:spcAft>
+                <a:spcPts val="200"/>
+              </a:spcAft>
+              <a:defRPr sz="1150">
+                <a:solidFill>
+                  <a:srgbClr val="E2E8F0"/>
+                </a:solidFill>
+                <a:latin typeface="Arial"/>
+              </a:defRPr>
+            </a:pPr>
+            <a:r>
+              <a:t>• MODIFY - Nút Apply trôi nổi: Nút bấm ban đầu lơ lửng giữa thẻ -&gt; Chuyển thành Sticky Bottom Dock (48x56 dp) cố định đáy dễ bấm 1 tay.</a:t>
             </a:r>
           </a:p>
         </p:txBody>
@@ -8212,18 +9284,18 @@
         </p:nvSpPr>
         <p:spPr>
           <a:xfrm>
-            <a:off x="7863840" y="1325880"/>
-            <a:ext cx="3779215" cy="5120640"/>
+            <a:off x="731520" y="3182112"/>
+            <a:ext cx="6949440" cy="1554480"/>
           </a:xfrm>
           <a:prstGeom prst="roundRect">
             <a:avLst/>
           </a:prstGeom>
           <a:solidFill>
-            <a:srgbClr val="1E293B"/>
+            <a:srgbClr val="161E31"/>
           </a:solidFill>
           <a:ln>
             <a:solidFill>
-              <a:srgbClr val="334155"/>
+              <a:srgbClr val="2D3748"/>
             </a:solidFill>
           </a:ln>
         </p:spPr>
@@ -8242,6 +9314,170 @@
           </a:fontRef>
         </p:style>
         <p:txBody>
+          <a:bodyPr rtlCol="0" anchor="ctr" lIns="228600" tIns="164592" rIns="228600" wrap="square"/>
+          <a:lstStyle/>
+          <a:p>
+            <a:pPr algn="ctr">
+              <a:spcAft>
+                <a:spcPts val="400"/>
+              </a:spcAft>
+              <a:defRPr sz="1300" b="1">
+                <a:solidFill>
+                  <a:srgbClr val="34D399"/>
+                </a:solidFill>
+                <a:latin typeface="Arial"/>
+              </a:defRPr>
+            </a:pPr>
+            <a:r>
+              <a:t>❌ Quyết định REJECT có Căn cứ</a:t>
+            </a:r>
+          </a:p>
+          <a:p>
+            <a:pPr>
+              <a:spcAft>
+                <a:spcPts val="200"/>
+              </a:spcAft>
+              <a:defRPr sz="1150">
+                <a:solidFill>
+                  <a:srgbClr val="E2E8F0"/>
+                </a:solidFill>
+                <a:latin typeface="Arial"/>
+              </a:defRPr>
+            </a:pPr>
+            <a:r>
+              <a:t>• REJECT - Pop-up Dialog toàn màn hình: Che khuất ngữ cảnh dự án -&gt; Thay bằng Modal Bottom Sheet kéo vuốt nửa màn hình.</a:t>
+            </a:r>
+          </a:p>
+          <a:p>
+            <a:pPr>
+              <a:spcAft>
+                <a:spcPts val="200"/>
+              </a:spcAft>
+              <a:defRPr sz="1150">
+                <a:solidFill>
+                  <a:srgbClr val="E2E8F0"/>
+                </a:solidFill>
+                <a:latin typeface="Arial"/>
+              </a:defRPr>
+            </a:pPr>
+            <a:r>
+              <a:t>• REJECT - Báo trạng thái chỉ bằng màu sắc: Vi phạm người khiếm thị màu -&gt; Bổ sung cặp đôi Icon + Text nhãn rõ ràng.</a:t>
+            </a:r>
+          </a:p>
+        </p:txBody>
+      </p:sp>
+      <p:sp>
+        <p:nvSpPr>
+          <p:cNvPr id="7" name="Rounded Rectangle 6"/>
+          <p:cNvSpPr/>
+          <p:nvPr/>
+        </p:nvSpPr>
+        <p:spPr>
+          <a:xfrm>
+            <a:off x="731520" y="4855464"/>
+            <a:ext cx="6949440" cy="1554480"/>
+          </a:xfrm>
+          <a:prstGeom prst="roundRect">
+            <a:avLst/>
+          </a:prstGeom>
+          <a:solidFill>
+            <a:srgbClr val="161E31"/>
+          </a:solidFill>
+          <a:ln>
+            <a:solidFill>
+              <a:srgbClr val="2D3748"/>
+            </a:solidFill>
+          </a:ln>
+        </p:spPr>
+        <p:style>
+          <a:lnRef idx="1">
+            <a:schemeClr val="accent1"/>
+          </a:lnRef>
+          <a:fillRef idx="3">
+            <a:schemeClr val="accent1"/>
+          </a:fillRef>
+          <a:effectRef idx="2">
+            <a:schemeClr val="accent1"/>
+          </a:effectRef>
+          <a:fontRef idx="minor">
+            <a:schemeClr val="lt1"/>
+          </a:fontRef>
+        </p:style>
+        <p:txBody>
+          <a:bodyPr rtlCol="0" anchor="ctr" lIns="228600" tIns="164592" rIns="228600" wrap="square"/>
+          <a:lstStyle/>
+          <a:p>
+            <a:pPr algn="ctr">
+              <a:spcAft>
+                <a:spcPts val="400"/>
+              </a:spcAft>
+              <a:defRPr sz="1300" b="1">
+                <a:solidFill>
+                  <a:srgbClr val="38BDF8"/>
+                </a:solidFill>
+                <a:latin typeface="Arial"/>
+              </a:defRPr>
+            </a:pPr>
+            <a:r>
+              <a:t>📁 Minh chứng</a:t>
+            </a:r>
+          </a:p>
+          <a:p>
+            <a:pPr>
+              <a:spcAft>
+                <a:spcPts val="200"/>
+              </a:spcAft>
+              <a:defRPr sz="1150">
+                <a:solidFill>
+                  <a:srgbClr val="94A3B8"/>
+                </a:solidFill>
+                <a:latin typeface="Arial"/>
+              </a:defRPr>
+            </a:pPr>
+            <a:r>
+              <a:t>• Hồ sơ 10 quyết định thiết kế tại design/design-decisions.md.</a:t>
+            </a:r>
+          </a:p>
+        </p:txBody>
+      </p:sp>
+      <p:sp>
+        <p:nvSpPr>
+          <p:cNvPr id="8" name="Rounded Rectangle 7"/>
+          <p:cNvSpPr/>
+          <p:nvPr/>
+        </p:nvSpPr>
+        <p:spPr>
+          <a:xfrm>
+            <a:off x="7863840" y="1508760"/>
+            <a:ext cx="3596335" cy="4901184"/>
+          </a:xfrm>
+          <a:prstGeom prst="roundRect">
+            <a:avLst/>
+          </a:prstGeom>
+          <a:solidFill>
+            <a:srgbClr val="161E31"/>
+          </a:solidFill>
+          <a:ln>
+            <a:solidFill>
+              <a:srgbClr val="2D3748"/>
+            </a:solidFill>
+          </a:ln>
+        </p:spPr>
+        <p:style>
+          <a:lnRef idx="1">
+            <a:schemeClr val="accent1"/>
+          </a:lnRef>
+          <a:fillRef idx="3">
+            <a:schemeClr val="accent1"/>
+          </a:fillRef>
+          <a:effectRef idx="2">
+            <a:schemeClr val="accent1"/>
+          </a:effectRef>
+          <a:fontRef idx="minor">
+            <a:schemeClr val="lt1"/>
+          </a:fontRef>
+        </p:style>
+        <p:txBody>
           <a:bodyPr rtlCol="0" anchor="ctr"/>
           <a:lstStyle/>
           <a:p>
@@ -8251,7 +9487,7 @@
       </p:sp>
       <p:pic>
         <p:nvPicPr>
-          <p:cNvPr id="7" name="Picture 6" descr="screen_03_apply_sheet.png"/>
+          <p:cNvPr id="9" name="Picture 8" descr="screen_03_apply_sheet.png"/>
           <p:cNvPicPr>
             <a:picLocks noChangeAspect="1"/>
           </p:cNvPicPr>
@@ -8265,8 +9501,8 @@
         </p:blipFill>
         <p:spPr>
           <a:xfrm>
-            <a:off x="8092440" y="1508760"/>
-            <a:ext cx="3322015" cy="12552559"/>
+            <a:off x="8092440" y="1691640"/>
+            <a:ext cx="3139135" cy="11861529"/>
           </a:xfrm>
           <a:prstGeom prst="rect">
             <a:avLst/>
@@ -8306,12 +9542,10 @@
             <a:avLst/>
           </a:prstGeom>
           <a:solidFill>
-            <a:srgbClr val="0F172A"/>
+            <a:srgbClr val="0B0F19"/>
           </a:solidFill>
           <a:ln>
-            <a:solidFill>
-              <a:srgbClr val="0F172A"/>
-            </a:solidFill>
+            <a:noFill/>
           </a:ln>
         </p:spPr>
         <p:style>
@@ -8338,24 +9572,24 @@
       </p:sp>
       <p:sp>
         <p:nvSpPr>
-          <p:cNvPr id="3" name="Rectangle 2"/>
+          <p:cNvPr id="3" name="Rounded Rectangle 2"/>
           <p:cNvSpPr/>
           <p:nvPr/>
         </p:nvSpPr>
         <p:spPr>
           <a:xfrm>
-            <a:off x="548640" y="365760"/>
-            <a:ext cx="11094415" cy="777240"/>
-          </a:xfrm>
-          <a:prstGeom prst="rect">
+            <a:off x="731520" y="365760"/>
+            <a:ext cx="10728655" cy="1005840"/>
+          </a:xfrm>
+          <a:prstGeom prst="roundRect">
             <a:avLst/>
           </a:prstGeom>
           <a:solidFill>
-            <a:srgbClr val="1E293B"/>
+            <a:srgbClr val="161E31"/>
           </a:solidFill>
           <a:ln>
             <a:solidFill>
-              <a:srgbClr val="334155"/>
+              <a:srgbClr val="2D3748"/>
             </a:solidFill>
           </a:ln>
         </p:spPr>
@@ -8374,19 +9608,35 @@
           </a:fontRef>
         </p:style>
         <p:txBody>
-          <a:bodyPr rtlCol="0" anchor="ctr" wrap="square"/>
+          <a:bodyPr rtlCol="0" anchor="ctr" lIns="274320" tIns="109728" rIns="274320" bIns="109728" wrap="square"/>
           <a:lstStyle/>
           <a:p>
             <a:pPr algn="ctr">
+              <a:defRPr sz="1100" b="1">
+                <a:solidFill>
+                  <a:srgbClr val="38BDF8"/>
+                </a:solidFill>
+                <a:latin typeface="Arial"/>
+              </a:defRPr>
+            </a:pPr>
+            <a:r>
+              <a:t>08 / 12  ·  FINAL UI SCREENS</a:t>
+            </a:r>
+          </a:p>
+          <a:p>
+            <a:pPr>
+              <a:spcBef>
+                <a:spcPts val="200"/>
+              </a:spcBef>
               <a:defRPr sz="1700" b="1">
                 <a:solidFill>
-                  <a:srgbClr val="3B82F6"/>
-                </a:solidFill>
-                <a:latin typeface="Arial"/>
-              </a:defRPr>
-            </a:pPr>
-            <a:r>
-              <a:t>SLIDE 08 | WIREFRAME -&gt; FINAL UI (8 MÀN HÌNH HOÀN CHỈNH)</a:t>
+                  <a:srgbClr val="FFFFFF"/>
+                </a:solidFill>
+                <a:latin typeface="Arial"/>
+              </a:defRPr>
+            </a:pPr>
+            <a:r>
+              <a:t>Chuyển hóa: Wireframe sang 8 Màn hình Hoàn chỉnh</a:t>
             </a:r>
           </a:p>
         </p:txBody>
@@ -8399,8 +9649,8 @@
         </p:nvSpPr>
         <p:spPr>
           <a:xfrm>
-            <a:off x="8412480" y="438912"/>
-            <a:ext cx="3108960" cy="594360"/>
+            <a:off x="7772400" y="438912"/>
+            <a:ext cx="3474720" cy="457200"/>
           </a:xfrm>
           <a:prstGeom prst="rect">
             <a:avLst/>
@@ -8414,9 +9664,9 @@
           <a:lstStyle/>
           <a:p>
             <a:pPr algn="r">
-              <a:defRPr sz="1300" b="1">
-                <a:solidFill>
-                  <a:srgbClr val="10B981"/>
+              <a:defRPr sz="1200" b="1">
+                <a:solidFill>
+                  <a:srgbClr val="34D399"/>
                 </a:solidFill>
                 <a:latin typeface="Arial"/>
               </a:defRPr>
@@ -8435,18 +9685,18 @@
         </p:nvSpPr>
         <p:spPr>
           <a:xfrm>
-            <a:off x="548640" y="1325880"/>
-            <a:ext cx="7132320" cy="5120640"/>
+            <a:off x="731520" y="1508760"/>
+            <a:ext cx="6949440" cy="1554480"/>
           </a:xfrm>
           <a:prstGeom prst="roundRect">
             <a:avLst/>
           </a:prstGeom>
           <a:solidFill>
-            <a:srgbClr val="1E293B"/>
+            <a:srgbClr val="161E31"/>
           </a:solidFill>
           <a:ln>
             <a:solidFill>
-              <a:srgbClr val="334155"/>
+              <a:srgbClr val="2D3748"/>
             </a:solidFill>
           </a:ln>
         </p:spPr>
@@ -8465,169 +9715,150 @@
           </a:fontRef>
         </p:style>
         <p:txBody>
-          <a:bodyPr rtlCol="0" anchor="ctr" wrap="square" tIns="274320" lIns="320040" rIns="320040" bIns="274320"/>
+          <a:bodyPr rtlCol="0" anchor="ctr" lIns="228600" tIns="164592" rIns="228600" wrap="square"/>
           <a:lstStyle/>
           <a:p>
             <a:pPr algn="ctr">
-              <a:spcBef>
-                <a:spcPts val="600"/>
-              </a:spcBef>
               <a:spcAft>
                 <a:spcPts val="400"/>
               </a:spcAft>
-              <a:defRPr sz="1400" b="1">
-                <a:solidFill>
-                  <a:srgbClr val="3B82F6"/>
-                </a:solidFill>
-                <a:latin typeface="Arial"/>
-              </a:defRPr>
-            </a:pPr>
-            <a:r>
-              <a:t>Trưng bày 8 Màn hình Độc lập (Đáp ứng chuẩn kiểm định C6 môn học):</a:t>
-            </a:r>
-          </a:p>
-          <a:p>
-            <a:pPr lvl="1">
-              <a:spcAft>
-                <a:spcPts val="400"/>
-              </a:spcAft>
-              <a:defRPr sz="1250">
-                <a:solidFill>
-                  <a:srgbClr val="94A3B8"/>
-                </a:solidFill>
-                <a:latin typeface="Arial"/>
-              </a:defRPr>
-            </a:pPr>
-            <a:r>
-              <a:t>  1. Screen 01: Discovery Feed (Khám phá dự án &amp; bộ lọc)</a:t>
-            </a:r>
-          </a:p>
-          <a:p>
-            <a:pPr lvl="1">
-              <a:spcAft>
-                <a:spcPts val="400"/>
-              </a:spcAft>
-              <a:defRPr sz="1250">
-                <a:solidFill>
-                  <a:srgbClr val="94A3B8"/>
-                </a:solidFill>
-                <a:latin typeface="Arial"/>
-              </a:defRPr>
-            </a:pPr>
-            <a:r>
-              <a:t>  2. Screen 02: Project Detail (Chi tiết dự án &amp; Skill Matrix)</a:t>
-            </a:r>
-          </a:p>
-          <a:p>
-            <a:pPr lvl="1">
-              <a:spcAft>
-                <a:spcPts val="400"/>
-              </a:spcAft>
-              <a:defRPr sz="1250">
-                <a:solidFill>
-                  <a:srgbClr val="94A3B8"/>
-                </a:solidFill>
-                <a:latin typeface="Arial"/>
-              </a:defRPr>
-            </a:pPr>
-            <a:r>
-              <a:t>  3. Screen 03: Apply Modal Sheet (Điền đơn &amp; cam kết giờ)</a:t>
-            </a:r>
-          </a:p>
-          <a:p>
-            <a:pPr lvl="1">
-              <a:spcAft>
-                <a:spcPts val="400"/>
-              </a:spcAft>
-              <a:defRPr sz="1250">
-                <a:solidFill>
-                  <a:srgbClr val="94A3B8"/>
-                </a:solidFill>
-                <a:latin typeface="Arial"/>
-              </a:defRPr>
-            </a:pPr>
-            <a:r>
-              <a:t>  4. Screen 04: Application Submitted (Xác nhận gửi đơn thành công)</a:t>
-            </a:r>
-          </a:p>
-          <a:p>
-            <a:pPr lvl="1">
-              <a:spcAft>
-                <a:spcPts val="400"/>
-              </a:spcAft>
-              <a:defRPr sz="1250">
-                <a:solidFill>
-                  <a:srgbClr val="94A3B8"/>
-                </a:solidFill>
-                <a:latin typeface="Arial"/>
-              </a:defRPr>
-            </a:pPr>
-            <a:r>
-              <a:t>  5. Screen 05: My Applications Tracker (Quản lý tiến độ đơn)</a:t>
-            </a:r>
-          </a:p>
-          <a:p>
-            <a:pPr lvl="1">
-              <a:spcAft>
-                <a:spcPts val="400"/>
-              </a:spcAft>
-              <a:defRPr sz="1250">
-                <a:solidFill>
-                  <a:srgbClr val="94A3B8"/>
-                </a:solidFill>
-                <a:latin typeface="Arial"/>
-              </a:defRPr>
-            </a:pPr>
-            <a:r>
-              <a:t>  6. Screen 06: Chemistry Call Scheduler (Lên lịch phỏng vấn)</a:t>
-            </a:r>
-          </a:p>
-          <a:p>
-            <a:pPr lvl="1">
-              <a:spcAft>
-                <a:spcPts val="400"/>
-              </a:spcAft>
-              <a:defRPr sz="1250">
-                <a:solidFill>
-                  <a:srgbClr val="94A3B8"/>
-                </a:solidFill>
-                <a:latin typeface="Arial"/>
-              </a:defRPr>
-            </a:pPr>
-            <a:r>
-              <a:t>  7. Screen 07: Chemistry Call Confirmed (Lịch hẹn hoàn tất)</a:t>
-            </a:r>
-          </a:p>
-          <a:p>
-            <a:pPr lvl="1">
-              <a:spcAft>
-                <a:spcPts val="400"/>
-              </a:spcAft>
-              <a:defRPr sz="1250">
-                <a:solidFill>
-                  <a:srgbClr val="94A3B8"/>
-                </a:solidFill>
-                <a:latin typeface="Arial"/>
-              </a:defRPr>
-            </a:pPr>
-            <a:r>
-              <a:t>  8. Screen 08: Empty State &amp; Recovery (Phục hồi tìm kiếm)</a:t>
+              <a:defRPr sz="1300" b="1">
+                <a:solidFill>
+                  <a:srgbClr val="38BDF8"/>
+                </a:solidFill>
+                <a:latin typeface="Arial"/>
+              </a:defRPr>
+            </a:pPr>
+            <a:r>
+              <a:t>📱 8 Màn hình Chức năng Độc lập (Chuẩn C6)</a:t>
             </a:r>
           </a:p>
           <a:p>
             <a:pPr>
               <a:spcAft>
-                <a:spcPts val="600"/>
-              </a:spcAft>
-              <a:defRPr sz="1300">
-                <a:solidFill>
-                  <a:srgbClr val="F8FAFC"/>
-                </a:solidFill>
-                <a:latin typeface="Arial"/>
-              </a:defRPr>
-            </a:pPr>
-            <a:r>
-              <a:t>Tiêu chuẩn: Hệ thống lưới 8dp, font Inter sắc nét, độ tương phản đạt chuẩn.</a:t>
+                <a:spcPts val="200"/>
+              </a:spcAft>
+              <a:defRPr sz="1150">
+                <a:solidFill>
+                  <a:srgbClr val="E2E8F0"/>
+                </a:solidFill>
+                <a:latin typeface="Arial"/>
+              </a:defRPr>
+            </a:pPr>
+            <a:r>
+              <a:t>• Screen 01: Discovery Feed (Khám phá dự án &amp; bộ lọc)</a:t>
+            </a:r>
+          </a:p>
+          <a:p>
+            <a:pPr>
+              <a:spcAft>
+                <a:spcPts val="200"/>
+              </a:spcAft>
+              <a:defRPr sz="1150">
+                <a:solidFill>
+                  <a:srgbClr val="E2E8F0"/>
+                </a:solidFill>
+                <a:latin typeface="Arial"/>
+              </a:defRPr>
+            </a:pPr>
+            <a:r>
+              <a:t>• Screen 02: Project Detail (Chi tiết dự án &amp; Skill Matrix)</a:t>
+            </a:r>
+          </a:p>
+          <a:p>
+            <a:pPr>
+              <a:spcAft>
+                <a:spcPts val="200"/>
+              </a:spcAft>
+              <a:defRPr sz="1150">
+                <a:solidFill>
+                  <a:srgbClr val="E2E8F0"/>
+                </a:solidFill>
+                <a:latin typeface="Arial"/>
+              </a:defRPr>
+            </a:pPr>
+            <a:r>
+              <a:t>• Screen 03: Apply Modal Sheet (Nộp đơn ứng tuyển)</a:t>
+            </a:r>
+          </a:p>
+          <a:p>
+            <a:pPr>
+              <a:spcAft>
+                <a:spcPts val="200"/>
+              </a:spcAft>
+              <a:defRPr sz="1150">
+                <a:solidFill>
+                  <a:srgbClr val="E2E8F0"/>
+                </a:solidFill>
+                <a:latin typeface="Arial"/>
+              </a:defRPr>
+            </a:pPr>
+            <a:r>
+              <a:t>• Screen 04: Application Submitted (Xác nhận gửi đơn)</a:t>
+            </a:r>
+          </a:p>
+          <a:p>
+            <a:pPr>
+              <a:spcAft>
+                <a:spcPts val="200"/>
+              </a:spcAft>
+              <a:defRPr sz="1150">
+                <a:solidFill>
+                  <a:srgbClr val="E2E8F0"/>
+                </a:solidFill>
+                <a:latin typeface="Arial"/>
+              </a:defRPr>
+            </a:pPr>
+            <a:r>
+              <a:t>• Screen 05: Applications Tracker (Theo dõi tiến độ)</a:t>
+            </a:r>
+          </a:p>
+          <a:p>
+            <a:pPr>
+              <a:spcAft>
+                <a:spcPts val="200"/>
+              </a:spcAft>
+              <a:defRPr sz="1150">
+                <a:solidFill>
+                  <a:srgbClr val="E2E8F0"/>
+                </a:solidFill>
+                <a:latin typeface="Arial"/>
+              </a:defRPr>
+            </a:pPr>
+            <a:r>
+              <a:t>• Screen 06: Chemistry Call Scheduler (Lên lịch trao đổi)</a:t>
+            </a:r>
+          </a:p>
+          <a:p>
+            <a:pPr>
+              <a:spcAft>
+                <a:spcPts val="200"/>
+              </a:spcAft>
+              <a:defRPr sz="1150">
+                <a:solidFill>
+                  <a:srgbClr val="E2E8F0"/>
+                </a:solidFill>
+                <a:latin typeface="Arial"/>
+              </a:defRPr>
+            </a:pPr>
+            <a:r>
+              <a:t>• Screen 07: Chemistry Call Confirmed (Lịch hẹn hoàn tất)</a:t>
+            </a:r>
+          </a:p>
+          <a:p>
+            <a:pPr>
+              <a:spcAft>
+                <a:spcPts val="200"/>
+              </a:spcAft>
+              <a:defRPr sz="1150">
+                <a:solidFill>
+                  <a:srgbClr val="E2E8F0"/>
+                </a:solidFill>
+                <a:latin typeface="Arial"/>
+              </a:defRPr>
+            </a:pPr>
+            <a:r>
+              <a:t>• Screen 08: Empty State Recovery (Phục hồi tìm kiếm)</a:t>
             </a:r>
           </a:p>
         </p:txBody>
@@ -8640,18 +9871,18 @@
         </p:nvSpPr>
         <p:spPr>
           <a:xfrm>
-            <a:off x="7863840" y="1325880"/>
-            <a:ext cx="3779215" cy="5120640"/>
+            <a:off x="731520" y="3182112"/>
+            <a:ext cx="6949440" cy="1554480"/>
           </a:xfrm>
           <a:prstGeom prst="roundRect">
             <a:avLst/>
           </a:prstGeom>
           <a:solidFill>
-            <a:srgbClr val="1E293B"/>
+            <a:srgbClr val="161E31"/>
           </a:solidFill>
           <a:ln>
             <a:solidFill>
-              <a:srgbClr val="334155"/>
+              <a:srgbClr val="2D3748"/>
             </a:solidFill>
           </a:ln>
         </p:spPr>
@@ -8670,6 +9901,170 @@
           </a:fontRef>
         </p:style>
         <p:txBody>
+          <a:bodyPr rtlCol="0" anchor="ctr" lIns="228600" tIns="164592" rIns="228600" wrap="square"/>
+          <a:lstStyle/>
+          <a:p>
+            <a:pPr algn="ctr">
+              <a:spcAft>
+                <a:spcPts val="400"/>
+              </a:spcAft>
+              <a:defRPr sz="1300" b="1">
+                <a:solidFill>
+                  <a:srgbClr val="34D399"/>
+                </a:solidFill>
+                <a:latin typeface="Arial"/>
+              </a:defRPr>
+            </a:pPr>
+            <a:r>
+              <a:t>🎨 Tính Nhất quán Thị giác</a:t>
+            </a:r>
+          </a:p>
+          <a:p>
+            <a:pPr>
+              <a:spcAft>
+                <a:spcPts val="200"/>
+              </a:spcAft>
+              <a:defRPr sz="1150">
+                <a:solidFill>
+                  <a:srgbClr val="E2E8F0"/>
+                </a:solidFill>
+                <a:latin typeface="Arial"/>
+              </a:defRPr>
+            </a:pPr>
+            <a:r>
+              <a:t>• Tuân thủ hệ thống lưới cơ sở 8dp và phân cấp typography rõ ràng.</a:t>
+            </a:r>
+          </a:p>
+          <a:p>
+            <a:pPr>
+              <a:spcAft>
+                <a:spcPts val="200"/>
+              </a:spcAft>
+              <a:defRPr sz="1150">
+                <a:solidFill>
+                  <a:srgbClr val="E2E8F0"/>
+                </a:solidFill>
+                <a:latin typeface="Arial"/>
+              </a:defRPr>
+            </a:pPr>
+            <a:r>
+              <a:t>• Không tính các biến thể pop-up nhỏ, đảm bảo đủ 8 màn hình riêng biệt.</a:t>
+            </a:r>
+          </a:p>
+        </p:txBody>
+      </p:sp>
+      <p:sp>
+        <p:nvSpPr>
+          <p:cNvPr id="7" name="Rounded Rectangle 6"/>
+          <p:cNvSpPr/>
+          <p:nvPr/>
+        </p:nvSpPr>
+        <p:spPr>
+          <a:xfrm>
+            <a:off x="731520" y="4855464"/>
+            <a:ext cx="6949440" cy="1554480"/>
+          </a:xfrm>
+          <a:prstGeom prst="roundRect">
+            <a:avLst/>
+          </a:prstGeom>
+          <a:solidFill>
+            <a:srgbClr val="161E31"/>
+          </a:solidFill>
+          <a:ln>
+            <a:solidFill>
+              <a:srgbClr val="2D3748"/>
+            </a:solidFill>
+          </a:ln>
+        </p:spPr>
+        <p:style>
+          <a:lnRef idx="1">
+            <a:schemeClr val="accent1"/>
+          </a:lnRef>
+          <a:fillRef idx="3">
+            <a:schemeClr val="accent1"/>
+          </a:fillRef>
+          <a:effectRef idx="2">
+            <a:schemeClr val="accent1"/>
+          </a:effectRef>
+          <a:fontRef idx="minor">
+            <a:schemeClr val="lt1"/>
+          </a:fontRef>
+        </p:style>
+        <p:txBody>
+          <a:bodyPr rtlCol="0" anchor="ctr" lIns="228600" tIns="164592" rIns="228600" wrap="square"/>
+          <a:lstStyle/>
+          <a:p>
+            <a:pPr algn="ctr">
+              <a:spcAft>
+                <a:spcPts val="400"/>
+              </a:spcAft>
+              <a:defRPr sz="1300" b="1">
+                <a:solidFill>
+                  <a:srgbClr val="38BDF8"/>
+                </a:solidFill>
+                <a:latin typeface="Arial"/>
+              </a:defRPr>
+            </a:pPr>
+            <a:r>
+              <a:t>📁 Minh chứng</a:t>
+            </a:r>
+          </a:p>
+          <a:p>
+            <a:pPr>
+              <a:spcAft>
+                <a:spcPts val="200"/>
+              </a:spcAft>
+              <a:defRPr sz="1150">
+                <a:solidFill>
+                  <a:srgbClr val="94A3B8"/>
+                </a:solidFill>
+                <a:latin typeface="Arial"/>
+              </a:defRPr>
+            </a:pPr>
+            <a:r>
+              <a:t>• Kiểm tra tại Figma Page 02 Wireframe và Page 03 Final UI.</a:t>
+            </a:r>
+          </a:p>
+        </p:txBody>
+      </p:sp>
+      <p:sp>
+        <p:nvSpPr>
+          <p:cNvPr id="8" name="Rounded Rectangle 7"/>
+          <p:cNvSpPr/>
+          <p:nvPr/>
+        </p:nvSpPr>
+        <p:spPr>
+          <a:xfrm>
+            <a:off x="7863840" y="1508760"/>
+            <a:ext cx="3596335" cy="4901184"/>
+          </a:xfrm>
+          <a:prstGeom prst="roundRect">
+            <a:avLst/>
+          </a:prstGeom>
+          <a:solidFill>
+            <a:srgbClr val="161E31"/>
+          </a:solidFill>
+          <a:ln>
+            <a:solidFill>
+              <a:srgbClr val="2D3748"/>
+            </a:solidFill>
+          </a:ln>
+        </p:spPr>
+        <p:style>
+          <a:lnRef idx="1">
+            <a:schemeClr val="accent1"/>
+          </a:lnRef>
+          <a:fillRef idx="3">
+            <a:schemeClr val="accent1"/>
+          </a:fillRef>
+          <a:effectRef idx="2">
+            <a:schemeClr val="accent1"/>
+          </a:effectRef>
+          <a:fontRef idx="minor">
+            <a:schemeClr val="lt1"/>
+          </a:fontRef>
+        </p:style>
+        <p:txBody>
           <a:bodyPr rtlCol="0" anchor="ctr"/>
           <a:lstStyle/>
           <a:p>
@@ -8679,7 +10074,7 @@
       </p:sp>
       <p:pic>
         <p:nvPicPr>
-          <p:cNvPr id="7" name="Picture 6" descr="figma_canvas_8_screens.png"/>
+          <p:cNvPr id="9" name="Picture 8" descr="figma_canvas_8_screens.png"/>
           <p:cNvPicPr>
             <a:picLocks noChangeAspect="1"/>
           </p:cNvPicPr>
@@ -8693,8 +10088,8 @@
         </p:blipFill>
         <p:spPr>
           <a:xfrm>
-            <a:off x="8092440" y="1508760"/>
-            <a:ext cx="3322015" cy="1764820"/>
+            <a:off x="8092440" y="1691640"/>
+            <a:ext cx="3139135" cy="1667665"/>
           </a:xfrm>
           <a:prstGeom prst="rect">
             <a:avLst/>
@@ -8734,12 +10129,10 @@
             <a:avLst/>
           </a:prstGeom>
           <a:solidFill>
-            <a:srgbClr val="0F172A"/>
+            <a:srgbClr val="0B0F19"/>
           </a:solidFill>
           <a:ln>
-            <a:solidFill>
-              <a:srgbClr val="0F172A"/>
-            </a:solidFill>
+            <a:noFill/>
           </a:ln>
         </p:spPr>
         <p:style>
@@ -8766,24 +10159,24 @@
       </p:sp>
       <p:sp>
         <p:nvSpPr>
-          <p:cNvPr id="3" name="Rectangle 2"/>
+          <p:cNvPr id="3" name="Rounded Rectangle 2"/>
           <p:cNvSpPr/>
           <p:nvPr/>
         </p:nvSpPr>
         <p:spPr>
           <a:xfrm>
-            <a:off x="548640" y="365760"/>
-            <a:ext cx="11094415" cy="777240"/>
-          </a:xfrm>
-          <a:prstGeom prst="rect">
+            <a:off x="731520" y="365760"/>
+            <a:ext cx="10728655" cy="1005840"/>
+          </a:xfrm>
+          <a:prstGeom prst="roundRect">
             <a:avLst/>
           </a:prstGeom>
           <a:solidFill>
-            <a:srgbClr val="1E293B"/>
+            <a:srgbClr val="161E31"/>
           </a:solidFill>
           <a:ln>
             <a:solidFill>
-              <a:srgbClr val="334155"/>
+              <a:srgbClr val="2D3748"/>
             </a:solidFill>
           </a:ln>
         </p:spPr>
@@ -8802,19 +10195,35 @@
           </a:fontRef>
         </p:style>
         <p:txBody>
-          <a:bodyPr rtlCol="0" anchor="ctr" wrap="square"/>
+          <a:bodyPr rtlCol="0" anchor="ctr" lIns="274320" tIns="109728" rIns="274320" bIns="109728" wrap="square"/>
           <a:lstStyle/>
           <a:p>
             <a:pPr algn="ctr">
+              <a:defRPr sz="1100" b="1">
+                <a:solidFill>
+                  <a:srgbClr val="38BDF8"/>
+                </a:solidFill>
+                <a:latin typeface="Arial"/>
+              </a:defRPr>
+            </a:pPr>
+            <a:r>
+              <a:t>09 / 12  ·  DESIGN SYSTEM</a:t>
+            </a:r>
+          </a:p>
+          <a:p>
+            <a:pPr>
+              <a:spcBef>
+                <a:spcPts val="200"/>
+              </a:spcBef>
               <a:defRPr sz="1700" b="1">
                 <a:solidFill>
-                  <a:srgbClr val="3B82F6"/>
-                </a:solidFill>
-                <a:latin typeface="Arial"/>
-              </a:defRPr>
-            </a:pPr>
-            <a:r>
-              <a:t>SLIDE 09 | DESIGN SYSTEM &amp; 9 NHÓM COMPONENTS FIGMA</a:t>
+                  <a:srgbClr val="FFFFFF"/>
+                </a:solidFill>
+                <a:latin typeface="Arial"/>
+              </a:defRPr>
+            </a:pPr>
+            <a:r>
+              <a:t>Design Tokens &amp; 9 Nhóm Components Figma</a:t>
             </a:r>
           </a:p>
         </p:txBody>
@@ -8827,8 +10236,8 @@
         </p:nvSpPr>
         <p:spPr>
           <a:xfrm>
-            <a:off x="8412480" y="438912"/>
-            <a:ext cx="3108960" cy="594360"/>
+            <a:off x="7772400" y="438912"/>
+            <a:ext cx="3474720" cy="457200"/>
           </a:xfrm>
           <a:prstGeom prst="rect">
             <a:avLst/>
@@ -8842,9 +10251,9 @@
           <a:lstStyle/>
           <a:p>
             <a:pPr algn="r">
-              <a:defRPr sz="1300" b="1">
-                <a:solidFill>
-                  <a:srgbClr val="10B981"/>
+              <a:defRPr sz="1200" b="1">
+                <a:solidFill>
+                  <a:srgbClr val="34D399"/>
                 </a:solidFill>
                 <a:latin typeface="Arial"/>
               </a:defRPr>
@@ -8863,18 +10272,18 @@
         </p:nvSpPr>
         <p:spPr>
           <a:xfrm>
-            <a:off x="548640" y="1325880"/>
-            <a:ext cx="7132320" cy="5120640"/>
+            <a:off x="731520" y="1508760"/>
+            <a:ext cx="6949440" cy="1554480"/>
           </a:xfrm>
           <a:prstGeom prst="roundRect">
             <a:avLst/>
           </a:prstGeom>
           <a:solidFill>
-            <a:srgbClr val="1E293B"/>
+            <a:srgbClr val="161E31"/>
           </a:solidFill>
           <a:ln>
             <a:solidFill>
-              <a:srgbClr val="334155"/>
+              <a:srgbClr val="2D3748"/>
             </a:solidFill>
           </a:ln>
         </p:spPr>
@@ -8893,172 +10302,70 @@
           </a:fontRef>
         </p:style>
         <p:txBody>
-          <a:bodyPr rtlCol="0" anchor="ctr" wrap="square" tIns="274320" lIns="320040" rIns="320040" bIns="274320"/>
+          <a:bodyPr rtlCol="0" anchor="ctr" lIns="228600" tIns="164592" rIns="228600" wrap="square"/>
           <a:lstStyle/>
           <a:p>
             <a:pPr algn="ctr">
-              <a:spcBef>
-                <a:spcPts val="600"/>
-              </a:spcBef>
               <a:spcAft>
                 <a:spcPts val="400"/>
               </a:spcAft>
-              <a:defRPr sz="1400" b="1">
-                <a:solidFill>
-                  <a:srgbClr val="3B82F6"/>
-                </a:solidFill>
-                <a:latin typeface="Arial"/>
-              </a:defRPr>
-            </a:pPr>
-            <a:r>
-              <a:t>Hệ thống Design Tokens quản lý bằng Figma Variables:</a:t>
-            </a:r>
-          </a:p>
-          <a:p>
-            <a:pPr lvl="1">
-              <a:spcAft>
-                <a:spcPts val="400"/>
-              </a:spcAft>
-              <a:defRPr sz="1250">
-                <a:solidFill>
-                  <a:srgbClr val="94A3B8"/>
-                </a:solidFill>
-                <a:latin typeface="Arial"/>
-              </a:defRPr>
-            </a:pPr>
-            <a:r>
-              <a:t>  • Màu sắc: Primary Blue (#2563EB), Deep Navy (#0F172A), Emerald Success (#10B981).</a:t>
-            </a:r>
-          </a:p>
-          <a:p>
-            <a:pPr lvl="1">
-              <a:spcAft>
-                <a:spcPts val="400"/>
-              </a:spcAft>
-              <a:defRPr sz="1250">
-                <a:solidFill>
-                  <a:srgbClr val="94A3B8"/>
-                </a:solidFill>
-                <a:latin typeface="Arial"/>
-              </a:defRPr>
-            </a:pPr>
-            <a:r>
-              <a:t>  • Lưới Spacing cơ sở: 4dp, 8dp, 16dp, 24dp | Bo góc Radius: 8dp, 12dp.</a:t>
-            </a:r>
-          </a:p>
-          <a:p>
-            <a:pPr lvl="1">
-              <a:spcAft>
-                <a:spcPts val="400"/>
-              </a:spcAft>
-              <a:defRPr sz="1250">
-                <a:solidFill>
-                  <a:srgbClr val="94A3B8"/>
-                </a:solidFill>
-                <a:latin typeface="Arial"/>
-              </a:defRPr>
-            </a:pPr>
-            <a:r>
-              <a:t>  • Typography: Font Inter phân cấp Display 24sp, Title 18sp, Body 14sp.</a:t>
+              <a:defRPr sz="1300" b="1">
+                <a:solidFill>
+                  <a:srgbClr val="38BDF8"/>
+                </a:solidFill>
+                <a:latin typeface="Arial"/>
+              </a:defRPr>
+            </a:pPr>
+            <a:r>
+              <a:t>🎨 Hệ thống Tokens Quản lý bằng Variables</a:t>
             </a:r>
           </a:p>
           <a:p>
             <a:pPr>
-              <a:spcBef>
-                <a:spcPts val="600"/>
-              </a:spcBef>
-              <a:spcAft>
-                <a:spcPts val="400"/>
-              </a:spcAft>
-              <a:defRPr sz="1400" b="1">
-                <a:solidFill>
-                  <a:srgbClr val="3B82F6"/>
-                </a:solidFill>
-                <a:latin typeface="Arial"/>
-              </a:defRPr>
-            </a:pPr>
-            <a:r>
-              <a:t>Đầy đủ 9 nhóm Components với Auto Layout &amp; Variants:</a:t>
-            </a:r>
-          </a:p>
-          <a:p>
-            <a:pPr lvl="1">
-              <a:spcAft>
-                <a:spcPts val="400"/>
-              </a:spcAft>
-              <a:defRPr sz="1250">
-                <a:solidFill>
-                  <a:srgbClr val="94A3B8"/>
-                </a:solidFill>
-                <a:latin typeface="Arial"/>
-              </a:defRPr>
-            </a:pPr>
-            <a:r>
-              <a:t>  1. Buttons (Primary, Secondary, Text) | 2. Text Fields (Search &amp; Input)</a:t>
-            </a:r>
-          </a:p>
-          <a:p>
-            <a:pPr lvl="1">
-              <a:spcAft>
-                <a:spcPts val="400"/>
-              </a:spcAft>
-              <a:defRPr sz="1250">
-                <a:solidFill>
-                  <a:srgbClr val="94A3B8"/>
-                </a:solidFill>
-                <a:latin typeface="Arial"/>
-              </a:defRPr>
-            </a:pPr>
-            <a:r>
-              <a:t>  3. Cards (Project, Applicant, Stat) | 4. Navigation (Bottom Bar 4 tabs)</a:t>
-            </a:r>
-          </a:p>
-          <a:p>
-            <a:pPr lvl="1">
-              <a:spcAft>
-                <a:spcPts val="400"/>
-              </a:spcAft>
-              <a:defRPr sz="1250">
-                <a:solidFill>
-                  <a:srgbClr val="94A3B8"/>
-                </a:solidFill>
-                <a:latin typeface="Arial"/>
-              </a:defRPr>
-            </a:pPr>
-            <a:r>
-              <a:t>  5. App Bar (Header &amp; Back button) | 6. Dialog &amp; Bottom Sheet</a:t>
-            </a:r>
-          </a:p>
-          <a:p>
-            <a:pPr lvl="1">
-              <a:spcAft>
-                <a:spcPts val="400"/>
-              </a:spcAft>
-              <a:defRPr sz="1250">
-                <a:solidFill>
-                  <a:srgbClr val="94A3B8"/>
-                </a:solidFill>
-                <a:latin typeface="Arial"/>
-              </a:defRPr>
-            </a:pPr>
-            <a:r>
-              <a:t>  7. Loading State (Skeleton Shimmer) | 8. Empty State (Illustration + Reset)</a:t>
-            </a:r>
-          </a:p>
-          <a:p>
-            <a:pPr lvl="1">
-              <a:spcAft>
-                <a:spcPts val="400"/>
-              </a:spcAft>
-              <a:defRPr sz="1250">
-                <a:solidFill>
-                  <a:srgbClr val="94A3B8"/>
-                </a:solidFill>
-                <a:latin typeface="Arial"/>
-              </a:defRPr>
-            </a:pPr>
-            <a:r>
-              <a:t>  9. Error State (Inline Warning Banner)</a:t>
+              <a:spcAft>
+                <a:spcPts val="200"/>
+              </a:spcAft>
+              <a:defRPr sz="1150">
+                <a:solidFill>
+                  <a:srgbClr val="E2E8F0"/>
+                </a:solidFill>
+                <a:latin typeface="Arial"/>
+              </a:defRPr>
+            </a:pPr>
+            <a:r>
+              <a:t>• Màu sắc: Primary Blue (#2563EB), Slate Navy (#0F172A), Emerald (#10B981).</a:t>
+            </a:r>
+          </a:p>
+          <a:p>
+            <a:pPr>
+              <a:spcAft>
+                <a:spcPts val="200"/>
+              </a:spcAft>
+              <a:defRPr sz="1150">
+                <a:solidFill>
+                  <a:srgbClr val="E2E8F0"/>
+                </a:solidFill>
+                <a:latin typeface="Arial"/>
+              </a:defRPr>
+            </a:pPr>
+            <a:r>
+              <a:t>• Typography: Font Inter hiện đại, phân cấp Display 24sp, Title 18sp, Body 14sp.</a:t>
+            </a:r>
+          </a:p>
+          <a:p>
+            <a:pPr>
+              <a:spcAft>
+                <a:spcPts val="200"/>
+              </a:spcAft>
+              <a:defRPr sz="1150">
+                <a:solidFill>
+                  <a:srgbClr val="E2E8F0"/>
+                </a:solidFill>
+                <a:latin typeface="Arial"/>
+              </a:defRPr>
+            </a:pPr>
+            <a:r>
+              <a:t>• Lưới khoảng cách: 4dp, 8dp, 16dp, 24dp | Bo góc Radius: 8dp, 12dp.</a:t>
             </a:r>
           </a:p>
         </p:txBody>
@@ -9071,18 +10378,18 @@
         </p:nvSpPr>
         <p:spPr>
           <a:xfrm>
-            <a:off x="7863840" y="1325880"/>
-            <a:ext cx="3779215" cy="5120640"/>
+            <a:off x="731520" y="3182112"/>
+            <a:ext cx="6949440" cy="1554480"/>
           </a:xfrm>
           <a:prstGeom prst="roundRect">
             <a:avLst/>
           </a:prstGeom>
           <a:solidFill>
-            <a:srgbClr val="1E293B"/>
+            <a:srgbClr val="161E31"/>
           </a:solidFill>
           <a:ln>
             <a:solidFill>
-              <a:srgbClr val="334155"/>
+              <a:srgbClr val="2D3748"/>
             </a:solidFill>
           </a:ln>
         </p:spPr>
@@ -9101,6 +10408,202 @@
           </a:fontRef>
         </p:style>
         <p:txBody>
+          <a:bodyPr rtlCol="0" anchor="ctr" lIns="228600" tIns="164592" rIns="228600" wrap="square"/>
+          <a:lstStyle/>
+          <a:p>
+            <a:pPr algn="ctr">
+              <a:spcAft>
+                <a:spcPts val="400"/>
+              </a:spcAft>
+              <a:defRPr sz="1300" b="1">
+                <a:solidFill>
+                  <a:srgbClr val="34D399"/>
+                </a:solidFill>
+                <a:latin typeface="Arial"/>
+              </a:defRPr>
+            </a:pPr>
+            <a:r>
+              <a:t>🧩 9 Nhóm Components với Auto Layout &amp; Variants</a:t>
+            </a:r>
+          </a:p>
+          <a:p>
+            <a:pPr>
+              <a:spcAft>
+                <a:spcPts val="200"/>
+              </a:spcAft>
+              <a:defRPr sz="1150">
+                <a:solidFill>
+                  <a:srgbClr val="E2E8F0"/>
+                </a:solidFill>
+                <a:latin typeface="Arial"/>
+              </a:defRPr>
+            </a:pPr>
+            <a:r>
+              <a:t>• 1. Buttons (Primary, Secondary, Text) | 2. Text Fields (Search &amp; Input)</a:t>
+            </a:r>
+          </a:p>
+          <a:p>
+            <a:pPr>
+              <a:spcAft>
+                <a:spcPts val="200"/>
+              </a:spcAft>
+              <a:defRPr sz="1150">
+                <a:solidFill>
+                  <a:srgbClr val="E2E8F0"/>
+                </a:solidFill>
+                <a:latin typeface="Arial"/>
+              </a:defRPr>
+            </a:pPr>
+            <a:r>
+              <a:t>• 3. Cards (Project, Applicant, Stat) | 4. Navigation (Bottom Bar 4 tabs)</a:t>
+            </a:r>
+          </a:p>
+          <a:p>
+            <a:pPr>
+              <a:spcAft>
+                <a:spcPts val="200"/>
+              </a:spcAft>
+              <a:defRPr sz="1150">
+                <a:solidFill>
+                  <a:srgbClr val="E2E8F0"/>
+                </a:solidFill>
+                <a:latin typeface="Arial"/>
+              </a:defRPr>
+            </a:pPr>
+            <a:r>
+              <a:t>• 5. App Bar (Header &amp; Back) | 6. Dialog &amp; Bottom Sheet</a:t>
+            </a:r>
+          </a:p>
+          <a:p>
+            <a:pPr>
+              <a:spcAft>
+                <a:spcPts val="200"/>
+              </a:spcAft>
+              <a:defRPr sz="1150">
+                <a:solidFill>
+                  <a:srgbClr val="E2E8F0"/>
+                </a:solidFill>
+                <a:latin typeface="Arial"/>
+              </a:defRPr>
+            </a:pPr>
+            <a:r>
+              <a:t>• 7. Loading State (Shimmer) | 8. Empty State | 9. Error Banner</a:t>
+            </a:r>
+          </a:p>
+        </p:txBody>
+      </p:sp>
+      <p:sp>
+        <p:nvSpPr>
+          <p:cNvPr id="7" name="Rounded Rectangle 6"/>
+          <p:cNvSpPr/>
+          <p:nvPr/>
+        </p:nvSpPr>
+        <p:spPr>
+          <a:xfrm>
+            <a:off x="731520" y="4855464"/>
+            <a:ext cx="6949440" cy="1554480"/>
+          </a:xfrm>
+          <a:prstGeom prst="roundRect">
+            <a:avLst/>
+          </a:prstGeom>
+          <a:solidFill>
+            <a:srgbClr val="161E31"/>
+          </a:solidFill>
+          <a:ln>
+            <a:solidFill>
+              <a:srgbClr val="2D3748"/>
+            </a:solidFill>
+          </a:ln>
+        </p:spPr>
+        <p:style>
+          <a:lnRef idx="1">
+            <a:schemeClr val="accent1"/>
+          </a:lnRef>
+          <a:fillRef idx="3">
+            <a:schemeClr val="accent1"/>
+          </a:fillRef>
+          <a:effectRef idx="2">
+            <a:schemeClr val="accent1"/>
+          </a:effectRef>
+          <a:fontRef idx="minor">
+            <a:schemeClr val="lt1"/>
+          </a:fontRef>
+        </p:style>
+        <p:txBody>
+          <a:bodyPr rtlCol="0" anchor="ctr" lIns="228600" tIns="164592" rIns="228600" wrap="square"/>
+          <a:lstStyle/>
+          <a:p>
+            <a:pPr algn="ctr">
+              <a:spcAft>
+                <a:spcPts val="400"/>
+              </a:spcAft>
+              <a:defRPr sz="1300" b="1">
+                <a:solidFill>
+                  <a:srgbClr val="38BDF8"/>
+                </a:solidFill>
+                <a:latin typeface="Arial"/>
+              </a:defRPr>
+            </a:pPr>
+            <a:r>
+              <a:t>📁 Minh chứng</a:t>
+            </a:r>
+          </a:p>
+          <a:p>
+            <a:pPr>
+              <a:spcAft>
+                <a:spcPts val="200"/>
+              </a:spcAft>
+              <a:defRPr sz="1150">
+                <a:solidFill>
+                  <a:srgbClr val="94A3B8"/>
+                </a:solidFill>
+                <a:latin typeface="Arial"/>
+              </a:defRPr>
+            </a:pPr>
+            <a:r>
+              <a:t>• Figma Page 04 Design System &amp; Page 05 Components.</a:t>
+            </a:r>
+          </a:p>
+        </p:txBody>
+      </p:sp>
+      <p:sp>
+        <p:nvSpPr>
+          <p:cNvPr id="8" name="Rounded Rectangle 7"/>
+          <p:cNvSpPr/>
+          <p:nvPr/>
+        </p:nvSpPr>
+        <p:spPr>
+          <a:xfrm>
+            <a:off x="7863840" y="1508760"/>
+            <a:ext cx="3596335" cy="4901184"/>
+          </a:xfrm>
+          <a:prstGeom prst="roundRect">
+            <a:avLst/>
+          </a:prstGeom>
+          <a:solidFill>
+            <a:srgbClr val="161E31"/>
+          </a:solidFill>
+          <a:ln>
+            <a:solidFill>
+              <a:srgbClr val="2D3748"/>
+            </a:solidFill>
+          </a:ln>
+        </p:spPr>
+        <p:style>
+          <a:lnRef idx="1">
+            <a:schemeClr val="accent1"/>
+          </a:lnRef>
+          <a:fillRef idx="3">
+            <a:schemeClr val="accent1"/>
+          </a:fillRef>
+          <a:effectRef idx="2">
+            <a:schemeClr val="accent1"/>
+          </a:effectRef>
+          <a:fontRef idx="minor">
+            <a:schemeClr val="lt1"/>
+          </a:fontRef>
+        </p:style>
+        <p:txBody>
           <a:bodyPr rtlCol="0" anchor="ctr"/>
           <a:lstStyle/>
           <a:p>
@@ -9110,7 +10613,7 @@
       </p:sp>
       <p:pic>
         <p:nvPicPr>
-          <p:cNvPr id="7" name="Picture 6" descr="screen_05_my_applications_tracker.png"/>
+          <p:cNvPr id="9" name="Picture 8" descr="screen_05_my_applications_tracker.png"/>
           <p:cNvPicPr>
             <a:picLocks noChangeAspect="1"/>
           </p:cNvPicPr>
@@ -9124,8 +10627,8 @@
         </p:blipFill>
         <p:spPr>
           <a:xfrm>
-            <a:off x="8092440" y="1508760"/>
-            <a:ext cx="3322015" cy="15822062"/>
+            <a:off x="8092440" y="1691640"/>
+            <a:ext cx="3139135" cy="14951043"/>
           </a:xfrm>
           <a:prstGeom prst="rect">
             <a:avLst/>

--- a/docs/PRM323_Lab2_Nhom4_Slides.pptx
+++ b/docs/PRM323_Lab2_Nhom4_Slides.pptx
@@ -519,7 +519,7 @@
           <a:p/>
           <a:p>
             <a:r>
-              <a:t>Kính chào thầy và các bạn, hôm nay Nhóm 4 xin đại diện trình bày đề tài EXE Team Matching. Ứng dụng ra đời nhằm giải quyết bài toán tìm đồng đội đa ngành có cùng mức cam kết trước hạn chót của nhà trường.</a:t>
+              <a:t>Kính chào thầy và các bạn, hôm nay Nhóm 4 xin đại diện trình bày đề tài EXE Team Matching. Ứng dụng giải quyết bài toán tìm đồng đội đa ngành có cùng mức cam kết trước hạn chót của nhà trường.</a:t>
             </a:r>
           </a:p>
         </p:txBody>
@@ -4412,18 +4412,18 @@
         </p:nvSpPr>
         <p:spPr>
           <a:xfrm>
-            <a:off x="731520" y="365760"/>
-            <a:ext cx="10728655" cy="1005840"/>
+            <a:off x="548640" y="320040"/>
+            <a:ext cx="11094415" cy="960120"/>
           </a:xfrm>
           <a:prstGeom prst="roundRect">
             <a:avLst/>
           </a:prstGeom>
           <a:solidFill>
-            <a:srgbClr val="161E31"/>
+            <a:srgbClr val="131A2A"/>
           </a:solidFill>
           <a:ln>
             <a:solidFill>
-              <a:srgbClr val="2D3748"/>
+              <a:srgbClr val="28344B"/>
             </a:solidFill>
           </a:ln>
         </p:spPr>
@@ -4454,7 +4454,7 @@
               </a:defRPr>
             </a:pPr>
             <a:r>
-              <a:t>01 / 12  ·  PROJECT OVERVIEW</a:t>
+              <a:t>01  ·  PROJECT OVERVIEW</a:t>
             </a:r>
           </a:p>
           <a:p>
@@ -4470,7 +4470,7 @@
               </a:defRPr>
             </a:pPr>
             <a:r>
-              <a:t>Hệ thống Ghép nhóm Khởi nghiệp (EXE Team Matching)</a:t>
+              <a:t>EXE Team Matching · Hệ thống Ghép nhóm Khởi nghiệp</a:t>
             </a:r>
           </a:p>
         </p:txBody>
@@ -4483,8 +4483,8 @@
         </p:nvSpPr>
         <p:spPr>
           <a:xfrm>
-            <a:off x="7772400" y="438912"/>
-            <a:ext cx="3474720" cy="457200"/>
+            <a:off x="7772400" y="384048"/>
+            <a:ext cx="3657600" cy="457200"/>
           </a:xfrm>
           <a:prstGeom prst="rect">
             <a:avLst/>
@@ -4519,18 +4519,18 @@
         </p:nvSpPr>
         <p:spPr>
           <a:xfrm>
-            <a:off x="731520" y="1508760"/>
-            <a:ext cx="6949440" cy="1554480"/>
+            <a:off x="548640" y="1417320"/>
+            <a:ext cx="8046720" cy="1584960"/>
           </a:xfrm>
           <a:prstGeom prst="roundRect">
             <a:avLst/>
           </a:prstGeom>
           <a:solidFill>
-            <a:srgbClr val="161E31"/>
+            <a:srgbClr val="131A2A"/>
           </a:solidFill>
           <a:ln>
             <a:solidFill>
-              <a:srgbClr val="2D3748"/>
+              <a:srgbClr val="28344B"/>
             </a:solidFill>
           </a:ln>
         </p:spPr>
@@ -4549,14 +4549,14 @@
           </a:fontRef>
         </p:style>
         <p:txBody>
-          <a:bodyPr rtlCol="0" anchor="ctr" lIns="228600" tIns="164592" rIns="228600" wrap="square"/>
+          <a:bodyPr rtlCol="0" anchor="ctr" lIns="228600" tIns="137160" rIns="228600" wrap="square"/>
           <a:lstStyle/>
           <a:p>
             <a:pPr algn="ctr">
               <a:spcAft>
-                <a:spcPts val="400"/>
-              </a:spcAft>
-              <a:defRPr sz="1300" b="1">
+                <a:spcPts val="300"/>
+              </a:spcAft>
+              <a:defRPr sz="1250" b="1">
                 <a:solidFill>
                   <a:srgbClr val="38BDF8"/>
                 </a:solidFill>
@@ -4572,7 +4572,7 @@
               <a:spcAft>
                 <a:spcPts val="200"/>
               </a:spcAft>
-              <a:defRPr sz="1150">
+              <a:defRPr sz="1100">
                 <a:solidFill>
                   <a:srgbClr val="E2E8F0"/>
                 </a:solidFill>
@@ -4580,7 +4580,7 @@
               </a:defRPr>
             </a:pPr>
             <a:r>
-              <a:t>• Sinh viên học EXE101/201 bắt buộc phải lập nhóm đa ngành (IT + Kinh tế/Marketing).</a:t>
+              <a:t>• Sinh viên học môn EXE101/201 bắt buộc phải lập nhóm liên ngành (IT + Kinh tế/Marketing).</a:t>
             </a:r>
           </a:p>
           <a:p>
@@ -4588,7 +4588,7 @@
               <a:spcAft>
                 <a:spcPts val="200"/>
               </a:spcAft>
-              <a:defRPr sz="1150">
+              <a:defRPr sz="1100">
                 <a:solidFill>
                   <a:srgbClr val="E2E8F0"/>
                 </a:solidFill>
@@ -4596,7 +4596,7 @@
               </a:defRPr>
             </a:pPr>
             <a:r>
-              <a:t>• Tìm nhóm qua mạng xã hội rất hỗn loạn: bài trôi nhanh, không rõ kỹ năng, dễ gặp người thiếu cam kết (free-rider).</a:t>
+              <a:t>• Tìm nhóm qua mạng xã hội rất hỗn loạn: bài trôi nhanh, kỹ năng mập mờ, dễ gặp free-rider.</a:t>
             </a:r>
           </a:p>
         </p:txBody>
@@ -4609,18 +4609,18 @@
         </p:nvSpPr>
         <p:spPr>
           <a:xfrm>
-            <a:off x="731520" y="3182112"/>
-            <a:ext cx="6949440" cy="1554480"/>
+            <a:off x="548640" y="3139440"/>
+            <a:ext cx="8046720" cy="1584960"/>
           </a:xfrm>
           <a:prstGeom prst="roundRect">
             <a:avLst/>
           </a:prstGeom>
           <a:solidFill>
-            <a:srgbClr val="161E31"/>
+            <a:srgbClr val="131A2A"/>
           </a:solidFill>
           <a:ln>
             <a:solidFill>
-              <a:srgbClr val="2D3748"/>
+              <a:srgbClr val="28344B"/>
             </a:solidFill>
           </a:ln>
         </p:spPr>
@@ -4639,14 +4639,14 @@
           </a:fontRef>
         </p:style>
         <p:txBody>
-          <a:bodyPr rtlCol="0" anchor="ctr" lIns="228600" tIns="164592" rIns="228600" wrap="square"/>
+          <a:bodyPr rtlCol="0" anchor="ctr" lIns="228600" tIns="137160" rIns="228600" wrap="square"/>
           <a:lstStyle/>
           <a:p>
             <a:pPr algn="ctr">
               <a:spcAft>
-                <a:spcPts val="400"/>
-              </a:spcAft>
-              <a:defRPr sz="1300" b="1">
+                <a:spcPts val="300"/>
+              </a:spcAft>
+              <a:defRPr sz="1250" b="1">
                 <a:solidFill>
                   <a:srgbClr val="34D399"/>
                 </a:solidFill>
@@ -4662,7 +4662,7 @@
               <a:spcAft>
                 <a:spcPts val="200"/>
               </a:spcAft>
-              <a:defRPr sz="1150">
+              <a:defRPr sz="1100">
                 <a:solidFill>
                   <a:srgbClr val="E2E8F0"/>
                 </a:solidFill>
@@ -4678,7 +4678,7 @@
               <a:spcAft>
                 <a:spcPts val="200"/>
               </a:spcAft>
-              <a:defRPr sz="1150">
+              <a:defRPr sz="1100">
                 <a:solidFill>
                   <a:srgbClr val="E2E8F0"/>
                 </a:solidFill>
@@ -4686,7 +4686,7 @@
               </a:defRPr>
             </a:pPr>
             <a:r>
-              <a:t>• Đạt mục tiêu tìm kiếm và ứng tuyển thành công chỉ trong vòng dưới 60 giây.</a:t>
+              <a:t>• Tối ưu hóa hành trình: Tìm và nộp đơn thành công chỉ trong vòng dưới 60 giây.</a:t>
             </a:r>
           </a:p>
         </p:txBody>
@@ -4699,18 +4699,18 @@
         </p:nvSpPr>
         <p:spPr>
           <a:xfrm>
-            <a:off x="731520" y="4855464"/>
-            <a:ext cx="6949440" cy="1554480"/>
+            <a:off x="548640" y="4861560"/>
+            <a:ext cx="8046720" cy="1584960"/>
           </a:xfrm>
           <a:prstGeom prst="roundRect">
             <a:avLst/>
           </a:prstGeom>
           <a:solidFill>
-            <a:srgbClr val="161E31"/>
+            <a:srgbClr val="131A2A"/>
           </a:solidFill>
           <a:ln>
             <a:solidFill>
-              <a:srgbClr val="2D3748"/>
+              <a:srgbClr val="28344B"/>
             </a:solidFill>
           </a:ln>
         </p:spPr>
@@ -4729,14 +4729,14 @@
           </a:fontRef>
         </p:style>
         <p:txBody>
-          <a:bodyPr rtlCol="0" anchor="ctr" lIns="228600" tIns="164592" rIns="228600" wrap="square"/>
+          <a:bodyPr rtlCol="0" anchor="ctr" lIns="228600" tIns="137160" rIns="228600" wrap="square"/>
           <a:lstStyle/>
           <a:p>
             <a:pPr algn="ctr">
               <a:spcAft>
-                <a:spcPts val="400"/>
-              </a:spcAft>
-              <a:defRPr sz="1300" b="1">
+                <a:spcPts val="300"/>
+              </a:spcAft>
+              <a:defRPr sz="1250" b="1">
                 <a:solidFill>
                   <a:srgbClr val="38BDF8"/>
                 </a:solidFill>
@@ -4744,7 +4744,7 @@
               </a:defRPr>
             </a:pPr>
             <a:r>
-              <a:t>👥 Đội ngũ Nhóm 4 &amp; Phân vai</a:t>
+              <a:t>👥 Đội ngũ Nhóm 4</a:t>
             </a:r>
           </a:p>
           <a:p>
@@ -4752,15 +4752,15 @@
               <a:spcAft>
                 <a:spcPts val="200"/>
               </a:spcAft>
-              <a:defRPr sz="1150">
-                <a:solidFill>
-                  <a:srgbClr val="94A3B8"/>
-                </a:solidFill>
-                <a:latin typeface="Arial"/>
-              </a:defRPr>
-            </a:pPr>
-            <a:r>
-              <a:t>• 1. Tăng Mình Trọng: Trưởng nhóm · UX Persona &amp; Sitemap</a:t>
+              <a:defRPr sz="1100">
+                <a:solidFill>
+                  <a:srgbClr val="E2E8F0"/>
+                </a:solidFill>
+                <a:latin typeface="Arial"/>
+              </a:defRPr>
+            </a:pPr>
+            <a:r>
+              <a:t>• 1. Tăng Mình Trọng: Trưởng nhóm · UX Research, Persona, Quản phối</a:t>
             </a:r>
           </a:p>
           <a:p>
@@ -4768,15 +4768,15 @@
               <a:spcAft>
                 <a:spcPts val="200"/>
               </a:spcAft>
-              <a:defRPr sz="1150">
-                <a:solidFill>
-                  <a:srgbClr val="94A3B8"/>
-                </a:solidFill>
-                <a:latin typeface="Arial"/>
-              </a:defRPr>
-            </a:pPr>
-            <a:r>
-              <a:t>• 2. Phan Anh Tuấn: User Flows, AI Prompting &amp; Heuristics</a:t>
+              <a:defRPr sz="1100">
+                <a:solidFill>
+                  <a:srgbClr val="E2E8F0"/>
+                </a:solidFill>
+                <a:latin typeface="Arial"/>
+              </a:defRPr>
+            </a:pPr>
+            <a:r>
+              <a:t>• 2. Phan Anh Tuấn: User Flows, AI Prompting &amp; Usability Heuristics</a:t>
             </a:r>
           </a:p>
           <a:p>
@@ -4784,15 +4784,15 @@
               <a:spcAft>
                 <a:spcPts val="200"/>
               </a:spcAft>
-              <a:defRPr sz="1150">
-                <a:solidFill>
-                  <a:srgbClr val="94A3B8"/>
-                </a:solidFill>
-                <a:latin typeface="Arial"/>
-              </a:defRPr>
-            </a:pPr>
-            <a:r>
-              <a:t>• 3. Đỗ Anh Minh: Design System &amp; 9 Components</a:t>
+              <a:defRPr sz="1100">
+                <a:solidFill>
+                  <a:srgbClr val="E2E8F0"/>
+                </a:solidFill>
+                <a:latin typeface="Arial"/>
+              </a:defRPr>
+            </a:pPr>
+            <a:r>
+              <a:t>• 3. Đỗ Anh Minh: Design System, Figma Components &amp; UI Audit</a:t>
             </a:r>
           </a:p>
           <a:p>
@@ -4800,15 +4800,15 @@
               <a:spcAft>
                 <a:spcPts val="200"/>
               </a:spcAft>
-              <a:defRPr sz="1150">
-                <a:solidFill>
-                  <a:srgbClr val="94A3B8"/>
-                </a:solidFill>
-                <a:latin typeface="Arial"/>
-              </a:defRPr>
-            </a:pPr>
-            <a:r>
-              <a:t>• 4. Lữ Phước Nhật Tú: Prototype &amp; Flutter Handoff</a:t>
+              <a:defRPr sz="1100">
+                <a:solidFill>
+                  <a:srgbClr val="E2E8F0"/>
+                </a:solidFill>
+                <a:latin typeface="Arial"/>
+              </a:defRPr>
+            </a:pPr>
+            <a:r>
+              <a:t>• 4. Lữ Phước Nhật Tú: Interactive Prototype &amp; Flutter Handoff</a:t>
             </a:r>
           </a:p>
         </p:txBody>
@@ -4821,18 +4821,18 @@
         </p:nvSpPr>
         <p:spPr>
           <a:xfrm>
-            <a:off x="7863840" y="1508760"/>
-            <a:ext cx="3596335" cy="4901184"/>
+            <a:off x="8778240" y="1417320"/>
+            <a:ext cx="2864815" cy="5029200"/>
           </a:xfrm>
           <a:prstGeom prst="roundRect">
             <a:avLst/>
           </a:prstGeom>
           <a:solidFill>
-            <a:srgbClr val="161E31"/>
+            <a:srgbClr val="131A2A"/>
           </a:solidFill>
           <a:ln>
             <a:solidFill>
-              <a:srgbClr val="2D3748"/>
+              <a:srgbClr val="28344B"/>
             </a:solidFill>
           </a:ln>
         </p:spPr>
@@ -4874,8 +4874,8 @@
         </p:blipFill>
         <p:spPr>
           <a:xfrm>
-            <a:off x="8092440" y="1691640"/>
-            <a:ext cx="3139135" cy="14098571"/>
+            <a:off x="9681295" y="1554480"/>
+            <a:ext cx="1058703" cy="4754880"/>
           </a:xfrm>
           <a:prstGeom prst="rect">
             <a:avLst/>
@@ -4951,18 +4951,18 @@
         </p:nvSpPr>
         <p:spPr>
           <a:xfrm>
-            <a:off x="731520" y="365760"/>
-            <a:ext cx="10728655" cy="1005840"/>
+            <a:off x="548640" y="320040"/>
+            <a:ext cx="11094415" cy="960120"/>
           </a:xfrm>
           <a:prstGeom prst="roundRect">
             <a:avLst/>
           </a:prstGeom>
           <a:solidFill>
-            <a:srgbClr val="161E31"/>
+            <a:srgbClr val="131A2A"/>
           </a:solidFill>
           <a:ln>
             <a:solidFill>
-              <a:srgbClr val="2D3748"/>
+              <a:srgbClr val="28344B"/>
             </a:solidFill>
           </a:ln>
         </p:spPr>
@@ -4993,7 +4993,7 @@
               </a:defRPr>
             </a:pPr>
             <a:r>
-              <a:t>10 / 12  ·  ACCESSIBILITY &amp; RESPONSIVE</a:t>
+              <a:t>10  ·  ACCESSIBILITY &amp; RESPONSIVE</a:t>
             </a:r>
           </a:p>
           <a:p>
@@ -5009,7 +5009,7 @@
               </a:defRPr>
             </a:pPr>
             <a:r>
-              <a:t>Kiểm chuẩn WCAG 2.1 AA &amp; Thích ứng Responsive</a:t>
+              <a:t>Kiểm chuẩn Trợ năng WCAG 2.1 AA &amp; Thích ứng Đa thiết bị</a:t>
             </a:r>
           </a:p>
         </p:txBody>
@@ -5022,8 +5022,8 @@
         </p:nvSpPr>
         <p:spPr>
           <a:xfrm>
-            <a:off x="7772400" y="438912"/>
-            <a:ext cx="3474720" cy="457200"/>
+            <a:off x="7772400" y="384048"/>
+            <a:ext cx="3657600" cy="457200"/>
           </a:xfrm>
           <a:prstGeom prst="rect">
             <a:avLst/>
@@ -5058,18 +5058,18 @@
         </p:nvSpPr>
         <p:spPr>
           <a:xfrm>
-            <a:off x="731520" y="1508760"/>
-            <a:ext cx="6949440" cy="1554480"/>
+            <a:off x="548640" y="1417320"/>
+            <a:ext cx="8046720" cy="1584960"/>
           </a:xfrm>
           <a:prstGeom prst="roundRect">
             <a:avLst/>
           </a:prstGeom>
           <a:solidFill>
-            <a:srgbClr val="161E31"/>
+            <a:srgbClr val="131A2A"/>
           </a:solidFill>
           <a:ln>
             <a:solidFill>
-              <a:srgbClr val="2D3748"/>
+              <a:srgbClr val="28344B"/>
             </a:solidFill>
           </a:ln>
         </p:spPr>
@@ -5088,16 +5088,16 @@
           </a:fontRef>
         </p:style>
         <p:txBody>
-          <a:bodyPr rtlCol="0" anchor="ctr" lIns="228600" tIns="164592" rIns="228600" wrap="square"/>
+          <a:bodyPr rtlCol="0" anchor="ctr" lIns="228600" tIns="137160" rIns="228600" wrap="square"/>
           <a:lstStyle/>
           <a:p>
             <a:pPr algn="ctr">
               <a:spcAft>
-                <a:spcPts val="400"/>
-              </a:spcAft>
-              <a:defRPr sz="1300" b="1">
-                <a:solidFill>
-                  <a:srgbClr val="38BDF8"/>
+                <a:spcPts val="300"/>
+              </a:spcAft>
+              <a:defRPr sz="1250" b="1">
+                <a:solidFill>
+                  <a:srgbClr val="34D399"/>
                 </a:solidFill>
                 <a:latin typeface="Arial"/>
               </a:defRPr>
@@ -5111,7 +5111,7 @@
               <a:spcAft>
                 <a:spcPts val="200"/>
               </a:spcAft>
-              <a:defRPr sz="1150">
+              <a:defRPr sz="1100">
                 <a:solidFill>
                   <a:srgbClr val="E2E8F0"/>
                 </a:solidFill>
@@ -5127,7 +5127,7 @@
               <a:spcAft>
                 <a:spcPts val="200"/>
               </a:spcAft>
-              <a:defRPr sz="1150">
+              <a:defRPr sz="1100">
                 <a:solidFill>
                   <a:srgbClr val="E2E8F0"/>
                 </a:solidFill>
@@ -5143,7 +5143,7 @@
               <a:spcAft>
                 <a:spcPts val="200"/>
               </a:spcAft>
-              <a:defRPr sz="1150">
+              <a:defRPr sz="1100">
                 <a:solidFill>
                   <a:srgbClr val="E2E8F0"/>
                 </a:solidFill>
@@ -5159,7 +5159,7 @@
               <a:spcAft>
                 <a:spcPts val="200"/>
               </a:spcAft>
-              <a:defRPr sz="1150">
+              <a:defRPr sz="1100">
                 <a:solidFill>
                   <a:srgbClr val="E2E8F0"/>
                 </a:solidFill>
@@ -5180,18 +5180,18 @@
         </p:nvSpPr>
         <p:spPr>
           <a:xfrm>
-            <a:off x="731520" y="3182112"/>
-            <a:ext cx="6949440" cy="1554480"/>
+            <a:off x="548640" y="3139440"/>
+            <a:ext cx="8046720" cy="1584960"/>
           </a:xfrm>
           <a:prstGeom prst="roundRect">
             <a:avLst/>
           </a:prstGeom>
           <a:solidFill>
-            <a:srgbClr val="161E31"/>
+            <a:srgbClr val="131A2A"/>
           </a:solidFill>
           <a:ln>
             <a:solidFill>
-              <a:srgbClr val="2D3748"/>
+              <a:srgbClr val="28344B"/>
             </a:solidFill>
           </a:ln>
         </p:spPr>
@@ -5210,22 +5210,22 @@
           </a:fontRef>
         </p:style>
         <p:txBody>
-          <a:bodyPr rtlCol="0" anchor="ctr" lIns="228600" tIns="164592" rIns="228600" wrap="square"/>
+          <a:bodyPr rtlCol="0" anchor="ctr" lIns="228600" tIns="137160" rIns="228600" wrap="square"/>
           <a:lstStyle/>
           <a:p>
             <a:pPr algn="ctr">
               <a:spcAft>
-                <a:spcPts val="400"/>
-              </a:spcAft>
-              <a:defRPr sz="1300" b="1">
-                <a:solidFill>
-                  <a:srgbClr val="34D399"/>
-                </a:solidFill>
-                <a:latin typeface="Arial"/>
-              </a:defRPr>
-            </a:pPr>
-            <a:r>
-              <a:t>📱 Thích ứng Màn hình Đa kích thước</a:t>
+                <a:spcPts val="300"/>
+              </a:spcAft>
+              <a:defRPr sz="1250" b="1">
+                <a:solidFill>
+                  <a:srgbClr val="38BDF8"/>
+                </a:solidFill>
+                <a:latin typeface="Arial"/>
+              </a:defRPr>
+            </a:pPr>
+            <a:r>
+              <a:t>📱 Thích ứng Màn hình Đa kích thước (Responsive)</a:t>
             </a:r>
           </a:p>
           <a:p>
@@ -5233,7 +5233,7 @@
               <a:spcAft>
                 <a:spcPts val="200"/>
               </a:spcAft>
-              <a:defRPr sz="1150">
+              <a:defRPr sz="1100">
                 <a:solidFill>
                   <a:srgbClr val="E2E8F0"/>
                 </a:solidFill>
@@ -5249,7 +5249,7 @@
               <a:spcAft>
                 <a:spcPts val="200"/>
               </a:spcAft>
-              <a:defRPr sz="1150">
+              <a:defRPr sz="1100">
                 <a:solidFill>
                   <a:srgbClr val="E2E8F0"/>
                 </a:solidFill>
@@ -5257,7 +5257,7 @@
               </a:defRPr>
             </a:pPr>
             <a:r>
-              <a:t>• Tự động co giãn không vỡ khung trên màn hình lớn 412x915 dp nhờ thiết lập Auto Layout 'Fill container'.</a:t>
+              <a:t>• Tự động co giãn không vỡ khung trên màn hình lớn 412x915 dp nhờ Auto Layout 'Fill container'.</a:t>
             </a:r>
           </a:p>
         </p:txBody>
@@ -5270,18 +5270,18 @@
         </p:nvSpPr>
         <p:spPr>
           <a:xfrm>
-            <a:off x="731520" y="4855464"/>
-            <a:ext cx="6949440" cy="1554480"/>
+            <a:off x="548640" y="4861560"/>
+            <a:ext cx="8046720" cy="1584960"/>
           </a:xfrm>
           <a:prstGeom prst="roundRect">
             <a:avLst/>
           </a:prstGeom>
           <a:solidFill>
-            <a:srgbClr val="161E31"/>
+            <a:srgbClr val="131A2A"/>
           </a:solidFill>
           <a:ln>
             <a:solidFill>
-              <a:srgbClr val="2D3748"/>
+              <a:srgbClr val="28344B"/>
             </a:solidFill>
           </a:ln>
         </p:spPr>
@@ -5300,16 +5300,16 @@
           </a:fontRef>
         </p:style>
         <p:txBody>
-          <a:bodyPr rtlCol="0" anchor="ctr" lIns="228600" tIns="164592" rIns="228600" wrap="square"/>
+          <a:bodyPr rtlCol="0" anchor="ctr" lIns="228600" tIns="137160" rIns="228600" wrap="square"/>
           <a:lstStyle/>
           <a:p>
             <a:pPr algn="ctr">
               <a:spcAft>
-                <a:spcPts val="400"/>
-              </a:spcAft>
-              <a:defRPr sz="1300" b="1">
-                <a:solidFill>
-                  <a:srgbClr val="38BDF8"/>
+                <a:spcPts val="300"/>
+              </a:spcAft>
+              <a:defRPr sz="1250" b="1">
+                <a:solidFill>
+                  <a:srgbClr val="34D399"/>
                 </a:solidFill>
                 <a:latin typeface="Arial"/>
               </a:defRPr>
@@ -5323,15 +5323,15 @@
               <a:spcAft>
                 <a:spcPts val="200"/>
               </a:spcAft>
-              <a:defRPr sz="1150">
-                <a:solidFill>
-                  <a:srgbClr val="94A3B8"/>
-                </a:solidFill>
-                <a:latin typeface="Arial"/>
-              </a:defRPr>
-            </a:pPr>
-            <a:r>
-              <a:t>• Bảng kiểm định tương phản tại design/design-decisions.md.</a:t>
+              <a:defRPr sz="1100">
+                <a:solidFill>
+                  <a:srgbClr val="E2E8F0"/>
+                </a:solidFill>
+                <a:latin typeface="Arial"/>
+              </a:defRPr>
+            </a:pPr>
+            <a:r>
+              <a:t>• Xem bảng kiểm định chi tiết tại file design/design-decisions.md.</a:t>
             </a:r>
           </a:p>
         </p:txBody>
@@ -5344,18 +5344,18 @@
         </p:nvSpPr>
         <p:spPr>
           <a:xfrm>
-            <a:off x="7863840" y="1508760"/>
-            <a:ext cx="3596335" cy="4901184"/>
+            <a:off x="8778240" y="1417320"/>
+            <a:ext cx="2864815" cy="5029200"/>
           </a:xfrm>
           <a:prstGeom prst="roundRect">
             <a:avLst/>
           </a:prstGeom>
           <a:solidFill>
-            <a:srgbClr val="161E31"/>
+            <a:srgbClr val="131A2A"/>
           </a:solidFill>
           <a:ln>
             <a:solidFill>
-              <a:srgbClr val="2D3748"/>
+              <a:srgbClr val="28344B"/>
             </a:solidFill>
           </a:ln>
         </p:spPr>
@@ -5397,8 +5397,8 @@
         </p:blipFill>
         <p:spPr>
           <a:xfrm>
-            <a:off x="8092440" y="1691640"/>
-            <a:ext cx="3139135" cy="7127437"/>
+            <a:off x="9163552" y="1554480"/>
+            <a:ext cx="2094190" cy="4754880"/>
           </a:xfrm>
           <a:prstGeom prst="rect">
             <a:avLst/>
@@ -5474,18 +5474,18 @@
         </p:nvSpPr>
         <p:spPr>
           <a:xfrm>
-            <a:off x="731520" y="365760"/>
-            <a:ext cx="10728655" cy="1005840"/>
+            <a:off x="548640" y="320040"/>
+            <a:ext cx="11094415" cy="960120"/>
           </a:xfrm>
           <a:prstGeom prst="roundRect">
             <a:avLst/>
           </a:prstGeom>
           <a:solidFill>
-            <a:srgbClr val="161E31"/>
+            <a:srgbClr val="131A2A"/>
           </a:solidFill>
           <a:ln>
             <a:solidFill>
-              <a:srgbClr val="2D3748"/>
+              <a:srgbClr val="28344B"/>
             </a:solidFill>
           </a:ln>
         </p:spPr>
@@ -5516,7 +5516,7 @@
               </a:defRPr>
             </a:pPr>
             <a:r>
-              <a:t>11 / 12  ·  LIVE PROTOTYPE</a:t>
+              <a:t>11  ·  LIVE PROTOTYPE</a:t>
             </a:r>
           </a:p>
           <a:p>
@@ -5532,7 +5532,7 @@
               </a:defRPr>
             </a:pPr>
             <a:r>
-              <a:t>Nguyên mẫu Tương tác Figma (Figma Page 06)</a:t>
+              <a:t>Nguyên mẫu Tương tác Figma · Khép kín Không Ngõ Cụt</a:t>
             </a:r>
           </a:p>
         </p:txBody>
@@ -5545,8 +5545,8 @@
         </p:nvSpPr>
         <p:spPr>
           <a:xfrm>
-            <a:off x="7772400" y="438912"/>
-            <a:ext cx="3474720" cy="457200"/>
+            <a:off x="7772400" y="384048"/>
+            <a:ext cx="3657600" cy="457200"/>
           </a:xfrm>
           <a:prstGeom prst="rect">
             <a:avLst/>
@@ -5581,18 +5581,18 @@
         </p:nvSpPr>
         <p:spPr>
           <a:xfrm>
-            <a:off x="731520" y="1508760"/>
-            <a:ext cx="6949440" cy="1554480"/>
+            <a:off x="548640" y="1417320"/>
+            <a:ext cx="8046720" cy="1584960"/>
           </a:xfrm>
           <a:prstGeom prst="roundRect">
             <a:avLst/>
           </a:prstGeom>
           <a:solidFill>
-            <a:srgbClr val="161E31"/>
+            <a:srgbClr val="131A2A"/>
           </a:solidFill>
           <a:ln>
             <a:solidFill>
-              <a:srgbClr val="2D3748"/>
+              <a:srgbClr val="28344B"/>
             </a:solidFill>
           </a:ln>
         </p:spPr>
@@ -5611,14 +5611,14 @@
           </a:fontRef>
         </p:style>
         <p:txBody>
-          <a:bodyPr rtlCol="0" anchor="ctr" lIns="228600" tIns="164592" rIns="228600" wrap="square"/>
+          <a:bodyPr rtlCol="0" anchor="ctr" lIns="228600" tIns="137160" rIns="228600" wrap="square"/>
           <a:lstStyle/>
           <a:p>
             <a:pPr algn="ctr">
               <a:spcAft>
-                <a:spcPts val="400"/>
-              </a:spcAft>
-              <a:defRPr sz="1300" b="1">
+                <a:spcPts val="300"/>
+              </a:spcAft>
+              <a:defRPr sz="1250" b="1">
                 <a:solidFill>
                   <a:srgbClr val="38BDF8"/>
                 </a:solidFill>
@@ -5634,7 +5634,7 @@
               <a:spcAft>
                 <a:spcPts val="200"/>
               </a:spcAft>
-              <a:defRPr sz="1150">
+              <a:defRPr sz="1100">
                 <a:solidFill>
                   <a:srgbClr val="E2E8F0"/>
                 </a:solidFill>
@@ -5650,7 +5650,7 @@
               <a:spcAft>
                 <a:spcPts val="200"/>
               </a:spcAft>
-              <a:defRPr sz="1150">
+              <a:defRPr sz="1100">
                 <a:solidFill>
                   <a:srgbClr val="E2E8F0"/>
                 </a:solidFill>
@@ -5666,7 +5666,7 @@
               <a:spcAft>
                 <a:spcPts val="200"/>
               </a:spcAft>
-              <a:defRPr sz="1150">
+              <a:defRPr sz="1100">
                 <a:solidFill>
                   <a:srgbClr val="E2E8F0"/>
                 </a:solidFill>
@@ -5687,18 +5687,18 @@
         </p:nvSpPr>
         <p:spPr>
           <a:xfrm>
-            <a:off x="731520" y="3182112"/>
-            <a:ext cx="6949440" cy="1554480"/>
+            <a:off x="548640" y="3139440"/>
+            <a:ext cx="8046720" cy="1584960"/>
           </a:xfrm>
           <a:prstGeom prst="roundRect">
             <a:avLst/>
           </a:prstGeom>
           <a:solidFill>
-            <a:srgbClr val="161E31"/>
+            <a:srgbClr val="131A2A"/>
           </a:solidFill>
           <a:ln>
             <a:solidFill>
-              <a:srgbClr val="2D3748"/>
+              <a:srgbClr val="28344B"/>
             </a:solidFill>
           </a:ln>
         </p:spPr>
@@ -5717,14 +5717,14 @@
           </a:fontRef>
         </p:style>
         <p:txBody>
-          <a:bodyPr rtlCol="0" anchor="ctr" lIns="228600" tIns="164592" rIns="228600" wrap="square"/>
+          <a:bodyPr rtlCol="0" anchor="ctr" lIns="228600" tIns="137160" rIns="228600" wrap="square"/>
           <a:lstStyle/>
           <a:p>
             <a:pPr algn="ctr">
               <a:spcAft>
-                <a:spcPts val="400"/>
-              </a:spcAft>
-              <a:defRPr sz="1300" b="1">
+                <a:spcPts val="300"/>
+              </a:spcAft>
+              <a:defRPr sz="1250" b="1">
                 <a:solidFill>
                   <a:srgbClr val="34D399"/>
                 </a:solidFill>
@@ -5740,7 +5740,7 @@
               <a:spcAft>
                 <a:spcPts val="200"/>
               </a:spcAft>
-              <a:defRPr sz="1150">
+              <a:defRPr sz="1100">
                 <a:solidFill>
                   <a:srgbClr val="E2E8F0"/>
                 </a:solidFill>
@@ -5756,7 +5756,7 @@
               <a:spcAft>
                 <a:spcPts val="200"/>
               </a:spcAft>
-              <a:defRPr sz="1150">
+              <a:defRPr sz="1100">
                 <a:solidFill>
                   <a:srgbClr val="E2E8F0"/>
                 </a:solidFill>
@@ -5764,7 +5764,7 @@
               </a:defRPr>
             </a:pPr>
             <a:r>
-              <a:t>• Nút 'Về trang chủ' và 'Xem đơn' sau khi nộp đơn giúp loại bỏ hoàn toàn bẫy ngõ cụt.</a:t>
+              <a:t>• Nút 'Về trang chủ' và 'Xem đơn' sau khi nộp đơn loại bỏ hoàn toàn bẫy ngõ cụt.</a:t>
             </a:r>
           </a:p>
           <a:p>
@@ -5772,7 +5772,7 @@
               <a:spcAft>
                 <a:spcPts val="200"/>
               </a:spcAft>
-              <a:defRPr sz="1150">
+              <a:defRPr sz="1100">
                 <a:solidFill>
                   <a:srgbClr val="E2E8F0"/>
                 </a:solidFill>
@@ -5793,18 +5793,18 @@
         </p:nvSpPr>
         <p:spPr>
           <a:xfrm>
-            <a:off x="731520" y="4855464"/>
-            <a:ext cx="6949440" cy="1554480"/>
+            <a:off x="548640" y="4861560"/>
+            <a:ext cx="8046720" cy="1584960"/>
           </a:xfrm>
           <a:prstGeom prst="roundRect">
             <a:avLst/>
           </a:prstGeom>
           <a:solidFill>
-            <a:srgbClr val="161E31"/>
+            <a:srgbClr val="131A2A"/>
           </a:solidFill>
           <a:ln>
             <a:solidFill>
-              <a:srgbClr val="2D3748"/>
+              <a:srgbClr val="28344B"/>
             </a:solidFill>
           </a:ln>
         </p:spPr>
@@ -5823,14 +5823,14 @@
           </a:fontRef>
         </p:style>
         <p:txBody>
-          <a:bodyPr rtlCol="0" anchor="ctr" lIns="228600" tIns="164592" rIns="228600" wrap="square"/>
+          <a:bodyPr rtlCol="0" anchor="ctr" lIns="228600" tIns="137160" rIns="228600" wrap="square"/>
           <a:lstStyle/>
           <a:p>
             <a:pPr algn="ctr">
               <a:spcAft>
-                <a:spcPts val="400"/>
-              </a:spcAft>
-              <a:defRPr sz="1300" b="1">
+                <a:spcPts val="300"/>
+              </a:spcAft>
+              <a:defRPr sz="1250" b="1">
                 <a:solidFill>
                   <a:srgbClr val="38BDF8"/>
                 </a:solidFill>
@@ -5846,15 +5846,15 @@
               <a:spcAft>
                 <a:spcPts val="200"/>
               </a:spcAft>
-              <a:defRPr sz="1150">
-                <a:solidFill>
-                  <a:srgbClr val="94A3B8"/>
-                </a:solidFill>
-                <a:latin typeface="Arial"/>
-              </a:defRPr>
-            </a:pPr>
-            <a:r>
-              <a:t>• Sẵn sàng cho phiên Live Demo 5 phút trên Figma Canvas.</a:t>
+              <a:defRPr sz="1100">
+                <a:solidFill>
+                  <a:srgbClr val="E2E8F0"/>
+                </a:solidFill>
+                <a:latin typeface="Arial"/>
+              </a:defRPr>
+            </a:pPr>
+            <a:r>
+              <a:t>• Sẵn sàng cho phiên Live Demo 5 phút trực tiếp trên Figma Canvas.</a:t>
             </a:r>
           </a:p>
         </p:txBody>
@@ -5867,18 +5867,18 @@
         </p:nvSpPr>
         <p:spPr>
           <a:xfrm>
-            <a:off x="7863840" y="1508760"/>
-            <a:ext cx="3596335" cy="4901184"/>
+            <a:off x="8778240" y="1417320"/>
+            <a:ext cx="2864815" cy="5029200"/>
           </a:xfrm>
           <a:prstGeom prst="roundRect">
             <a:avLst/>
           </a:prstGeom>
           <a:solidFill>
-            <a:srgbClr val="161E31"/>
+            <a:srgbClr val="131A2A"/>
           </a:solidFill>
           <a:ln>
             <a:solidFill>
-              <a:srgbClr val="2D3748"/>
+              <a:srgbClr val="28344B"/>
             </a:solidFill>
           </a:ln>
         </p:spPr>
@@ -5920,8 +5920,8 @@
         </p:blipFill>
         <p:spPr>
           <a:xfrm>
-            <a:off x="8092440" y="1691640"/>
-            <a:ext cx="3139135" cy="20474358"/>
+            <a:off x="9846137" y="1554480"/>
+            <a:ext cx="729019" cy="4754880"/>
           </a:xfrm>
           <a:prstGeom prst="rect">
             <a:avLst/>
@@ -5997,18 +5997,18 @@
         </p:nvSpPr>
         <p:spPr>
           <a:xfrm>
-            <a:off x="731520" y="365760"/>
-            <a:ext cx="10728655" cy="1005840"/>
+            <a:off x="548640" y="320040"/>
+            <a:ext cx="11094415" cy="960120"/>
           </a:xfrm>
           <a:prstGeom prst="roundRect">
             <a:avLst/>
           </a:prstGeom>
           <a:solidFill>
-            <a:srgbClr val="161E31"/>
+            <a:srgbClr val="131A2A"/>
           </a:solidFill>
           <a:ln>
             <a:solidFill>
-              <a:srgbClr val="2D3748"/>
+              <a:srgbClr val="28344B"/>
             </a:solidFill>
           </a:ln>
         </p:spPr>
@@ -6039,7 +6039,7 @@
               </a:defRPr>
             </a:pPr>
             <a:r>
-              <a:t>12 / 12  ·  FLUTTER HANDOFF &amp; SUMMARY</a:t>
+              <a:t>12  ·  FLUTTER HANDOFF &amp; SUMMARY</a:t>
             </a:r>
           </a:p>
           <a:p>
@@ -6068,8 +6068,8 @@
         </p:nvSpPr>
         <p:spPr>
           <a:xfrm>
-            <a:off x="7772400" y="438912"/>
-            <a:ext cx="3474720" cy="457200"/>
+            <a:off x="7772400" y="384048"/>
+            <a:ext cx="3657600" cy="457200"/>
           </a:xfrm>
           <a:prstGeom prst="rect">
             <a:avLst/>
@@ -6104,18 +6104,18 @@
         </p:nvSpPr>
         <p:spPr>
           <a:xfrm>
-            <a:off x="731520" y="1508760"/>
-            <a:ext cx="6949440" cy="1554480"/>
+            <a:off x="548640" y="1417320"/>
+            <a:ext cx="8046720" cy="1584960"/>
           </a:xfrm>
           <a:prstGeom prst="roundRect">
             <a:avLst/>
           </a:prstGeom>
           <a:solidFill>
-            <a:srgbClr val="161E31"/>
+            <a:srgbClr val="131A2A"/>
           </a:solidFill>
           <a:ln>
             <a:solidFill>
-              <a:srgbClr val="2D3748"/>
+              <a:srgbClr val="28344B"/>
             </a:solidFill>
           </a:ln>
         </p:spPr>
@@ -6134,14 +6134,14 @@
           </a:fontRef>
         </p:style>
         <p:txBody>
-          <a:bodyPr rtlCol="0" anchor="ctr" lIns="228600" tIns="164592" rIns="228600" wrap="square"/>
+          <a:bodyPr rtlCol="0" anchor="ctr" lIns="228600" tIns="137160" rIns="228600" wrap="square"/>
           <a:lstStyle/>
           <a:p>
             <a:pPr algn="ctr">
               <a:spcAft>
-                <a:spcPts val="400"/>
-              </a:spcAft>
-              <a:defRPr sz="1300" b="1">
+                <a:spcPts val="300"/>
+              </a:spcAft>
+              <a:defRPr sz="1250" b="1">
                 <a:solidFill>
                   <a:srgbClr val="38BDF8"/>
                 </a:solidFill>
@@ -6157,7 +6157,7 @@
               <a:spcAft>
                 <a:spcPts val="200"/>
               </a:spcAft>
-              <a:defRPr sz="1150">
+              <a:defRPr sz="1100">
                 <a:solidFill>
                   <a:srgbClr val="E2E8F0"/>
                 </a:solidFill>
@@ -6173,7 +6173,7 @@
               <a:spcAft>
                 <a:spcPts val="200"/>
               </a:spcAft>
-              <a:defRPr sz="1150">
+              <a:defRPr sz="1100">
                 <a:solidFill>
                   <a:srgbClr val="E2E8F0"/>
                 </a:solidFill>
@@ -6189,7 +6189,7 @@
               <a:spcAft>
                 <a:spcPts val="200"/>
               </a:spcAft>
-              <a:defRPr sz="1150">
+              <a:defRPr sz="1100">
                 <a:solidFill>
                   <a:srgbClr val="E2E8F0"/>
                 </a:solidFill>
@@ -6210,18 +6210,18 @@
         </p:nvSpPr>
         <p:spPr>
           <a:xfrm>
-            <a:off x="731520" y="3182112"/>
-            <a:ext cx="6949440" cy="1554480"/>
+            <a:off x="548640" y="3139440"/>
+            <a:ext cx="8046720" cy="1584960"/>
           </a:xfrm>
           <a:prstGeom prst="roundRect">
             <a:avLst/>
           </a:prstGeom>
           <a:solidFill>
-            <a:srgbClr val="161E31"/>
+            <a:srgbClr val="131A2A"/>
           </a:solidFill>
           <a:ln>
             <a:solidFill>
-              <a:srgbClr val="2D3748"/>
+              <a:srgbClr val="28344B"/>
             </a:solidFill>
           </a:ln>
         </p:spPr>
@@ -6240,14 +6240,14 @@
           </a:fontRef>
         </p:style>
         <p:txBody>
-          <a:bodyPr rtlCol="0" anchor="ctr" lIns="228600" tIns="164592" rIns="228600" wrap="square"/>
+          <a:bodyPr rtlCol="0" anchor="ctr" lIns="228600" tIns="137160" rIns="228600" wrap="square"/>
           <a:lstStyle/>
           <a:p>
             <a:pPr algn="ctr">
               <a:spcAft>
-                <a:spcPts val="400"/>
-              </a:spcAft>
-              <a:defRPr sz="1300" b="1">
+                <a:spcPts val="300"/>
+              </a:spcAft>
+              <a:defRPr sz="1250" b="1">
                 <a:solidFill>
                   <a:srgbClr val="34D399"/>
                 </a:solidFill>
@@ -6255,7 +6255,7 @@
               </a:defRPr>
             </a:pPr>
             <a:r>
-              <a:t>🏆 Tổng kết Điểm Rubric</a:t>
+              <a:t>🏆 Tổng kết Điểm Rubric Môn học</a:t>
             </a:r>
           </a:p>
           <a:p>
@@ -6263,7 +6263,7 @@
               <a:spcAft>
                 <a:spcPts val="200"/>
               </a:spcAft>
-              <a:defRPr sz="1150">
+              <a:defRPr sz="1100">
                 <a:solidFill>
                   <a:srgbClr val="E2E8F0"/>
                 </a:solidFill>
@@ -6279,7 +6279,7 @@
               <a:spcAft>
                 <a:spcPts val="200"/>
               </a:spcAft>
-              <a:defRPr sz="1150">
+              <a:defRPr sz="1100">
                 <a:solidFill>
                   <a:srgbClr val="E2E8F0"/>
                 </a:solidFill>
@@ -6295,7 +6295,7 @@
               <a:spcAft>
                 <a:spcPts val="200"/>
               </a:spcAft>
-              <a:defRPr sz="1150">
+              <a:defRPr sz="1100">
                 <a:solidFill>
                   <a:srgbClr val="E2E8F0"/>
                 </a:solidFill>
@@ -6303,7 +6303,7 @@
               </a:defRPr>
             </a:pPr>
             <a:r>
-              <a:t>• Tổng điểm dự kiến: 100 / 100 ĐIỂM.</a:t>
+              <a:t>• TỔNG ĐIỂM DỰ KIẾN: 100 / 100 ĐIỂM.</a:t>
             </a:r>
           </a:p>
         </p:txBody>
@@ -6316,18 +6316,18 @@
         </p:nvSpPr>
         <p:spPr>
           <a:xfrm>
-            <a:off x="731520" y="4855464"/>
-            <a:ext cx="6949440" cy="1554480"/>
+            <a:off x="548640" y="4861560"/>
+            <a:ext cx="8046720" cy="1584960"/>
           </a:xfrm>
           <a:prstGeom prst="roundRect">
             <a:avLst/>
           </a:prstGeom>
           <a:solidFill>
-            <a:srgbClr val="161E31"/>
+            <a:srgbClr val="131A2A"/>
           </a:solidFill>
           <a:ln>
             <a:solidFill>
-              <a:srgbClr val="2D3748"/>
+              <a:srgbClr val="28344B"/>
             </a:solidFill>
           </a:ln>
         </p:spPr>
@@ -6346,14 +6346,14 @@
           </a:fontRef>
         </p:style>
         <p:txBody>
-          <a:bodyPr rtlCol="0" anchor="ctr" lIns="228600" tIns="164592" rIns="228600" wrap="square"/>
+          <a:bodyPr rtlCol="0" anchor="ctr" lIns="228600" tIns="137160" rIns="228600" wrap="square"/>
           <a:lstStyle/>
           <a:p>
             <a:pPr algn="ctr">
               <a:spcAft>
-                <a:spcPts val="400"/>
-              </a:spcAft>
-              <a:defRPr sz="1300" b="1">
+                <a:spcPts val="300"/>
+              </a:spcAft>
+              <a:defRPr sz="1250" b="1">
                 <a:solidFill>
                   <a:srgbClr val="38BDF8"/>
                 </a:solidFill>
@@ -6361,7 +6361,7 @@
               </a:defRPr>
             </a:pPr>
             <a:r>
-              <a:t>🔗 Liên kết Nộp bài</a:t>
+              <a:t>🔗 Liên kết Nộp bài Chính thức</a:t>
             </a:r>
           </a:p>
           <a:p>
@@ -6369,15 +6369,31 @@
               <a:spcAft>
                 <a:spcPts val="200"/>
               </a:spcAft>
-              <a:defRPr sz="1150">
-                <a:solidFill>
-                  <a:srgbClr val="94A3B8"/>
-                </a:solidFill>
-                <a:latin typeface="Arial"/>
-              </a:defRPr>
-            </a:pPr>
-            <a:r>
-              <a:t>• GitHub: github.com/LuTu-2004/prm323-lab2-group4 | Figma Public Link</a:t>
+              <a:defRPr sz="1100">
+                <a:solidFill>
+                  <a:srgbClr val="E2E8F0"/>
+                </a:solidFill>
+                <a:latin typeface="Arial"/>
+              </a:defRPr>
+            </a:pPr>
+            <a:r>
+              <a:t>• GitHub: github.com/LuTu-2004/prm323-lab2-group4</a:t>
+            </a:r>
+          </a:p>
+          <a:p>
+            <a:pPr>
+              <a:spcAft>
+                <a:spcPts val="200"/>
+              </a:spcAft>
+              <a:defRPr sz="1100">
+                <a:solidFill>
+                  <a:srgbClr val="E2E8F0"/>
+                </a:solidFill>
+                <a:latin typeface="Arial"/>
+              </a:defRPr>
+            </a:pPr>
+            <a:r>
+              <a:t>• Figma Link: Công khai quyền xem trên Canvas.</a:t>
             </a:r>
           </a:p>
         </p:txBody>
@@ -6390,18 +6406,18 @@
         </p:nvSpPr>
         <p:spPr>
           <a:xfrm>
-            <a:off x="7863840" y="1508760"/>
-            <a:ext cx="3596335" cy="4901184"/>
+            <a:off x="8778240" y="1417320"/>
+            <a:ext cx="2864815" cy="5029200"/>
           </a:xfrm>
           <a:prstGeom prst="roundRect">
             <a:avLst/>
           </a:prstGeom>
           <a:solidFill>
-            <a:srgbClr val="161E31"/>
+            <a:srgbClr val="131A2A"/>
           </a:solidFill>
           <a:ln>
             <a:solidFill>
-              <a:srgbClr val="2D3748"/>
+              <a:srgbClr val="28344B"/>
             </a:solidFill>
           </a:ln>
         </p:spPr>
@@ -6443,8 +6459,8 @@
         </p:blipFill>
         <p:spPr>
           <a:xfrm>
-            <a:off x="8092440" y="1691640"/>
-            <a:ext cx="3139135" cy="13228289"/>
+            <a:off x="9646469" y="1554480"/>
+            <a:ext cx="1128355" cy="4754880"/>
           </a:xfrm>
           <a:prstGeom prst="rect">
             <a:avLst/>
@@ -6520,18 +6536,18 @@
         </p:nvSpPr>
         <p:spPr>
           <a:xfrm>
-            <a:off x="731520" y="365760"/>
-            <a:ext cx="10728655" cy="1005840"/>
+            <a:off x="548640" y="320040"/>
+            <a:ext cx="11094415" cy="960120"/>
           </a:xfrm>
           <a:prstGeom prst="roundRect">
             <a:avLst/>
           </a:prstGeom>
           <a:solidFill>
-            <a:srgbClr val="161E31"/>
+            <a:srgbClr val="131A2A"/>
           </a:solidFill>
           <a:ln>
             <a:solidFill>
-              <a:srgbClr val="2D3748"/>
+              <a:srgbClr val="28344B"/>
             </a:solidFill>
           </a:ln>
         </p:spPr>
@@ -6562,7 +6578,7 @@
               </a:defRPr>
             </a:pPr>
             <a:r>
-              <a:t>02 / 12  ·  PROBLEM &amp; PERSONA</a:t>
+              <a:t>02  ·  PROBLEM &amp; PERSONA</a:t>
             </a:r>
           </a:p>
           <a:p>
@@ -6578,7 +6594,7 @@
               </a:defRPr>
             </a:pPr>
             <a:r>
-              <a:t>Primary Persona: Lê Quốc Huy (Tech-Savvy Active Seeker)</a:t>
+              <a:t>Primary Persona · Lê Quốc Huy (Tech-Savvy Active Seeker)</a:t>
             </a:r>
           </a:p>
         </p:txBody>
@@ -6591,8 +6607,8 @@
         </p:nvSpPr>
         <p:spPr>
           <a:xfrm>
-            <a:off x="7772400" y="438912"/>
-            <a:ext cx="3474720" cy="457200"/>
+            <a:off x="7772400" y="384048"/>
+            <a:ext cx="3657600" cy="457200"/>
           </a:xfrm>
           <a:prstGeom prst="rect">
             <a:avLst/>
@@ -6627,18 +6643,18 @@
         </p:nvSpPr>
         <p:spPr>
           <a:xfrm>
-            <a:off x="731520" y="1508760"/>
-            <a:ext cx="6949440" cy="1554480"/>
+            <a:off x="548640" y="1417320"/>
+            <a:ext cx="8046720" cy="1584960"/>
           </a:xfrm>
           <a:prstGeom prst="roundRect">
             <a:avLst/>
           </a:prstGeom>
           <a:solidFill>
-            <a:srgbClr val="161E31"/>
+            <a:srgbClr val="131A2A"/>
           </a:solidFill>
           <a:ln>
             <a:solidFill>
-              <a:srgbClr val="2D3748"/>
+              <a:srgbClr val="28344B"/>
             </a:solidFill>
           </a:ln>
         </p:spPr>
@@ -6657,14 +6673,14 @@
           </a:fontRef>
         </p:style>
         <p:txBody>
-          <a:bodyPr rtlCol="0" anchor="ctr" lIns="228600" tIns="164592" rIns="228600" wrap="square"/>
+          <a:bodyPr rtlCol="0" anchor="ctr" lIns="228600" tIns="137160" rIns="228600" wrap="square"/>
           <a:lstStyle/>
           <a:p>
             <a:pPr algn="ctr">
               <a:spcAft>
-                <a:spcPts val="400"/>
-              </a:spcAft>
-              <a:defRPr sz="1300" b="1">
+                <a:spcPts val="300"/>
+              </a:spcAft>
+              <a:defRPr sz="1250" b="1">
                 <a:solidFill>
                   <a:srgbClr val="38BDF8"/>
                 </a:solidFill>
@@ -6680,7 +6696,7 @@
               <a:spcAft>
                 <a:spcPts val="200"/>
               </a:spcAft>
-              <a:defRPr sz="1150">
+              <a:defRPr sz="1100">
                 <a:solidFill>
                   <a:srgbClr val="E2E8F0"/>
                 </a:solidFill>
@@ -6696,7 +6712,7 @@
               <a:spcAft>
                 <a:spcPts val="200"/>
               </a:spcAft>
-              <a:defRPr sz="1150">
+              <a:defRPr sz="1100">
                 <a:solidFill>
                   <a:srgbClr val="E2E8F0"/>
                 </a:solidFill>
@@ -6704,7 +6720,7 @@
               </a:defRPr>
             </a:pPr>
             <a:r>
-              <a:t>• Mục tiêu: Technical Lead / Mobile Developer.</a:t>
+              <a:t>• Vai trò: Technical Lead / Mobile App Developer.</a:t>
             </a:r>
           </a:p>
           <a:p>
@@ -6712,7 +6728,7 @@
               <a:spcAft>
                 <a:spcPts val="200"/>
               </a:spcAft>
-              <a:defRPr sz="1150">
+              <a:defRPr sz="1100">
                 <a:solidFill>
                   <a:srgbClr val="E2E8F0"/>
                 </a:solidFill>
@@ -6720,7 +6736,7 @@
               </a:defRPr>
             </a:pPr>
             <a:r>
-              <a:t>• Bối cảnh: Dùng Android 360x800 dp, dùng 1 tay trên xe buýt / sảnh trường, hạn nộp nhóm còn đúng 5 ngày.</a:t>
+              <a:t>• Bối cảnh: Dùng Android 360x800 dp, dùng 1 tay trên xe buýt / thư viện.</a:t>
             </a:r>
           </a:p>
           <a:p>
@@ -6728,7 +6744,7 @@
               <a:spcAft>
                 <a:spcPts val="200"/>
               </a:spcAft>
-              <a:defRPr sz="1150">
+              <a:defRPr sz="1100">
                 <a:solidFill>
                   <a:srgbClr val="E2E8F0"/>
                 </a:solidFill>
@@ -6736,7 +6752,7 @@
               </a:defRPr>
             </a:pPr>
             <a:r>
-              <a:t>• Trở ngại: Không quen bạn Kinh tế, sợ ghép bừa gặp free-rider.</a:t>
+              <a:t>• Hạn chót: Nộp danh sách nhóm lên nhà trường chỉ còn đúng 5 ngày.</a:t>
             </a:r>
           </a:p>
         </p:txBody>
@@ -6749,18 +6765,18 @@
         </p:nvSpPr>
         <p:spPr>
           <a:xfrm>
-            <a:off x="731520" y="3182112"/>
-            <a:ext cx="6949440" cy="1554480"/>
+            <a:off x="548640" y="3139440"/>
+            <a:ext cx="8046720" cy="1584960"/>
           </a:xfrm>
           <a:prstGeom prst="roundRect">
             <a:avLst/>
           </a:prstGeom>
           <a:solidFill>
-            <a:srgbClr val="161E31"/>
+            <a:srgbClr val="131A2A"/>
           </a:solidFill>
           <a:ln>
             <a:solidFill>
-              <a:srgbClr val="2D3748"/>
+              <a:srgbClr val="28344B"/>
             </a:solidFill>
           </a:ln>
         </p:spPr>
@@ -6779,16 +6795,16 @@
           </a:fontRef>
         </p:style>
         <p:txBody>
-          <a:bodyPr rtlCol="0" anchor="ctr" lIns="228600" tIns="164592" rIns="228600" wrap="square"/>
+          <a:bodyPr rtlCol="0" anchor="ctr" lIns="228600" tIns="137160" rIns="228600" wrap="square"/>
           <a:lstStyle/>
           <a:p>
             <a:pPr algn="ctr">
               <a:spcAft>
-                <a:spcPts val="400"/>
-              </a:spcAft>
-              <a:defRPr sz="1300" b="1">
-                <a:solidFill>
-                  <a:srgbClr val="34D399"/>
+                <a:spcPts val="300"/>
+              </a:spcAft>
+              <a:defRPr sz="1250" b="1">
+                <a:solidFill>
+                  <a:srgbClr val="FB7185"/>
                 </a:solidFill>
                 <a:latin typeface="Arial"/>
               </a:defRPr>
@@ -6802,7 +6818,7 @@
               <a:spcAft>
                 <a:spcPts val="200"/>
               </a:spcAft>
-              <a:defRPr sz="1150">
+              <a:defRPr sz="1100">
                 <a:solidFill>
                   <a:srgbClr val="E2E8F0"/>
                 </a:solidFill>
@@ -6810,7 +6826,7 @@
               </a:defRPr>
             </a:pPr>
             <a:r>
-              <a:t>• "Sinh viên kỹ thuật phần mềm gặp khó khăn lớn khi tìm đồng đội khối ngành Kinh tế/Marketing phù hợp về kỹ năng và mức cam kết trước deadline nộp danh sách."</a:t>
+              <a:t>• "Sinh viên kỹ thuật phần mềm gặp khó khăn lớn khi tìm đồng đội khối ngành Kinh tế/Marketing phù hợp về kỹ năng và cam kết trước deadline nộp danh sách."</a:t>
             </a:r>
           </a:p>
         </p:txBody>
@@ -6823,18 +6839,18 @@
         </p:nvSpPr>
         <p:spPr>
           <a:xfrm>
-            <a:off x="731520" y="4855464"/>
-            <a:ext cx="6949440" cy="1554480"/>
+            <a:off x="548640" y="4861560"/>
+            <a:ext cx="8046720" cy="1584960"/>
           </a:xfrm>
           <a:prstGeom prst="roundRect">
             <a:avLst/>
           </a:prstGeom>
           <a:solidFill>
-            <a:srgbClr val="161E31"/>
+            <a:srgbClr val="131A2A"/>
           </a:solidFill>
           <a:ln>
             <a:solidFill>
-              <a:srgbClr val="2D3748"/>
+              <a:srgbClr val="28344B"/>
             </a:solidFill>
           </a:ln>
         </p:spPr>
@@ -6853,16 +6869,16 @@
           </a:fontRef>
         </p:style>
         <p:txBody>
-          <a:bodyPr rtlCol="0" anchor="ctr" lIns="228600" tIns="164592" rIns="228600" wrap="square"/>
+          <a:bodyPr rtlCol="0" anchor="ctr" lIns="228600" tIns="137160" rIns="228600" wrap="square"/>
           <a:lstStyle/>
           <a:p>
             <a:pPr algn="ctr">
               <a:spcAft>
-                <a:spcPts val="400"/>
-              </a:spcAft>
-              <a:defRPr sz="1300" b="1">
-                <a:solidFill>
-                  <a:srgbClr val="38BDF8"/>
+                <a:spcPts val="300"/>
+              </a:spcAft>
+              <a:defRPr sz="1250" b="1">
+                <a:solidFill>
+                  <a:srgbClr val="34D399"/>
                 </a:solidFill>
                 <a:latin typeface="Arial"/>
               </a:defRPr>
@@ -6876,9 +6892,9 @@
               <a:spcAft>
                 <a:spcPts val="200"/>
               </a:spcAft>
-              <a:defRPr sz="1150">
-                <a:solidFill>
-                  <a:srgbClr val="94A3B8"/>
+              <a:defRPr sz="1100">
+                <a:solidFill>
+                  <a:srgbClr val="E2E8F0"/>
                 </a:solidFill>
                 <a:latin typeface="Arial"/>
               </a:defRPr>
@@ -6897,18 +6913,18 @@
         </p:nvSpPr>
         <p:spPr>
           <a:xfrm>
-            <a:off x="7863840" y="1508760"/>
-            <a:ext cx="3596335" cy="4901184"/>
+            <a:off x="8778240" y="1417320"/>
+            <a:ext cx="2864815" cy="5029200"/>
           </a:xfrm>
           <a:prstGeom prst="roundRect">
             <a:avLst/>
           </a:prstGeom>
           <a:solidFill>
-            <a:srgbClr val="161E31"/>
+            <a:srgbClr val="131A2A"/>
           </a:solidFill>
           <a:ln>
             <a:solidFill>
-              <a:srgbClr val="2D3748"/>
+              <a:srgbClr val="28344B"/>
             </a:solidFill>
           </a:ln>
         </p:spPr>
@@ -6950,8 +6966,8 @@
         </p:blipFill>
         <p:spPr>
           <a:xfrm>
-            <a:off x="8092440" y="1691640"/>
-            <a:ext cx="3139135" cy="12857897"/>
+            <a:off x="9630217" y="1554480"/>
+            <a:ext cx="1160859" cy="4754880"/>
           </a:xfrm>
           <a:prstGeom prst="rect">
             <a:avLst/>
@@ -7027,18 +7043,18 @@
         </p:nvSpPr>
         <p:spPr>
           <a:xfrm>
-            <a:off x="731520" y="365760"/>
-            <a:ext cx="10728655" cy="1005840"/>
+            <a:off x="548640" y="320040"/>
+            <a:ext cx="11094415" cy="960120"/>
           </a:xfrm>
           <a:prstGeom prst="roundRect">
             <a:avLst/>
           </a:prstGeom>
           <a:solidFill>
-            <a:srgbClr val="161E31"/>
+            <a:srgbClr val="131A2A"/>
           </a:solidFill>
           <a:ln>
             <a:solidFill>
-              <a:srgbClr val="2D3748"/>
+              <a:srgbClr val="28344B"/>
             </a:solidFill>
           </a:ln>
         </p:spPr>
@@ -7069,7 +7085,7 @@
               </a:defRPr>
             </a:pPr>
             <a:r>
-              <a:t>03 / 12  ·  INFORMATION ARCHITECTURE</a:t>
+              <a:t>03  ·  INFORMATION ARCHITECTURE</a:t>
             </a:r>
           </a:p>
           <a:p>
@@ -7098,8 +7114,8 @@
         </p:nvSpPr>
         <p:spPr>
           <a:xfrm>
-            <a:off x="7772400" y="438912"/>
-            <a:ext cx="3474720" cy="457200"/>
+            <a:off x="7772400" y="384048"/>
+            <a:ext cx="3657600" cy="457200"/>
           </a:xfrm>
           <a:prstGeom prst="rect">
             <a:avLst/>
@@ -7134,18 +7150,18 @@
         </p:nvSpPr>
         <p:spPr>
           <a:xfrm>
-            <a:off x="731520" y="1508760"/>
-            <a:ext cx="6949440" cy="1554480"/>
+            <a:off x="548640" y="1417320"/>
+            <a:ext cx="4389120" cy="2432304"/>
           </a:xfrm>
           <a:prstGeom prst="roundRect">
             <a:avLst/>
           </a:prstGeom>
           <a:solidFill>
-            <a:srgbClr val="161E31"/>
+            <a:srgbClr val="131A2A"/>
           </a:solidFill>
           <a:ln>
             <a:solidFill>
-              <a:srgbClr val="2D3748"/>
+              <a:srgbClr val="28344B"/>
             </a:solidFill>
           </a:ln>
         </p:spPr>
@@ -7179,15 +7195,15 @@
               </a:defRPr>
             </a:pPr>
             <a:r>
-              <a:t>🗺️ Cấu trúc Điều hướng Phẳng</a:t>
+              <a:t>🗺️ Điều hướng Phẳng (Bottom Bar 4 Tabs)</a:t>
             </a:r>
           </a:p>
           <a:p>
             <a:pPr>
               <a:spcAft>
-                <a:spcPts val="200"/>
-              </a:spcAft>
-              <a:defRPr sz="1150">
+                <a:spcPts val="300"/>
+              </a:spcAft>
+              <a:defRPr sz="1100">
                 <a:solidFill>
                   <a:srgbClr val="E2E8F0"/>
                 </a:solidFill>
@@ -7195,15 +7211,15 @@
               </a:defRPr>
             </a:pPr>
             <a:r>
-              <a:t>• Bottom Navigation Bar 4 tab cố định: Khám phá · Đơn của tôi · Tin nhắn · Cá nhân.</a:t>
+              <a:t>• Khám phá · Đơn của tôi · Tin nhắn · Cá nhân.</a:t>
             </a:r>
           </a:p>
           <a:p>
             <a:pPr>
               <a:spcAft>
-                <a:spcPts val="200"/>
-              </a:spcAft>
-              <a:defRPr sz="1150">
+                <a:spcPts val="300"/>
+              </a:spcAft>
+              <a:defRPr sz="1100">
                 <a:solidFill>
                   <a:srgbClr val="E2E8F0"/>
                 </a:solidFill>
@@ -7211,15 +7227,15 @@
               </a:defRPr>
             </a:pPr>
             <a:r>
-              <a:t>• Thiết kế chuẩn công thái học trong vùng ngón tay cái (Thumb Zone).</a:t>
+              <a:t>• Thiết kế công thái học nằm gọn trong vùng ngón tay cái (Thumb Zone).</a:t>
             </a:r>
           </a:p>
           <a:p>
             <a:pPr>
               <a:spcAft>
-                <a:spcPts val="200"/>
-              </a:spcAft>
-              <a:defRPr sz="1150">
+                <a:spcPts val="300"/>
+              </a:spcAft>
+              <a:defRPr sz="1100">
                 <a:solidFill>
                   <a:srgbClr val="E2E8F0"/>
                 </a:solidFill>
@@ -7240,18 +7256,18 @@
         </p:nvSpPr>
         <p:spPr>
           <a:xfrm>
-            <a:off x="731520" y="3182112"/>
-            <a:ext cx="6949440" cy="1554480"/>
+            <a:off x="548640" y="4014216"/>
+            <a:ext cx="4389120" cy="2432304"/>
           </a:xfrm>
           <a:prstGeom prst="roundRect">
             <a:avLst/>
           </a:prstGeom>
           <a:solidFill>
-            <a:srgbClr val="161E31"/>
+            <a:srgbClr val="131A2A"/>
           </a:solidFill>
           <a:ln>
             <a:solidFill>
-              <a:srgbClr val="2D3748"/>
+              <a:srgbClr val="28344B"/>
             </a:solidFill>
           </a:ln>
         </p:spPr>
@@ -7291,9 +7307,9 @@
           <a:p>
             <a:pPr>
               <a:spcAft>
-                <a:spcPts val="200"/>
-              </a:spcAft>
-              <a:defRPr sz="1150">
+                <a:spcPts val="300"/>
+              </a:spcAft>
+              <a:defRPr sz="1100">
                 <a:solidFill>
                   <a:srgbClr val="E2E8F0"/>
                 </a:solidFill>
@@ -7301,15 +7317,15 @@
               </a:defRPr>
             </a:pPr>
             <a:r>
-              <a:t>• Cấp 1 (Top-Level): Screen 01 (Khám phá), Screen 05 (Theo dõi đơn), Screen 08 (Empty State).</a:t>
+              <a:t>• Cấp 1: Screen 01 (Khám phá), Screen 05 (Theo dõi đơn), Screen 08 (Empty State).</a:t>
             </a:r>
           </a:p>
           <a:p>
             <a:pPr>
               <a:spcAft>
-                <a:spcPts val="200"/>
-              </a:spcAft>
-              <a:defRPr sz="1150">
+                <a:spcPts val="300"/>
+              </a:spcAft>
+              <a:defRPr sz="1100">
                 <a:solidFill>
                   <a:srgbClr val="E2E8F0"/>
                 </a:solidFill>
@@ -7317,15 +7333,15 @@
               </a:defRPr>
             </a:pPr>
             <a:r>
-              <a:t>• Cấp 2 (Child Details): Screen 02 (Chi tiết), Screen 03 (Apply Sheet), Screen 04 (Xác nhận gửi).</a:t>
+              <a:t>• Cấp 2: Screen 02 (Chi tiết), Screen 03 (Apply Sheet), Screen 04 (Xác nhận gửi).</a:t>
             </a:r>
           </a:p>
           <a:p>
             <a:pPr>
               <a:spcAft>
-                <a:spcPts val="200"/>
-              </a:spcAft>
-              <a:defRPr sz="1150">
+                <a:spcPts val="300"/>
+              </a:spcAft>
+              <a:defRPr sz="1100">
                 <a:solidFill>
                   <a:srgbClr val="E2E8F0"/>
                 </a:solidFill>
@@ -7333,7 +7349,7 @@
               </a:defRPr>
             </a:pPr>
             <a:r>
-              <a:t>• Cấp 3 (Modals): Screen 06 (Hẹn phỏng vấn), Screen 07 (Lịch hẹn hoàn tất).</a:t>
+              <a:t>• Cấp 3: Screen 06 (Lên lịch phỏng vấn), Screen 07 (Lịch hẹn hoàn tất).</a:t>
             </a:r>
           </a:p>
         </p:txBody>
@@ -7346,18 +7362,18 @@
         </p:nvSpPr>
         <p:spPr>
           <a:xfrm>
-            <a:off x="731520" y="4855464"/>
-            <a:ext cx="6949440" cy="1554480"/>
+            <a:off x="5120640" y="1417320"/>
+            <a:ext cx="6522415" cy="5029200"/>
           </a:xfrm>
           <a:prstGeom prst="roundRect">
             <a:avLst/>
           </a:prstGeom>
           <a:solidFill>
-            <a:srgbClr val="161E31"/>
+            <a:srgbClr val="131A2A"/>
           </a:solidFill>
           <a:ln>
             <a:solidFill>
-              <a:srgbClr val="2D3748"/>
+              <a:srgbClr val="28344B"/>
             </a:solidFill>
           </a:ln>
         </p:spPr>
@@ -7376,80 +7392,6 @@
           </a:fontRef>
         </p:style>
         <p:txBody>
-          <a:bodyPr rtlCol="0" anchor="ctr" lIns="228600" tIns="164592" rIns="228600" wrap="square"/>
-          <a:lstStyle/>
-          <a:p>
-            <a:pPr algn="ctr">
-              <a:spcAft>
-                <a:spcPts val="400"/>
-              </a:spcAft>
-              <a:defRPr sz="1300" b="1">
-                <a:solidFill>
-                  <a:srgbClr val="38BDF8"/>
-                </a:solidFill>
-                <a:latin typeface="Arial"/>
-              </a:defRPr>
-            </a:pPr>
-            <a:r>
-              <a:t>📁 Minh chứng Bàn giao</a:t>
-            </a:r>
-          </a:p>
-          <a:p>
-            <a:pPr>
-              <a:spcAft>
-                <a:spcPts val="200"/>
-              </a:spcAft>
-              <a:defRPr sz="1150">
-                <a:solidFill>
-                  <a:srgbClr val="94A3B8"/>
-                </a:solidFill>
-                <a:latin typeface="Arial"/>
-              </a:defRPr>
-            </a:pPr>
-            <a:r>
-              <a:t>• Đặc tả cấu trúc chi tiết tại ux/user-flow.md và Figma Page 01 User Flow.</a:t>
-            </a:r>
-          </a:p>
-        </p:txBody>
-      </p:sp>
-      <p:sp>
-        <p:nvSpPr>
-          <p:cNvPr id="8" name="Rounded Rectangle 7"/>
-          <p:cNvSpPr/>
-          <p:nvPr/>
-        </p:nvSpPr>
-        <p:spPr>
-          <a:xfrm>
-            <a:off x="7863840" y="1508760"/>
-            <a:ext cx="3596335" cy="4901184"/>
-          </a:xfrm>
-          <a:prstGeom prst="roundRect">
-            <a:avLst/>
-          </a:prstGeom>
-          <a:solidFill>
-            <a:srgbClr val="161E31"/>
-          </a:solidFill>
-          <a:ln>
-            <a:solidFill>
-              <a:srgbClr val="2D3748"/>
-            </a:solidFill>
-          </a:ln>
-        </p:spPr>
-        <p:style>
-          <a:lnRef idx="1">
-            <a:schemeClr val="accent1"/>
-          </a:lnRef>
-          <a:fillRef idx="3">
-            <a:schemeClr val="accent1"/>
-          </a:fillRef>
-          <a:effectRef idx="2">
-            <a:schemeClr val="accent1"/>
-          </a:effectRef>
-          <a:fontRef idx="minor">
-            <a:schemeClr val="lt1"/>
-          </a:fontRef>
-        </p:style>
-        <p:txBody>
           <a:bodyPr rtlCol="0" anchor="ctr"/>
           <a:lstStyle/>
           <a:p>
@@ -7459,7 +7401,7 @@
       </p:sp>
       <p:pic>
         <p:nvPicPr>
-          <p:cNvPr id="9" name="Picture 8" descr="stitch_canvas_screen_01_02_03.png"/>
+          <p:cNvPr id="8" name="Picture 7" descr="stitch_canvas_screen_01_02_03.png"/>
           <p:cNvPicPr>
             <a:picLocks noChangeAspect="1"/>
           </p:cNvPicPr>
@@ -7473,8 +7415,8 @@
         </p:blipFill>
         <p:spPr>
           <a:xfrm>
-            <a:off x="8092440" y="1691640"/>
-            <a:ext cx="3139135" cy="1667665"/>
+            <a:off x="5318607" y="2304573"/>
+            <a:ext cx="6126480" cy="3254692"/>
           </a:xfrm>
           <a:prstGeom prst="rect">
             <a:avLst/>
@@ -7550,18 +7492,18 @@
         </p:nvSpPr>
         <p:spPr>
           <a:xfrm>
-            <a:off x="731520" y="365760"/>
-            <a:ext cx="10728655" cy="1005840"/>
+            <a:off x="548640" y="320040"/>
+            <a:ext cx="11094415" cy="960120"/>
           </a:xfrm>
           <a:prstGeom prst="roundRect">
             <a:avLst/>
           </a:prstGeom>
           <a:solidFill>
-            <a:srgbClr val="161E31"/>
+            <a:srgbClr val="131A2A"/>
           </a:solidFill>
           <a:ln>
             <a:solidFill>
-              <a:srgbClr val="2D3748"/>
+              <a:srgbClr val="28344B"/>
             </a:solidFill>
           </a:ln>
         </p:spPr>
@@ -7592,7 +7534,7 @@
               </a:defRPr>
             </a:pPr>
             <a:r>
-              <a:t>04 / 12  ·  USER FLOWS</a:t>
+              <a:t>04  ·  USER FLOWS</a:t>
             </a:r>
           </a:p>
           <a:p>
@@ -7608,7 +7550,7 @@
               </a:defRPr>
             </a:pPr>
             <a:r>
-              <a:t>3 Luồng Trải nghiệm Cốt lõi &amp; Phục hồi Lỗi</a:t>
+              <a:t>3 Luồng Trải nghiệm Cốt lõi &amp; Kịch bản Xử lý Lỗi</a:t>
             </a:r>
           </a:p>
         </p:txBody>
@@ -7621,8 +7563,8 @@
         </p:nvSpPr>
         <p:spPr>
           <a:xfrm>
-            <a:off x="7772400" y="438912"/>
-            <a:ext cx="3474720" cy="457200"/>
+            <a:off x="7772400" y="384048"/>
+            <a:ext cx="3657600" cy="457200"/>
           </a:xfrm>
           <a:prstGeom prst="rect">
             <a:avLst/>
@@ -7657,18 +7599,18 @@
         </p:nvSpPr>
         <p:spPr>
           <a:xfrm>
-            <a:off x="731520" y="1508760"/>
-            <a:ext cx="6949440" cy="1554480"/>
+            <a:off x="548640" y="1417320"/>
+            <a:ext cx="8046720" cy="1584960"/>
           </a:xfrm>
           <a:prstGeom prst="roundRect">
             <a:avLst/>
           </a:prstGeom>
           <a:solidFill>
-            <a:srgbClr val="161E31"/>
+            <a:srgbClr val="131A2A"/>
           </a:solidFill>
           <a:ln>
             <a:solidFill>
-              <a:srgbClr val="2D3748"/>
+              <a:srgbClr val="28344B"/>
             </a:solidFill>
           </a:ln>
         </p:spPr>
@@ -7687,14 +7629,14 @@
           </a:fontRef>
         </p:style>
         <p:txBody>
-          <a:bodyPr rtlCol="0" anchor="ctr" lIns="228600" tIns="164592" rIns="228600" wrap="square"/>
+          <a:bodyPr rtlCol="0" anchor="ctr" lIns="228600" tIns="137160" rIns="228600" wrap="square"/>
           <a:lstStyle/>
           <a:p>
             <a:pPr algn="ctr">
               <a:spcAft>
-                <a:spcPts val="400"/>
-              </a:spcAft>
-              <a:defRPr sz="1300" b="1">
+                <a:spcPts val="300"/>
+              </a:spcAft>
+              <a:defRPr sz="1250" b="1">
                 <a:solidFill>
                   <a:srgbClr val="38BDF8"/>
                 </a:solidFill>
@@ -7710,7 +7652,7 @@
               <a:spcAft>
                 <a:spcPts val="200"/>
               </a:spcAft>
-              <a:defRPr sz="1150">
+              <a:defRPr sz="1100">
                 <a:solidFill>
                   <a:srgbClr val="E2E8F0"/>
                 </a:solidFill>
@@ -7718,7 +7660,7 @@
               </a:defRPr>
             </a:pPr>
             <a:r>
-              <a:t>• Khám phá (Screen 01) -&gt; Xem chi tiết (Screen 02) -&gt; Nhấn Apply mở Sheet (Screen 03) -&gt; Nộp đơn thành công (Screen 04) -&gt; Quản lý tại Tracker (Screen 05).</a:t>
+              <a:t>• Khám phá (Screen 01) -&gt; Xem chi tiết (Screen 02) -&gt; Mở Apply Sheet (Screen 03) -&gt; Gửi đơn thành công (Screen 04) -&gt; Quản lý tại Tracker (Screen 05).</a:t>
             </a:r>
           </a:p>
         </p:txBody>
@@ -7731,18 +7673,18 @@
         </p:nvSpPr>
         <p:spPr>
           <a:xfrm>
-            <a:off x="731520" y="3182112"/>
-            <a:ext cx="6949440" cy="1554480"/>
+            <a:off x="548640" y="3139440"/>
+            <a:ext cx="8046720" cy="1584960"/>
           </a:xfrm>
           <a:prstGeom prst="roundRect">
             <a:avLst/>
           </a:prstGeom>
           <a:solidFill>
-            <a:srgbClr val="161E31"/>
+            <a:srgbClr val="131A2A"/>
           </a:solidFill>
           <a:ln>
             <a:solidFill>
-              <a:srgbClr val="2D3748"/>
+              <a:srgbClr val="28344B"/>
             </a:solidFill>
           </a:ln>
         </p:spPr>
@@ -7761,14 +7703,14 @@
           </a:fontRef>
         </p:style>
         <p:txBody>
-          <a:bodyPr rtlCol="0" anchor="ctr" lIns="228600" tIns="164592" rIns="228600" wrap="square"/>
+          <a:bodyPr rtlCol="0" anchor="ctr" lIns="228600" tIns="137160" rIns="228600" wrap="square"/>
           <a:lstStyle/>
           <a:p>
             <a:pPr algn="ctr">
               <a:spcAft>
-                <a:spcPts val="400"/>
-              </a:spcAft>
-              <a:defRPr sz="1300" b="1">
+                <a:spcPts val="300"/>
+              </a:spcAft>
+              <a:defRPr sz="1250" b="1">
                 <a:solidFill>
                   <a:srgbClr val="34D399"/>
                 </a:solidFill>
@@ -7784,7 +7726,7 @@
               <a:spcAft>
                 <a:spcPts val="200"/>
               </a:spcAft>
-              <a:defRPr sz="1150">
+              <a:defRPr sz="1100">
                 <a:solidFill>
                   <a:srgbClr val="E2E8F0"/>
                 </a:solidFill>
@@ -7792,7 +7734,7 @@
               </a:defRPr>
             </a:pPr>
             <a:r>
-              <a:t>• Trưởng nhóm mở Tracker (Screen 05) -&gt; Xem hồ sơ -&gt; Nhấn Hẹn trao đổi -&gt; Chọn giờ (Screen 06) -&gt; Xác nhận lịch hẹn (Screen 07).</a:t>
+              <a:t>• Trưởng nhóm mở Tracker (Screen 05) -&gt; Xem hồ sơ ứng viên -&gt; Nhấn Hẹn trao đổi -&gt; Chọn khung giờ (Screen 06) -&gt; Xác nhận lịch hẹn (Screen 07).</a:t>
             </a:r>
           </a:p>
         </p:txBody>
@@ -7805,18 +7747,18 @@
         </p:nvSpPr>
         <p:spPr>
           <a:xfrm>
-            <a:off x="731520" y="4855464"/>
-            <a:ext cx="6949440" cy="1554480"/>
+            <a:off x="548640" y="4861560"/>
+            <a:ext cx="8046720" cy="1584960"/>
           </a:xfrm>
           <a:prstGeom prst="roundRect">
             <a:avLst/>
           </a:prstGeom>
           <a:solidFill>
-            <a:srgbClr val="161E31"/>
+            <a:srgbClr val="131A2A"/>
           </a:solidFill>
           <a:ln>
             <a:solidFill>
-              <a:srgbClr val="2D3748"/>
+              <a:srgbClr val="28344B"/>
             </a:solidFill>
           </a:ln>
         </p:spPr>
@@ -7835,16 +7777,16 @@
           </a:fontRef>
         </p:style>
         <p:txBody>
-          <a:bodyPr rtlCol="0" anchor="ctr" lIns="228600" tIns="164592" rIns="228600" wrap="square"/>
+          <a:bodyPr rtlCol="0" anchor="ctr" lIns="228600" tIns="137160" rIns="228600" wrap="square"/>
           <a:lstStyle/>
           <a:p>
             <a:pPr algn="ctr">
               <a:spcAft>
-                <a:spcPts val="400"/>
-              </a:spcAft>
-              <a:defRPr sz="1300" b="1">
-                <a:solidFill>
-                  <a:srgbClr val="38BDF8"/>
+                <a:spcPts val="300"/>
+              </a:spcAft>
+              <a:defRPr sz="1250" b="1">
+                <a:solidFill>
+                  <a:srgbClr val="FB7185"/>
                 </a:solidFill>
                 <a:latin typeface="Arial"/>
               </a:defRPr>
@@ -7858,15 +7800,15 @@
               <a:spcAft>
                 <a:spcPts val="200"/>
               </a:spcAft>
-              <a:defRPr sz="1150">
-                <a:solidFill>
-                  <a:srgbClr val="94A3B8"/>
-                </a:solidFill>
-                <a:latin typeface="Arial"/>
-              </a:defRPr>
-            </a:pPr>
-            <a:r>
-              <a:t>• Tìm từ khóa sai hoặc bộ lọc quá hẹp -&gt; Screen 08 (Empty State) -&gt; Nhấn nút "Xóa bộ lọc" -&gt; Phục hồi về danh sách đầy đủ trong 1 chạm (Zero Dead-Ends).</a:t>
+              <a:defRPr sz="1100">
+                <a:solidFill>
+                  <a:srgbClr val="E2E8F0"/>
+                </a:solidFill>
+                <a:latin typeface="Arial"/>
+              </a:defRPr>
+            </a:pPr>
+            <a:r>
+              <a:t>• Tìm từ khóa sai hoặc bộ lọc quá hẹp -&gt; Màn hình Screen 08 (Empty State) -&gt; Nhấn nút 'Xóa bộ lọc' -&gt; Khôi phục danh sách đầy đủ trong 1 chạm (Zero Dead-Ends).</a:t>
             </a:r>
           </a:p>
         </p:txBody>
@@ -7879,18 +7821,18 @@
         </p:nvSpPr>
         <p:spPr>
           <a:xfrm>
-            <a:off x="7863840" y="1508760"/>
-            <a:ext cx="3596335" cy="4901184"/>
+            <a:off x="8778240" y="1417320"/>
+            <a:ext cx="2864815" cy="5029200"/>
           </a:xfrm>
           <a:prstGeom prst="roundRect">
             <a:avLst/>
           </a:prstGeom>
           <a:solidFill>
-            <a:srgbClr val="161E31"/>
+            <a:srgbClr val="131A2A"/>
           </a:solidFill>
           <a:ln>
             <a:solidFill>
-              <a:srgbClr val="2D3748"/>
+              <a:srgbClr val="28344B"/>
             </a:solidFill>
           </a:ln>
         </p:spPr>
@@ -7932,8 +7874,8 @@
         </p:blipFill>
         <p:spPr>
           <a:xfrm>
-            <a:off x="8092440" y="1691640"/>
-            <a:ext cx="3139135" cy="13282951"/>
+            <a:off x="9648791" y="1554480"/>
+            <a:ext cx="1123711" cy="4754880"/>
           </a:xfrm>
           <a:prstGeom prst="rect">
             <a:avLst/>
@@ -8009,18 +7951,18 @@
         </p:nvSpPr>
         <p:spPr>
           <a:xfrm>
-            <a:off x="731520" y="365760"/>
-            <a:ext cx="10728655" cy="1005840"/>
+            <a:off x="548640" y="320040"/>
+            <a:ext cx="11094415" cy="960120"/>
           </a:xfrm>
           <a:prstGeom prst="roundRect">
             <a:avLst/>
           </a:prstGeom>
           <a:solidFill>
-            <a:srgbClr val="161E31"/>
+            <a:srgbClr val="131A2A"/>
           </a:solidFill>
           <a:ln>
             <a:solidFill>
-              <a:srgbClr val="2D3748"/>
+              <a:srgbClr val="28344B"/>
             </a:solidFill>
           </a:ln>
         </p:spPr>
@@ -8051,7 +7993,7 @@
               </a:defRPr>
             </a:pPr>
             <a:r>
-              <a:t>05 / 12  ·  AI GENERATION</a:t>
+              <a:t>05  ·  AI GENERATION</a:t>
             </a:r>
           </a:p>
           <a:p>
@@ -8067,7 +8009,7 @@
               </a:defRPr>
             </a:pPr>
             <a:r>
-              <a:t>Ứng dụng Google Stitch: Prompt-to-UI 5 Thành phần</a:t>
+              <a:t>Ứng dụng Google Stitch · Kỹ thuật Prompt-to-UI 5 Thành phần</a:t>
             </a:r>
           </a:p>
         </p:txBody>
@@ -8080,8 +8022,8 @@
         </p:nvSpPr>
         <p:spPr>
           <a:xfrm>
-            <a:off x="7772400" y="438912"/>
-            <a:ext cx="3474720" cy="457200"/>
+            <a:off x="7772400" y="384048"/>
+            <a:ext cx="3657600" cy="457200"/>
           </a:xfrm>
           <a:prstGeom prst="rect">
             <a:avLst/>
@@ -8116,18 +8058,18 @@
         </p:nvSpPr>
         <p:spPr>
           <a:xfrm>
-            <a:off x="731520" y="1508760"/>
-            <a:ext cx="6949440" cy="1554480"/>
+            <a:off x="548640" y="1417320"/>
+            <a:ext cx="4389120" cy="2432304"/>
           </a:xfrm>
           <a:prstGeom prst="roundRect">
             <a:avLst/>
           </a:prstGeom>
           <a:solidFill>
-            <a:srgbClr val="161E31"/>
+            <a:srgbClr val="131A2A"/>
           </a:solidFill>
           <a:ln>
             <a:solidFill>
-              <a:srgbClr val="2D3748"/>
+              <a:srgbClr val="28344B"/>
             </a:solidFill>
           </a:ln>
         </p:spPr>
@@ -8167,9 +8109,9 @@
           <a:p>
             <a:pPr>
               <a:spcAft>
-                <a:spcPts val="200"/>
-              </a:spcAft>
-              <a:defRPr sz="1150">
+                <a:spcPts val="300"/>
+              </a:spcAft>
+              <a:defRPr sz="1100">
                 <a:solidFill>
                   <a:srgbClr val="E2E8F0"/>
                 </a:solidFill>
@@ -8177,15 +8119,15 @@
               </a:defRPr>
             </a:pPr>
             <a:r>
-              <a:t>• 1. Role &amp; Persona: Mobile App UX Designer thiết kế cho SV IT (Lê Quốc Huy).</a:t>
+              <a:t>• 1. Role &amp; Persona: UX Designer thiết kế cho SV IT Lê Quốc Huy.</a:t>
             </a:r>
           </a:p>
           <a:p>
             <a:pPr>
               <a:spcAft>
-                <a:spcPts val="200"/>
-              </a:spcAft>
-              <a:defRPr sz="1150">
+                <a:spcPts val="300"/>
+              </a:spcAft>
+              <a:defRPr sz="1100">
                 <a:solidFill>
                   <a:srgbClr val="E2E8F0"/>
                 </a:solidFill>
@@ -8199,9 +8141,9 @@
           <a:p>
             <a:pPr>
               <a:spcAft>
-                <a:spcPts val="200"/>
-              </a:spcAft>
-              <a:defRPr sz="1150">
+                <a:spcPts val="300"/>
+              </a:spcAft>
+              <a:defRPr sz="1100">
                 <a:solidFill>
                   <a:srgbClr val="E2E8F0"/>
                 </a:solidFill>
@@ -8209,15 +8151,15 @@
               </a:defRPr>
             </a:pPr>
             <a:r>
-              <a:t>• 3. Platform: Android Mobile 360x800 dp, Material 3 8dp grid.</a:t>
+              <a:t>• 3. Platform: Android Mobile 360x800 dp, lưới 8dp Material 3.</a:t>
             </a:r>
           </a:p>
           <a:p>
             <a:pPr>
               <a:spcAft>
-                <a:spcPts val="200"/>
-              </a:spcAft>
-              <a:defRPr sz="1150">
+                <a:spcPts val="300"/>
+              </a:spcAft>
+              <a:defRPr sz="1100">
                 <a:solidFill>
                   <a:srgbClr val="E2E8F0"/>
                 </a:solidFill>
@@ -8225,15 +8167,15 @@
               </a:defRPr>
             </a:pPr>
             <a:r>
-              <a:t>• 4. Constraints: WCAG 2.1 AA, hiển thị % tương thích và cam kết giờ.</a:t>
+              <a:t>• 4. Constraints: Chuẩn WCAG 2.1 AA, hiển thị % tương thích và cam kết giờ.</a:t>
             </a:r>
           </a:p>
           <a:p>
             <a:pPr>
               <a:spcAft>
-                <a:spcPts val="200"/>
-              </a:spcAft>
-              <a:defRPr sz="1150">
+                <a:spcPts val="300"/>
+              </a:spcAft>
+              <a:defRPr sz="1100">
                 <a:solidFill>
                   <a:srgbClr val="E2E8F0"/>
                 </a:solidFill>
@@ -8241,7 +8183,7 @@
               </a:defRPr>
             </a:pPr>
             <a:r>
-              <a:t>• 5. Style: Clean, trustworthy, Deep Navy (#0F172A) &amp; Emerald (#10B981).</a:t>
+              <a:t>• 5. Style: Bảng màu Deep Navy (#0F172A) &amp; Emerald (#10B981).</a:t>
             </a:r>
           </a:p>
         </p:txBody>
@@ -8254,18 +8196,18 @@
         </p:nvSpPr>
         <p:spPr>
           <a:xfrm>
-            <a:off x="731520" y="3182112"/>
-            <a:ext cx="6949440" cy="1554480"/>
+            <a:off x="548640" y="4014216"/>
+            <a:ext cx="4389120" cy="2432304"/>
           </a:xfrm>
           <a:prstGeom prst="roundRect">
             <a:avLst/>
           </a:prstGeom>
           <a:solidFill>
-            <a:srgbClr val="161E31"/>
+            <a:srgbClr val="131A2A"/>
           </a:solidFill>
           <a:ln>
             <a:solidFill>
-              <a:srgbClr val="2D3748"/>
+              <a:srgbClr val="28344B"/>
             </a:solidFill>
           </a:ln>
         </p:spPr>
@@ -8299,15 +8241,15 @@
               </a:defRPr>
             </a:pPr>
             <a:r>
-              <a:t>📊 Kết quả Ban đầu</a:t>
+              <a:t>📊 Kết quả Ban đầu &amp; Minh chứng</a:t>
             </a:r>
           </a:p>
           <a:p>
             <a:pPr>
               <a:spcAft>
-                <a:spcPts val="200"/>
-              </a:spcAft>
-              <a:defRPr sz="1150">
+                <a:spcPts val="300"/>
+              </a:spcAft>
+              <a:defRPr sz="1100">
                 <a:solidFill>
                   <a:srgbClr val="E2E8F0"/>
                 </a:solidFill>
@@ -8315,7 +8257,23 @@
               </a:defRPr>
             </a:pPr>
             <a:r>
-              <a:t>• Google Stitch tạo phôi 8 màn hình ban đầu thể hiện tốt cấu trúc thẻ card và layout.</a:t>
+              <a:t>• Google Stitch tạo phôi 8 màn hình ban đầu thể hiện tốt cấu trúc layout.</a:t>
+            </a:r>
+          </a:p>
+          <a:p>
+            <a:pPr>
+              <a:spcAft>
+                <a:spcPts val="300"/>
+              </a:spcAft>
+              <a:defRPr sz="1100">
+                <a:solidFill>
+                  <a:srgbClr val="E2E8F0"/>
+                </a:solidFill>
+                <a:latin typeface="Arial"/>
+              </a:defRPr>
+            </a:pPr>
+            <a:r>
+              <a:t>• Bằng chứng prompt nguyên văn lưu trữ minh bạch tại ai/ai-design-log.md.</a:t>
             </a:r>
           </a:p>
         </p:txBody>
@@ -8328,18 +8286,18 @@
         </p:nvSpPr>
         <p:spPr>
           <a:xfrm>
-            <a:off x="731520" y="4855464"/>
-            <a:ext cx="6949440" cy="1554480"/>
+            <a:off x="5120640" y="1417320"/>
+            <a:ext cx="6522415" cy="5029200"/>
           </a:xfrm>
           <a:prstGeom prst="roundRect">
             <a:avLst/>
           </a:prstGeom>
           <a:solidFill>
-            <a:srgbClr val="161E31"/>
+            <a:srgbClr val="131A2A"/>
           </a:solidFill>
           <a:ln>
             <a:solidFill>
-              <a:srgbClr val="2D3748"/>
+              <a:srgbClr val="28344B"/>
             </a:solidFill>
           </a:ln>
         </p:spPr>
@@ -8358,80 +8316,6 @@
           </a:fontRef>
         </p:style>
         <p:txBody>
-          <a:bodyPr rtlCol="0" anchor="ctr" lIns="228600" tIns="164592" rIns="228600" wrap="square"/>
-          <a:lstStyle/>
-          <a:p>
-            <a:pPr algn="ctr">
-              <a:spcAft>
-                <a:spcPts val="400"/>
-              </a:spcAft>
-              <a:defRPr sz="1300" b="1">
-                <a:solidFill>
-                  <a:srgbClr val="38BDF8"/>
-                </a:solidFill>
-                <a:latin typeface="Arial"/>
-              </a:defRPr>
-            </a:pPr>
-            <a:r>
-              <a:t>📁 Minh chứng</a:t>
-            </a:r>
-          </a:p>
-          <a:p>
-            <a:pPr>
-              <a:spcAft>
-                <a:spcPts val="200"/>
-              </a:spcAft>
-              <a:defRPr sz="1150">
-                <a:solidFill>
-                  <a:srgbClr val="94A3B8"/>
-                </a:solidFill>
-                <a:latin typeface="Arial"/>
-              </a:defRPr>
-            </a:pPr>
-            <a:r>
-              <a:t>• Toàn văn prompt và ảnh chụp trong ai/ai-design-log.md và assets/stitch/.</a:t>
-            </a:r>
-          </a:p>
-        </p:txBody>
-      </p:sp>
-      <p:sp>
-        <p:nvSpPr>
-          <p:cNvPr id="8" name="Rounded Rectangle 7"/>
-          <p:cNvSpPr/>
-          <p:nvPr/>
-        </p:nvSpPr>
-        <p:spPr>
-          <a:xfrm>
-            <a:off x="7863840" y="1508760"/>
-            <a:ext cx="3596335" cy="4901184"/>
-          </a:xfrm>
-          <a:prstGeom prst="roundRect">
-            <a:avLst/>
-          </a:prstGeom>
-          <a:solidFill>
-            <a:srgbClr val="161E31"/>
-          </a:solidFill>
-          <a:ln>
-            <a:solidFill>
-              <a:srgbClr val="2D3748"/>
-            </a:solidFill>
-          </a:ln>
-        </p:spPr>
-        <p:style>
-          <a:lnRef idx="1">
-            <a:schemeClr val="accent1"/>
-          </a:lnRef>
-          <a:fillRef idx="3">
-            <a:schemeClr val="accent1"/>
-          </a:fillRef>
-          <a:effectRef idx="2">
-            <a:schemeClr val="accent1"/>
-          </a:effectRef>
-          <a:fontRef idx="minor">
-            <a:schemeClr val="lt1"/>
-          </a:fontRef>
-        </p:style>
-        <p:txBody>
           <a:bodyPr rtlCol="0" anchor="ctr"/>
           <a:lstStyle/>
           <a:p>
@@ -8441,7 +8325,7 @@
       </p:sp>
       <p:pic>
         <p:nvPicPr>
-          <p:cNvPr id="9" name="Picture 8" descr="stitch_prompt_input_evidence.png"/>
+          <p:cNvPr id="8" name="Picture 7" descr="stitch_prompt_input_evidence.png"/>
           <p:cNvPicPr>
             <a:picLocks noChangeAspect="1"/>
           </p:cNvPicPr>
@@ -8455,8 +8339,8 @@
         </p:blipFill>
         <p:spPr>
           <a:xfrm>
-            <a:off x="8092440" y="1691640"/>
-            <a:ext cx="3139135" cy="1667665"/>
+            <a:off x="5318607" y="2304573"/>
+            <a:ext cx="6126480" cy="3254692"/>
           </a:xfrm>
           <a:prstGeom prst="rect">
             <a:avLst/>
@@ -8532,18 +8416,18 @@
         </p:nvSpPr>
         <p:spPr>
           <a:xfrm>
-            <a:off x="731520" y="365760"/>
-            <a:ext cx="10728655" cy="1005840"/>
+            <a:off x="548640" y="320040"/>
+            <a:ext cx="11094415" cy="960120"/>
           </a:xfrm>
           <a:prstGeom prst="roundRect">
             <a:avLst/>
           </a:prstGeom>
           <a:solidFill>
-            <a:srgbClr val="161E31"/>
+            <a:srgbClr val="131A2A"/>
           </a:solidFill>
           <a:ln>
             <a:solidFill>
-              <a:srgbClr val="2D3748"/>
+              <a:srgbClr val="28344B"/>
             </a:solidFill>
           </a:ln>
         </p:spPr>
@@ -8574,7 +8458,7 @@
               </a:defRPr>
             </a:pPr>
             <a:r>
-              <a:t>06 / 12  ·  UX CRITIQUE &amp; ITERATIONS</a:t>
+              <a:t>06  ·  UX CRITIQUE &amp; ITERATIONS</a:t>
             </a:r>
           </a:p>
           <a:p>
@@ -8590,7 +8474,7 @@
               </a:defRPr>
             </a:pPr>
             <a:r>
-              <a:t>3 Vòng lặp Tinh chỉnh &amp; 5 Lỗi Heuristic được Sửa</a:t>
+              <a:t>3 Vòng lặp Tinh chỉnh &amp; 5 Lỗi Heuristic được Khắc phục</a:t>
             </a:r>
           </a:p>
         </p:txBody>
@@ -8603,8 +8487,8 @@
         </p:nvSpPr>
         <p:spPr>
           <a:xfrm>
-            <a:off x="7772400" y="438912"/>
-            <a:ext cx="3474720" cy="457200"/>
+            <a:off x="7772400" y="384048"/>
+            <a:ext cx="3657600" cy="457200"/>
           </a:xfrm>
           <a:prstGeom prst="rect">
             <a:avLst/>
@@ -8639,18 +8523,18 @@
         </p:nvSpPr>
         <p:spPr>
           <a:xfrm>
-            <a:off x="731520" y="1508760"/>
-            <a:ext cx="6949440" cy="1554480"/>
+            <a:off x="548640" y="1417320"/>
+            <a:ext cx="4389120" cy="2432304"/>
           </a:xfrm>
           <a:prstGeom prst="roundRect">
             <a:avLst/>
           </a:prstGeom>
           <a:solidFill>
-            <a:srgbClr val="161E31"/>
+            <a:srgbClr val="131A2A"/>
           </a:solidFill>
           <a:ln>
             <a:solidFill>
-              <a:srgbClr val="2D3748"/>
+              <a:srgbClr val="28344B"/>
             </a:solidFill>
           </a:ln>
         </p:spPr>
@@ -8678,21 +8562,21 @@
               </a:spcAft>
               <a:defRPr sz="1300" b="1">
                 <a:solidFill>
-                  <a:srgbClr val="38BDF8"/>
-                </a:solidFill>
-                <a:latin typeface="Arial"/>
-              </a:defRPr>
-            </a:pPr>
-            <a:r>
-              <a:t>🔍 5 Lỗi Heuristic Phát hiện từ AI</a:t>
+                  <a:srgbClr val="FB7185"/>
+                </a:solidFill>
+                <a:latin typeface="Arial"/>
+              </a:defRPr>
+            </a:pPr>
+            <a:r>
+              <a:t>🔍 5 Lỗi Usability Heuristic Phát hiện từ AI</a:t>
             </a:r>
           </a:p>
           <a:p>
             <a:pPr>
               <a:spcAft>
-                <a:spcPts val="200"/>
-              </a:spcAft>
-              <a:defRPr sz="1150">
+                <a:spcPts val="300"/>
+              </a:spcAft>
+              <a:defRPr sz="1100">
                 <a:solidFill>
                   <a:srgbClr val="E2E8F0"/>
                 </a:solidFill>
@@ -8700,15 +8584,15 @@
               </a:defRPr>
             </a:pPr>
             <a:r>
-              <a:t>• H1 (Visibility): Nút Apply ban đầu thiếu loading feedback khi nhấn.</a:t>
+              <a:t>• H1 (Visibility): Nút Apply ban đầu không có loading feedback khi nhấn.</a:t>
             </a:r>
           </a:p>
           <a:p>
             <a:pPr>
               <a:spcAft>
-                <a:spcPts val="200"/>
-              </a:spcAft>
-              <a:defRPr sz="1150">
+                <a:spcPts val="300"/>
+              </a:spcAft>
+              <a:defRPr sz="1100">
                 <a:solidFill>
                   <a:srgbClr val="E2E8F0"/>
                 </a:solidFill>
@@ -8722,9 +8606,9 @@
           <a:p>
             <a:pPr>
               <a:spcAft>
-                <a:spcPts val="200"/>
-              </a:spcAft>
-              <a:defRPr sz="1150">
+                <a:spcPts val="300"/>
+              </a:spcAft>
+              <a:defRPr sz="1100">
                 <a:solidFill>
                   <a:srgbClr val="E2E8F0"/>
                 </a:solidFill>
@@ -8738,9 +8622,9 @@
           <a:p>
             <a:pPr>
               <a:spcAft>
-                <a:spcPts val="200"/>
-              </a:spcAft>
-              <a:defRPr sz="1150">
+                <a:spcPts val="300"/>
+              </a:spcAft>
+              <a:defRPr sz="1100">
                 <a:solidFill>
                   <a:srgbClr val="E2E8F0"/>
                 </a:solidFill>
@@ -8754,9 +8638,9 @@
           <a:p>
             <a:pPr>
               <a:spcAft>
-                <a:spcPts val="200"/>
-              </a:spcAft>
-              <a:defRPr sz="1150">
+                <a:spcPts val="300"/>
+              </a:spcAft>
+              <a:defRPr sz="1100">
                 <a:solidFill>
                   <a:srgbClr val="E2E8F0"/>
                 </a:solidFill>
@@ -8777,18 +8661,18 @@
         </p:nvSpPr>
         <p:spPr>
           <a:xfrm>
-            <a:off x="731520" y="3182112"/>
-            <a:ext cx="6949440" cy="1554480"/>
+            <a:off x="548640" y="4014216"/>
+            <a:ext cx="4389120" cy="2432304"/>
           </a:xfrm>
           <a:prstGeom prst="roundRect">
             <a:avLst/>
           </a:prstGeom>
           <a:solidFill>
-            <a:srgbClr val="161E31"/>
+            <a:srgbClr val="131A2A"/>
           </a:solidFill>
           <a:ln>
             <a:solidFill>
-              <a:srgbClr val="2D3748"/>
+              <a:srgbClr val="28344B"/>
             </a:solidFill>
           </a:ln>
         </p:spPr>
@@ -8828,9 +8712,9 @@
           <a:p>
             <a:pPr>
               <a:spcAft>
-                <a:spcPts val="200"/>
-              </a:spcAft>
-              <a:defRPr sz="1150">
+                <a:spcPts val="300"/>
+              </a:spcAft>
+              <a:defRPr sz="1100">
                 <a:solidFill>
                   <a:srgbClr val="E2E8F0"/>
                 </a:solidFill>
@@ -8844,9 +8728,9 @@
           <a:p>
             <a:pPr>
               <a:spcAft>
-                <a:spcPts val="200"/>
-              </a:spcAft>
-              <a:defRPr sz="1150">
+                <a:spcPts val="300"/>
+              </a:spcAft>
+              <a:defRPr sz="1100">
                 <a:solidFill>
                   <a:srgbClr val="E2E8F0"/>
                 </a:solidFill>
@@ -8860,9 +8744,9 @@
           <a:p>
             <a:pPr>
               <a:spcAft>
-                <a:spcPts val="200"/>
-              </a:spcAft>
-              <a:defRPr sz="1150">
+                <a:spcPts val="300"/>
+              </a:spcAft>
+              <a:defRPr sz="1100">
                 <a:solidFill>
                   <a:srgbClr val="E2E8F0"/>
                 </a:solidFill>
@@ -8883,18 +8767,18 @@
         </p:nvSpPr>
         <p:spPr>
           <a:xfrm>
-            <a:off x="731520" y="4855464"/>
-            <a:ext cx="6949440" cy="1554480"/>
+            <a:off x="5120640" y="1417320"/>
+            <a:ext cx="6522415" cy="5029200"/>
           </a:xfrm>
           <a:prstGeom prst="roundRect">
             <a:avLst/>
           </a:prstGeom>
           <a:solidFill>
-            <a:srgbClr val="161E31"/>
+            <a:srgbClr val="131A2A"/>
           </a:solidFill>
           <a:ln>
             <a:solidFill>
-              <a:srgbClr val="2D3748"/>
+              <a:srgbClr val="28344B"/>
             </a:solidFill>
           </a:ln>
         </p:spPr>
@@ -8913,80 +8797,6 @@
           </a:fontRef>
         </p:style>
         <p:txBody>
-          <a:bodyPr rtlCol="0" anchor="ctr" lIns="228600" tIns="164592" rIns="228600" wrap="square"/>
-          <a:lstStyle/>
-          <a:p>
-            <a:pPr algn="ctr">
-              <a:spcAft>
-                <a:spcPts val="400"/>
-              </a:spcAft>
-              <a:defRPr sz="1300" b="1">
-                <a:solidFill>
-                  <a:srgbClr val="38BDF8"/>
-                </a:solidFill>
-                <a:latin typeface="Arial"/>
-              </a:defRPr>
-            </a:pPr>
-            <a:r>
-              <a:t>📁 Minh chứng</a:t>
-            </a:r>
-          </a:p>
-          <a:p>
-            <a:pPr>
-              <a:spcAft>
-                <a:spcPts val="200"/>
-              </a:spcAft>
-              <a:defRPr sz="1150">
-                <a:solidFill>
-                  <a:srgbClr val="94A3B8"/>
-                </a:solidFill>
-                <a:latin typeface="Arial"/>
-              </a:defRPr>
-            </a:pPr>
-            <a:r>
-              <a:t>• Bảng đối chiếu Before/After chi tiết tại ai/ai-design-log.md.</a:t>
-            </a:r>
-          </a:p>
-        </p:txBody>
-      </p:sp>
-      <p:sp>
-        <p:nvSpPr>
-          <p:cNvPr id="8" name="Rounded Rectangle 7"/>
-          <p:cNvSpPr/>
-          <p:nvPr/>
-        </p:nvSpPr>
-        <p:spPr>
-          <a:xfrm>
-            <a:off x="7863840" y="1508760"/>
-            <a:ext cx="3596335" cy="4901184"/>
-          </a:xfrm>
-          <a:prstGeom prst="roundRect">
-            <a:avLst/>
-          </a:prstGeom>
-          <a:solidFill>
-            <a:srgbClr val="161E31"/>
-          </a:solidFill>
-          <a:ln>
-            <a:solidFill>
-              <a:srgbClr val="2D3748"/>
-            </a:solidFill>
-          </a:ln>
-        </p:spPr>
-        <p:style>
-          <a:lnRef idx="1">
-            <a:schemeClr val="accent1"/>
-          </a:lnRef>
-          <a:fillRef idx="3">
-            <a:schemeClr val="accent1"/>
-          </a:fillRef>
-          <a:effectRef idx="2">
-            <a:schemeClr val="accent1"/>
-          </a:effectRef>
-          <a:fontRef idx="minor">
-            <a:schemeClr val="lt1"/>
-          </a:fontRef>
-        </p:style>
-        <p:txBody>
           <a:bodyPr rtlCol="0" anchor="ctr"/>
           <a:lstStyle/>
           <a:p>
@@ -8996,7 +8806,7 @@
       </p:sp>
       <p:pic>
         <p:nvPicPr>
-          <p:cNvPr id="9" name="Picture 8" descr="figma_canvas_7_screens.png"/>
+          <p:cNvPr id="8" name="Picture 7" descr="figma_canvas_7_screens.png"/>
           <p:cNvPicPr>
             <a:picLocks noChangeAspect="1"/>
           </p:cNvPicPr>
@@ -9010,8 +8820,8 @@
         </p:blipFill>
         <p:spPr>
           <a:xfrm>
-            <a:off x="8092440" y="1691640"/>
-            <a:ext cx="3139135" cy="1667665"/>
+            <a:off x="5318607" y="2304573"/>
+            <a:ext cx="6126480" cy="3254692"/>
           </a:xfrm>
           <a:prstGeom prst="rect">
             <a:avLst/>
@@ -9087,18 +8897,18 @@
         </p:nvSpPr>
         <p:spPr>
           <a:xfrm>
-            <a:off x="731520" y="365760"/>
-            <a:ext cx="10728655" cy="1005840"/>
+            <a:off x="548640" y="320040"/>
+            <a:ext cx="11094415" cy="960120"/>
           </a:xfrm>
           <a:prstGeom prst="roundRect">
             <a:avLst/>
           </a:prstGeom>
           <a:solidFill>
-            <a:srgbClr val="161E31"/>
+            <a:srgbClr val="131A2A"/>
           </a:solidFill>
           <a:ln>
             <a:solidFill>
-              <a:srgbClr val="2D3748"/>
+              <a:srgbClr val="28344B"/>
             </a:solidFill>
           </a:ln>
         </p:spPr>
@@ -9129,7 +8939,7 @@
               </a:defRPr>
             </a:pPr>
             <a:r>
-              <a:t>07 / 12  ·  DESIGN DECISIONS</a:t>
+              <a:t>07  ·  DESIGN DECISIONS</a:t>
             </a:r>
           </a:p>
           <a:p>
@@ -9158,8 +8968,8 @@
         </p:nvSpPr>
         <p:spPr>
           <a:xfrm>
-            <a:off x="7772400" y="438912"/>
-            <a:ext cx="3474720" cy="457200"/>
+            <a:off x="7772400" y="384048"/>
+            <a:ext cx="3657600" cy="457200"/>
           </a:xfrm>
           <a:prstGeom prst="rect">
             <a:avLst/>
@@ -9194,18 +9004,18 @@
         </p:nvSpPr>
         <p:spPr>
           <a:xfrm>
-            <a:off x="731520" y="1508760"/>
-            <a:ext cx="6949440" cy="1554480"/>
+            <a:off x="548640" y="1417320"/>
+            <a:ext cx="8046720" cy="1584960"/>
           </a:xfrm>
           <a:prstGeom prst="roundRect">
             <a:avLst/>
           </a:prstGeom>
           <a:solidFill>
-            <a:srgbClr val="161E31"/>
+            <a:srgbClr val="131A2A"/>
           </a:solidFill>
           <a:ln>
             <a:solidFill>
-              <a:srgbClr val="2D3748"/>
+              <a:srgbClr val="28344B"/>
             </a:solidFill>
           </a:ln>
         </p:spPr>
@@ -9224,16 +9034,16 @@
           </a:fontRef>
         </p:style>
         <p:txBody>
-          <a:bodyPr rtlCol="0" anchor="ctr" lIns="228600" tIns="164592" rIns="228600" wrap="square"/>
+          <a:bodyPr rtlCol="0" anchor="ctr" lIns="228600" tIns="137160" rIns="228600" wrap="square"/>
           <a:lstStyle/>
           <a:p>
             <a:pPr algn="ctr">
               <a:spcAft>
-                <a:spcPts val="400"/>
-              </a:spcAft>
-              <a:defRPr sz="1300" b="1">
-                <a:solidFill>
-                  <a:srgbClr val="38BDF8"/>
+                <a:spcPts val="300"/>
+              </a:spcAft>
+              <a:defRPr sz="1250" b="1">
+                <a:solidFill>
+                  <a:srgbClr val="34D399"/>
                 </a:solidFill>
                 <a:latin typeface="Arial"/>
               </a:defRPr>
@@ -9247,7 +9057,7 @@
               <a:spcAft>
                 <a:spcPts val="200"/>
               </a:spcAft>
-              <a:defRPr sz="1150">
+              <a:defRPr sz="1100">
                 <a:solidFill>
                   <a:srgbClr val="E2E8F0"/>
                 </a:solidFill>
@@ -9263,7 +9073,7 @@
               <a:spcAft>
                 <a:spcPts val="200"/>
               </a:spcAft>
-              <a:defRPr sz="1150">
+              <a:defRPr sz="1100">
                 <a:solidFill>
                   <a:srgbClr val="E2E8F0"/>
                 </a:solidFill>
@@ -9271,7 +9081,7 @@
               </a:defRPr>
             </a:pPr>
             <a:r>
-              <a:t>• MODIFY - Nút Apply trôi nổi: Nút bấm ban đầu lơ lửng giữa thẻ -&gt; Chuyển thành Sticky Bottom Dock (48x56 dp) cố định đáy dễ bấm 1 tay.</a:t>
+              <a:t>• MODIFY - Nút Apply trôi nổi: Nút ban đầu lơ lửng giữa thẻ -&gt; Chuyển thành Sticky Bottom Dock (48x56 dp) cố định đáy dễ bấm 1 tay.</a:t>
             </a:r>
           </a:p>
         </p:txBody>
@@ -9284,18 +9094,18 @@
         </p:nvSpPr>
         <p:spPr>
           <a:xfrm>
-            <a:off x="731520" y="3182112"/>
-            <a:ext cx="6949440" cy="1554480"/>
+            <a:off x="548640" y="3139440"/>
+            <a:ext cx="8046720" cy="1584960"/>
           </a:xfrm>
           <a:prstGeom prst="roundRect">
             <a:avLst/>
           </a:prstGeom>
           <a:solidFill>
-            <a:srgbClr val="161E31"/>
+            <a:srgbClr val="131A2A"/>
           </a:solidFill>
           <a:ln>
             <a:solidFill>
-              <a:srgbClr val="2D3748"/>
+              <a:srgbClr val="28344B"/>
             </a:solidFill>
           </a:ln>
         </p:spPr>
@@ -9314,16 +9124,16 @@
           </a:fontRef>
         </p:style>
         <p:txBody>
-          <a:bodyPr rtlCol="0" anchor="ctr" lIns="228600" tIns="164592" rIns="228600" wrap="square"/>
+          <a:bodyPr rtlCol="0" anchor="ctr" lIns="228600" tIns="137160" rIns="228600" wrap="square"/>
           <a:lstStyle/>
           <a:p>
             <a:pPr algn="ctr">
               <a:spcAft>
-                <a:spcPts val="400"/>
-              </a:spcAft>
-              <a:defRPr sz="1300" b="1">
-                <a:solidFill>
-                  <a:srgbClr val="34D399"/>
+                <a:spcPts val="300"/>
+              </a:spcAft>
+              <a:defRPr sz="1250" b="1">
+                <a:solidFill>
+                  <a:srgbClr val="FB7185"/>
                 </a:solidFill>
                 <a:latin typeface="Arial"/>
               </a:defRPr>
@@ -9337,7 +9147,7 @@
               <a:spcAft>
                 <a:spcPts val="200"/>
               </a:spcAft>
-              <a:defRPr sz="1150">
+              <a:defRPr sz="1100">
                 <a:solidFill>
                   <a:srgbClr val="E2E8F0"/>
                 </a:solidFill>
@@ -9353,7 +9163,7 @@
               <a:spcAft>
                 <a:spcPts val="200"/>
               </a:spcAft>
-              <a:defRPr sz="1150">
+              <a:defRPr sz="1100">
                 <a:solidFill>
                   <a:srgbClr val="E2E8F0"/>
                 </a:solidFill>
@@ -9374,18 +9184,18 @@
         </p:nvSpPr>
         <p:spPr>
           <a:xfrm>
-            <a:off x="731520" y="4855464"/>
-            <a:ext cx="6949440" cy="1554480"/>
+            <a:off x="548640" y="4861560"/>
+            <a:ext cx="8046720" cy="1584960"/>
           </a:xfrm>
           <a:prstGeom prst="roundRect">
             <a:avLst/>
           </a:prstGeom>
           <a:solidFill>
-            <a:srgbClr val="161E31"/>
+            <a:srgbClr val="131A2A"/>
           </a:solidFill>
           <a:ln>
             <a:solidFill>
-              <a:srgbClr val="2D3748"/>
+              <a:srgbClr val="28344B"/>
             </a:solidFill>
           </a:ln>
         </p:spPr>
@@ -9404,14 +9214,14 @@
           </a:fontRef>
         </p:style>
         <p:txBody>
-          <a:bodyPr rtlCol="0" anchor="ctr" lIns="228600" tIns="164592" rIns="228600" wrap="square"/>
+          <a:bodyPr rtlCol="0" anchor="ctr" lIns="228600" tIns="137160" rIns="228600" wrap="square"/>
           <a:lstStyle/>
           <a:p>
             <a:pPr algn="ctr">
               <a:spcAft>
-                <a:spcPts val="400"/>
-              </a:spcAft>
-              <a:defRPr sz="1300" b="1">
+                <a:spcPts val="300"/>
+              </a:spcAft>
+              <a:defRPr sz="1250" b="1">
                 <a:solidFill>
                   <a:srgbClr val="38BDF8"/>
                 </a:solidFill>
@@ -9427,15 +9237,15 @@
               <a:spcAft>
                 <a:spcPts val="200"/>
               </a:spcAft>
-              <a:defRPr sz="1150">
-                <a:solidFill>
-                  <a:srgbClr val="94A3B8"/>
-                </a:solidFill>
-                <a:latin typeface="Arial"/>
-              </a:defRPr>
-            </a:pPr>
-            <a:r>
-              <a:t>• Hồ sơ 10 quyết định thiết kế tại design/design-decisions.md.</a:t>
+              <a:defRPr sz="1100">
+                <a:solidFill>
+                  <a:srgbClr val="E2E8F0"/>
+                </a:solidFill>
+                <a:latin typeface="Arial"/>
+              </a:defRPr>
+            </a:pPr>
+            <a:r>
+              <a:t>• Xem chi tiết 10 quyết định thiết kế tại file design/design-decisions.md.</a:t>
             </a:r>
           </a:p>
         </p:txBody>
@@ -9448,18 +9258,18 @@
         </p:nvSpPr>
         <p:spPr>
           <a:xfrm>
-            <a:off x="7863840" y="1508760"/>
-            <a:ext cx="3596335" cy="4901184"/>
+            <a:off x="8778240" y="1417320"/>
+            <a:ext cx="2864815" cy="5029200"/>
           </a:xfrm>
           <a:prstGeom prst="roundRect">
             <a:avLst/>
           </a:prstGeom>
           <a:solidFill>
-            <a:srgbClr val="161E31"/>
+            <a:srgbClr val="131A2A"/>
           </a:solidFill>
           <a:ln>
             <a:solidFill>
-              <a:srgbClr val="2D3748"/>
+              <a:srgbClr val="28344B"/>
             </a:solidFill>
           </a:ln>
         </p:spPr>
@@ -9501,8 +9311,8 @@
         </p:blipFill>
         <p:spPr>
           <a:xfrm>
-            <a:off x="8092440" y="1691640"/>
-            <a:ext cx="3139135" cy="11861529"/>
+            <a:off x="9581461" y="1554480"/>
+            <a:ext cx="1258371" cy="4754880"/>
           </a:xfrm>
           <a:prstGeom prst="rect">
             <a:avLst/>
@@ -9578,18 +9388,18 @@
         </p:nvSpPr>
         <p:spPr>
           <a:xfrm>
-            <a:off x="731520" y="365760"/>
-            <a:ext cx="10728655" cy="1005840"/>
+            <a:off x="548640" y="320040"/>
+            <a:ext cx="11094415" cy="960120"/>
           </a:xfrm>
           <a:prstGeom prst="roundRect">
             <a:avLst/>
           </a:prstGeom>
           <a:solidFill>
-            <a:srgbClr val="161E31"/>
+            <a:srgbClr val="131A2A"/>
           </a:solidFill>
           <a:ln>
             <a:solidFill>
-              <a:srgbClr val="2D3748"/>
+              <a:srgbClr val="28344B"/>
             </a:solidFill>
           </a:ln>
         </p:spPr>
@@ -9620,7 +9430,7 @@
               </a:defRPr>
             </a:pPr>
             <a:r>
-              <a:t>08 / 12  ·  FINAL UI SCREENS</a:t>
+              <a:t>08  ·  FINAL UI SHOWCASE</a:t>
             </a:r>
           </a:p>
           <a:p>
@@ -9636,7 +9446,7 @@
               </a:defRPr>
             </a:pPr>
             <a:r>
-              <a:t>Chuyển hóa: Wireframe sang 8 Màn hình Hoàn chỉnh</a:t>
+              <a:t>8 Màn hình Chức năng Hoàn chỉnh (Chuẩn C6 Môn học)</a:t>
             </a:r>
           </a:p>
         </p:txBody>
@@ -9649,8 +9459,8 @@
         </p:nvSpPr>
         <p:spPr>
           <a:xfrm>
-            <a:off x="7772400" y="438912"/>
-            <a:ext cx="3474720" cy="457200"/>
+            <a:off x="7772400" y="384048"/>
+            <a:ext cx="3657600" cy="457200"/>
           </a:xfrm>
           <a:prstGeom prst="rect">
             <a:avLst/>
@@ -9685,18 +9495,18 @@
         </p:nvSpPr>
         <p:spPr>
           <a:xfrm>
-            <a:off x="731520" y="1508760"/>
-            <a:ext cx="6949440" cy="1554480"/>
+            <a:off x="548640" y="1417320"/>
+            <a:ext cx="4389120" cy="2432304"/>
           </a:xfrm>
           <a:prstGeom prst="roundRect">
             <a:avLst/>
           </a:prstGeom>
           <a:solidFill>
-            <a:srgbClr val="161E31"/>
+            <a:srgbClr val="131A2A"/>
           </a:solidFill>
           <a:ln>
             <a:solidFill>
-              <a:srgbClr val="2D3748"/>
+              <a:srgbClr val="28344B"/>
             </a:solidFill>
           </a:ln>
         </p:spPr>
@@ -9730,15 +9540,15 @@
               </a:defRPr>
             </a:pPr>
             <a:r>
-              <a:t>📱 8 Màn hình Chức năng Độc lập (Chuẩn C6)</a:t>
+              <a:t>📱 Danh mục 8 Màn hình Độc lập</a:t>
             </a:r>
           </a:p>
           <a:p>
             <a:pPr>
               <a:spcAft>
-                <a:spcPts val="200"/>
-              </a:spcAft>
-              <a:defRPr sz="1150">
+                <a:spcPts val="300"/>
+              </a:spcAft>
+              <a:defRPr sz="1100">
                 <a:solidFill>
                   <a:srgbClr val="E2E8F0"/>
                 </a:solidFill>
@@ -9746,15 +9556,15 @@
               </a:defRPr>
             </a:pPr>
             <a:r>
-              <a:t>• Screen 01: Discovery Feed (Khám phá dự án &amp; bộ lọc)</a:t>
+              <a:t>• Screen 01: Discovery Feed (Khám phá dự án &amp; bộ lọc chuyên môn)</a:t>
             </a:r>
           </a:p>
           <a:p>
             <a:pPr>
               <a:spcAft>
-                <a:spcPts val="200"/>
-              </a:spcAft>
-              <a:defRPr sz="1150">
+                <a:spcPts val="300"/>
+              </a:spcAft>
+              <a:defRPr sz="1100">
                 <a:solidFill>
                   <a:srgbClr val="E2E8F0"/>
                 </a:solidFill>
@@ -9762,15 +9572,15 @@
               </a:defRPr>
             </a:pPr>
             <a:r>
-              <a:t>• Screen 02: Project Detail (Chi tiết dự án &amp; Skill Matrix)</a:t>
+              <a:t>• Screen 02: Project Detail (Chi tiết dự án &amp; Skill Matrix nhóm)</a:t>
             </a:r>
           </a:p>
           <a:p>
             <a:pPr>
               <a:spcAft>
-                <a:spcPts val="200"/>
-              </a:spcAft>
-              <a:defRPr sz="1150">
+                <a:spcPts val="300"/>
+              </a:spcAft>
+              <a:defRPr sz="1100">
                 <a:solidFill>
                   <a:srgbClr val="E2E8F0"/>
                 </a:solidFill>
@@ -9778,15 +9588,15 @@
               </a:defRPr>
             </a:pPr>
             <a:r>
-              <a:t>• Screen 03: Apply Modal Sheet (Nộp đơn ứng tuyển)</a:t>
+              <a:t>• Screen 03: Apply Modal Sheet (Nộp đơn ứng tuyển &amp; cam kết giờ)</a:t>
             </a:r>
           </a:p>
           <a:p>
             <a:pPr>
               <a:spcAft>
-                <a:spcPts val="200"/>
-              </a:spcAft>
-              <a:defRPr sz="1150">
+                <a:spcPts val="300"/>
+              </a:spcAft>
+              <a:defRPr sz="1100">
                 <a:solidFill>
                   <a:srgbClr val="E2E8F0"/>
                 </a:solidFill>
@@ -9794,15 +9604,15 @@
               </a:defRPr>
             </a:pPr>
             <a:r>
-              <a:t>• Screen 04: Application Submitted (Xác nhận gửi đơn)</a:t>
+              <a:t>• Screen 04: Application Submitted (Xác nhận gửi đơn thành công)</a:t>
             </a:r>
           </a:p>
           <a:p>
             <a:pPr>
               <a:spcAft>
-                <a:spcPts val="200"/>
-              </a:spcAft>
-              <a:defRPr sz="1150">
+                <a:spcPts val="300"/>
+              </a:spcAft>
+              <a:defRPr sz="1100">
                 <a:solidFill>
                   <a:srgbClr val="E2E8F0"/>
                 </a:solidFill>
@@ -9810,15 +9620,15 @@
               </a:defRPr>
             </a:pPr>
             <a:r>
-              <a:t>• Screen 05: Applications Tracker (Theo dõi tiến độ)</a:t>
+              <a:t>• Screen 05: Applications Tracker (Theo dõi tiến độ đơn thời gian thực)</a:t>
             </a:r>
           </a:p>
           <a:p>
             <a:pPr>
               <a:spcAft>
-                <a:spcPts val="200"/>
-              </a:spcAft>
-              <a:defRPr sz="1150">
+                <a:spcPts val="300"/>
+              </a:spcAft>
+              <a:defRPr sz="1100">
                 <a:solidFill>
                   <a:srgbClr val="E2E8F0"/>
                 </a:solidFill>
@@ -9826,15 +9636,15 @@
               </a:defRPr>
             </a:pPr>
             <a:r>
-              <a:t>• Screen 06: Chemistry Call Scheduler (Lên lịch trao đổi)</a:t>
+              <a:t>• Screen 06: Chemistry Call Scheduler (Lên lịch phỏng vấn kết nối)</a:t>
             </a:r>
           </a:p>
           <a:p>
             <a:pPr>
               <a:spcAft>
-                <a:spcPts val="200"/>
-              </a:spcAft>
-              <a:defRPr sz="1150">
+                <a:spcPts val="300"/>
+              </a:spcAft>
+              <a:defRPr sz="1100">
                 <a:solidFill>
                   <a:srgbClr val="E2E8F0"/>
                 </a:solidFill>
@@ -9842,15 +9652,15 @@
               </a:defRPr>
             </a:pPr>
             <a:r>
-              <a:t>• Screen 07: Chemistry Call Confirmed (Lịch hẹn hoàn tất)</a:t>
+              <a:t>• Screen 07: Chemistry Call Confirmed (Lịch hẹn kết nối hoàn tất)</a:t>
             </a:r>
           </a:p>
           <a:p>
             <a:pPr>
               <a:spcAft>
-                <a:spcPts val="200"/>
-              </a:spcAft>
-              <a:defRPr sz="1150">
+                <a:spcPts val="300"/>
+              </a:spcAft>
+              <a:defRPr sz="1100">
                 <a:solidFill>
                   <a:srgbClr val="E2E8F0"/>
                 </a:solidFill>
@@ -9858,7 +9668,7 @@
               </a:defRPr>
             </a:pPr>
             <a:r>
-              <a:t>• Screen 08: Empty State Recovery (Phục hồi tìm kiếm)</a:t>
+              <a:t>• Screen 08: Empty State Recovery (Phục hồi tìm kiếm không ngõ cụt)</a:t>
             </a:r>
           </a:p>
         </p:txBody>
@@ -9871,18 +9681,18 @@
         </p:nvSpPr>
         <p:spPr>
           <a:xfrm>
-            <a:off x="731520" y="3182112"/>
-            <a:ext cx="6949440" cy="1554480"/>
+            <a:off x="548640" y="4014216"/>
+            <a:ext cx="4389120" cy="2432304"/>
           </a:xfrm>
           <a:prstGeom prst="roundRect">
             <a:avLst/>
           </a:prstGeom>
           <a:solidFill>
-            <a:srgbClr val="161E31"/>
+            <a:srgbClr val="131A2A"/>
           </a:solidFill>
           <a:ln>
             <a:solidFill>
-              <a:srgbClr val="2D3748"/>
+              <a:srgbClr val="28344B"/>
             </a:solidFill>
           </a:ln>
         </p:spPr>
@@ -9916,15 +9726,15 @@
               </a:defRPr>
             </a:pPr>
             <a:r>
-              <a:t>🎨 Tính Nhất quán Thị giác</a:t>
+              <a:t>🎨 Tiêu chuẩn Kiểm định</a:t>
             </a:r>
           </a:p>
           <a:p>
             <a:pPr>
               <a:spcAft>
-                <a:spcPts val="200"/>
-              </a:spcAft>
-              <a:defRPr sz="1150">
+                <a:spcPts val="300"/>
+              </a:spcAft>
+              <a:defRPr sz="1100">
                 <a:solidFill>
                   <a:srgbClr val="E2E8F0"/>
                 </a:solidFill>
@@ -9932,15 +9742,15 @@
               </a:defRPr>
             </a:pPr>
             <a:r>
-              <a:t>• Tuân thủ hệ thống lưới cơ sở 8dp và phân cấp typography rõ ràng.</a:t>
+              <a:t>• Tuân thủ nghiêm ngặt hệ thống lưới cơ sở 8dp và chuẩn tương phản WCAG 2.1 AA.</a:t>
             </a:r>
           </a:p>
           <a:p>
             <a:pPr>
               <a:spcAft>
-                <a:spcPts val="200"/>
-              </a:spcAft>
-              <a:defRPr sz="1150">
+                <a:spcPts val="300"/>
+              </a:spcAft>
+              <a:defRPr sz="1100">
                 <a:solidFill>
                   <a:srgbClr val="E2E8F0"/>
                 </a:solidFill>
@@ -9948,7 +9758,7 @@
               </a:defRPr>
             </a:pPr>
             <a:r>
-              <a:t>• Không tính các biến thể pop-up nhỏ, đảm bảo đủ 8 màn hình riêng biệt.</a:t>
+              <a:t>• Không tính các dialog nhỏ hay trạng thái biến thể, đủ 8 màn hình riêng biệt.</a:t>
             </a:r>
           </a:p>
         </p:txBody>
@@ -9961,18 +9771,18 @@
         </p:nvSpPr>
         <p:spPr>
           <a:xfrm>
-            <a:off x="731520" y="4855464"/>
-            <a:ext cx="6949440" cy="1554480"/>
+            <a:off x="5120640" y="1417320"/>
+            <a:ext cx="6522415" cy="5029200"/>
           </a:xfrm>
           <a:prstGeom prst="roundRect">
             <a:avLst/>
           </a:prstGeom>
           <a:solidFill>
-            <a:srgbClr val="161E31"/>
+            <a:srgbClr val="131A2A"/>
           </a:solidFill>
           <a:ln>
             <a:solidFill>
-              <a:srgbClr val="2D3748"/>
+              <a:srgbClr val="28344B"/>
             </a:solidFill>
           </a:ln>
         </p:spPr>
@@ -9991,80 +9801,6 @@
           </a:fontRef>
         </p:style>
         <p:txBody>
-          <a:bodyPr rtlCol="0" anchor="ctr" lIns="228600" tIns="164592" rIns="228600" wrap="square"/>
-          <a:lstStyle/>
-          <a:p>
-            <a:pPr algn="ctr">
-              <a:spcAft>
-                <a:spcPts val="400"/>
-              </a:spcAft>
-              <a:defRPr sz="1300" b="1">
-                <a:solidFill>
-                  <a:srgbClr val="38BDF8"/>
-                </a:solidFill>
-                <a:latin typeface="Arial"/>
-              </a:defRPr>
-            </a:pPr>
-            <a:r>
-              <a:t>📁 Minh chứng</a:t>
-            </a:r>
-          </a:p>
-          <a:p>
-            <a:pPr>
-              <a:spcAft>
-                <a:spcPts val="200"/>
-              </a:spcAft>
-              <a:defRPr sz="1150">
-                <a:solidFill>
-                  <a:srgbClr val="94A3B8"/>
-                </a:solidFill>
-                <a:latin typeface="Arial"/>
-              </a:defRPr>
-            </a:pPr>
-            <a:r>
-              <a:t>• Kiểm tra tại Figma Page 02 Wireframe và Page 03 Final UI.</a:t>
-            </a:r>
-          </a:p>
-        </p:txBody>
-      </p:sp>
-      <p:sp>
-        <p:nvSpPr>
-          <p:cNvPr id="8" name="Rounded Rectangle 7"/>
-          <p:cNvSpPr/>
-          <p:nvPr/>
-        </p:nvSpPr>
-        <p:spPr>
-          <a:xfrm>
-            <a:off x="7863840" y="1508760"/>
-            <a:ext cx="3596335" cy="4901184"/>
-          </a:xfrm>
-          <a:prstGeom prst="roundRect">
-            <a:avLst/>
-          </a:prstGeom>
-          <a:solidFill>
-            <a:srgbClr val="161E31"/>
-          </a:solidFill>
-          <a:ln>
-            <a:solidFill>
-              <a:srgbClr val="2D3748"/>
-            </a:solidFill>
-          </a:ln>
-        </p:spPr>
-        <p:style>
-          <a:lnRef idx="1">
-            <a:schemeClr val="accent1"/>
-          </a:lnRef>
-          <a:fillRef idx="3">
-            <a:schemeClr val="accent1"/>
-          </a:fillRef>
-          <a:effectRef idx="2">
-            <a:schemeClr val="accent1"/>
-          </a:effectRef>
-          <a:fontRef idx="minor">
-            <a:schemeClr val="lt1"/>
-          </a:fontRef>
-        </p:style>
-        <p:txBody>
           <a:bodyPr rtlCol="0" anchor="ctr"/>
           <a:lstStyle/>
           <a:p>
@@ -10074,7 +9810,7 @@
       </p:sp>
       <p:pic>
         <p:nvPicPr>
-          <p:cNvPr id="9" name="Picture 8" descr="figma_canvas_8_screens.png"/>
+          <p:cNvPr id="8" name="Picture 7" descr="figma_canvas_8_screens.png"/>
           <p:cNvPicPr>
             <a:picLocks noChangeAspect="1"/>
           </p:cNvPicPr>
@@ -10088,8 +9824,8 @@
         </p:blipFill>
         <p:spPr>
           <a:xfrm>
-            <a:off x="8092440" y="1691640"/>
-            <a:ext cx="3139135" cy="1667665"/>
+            <a:off x="5318607" y="2304573"/>
+            <a:ext cx="6126480" cy="3254692"/>
           </a:xfrm>
           <a:prstGeom prst="rect">
             <a:avLst/>
@@ -10165,18 +9901,18 @@
         </p:nvSpPr>
         <p:spPr>
           <a:xfrm>
-            <a:off x="731520" y="365760"/>
-            <a:ext cx="10728655" cy="1005840"/>
+            <a:off x="548640" y="320040"/>
+            <a:ext cx="11094415" cy="960120"/>
           </a:xfrm>
           <a:prstGeom prst="roundRect">
             <a:avLst/>
           </a:prstGeom>
           <a:solidFill>
-            <a:srgbClr val="161E31"/>
+            <a:srgbClr val="131A2A"/>
           </a:solidFill>
           <a:ln>
             <a:solidFill>
-              <a:srgbClr val="2D3748"/>
+              <a:srgbClr val="28344B"/>
             </a:solidFill>
           </a:ln>
         </p:spPr>
@@ -10207,7 +9943,7 @@
               </a:defRPr>
             </a:pPr>
             <a:r>
-              <a:t>09 / 12  ·  DESIGN SYSTEM</a:t>
+              <a:t>09  ·  DESIGN SYSTEM</a:t>
             </a:r>
           </a:p>
           <a:p>
@@ -10223,7 +9959,7 @@
               </a:defRPr>
             </a:pPr>
             <a:r>
-              <a:t>Design Tokens &amp; 9 Nhóm Components Figma</a:t>
+              <a:t>Design Tokens &amp; 9 Nhóm Components Figma Chuẩn mực</a:t>
             </a:r>
           </a:p>
         </p:txBody>
@@ -10236,8 +9972,8 @@
         </p:nvSpPr>
         <p:spPr>
           <a:xfrm>
-            <a:off x="7772400" y="438912"/>
-            <a:ext cx="3474720" cy="457200"/>
+            <a:off x="7772400" y="384048"/>
+            <a:ext cx="3657600" cy="457200"/>
           </a:xfrm>
           <a:prstGeom prst="rect">
             <a:avLst/>
@@ -10272,18 +10008,18 @@
         </p:nvSpPr>
         <p:spPr>
           <a:xfrm>
-            <a:off x="731520" y="1508760"/>
-            <a:ext cx="6949440" cy="1554480"/>
+            <a:off x="548640" y="1417320"/>
+            <a:ext cx="8046720" cy="1584960"/>
           </a:xfrm>
           <a:prstGeom prst="roundRect">
             <a:avLst/>
           </a:prstGeom>
           <a:solidFill>
-            <a:srgbClr val="161E31"/>
+            <a:srgbClr val="131A2A"/>
           </a:solidFill>
           <a:ln>
             <a:solidFill>
-              <a:srgbClr val="2D3748"/>
+              <a:srgbClr val="28344B"/>
             </a:solidFill>
           </a:ln>
         </p:spPr>
@@ -10302,14 +10038,14 @@
           </a:fontRef>
         </p:style>
         <p:txBody>
-          <a:bodyPr rtlCol="0" anchor="ctr" lIns="228600" tIns="164592" rIns="228600" wrap="square"/>
+          <a:bodyPr rtlCol="0" anchor="ctr" lIns="228600" tIns="137160" rIns="228600" wrap="square"/>
           <a:lstStyle/>
           <a:p>
             <a:pPr algn="ctr">
               <a:spcAft>
-                <a:spcPts val="400"/>
-              </a:spcAft>
-              <a:defRPr sz="1300" b="1">
+                <a:spcPts val="300"/>
+              </a:spcAft>
+              <a:defRPr sz="1250" b="1">
                 <a:solidFill>
                   <a:srgbClr val="38BDF8"/>
                 </a:solidFill>
@@ -10325,7 +10061,7 @@
               <a:spcAft>
                 <a:spcPts val="200"/>
               </a:spcAft>
-              <a:defRPr sz="1150">
+              <a:defRPr sz="1100">
                 <a:solidFill>
                   <a:srgbClr val="E2E8F0"/>
                 </a:solidFill>
@@ -10341,7 +10077,7 @@
               <a:spcAft>
                 <a:spcPts val="200"/>
               </a:spcAft>
-              <a:defRPr sz="1150">
+              <a:defRPr sz="1100">
                 <a:solidFill>
                   <a:srgbClr val="E2E8F0"/>
                 </a:solidFill>
@@ -10357,7 +10093,7 @@
               <a:spcAft>
                 <a:spcPts val="200"/>
               </a:spcAft>
-              <a:defRPr sz="1150">
+              <a:defRPr sz="1100">
                 <a:solidFill>
                   <a:srgbClr val="E2E8F0"/>
                 </a:solidFill>
@@ -10378,18 +10114,18 @@
         </p:nvSpPr>
         <p:spPr>
           <a:xfrm>
-            <a:off x="731520" y="3182112"/>
-            <a:ext cx="6949440" cy="1554480"/>
+            <a:off x="548640" y="3139440"/>
+            <a:ext cx="8046720" cy="1584960"/>
           </a:xfrm>
           <a:prstGeom prst="roundRect">
             <a:avLst/>
           </a:prstGeom>
           <a:solidFill>
-            <a:srgbClr val="161E31"/>
+            <a:srgbClr val="131A2A"/>
           </a:solidFill>
           <a:ln>
             <a:solidFill>
-              <a:srgbClr val="2D3748"/>
+              <a:srgbClr val="28344B"/>
             </a:solidFill>
           </a:ln>
         </p:spPr>
@@ -10408,14 +10144,14 @@
           </a:fontRef>
         </p:style>
         <p:txBody>
-          <a:bodyPr rtlCol="0" anchor="ctr" lIns="228600" tIns="164592" rIns="228600" wrap="square"/>
+          <a:bodyPr rtlCol="0" anchor="ctr" lIns="228600" tIns="137160" rIns="228600" wrap="square"/>
           <a:lstStyle/>
           <a:p>
             <a:pPr algn="ctr">
               <a:spcAft>
-                <a:spcPts val="400"/>
-              </a:spcAft>
-              <a:defRPr sz="1300" b="1">
+                <a:spcPts val="300"/>
+              </a:spcAft>
+              <a:defRPr sz="1250" b="1">
                 <a:solidFill>
                   <a:srgbClr val="34D399"/>
                 </a:solidFill>
@@ -10431,7 +10167,7 @@
               <a:spcAft>
                 <a:spcPts val="200"/>
               </a:spcAft>
-              <a:defRPr sz="1150">
+              <a:defRPr sz="1100">
                 <a:solidFill>
                   <a:srgbClr val="E2E8F0"/>
                 </a:solidFill>
@@ -10447,7 +10183,7 @@
               <a:spcAft>
                 <a:spcPts val="200"/>
               </a:spcAft>
-              <a:defRPr sz="1150">
+              <a:defRPr sz="1100">
                 <a:solidFill>
                   <a:srgbClr val="E2E8F0"/>
                 </a:solidFill>
@@ -10463,7 +10199,7 @@
               <a:spcAft>
                 <a:spcPts val="200"/>
               </a:spcAft>
-              <a:defRPr sz="1150">
+              <a:defRPr sz="1100">
                 <a:solidFill>
                   <a:srgbClr val="E2E8F0"/>
                 </a:solidFill>
@@ -10479,7 +10215,7 @@
               <a:spcAft>
                 <a:spcPts val="200"/>
               </a:spcAft>
-              <a:defRPr sz="1150">
+              <a:defRPr sz="1100">
                 <a:solidFill>
                   <a:srgbClr val="E2E8F0"/>
                 </a:solidFill>
@@ -10500,18 +10236,18 @@
         </p:nvSpPr>
         <p:spPr>
           <a:xfrm>
-            <a:off x="731520" y="4855464"/>
-            <a:ext cx="6949440" cy="1554480"/>
+            <a:off x="548640" y="4861560"/>
+            <a:ext cx="8046720" cy="1584960"/>
           </a:xfrm>
           <a:prstGeom prst="roundRect">
             <a:avLst/>
           </a:prstGeom>
           <a:solidFill>
-            <a:srgbClr val="161E31"/>
+            <a:srgbClr val="131A2A"/>
           </a:solidFill>
           <a:ln>
             <a:solidFill>
-              <a:srgbClr val="2D3748"/>
+              <a:srgbClr val="28344B"/>
             </a:solidFill>
           </a:ln>
         </p:spPr>
@@ -10530,14 +10266,14 @@
           </a:fontRef>
         </p:style>
         <p:txBody>
-          <a:bodyPr rtlCol="0" anchor="ctr" lIns="228600" tIns="164592" rIns="228600" wrap="square"/>
+          <a:bodyPr rtlCol="0" anchor="ctr" lIns="228600" tIns="137160" rIns="228600" wrap="square"/>
           <a:lstStyle/>
           <a:p>
             <a:pPr algn="ctr">
               <a:spcAft>
-                <a:spcPts val="400"/>
-              </a:spcAft>
-              <a:defRPr sz="1300" b="1">
+                <a:spcPts val="300"/>
+              </a:spcAft>
+              <a:defRPr sz="1250" b="1">
                 <a:solidFill>
                   <a:srgbClr val="38BDF8"/>
                 </a:solidFill>
@@ -10553,15 +10289,15 @@
               <a:spcAft>
                 <a:spcPts val="200"/>
               </a:spcAft>
-              <a:defRPr sz="1150">
-                <a:solidFill>
-                  <a:srgbClr val="94A3B8"/>
-                </a:solidFill>
-                <a:latin typeface="Arial"/>
-              </a:defRPr>
-            </a:pPr>
-            <a:r>
-              <a:t>• Figma Page 04 Design System &amp; Page 05 Components.</a:t>
+              <a:defRPr sz="1100">
+                <a:solidFill>
+                  <a:srgbClr val="E2E8F0"/>
+                </a:solidFill>
+                <a:latin typeface="Arial"/>
+              </a:defRPr>
+            </a:pPr>
+            <a:r>
+              <a:t>• Trực quan hóa tại Figma Page 04 Design System &amp; Page 05 Components.</a:t>
             </a:r>
           </a:p>
         </p:txBody>
@@ -10574,18 +10310,18 @@
         </p:nvSpPr>
         <p:spPr>
           <a:xfrm>
-            <a:off x="7863840" y="1508760"/>
-            <a:ext cx="3596335" cy="4901184"/>
+            <a:off x="8778240" y="1417320"/>
+            <a:ext cx="2864815" cy="5029200"/>
           </a:xfrm>
           <a:prstGeom prst="roundRect">
             <a:avLst/>
           </a:prstGeom>
           <a:solidFill>
-            <a:srgbClr val="161E31"/>
+            <a:srgbClr val="131A2A"/>
           </a:solidFill>
           <a:ln>
             <a:solidFill>
-              <a:srgbClr val="2D3748"/>
+              <a:srgbClr val="28344B"/>
             </a:solidFill>
           </a:ln>
         </p:spPr>
@@ -10627,8 +10363,8 @@
         </p:blipFill>
         <p:spPr>
           <a:xfrm>
-            <a:off x="8092440" y="1691640"/>
-            <a:ext cx="3139135" cy="14951043"/>
+            <a:off x="9711477" y="1554480"/>
+            <a:ext cx="998339" cy="4754880"/>
           </a:xfrm>
           <a:prstGeom prst="rect">
             <a:avLst/>

--- a/docs/PRM323_Lab2_Nhom4_Slides.pptx
+++ b/docs/PRM323_Lab2_Nhom4_Slides.pptx
@@ -4860,7 +4860,7 @@
       </p:sp>
       <p:pic>
         <p:nvPicPr>
-          <p:cNvPr id="9" name="Picture 8" descr="screen_01_discovery_feed.png"/>
+          <p:cNvPr id="9" name="Picture 8" descr="screen_01_discovery_feed_crop_fold.png"/>
           <p:cNvPicPr>
             <a:picLocks noChangeAspect="1"/>
           </p:cNvPicPr>
@@ -4874,8 +4874,8 @@
         </p:blipFill>
         <p:spPr>
           <a:xfrm>
-            <a:off x="9681295" y="1554480"/>
-            <a:ext cx="1058703" cy="4754880"/>
+            <a:off x="9072248" y="1600200"/>
+            <a:ext cx="2276797" cy="4663440"/>
           </a:xfrm>
           <a:prstGeom prst="rect">
             <a:avLst/>
@@ -5383,7 +5383,7 @@
       </p:sp>
       <p:pic>
         <p:nvPicPr>
-          <p:cNvPr id="9" name="Picture 8" descr="screen_06_chemistry_call_modal.png"/>
+          <p:cNvPr id="9" name="Picture 8" descr="screen_06_chemistry_call_modal_crop_fold.png"/>
           <p:cNvPicPr>
             <a:picLocks noChangeAspect="1"/>
           </p:cNvPicPr>
@@ -5397,8 +5397,8 @@
         </p:blipFill>
         <p:spPr>
           <a:xfrm>
-            <a:off x="9163552" y="1554480"/>
-            <a:ext cx="2094190" cy="4754880"/>
+            <a:off x="9072546" y="1600200"/>
+            <a:ext cx="2276202" cy="4663440"/>
           </a:xfrm>
           <a:prstGeom prst="rect">
             <a:avLst/>
@@ -5906,7 +5906,7 @@
       </p:sp>
       <p:pic>
         <p:nvPicPr>
-          <p:cNvPr id="9" name="Picture 8" descr="screen_07_chemistry_call_confirmed.png"/>
+          <p:cNvPr id="9" name="Picture 8" descr="screen_07_chemistry_call_confirmed_crop_fold.png"/>
           <p:cNvPicPr>
             <a:picLocks noChangeAspect="1"/>
           </p:cNvPicPr>
@@ -5920,8 +5920,8 @@
         </p:blipFill>
         <p:spPr>
           <a:xfrm>
-            <a:off x="9846137" y="1554480"/>
-            <a:ext cx="729019" cy="4754880"/>
+            <a:off x="9070211" y="1600200"/>
+            <a:ext cx="2280872" cy="4663440"/>
           </a:xfrm>
           <a:prstGeom prst="rect">
             <a:avLst/>
@@ -6445,7 +6445,7 @@
       </p:sp>
       <p:pic>
         <p:nvPicPr>
-          <p:cNvPr id="9" name="Picture 8" descr="screen_04_application_submitted.png"/>
+          <p:cNvPr id="9" name="Picture 8" descr="screen_04_application_submitted_crop_fold.png"/>
           <p:cNvPicPr>
             <a:picLocks noChangeAspect="1"/>
           </p:cNvPicPr>
@@ -6459,8 +6459,8 @@
         </p:blipFill>
         <p:spPr>
           <a:xfrm>
-            <a:off x="9646469" y="1554480"/>
-            <a:ext cx="1128355" cy="4754880"/>
+            <a:off x="9072880" y="1600200"/>
+            <a:ext cx="2275533" cy="4663440"/>
           </a:xfrm>
           <a:prstGeom prst="rect">
             <a:avLst/>
@@ -6952,7 +6952,7 @@
       </p:sp>
       <p:pic>
         <p:nvPicPr>
-          <p:cNvPr id="9" name="Picture 8" descr="screen_02_project_detail.png"/>
+          <p:cNvPr id="9" name="Picture 8" descr="screen_02_project_detail_crop_fold.png"/>
           <p:cNvPicPr>
             <a:picLocks noChangeAspect="1"/>
           </p:cNvPicPr>
@@ -6966,8 +6966,8 @@
         </p:blipFill>
         <p:spPr>
           <a:xfrm>
-            <a:off x="9630217" y="1554480"/>
-            <a:ext cx="1160859" cy="4754880"/>
+            <a:off x="9072112" y="1600200"/>
+            <a:ext cx="2277070" cy="4663440"/>
           </a:xfrm>
           <a:prstGeom prst="rect">
             <a:avLst/>
@@ -7860,7 +7860,7 @@
       </p:sp>
       <p:pic>
         <p:nvPicPr>
-          <p:cNvPr id="9" name="Picture 8" descr="screen_08_empty_state.png"/>
+          <p:cNvPr id="9" name="Picture 8" descr="screen_08_empty_state_crop_fold.png"/>
           <p:cNvPicPr>
             <a:picLocks noChangeAspect="1"/>
           </p:cNvPicPr>
@@ -7874,8 +7874,8 @@
         </p:blipFill>
         <p:spPr>
           <a:xfrm>
-            <a:off x="9648791" y="1554480"/>
-            <a:ext cx="1123711" cy="4754880"/>
+            <a:off x="9072993" y="1600200"/>
+            <a:ext cx="2275307" cy="4663440"/>
           </a:xfrm>
           <a:prstGeom prst="rect">
             <a:avLst/>
@@ -9297,7 +9297,7 @@
       </p:sp>
       <p:pic>
         <p:nvPicPr>
-          <p:cNvPr id="9" name="Picture 8" descr="screen_03_apply_sheet.png"/>
+          <p:cNvPr id="9" name="Picture 8" descr="screen_03_apply_sheet_crop_fold.png"/>
           <p:cNvPicPr>
             <a:picLocks noChangeAspect="1"/>
           </p:cNvPicPr>
@@ -9311,8 +9311,8 @@
         </p:blipFill>
         <p:spPr>
           <a:xfrm>
-            <a:off x="9581461" y="1554480"/>
-            <a:ext cx="1258371" cy="4754880"/>
+            <a:off x="9072095" y="1600200"/>
+            <a:ext cx="2277103" cy="4663440"/>
           </a:xfrm>
           <a:prstGeom prst="rect">
             <a:avLst/>
@@ -9810,7 +9810,7 @@
       </p:sp>
       <p:pic>
         <p:nvPicPr>
-          <p:cNvPr id="8" name="Picture 7" descr="figma_canvas_8_screens.png"/>
+          <p:cNvPr id="8" name="Picture 7" descr="screens_8_showcase_wide.png"/>
           <p:cNvPicPr>
             <a:picLocks noChangeAspect="1"/>
           </p:cNvPicPr>
@@ -9824,8 +9824,8 @@
         </p:blipFill>
         <p:spPr>
           <a:xfrm>
-            <a:off x="5318607" y="2304573"/>
-            <a:ext cx="6126480" cy="3254692"/>
+            <a:off x="5318607" y="2719387"/>
+            <a:ext cx="6126480" cy="2425065"/>
           </a:xfrm>
           <a:prstGeom prst="rect">
             <a:avLst/>
@@ -10349,7 +10349,7 @@
       </p:sp>
       <p:pic>
         <p:nvPicPr>
-          <p:cNvPr id="9" name="Picture 8" descr="screen_05_my_applications_tracker.png"/>
+          <p:cNvPr id="9" name="Picture 8" descr="screen_05_my_applications_tracker_crop_fold.png"/>
           <p:cNvPicPr>
             <a:picLocks noChangeAspect="1"/>
           </p:cNvPicPr>
@@ -10363,8 +10363,8 @@
         </p:blipFill>
         <p:spPr>
           <a:xfrm>
-            <a:off x="9711477" y="1554480"/>
-            <a:ext cx="998339" cy="4754880"/>
+            <a:off x="9071284" y="1600200"/>
+            <a:ext cx="2278726" cy="4663440"/>
           </a:xfrm>
           <a:prstGeom prst="rect">
             <a:avLst/>
